--- a/TFG_Chollos/TFG_Presentacion_final.pptx
+++ b/TFG_Chollos/TFG_Presentacion_final.pptx
@@ -10,8 +10,8 @@
   <p:sldIdLst>
     <p:sldId id="256" r:id="rId2"/>
     <p:sldId id="267" r:id="rId3"/>
-    <p:sldId id="259" r:id="rId4"/>
-    <p:sldId id="266" r:id="rId5"/>
+    <p:sldId id="266" r:id="rId4"/>
+    <p:sldId id="278" r:id="rId5"/>
     <p:sldId id="257" r:id="rId6"/>
     <p:sldId id="258" r:id="rId7"/>
     <p:sldId id="260" r:id="rId8"/>
@@ -407,7 +407,7 @@
           <a:p>
             <a:fld id="{F7021451-1387-4CA6-816F-3879F97B5CBC}" type="slidenum">
               <a:rPr lang="en-US"/>
-              <a:t>15</a:t>
+              <a:t>19</a:t>
             </a:fld>
             <a:endParaRPr lang="en-US"/>
           </a:p>
@@ -491,7 +491,7 @@
           <a:p>
             <a:fld id="{F7021451-1387-4CA6-816F-3879F97B5CBC}" type="slidenum">
               <a:rPr lang="en-US"/>
-              <a:t>19</a:t>
+              <a:t>20</a:t>
             </a:fld>
             <a:endParaRPr lang="en-US"/>
           </a:p>
@@ -575,7 +575,7 @@
           <a:p>
             <a:fld id="{F7021451-1387-4CA6-816F-3879F97B5CBC}" type="slidenum">
               <a:rPr lang="en-US"/>
-              <a:t>20</a:t>
+              <a:t>21</a:t>
             </a:fld>
             <a:endParaRPr lang="en-US"/>
           </a:p>
@@ -659,90 +659,6 @@
           <a:p>
             <a:fld id="{F7021451-1387-4CA6-816F-3879F97B5CBC}" type="slidenum">
               <a:rPr lang="en-US"/>
-              <a:t>21</a:t>
-            </a:fld>
-            <a:endParaRPr lang="en-US"/>
-          </a:p>
-        </p:txBody>
-      </p:sp>
-    </p:spTree>
-    <p:extLst>
-      <p:ext uri="{BB962C8B-B14F-4D97-AF65-F5344CB8AC3E}">
-        <p14:creationId xmlns:p14="http://schemas.microsoft.com/office/powerpoint/2010/main" val="1024086991"/>
-      </p:ext>
-    </p:extLst>
-  </p:cSld>
-  <p:clrMapOvr>
-    <a:masterClrMapping/>
-  </p:clrMapOvr>
-</p:notes>
-</file>
-
-<file path=ppt/notesSlides/notesSlide14.xml><?xml version="1.0" encoding="utf-8"?>
-<p:notes xmlns:a="http://schemas.openxmlformats.org/drawingml/2006/main" xmlns:r="http://schemas.openxmlformats.org/officeDocument/2006/relationships" xmlns:p="http://schemas.openxmlformats.org/presentationml/2006/main">
-  <p:cSld>
-    <p:spTree>
-      <p:nvGrpSpPr>
-        <p:cNvPr id="1" name=""/>
-        <p:cNvGrpSpPr/>
-        <p:nvPr/>
-      </p:nvGrpSpPr>
-      <p:grpSpPr>
-        <a:xfrm>
-          <a:off x="0" y="0"/>
-          <a:ext cx="0" cy="0"/>
-          <a:chOff x="0" y="0"/>
-          <a:chExt cx="0" cy="0"/>
-        </a:xfrm>
-      </p:grpSpPr>
-      <p:sp>
-        <p:nvSpPr>
-          <p:cNvPr id="2" name="Slide Image Placeholder 1"/>
-          <p:cNvSpPr>
-            <a:spLocks noGrp="1" noRot="1" noChangeAspect="1"/>
-          </p:cNvSpPr>
-          <p:nvPr>
-            <p:ph type="sldImg"/>
-          </p:nvPr>
-        </p:nvSpPr>
-        <p:spPr/>
-      </p:sp>
-      <p:sp>
-        <p:nvSpPr>
-          <p:cNvPr id="3" name="Notes Placeholder 2"/>
-          <p:cNvSpPr>
-            <a:spLocks noGrp="1"/>
-          </p:cNvSpPr>
-          <p:nvPr>
-            <p:ph type="body" idx="1"/>
-          </p:nvPr>
-        </p:nvSpPr>
-        <p:spPr/>
-        <p:txBody>
-          <a:bodyPr/>
-          <a:lstStyle/>
-          <a:p>
-            <a:endParaRPr lang="en-US" dirty="0"/>
-          </a:p>
-        </p:txBody>
-      </p:sp>
-      <p:sp>
-        <p:nvSpPr>
-          <p:cNvPr id="4" name="Slide Number Placeholder 3"/>
-          <p:cNvSpPr>
-            <a:spLocks noGrp="1"/>
-          </p:cNvSpPr>
-          <p:nvPr>
-            <p:ph type="sldNum" sz="quarter" idx="10"/>
-          </p:nvPr>
-        </p:nvSpPr>
-        <p:spPr/>
-        <p:txBody>
-          <a:bodyPr/>
-          <a:lstStyle/>
-          <a:p>
-            <a:fld id="{F7021451-1387-4CA6-816F-3879F97B5CBC}" type="slidenum">
-              <a:rPr lang="en-US"/>
               <a:t>22</a:t>
             </a:fld>
             <a:endParaRPr lang="en-US"/>
@@ -995,7 +911,7 @@
           <a:p>
             <a:fld id="{F7021451-1387-4CA6-816F-3879F97B5CBC}" type="slidenum">
               <a:rPr lang="en-US"/>
-              <a:t>4</a:t>
+              <a:t>5</a:t>
             </a:fld>
             <a:endParaRPr lang="en-US"/>
           </a:p>
@@ -1079,7 +995,7 @@
           <a:p>
             <a:fld id="{F7021451-1387-4CA6-816F-3879F97B5CBC}" type="slidenum">
               <a:rPr lang="en-US"/>
-              <a:t>5</a:t>
+              <a:t>6</a:t>
             </a:fld>
             <a:endParaRPr lang="en-US"/>
           </a:p>
@@ -1163,7 +1079,7 @@
           <a:p>
             <a:fld id="{F7021451-1387-4CA6-816F-3879F97B5CBC}" type="slidenum">
               <a:rPr lang="en-US"/>
-              <a:t>6</a:t>
+              <a:t>7</a:t>
             </a:fld>
             <a:endParaRPr lang="en-US"/>
           </a:p>
@@ -1247,7 +1163,7 @@
           <a:p>
             <a:fld id="{F7021451-1387-4CA6-816F-3879F97B5CBC}" type="slidenum">
               <a:rPr lang="en-US"/>
-              <a:t>7</a:t>
+              <a:t>8</a:t>
             </a:fld>
             <a:endParaRPr lang="en-US"/>
           </a:p>
@@ -1331,7 +1247,7 @@
           <a:p>
             <a:fld id="{F7021451-1387-4CA6-816F-3879F97B5CBC}" type="slidenum">
               <a:rPr lang="en-US"/>
-              <a:t>8</a:t>
+              <a:t>14</a:t>
             </a:fld>
             <a:endParaRPr lang="en-US"/>
           </a:p>
@@ -1415,7 +1331,7 @@
           <a:p>
             <a:fld id="{F7021451-1387-4CA6-816F-3879F97B5CBC}" type="slidenum">
               <a:rPr lang="en-US"/>
-              <a:t>14</a:t>
+              <a:t>15</a:t>
             </a:fld>
             <a:endParaRPr lang="en-US"/>
           </a:p>
@@ -3434,15 +3350,12 @@
             <a:pPr marL="0" indent="0">
               <a:buNone/>
             </a:pPr>
-            <a:r>
-              <a:rPr lang="es-ES" sz="900" dirty="0">
-                <a:solidFill>
-                  <a:srgbClr val="4A6080"/>
-                </a:solidFill>
-                <a:latin typeface="Calibri" pitchFamily="34" charset="0"/>
-              </a:rPr>
-              <a:t>6c</a:t>
-            </a:r>
+            <a:endParaRPr lang="es-ES" sz="900" dirty="0">
+              <a:solidFill>
+                <a:srgbClr val="4A6080"/>
+              </a:solidFill>
+              <a:latin typeface="Calibri" pitchFamily="34" charset="0"/>
+            </a:endParaRPr>
           </a:p>
         </p:txBody>
       </p:sp>
@@ -4943,15 +4856,12 @@
             <a:pPr marL="0" indent="0">
               <a:buNone/>
             </a:pPr>
-            <a:r>
-              <a:rPr lang="es-ES" sz="900" dirty="0">
-                <a:solidFill>
-                  <a:srgbClr val="64748B"/>
-                </a:solidFill>
-                <a:latin typeface="Calibri" pitchFamily="34" charset="0"/>
-              </a:rPr>
-              <a:t>6e</a:t>
-            </a:r>
+            <a:endParaRPr lang="es-ES" sz="900" dirty="0">
+              <a:solidFill>
+                <a:srgbClr val="64748B"/>
+              </a:solidFill>
+              <a:latin typeface="Calibri" pitchFamily="34" charset="0"/>
+            </a:endParaRPr>
           </a:p>
         </p:txBody>
       </p:sp>
@@ -5622,15 +5532,12 @@
             <a:pPr marL="0" indent="0">
               <a:buNone/>
             </a:pPr>
-            <a:r>
-              <a:rPr lang="es-ES" sz="900" dirty="0">
-                <a:solidFill>
-                  <a:srgbClr val="4A6080"/>
-                </a:solidFill>
-                <a:latin typeface="Calibri" pitchFamily="34" charset="0"/>
-              </a:rPr>
-              <a:t>6d</a:t>
-            </a:r>
+            <a:endParaRPr lang="es-ES" sz="900" dirty="0">
+              <a:solidFill>
+                <a:srgbClr val="4A6080"/>
+              </a:solidFill>
+              <a:latin typeface="Calibri" pitchFamily="34" charset="0"/>
+            </a:endParaRPr>
           </a:p>
         </p:txBody>
       </p:sp>
@@ -6973,15 +6880,12 @@
             <a:pPr marL="0" indent="0">
               <a:buNone/>
             </a:pPr>
-            <a:r>
-              <a:rPr lang="es-ES" sz="900" dirty="0">
-                <a:solidFill>
-                  <a:srgbClr val="64748B"/>
-                </a:solidFill>
-                <a:latin typeface="Calibri" pitchFamily="34" charset="0"/>
-              </a:rPr>
-              <a:t>13b</a:t>
-            </a:r>
+            <a:endParaRPr lang="es-ES" sz="900" dirty="0">
+              <a:solidFill>
+                <a:srgbClr val="64748B"/>
+              </a:solidFill>
+              <a:latin typeface="Calibri" pitchFamily="34" charset="0"/>
+            </a:endParaRPr>
           </a:p>
         </p:txBody>
       </p:sp>
@@ -8775,17 +8679,6 @@
             <a:pPr marL="0" indent="0" algn="ctr">
               <a:buNone/>
             </a:pPr>
-            <a:r>
-              <a:rPr lang="en-US" sz="900" dirty="0">
-                <a:solidFill>
-                  <a:srgbClr val="CBD5E1"/>
-                </a:solidFill>
-                <a:latin typeface="Calibri" pitchFamily="34" charset="0"/>
-                <a:ea typeface="Calibri" pitchFamily="34" charset="-122"/>
-                <a:cs typeface="Calibri" pitchFamily="34" charset="-120"/>
-              </a:rPr>
-              <a:t>7</a:t>
-            </a:r>
             <a:endParaRPr lang="en-US" sz="900" dirty="0"/>
           </a:p>
         </p:txBody>
@@ -9052,17 +8945,6 @@
             <a:pPr marL="0" indent="0" algn="ctr">
               <a:buNone/>
             </a:pPr>
-            <a:r>
-              <a:rPr lang="en-US" sz="900" dirty="0">
-                <a:solidFill>
-                  <a:srgbClr val="CBD5E1"/>
-                </a:solidFill>
-                <a:latin typeface="Calibri" pitchFamily="34" charset="0"/>
-                <a:ea typeface="Calibri" pitchFamily="34" charset="-122"/>
-                <a:cs typeface="Calibri" pitchFamily="34" charset="-120"/>
-              </a:rPr>
-              <a:t>9</a:t>
-            </a:r>
             <a:endParaRPr lang="en-US" sz="900" dirty="0"/>
           </a:p>
         </p:txBody>
@@ -9357,17 +9239,6 @@
             <a:pPr marL="0" indent="0" algn="ctr">
               <a:buNone/>
             </a:pPr>
-            <a:r>
-              <a:rPr lang="en-US" sz="900" dirty="0">
-                <a:solidFill>
-                  <a:srgbClr val="CBD5E1"/>
-                </a:solidFill>
-                <a:latin typeface="Calibri" pitchFamily="34" charset="0"/>
-                <a:ea typeface="Calibri" pitchFamily="34" charset="-122"/>
-                <a:cs typeface="Calibri" pitchFamily="34" charset="-120"/>
-              </a:rPr>
-              <a:t>9b</a:t>
-            </a:r>
             <a:endParaRPr lang="en-US" sz="900" dirty="0"/>
           </a:p>
         </p:txBody>
@@ -10360,15 +10231,12 @@
             <a:pPr marL="0" indent="0">
               <a:buNone/>
             </a:pPr>
-            <a:r>
-              <a:rPr lang="es-ES" sz="900" dirty="0">
-                <a:solidFill>
-                  <a:srgbClr val="4A6080"/>
-                </a:solidFill>
-                <a:latin typeface="Calibri" pitchFamily="34" charset="0"/>
-              </a:rPr>
-              <a:t>10b</a:t>
-            </a:r>
+            <a:endParaRPr lang="es-ES" sz="900" dirty="0">
+              <a:solidFill>
+                <a:srgbClr val="4A6080"/>
+              </a:solidFill>
+              <a:latin typeface="Calibri" pitchFamily="34" charset="0"/>
+            </a:endParaRPr>
           </a:p>
         </p:txBody>
       </p:sp>
@@ -12560,17 +12428,6 @@
             <a:pPr marL="0" indent="0" algn="ctr">
               <a:buNone/>
             </a:pPr>
-            <a:r>
-              <a:rPr lang="en-US" sz="900" dirty="0">
-                <a:solidFill>
-                  <a:srgbClr val="64748B"/>
-                </a:solidFill>
-                <a:latin typeface="Calibri" pitchFamily="34" charset="0"/>
-                <a:ea typeface="Calibri" pitchFamily="34" charset="-122"/>
-                <a:cs typeface="Calibri" pitchFamily="34" charset="-120"/>
-              </a:rPr>
-              <a:t>8</a:t>
-            </a:r>
             <a:endParaRPr lang="en-US" sz="900" dirty="0"/>
           </a:p>
         </p:txBody>
@@ -12712,7 +12569,7 @@
               <a:buNone/>
             </a:pPr>
             <a:r>
-              <a:rPr lang="en-US" sz="1200" dirty="0">
+              <a:rPr lang="en-US" sz="1200" dirty="0" err="1">
                 <a:solidFill>
                   <a:srgbClr val="F0C060"/>
                 </a:solidFill>
@@ -12720,7 +12577,29 @@
                 <a:ea typeface="Calibri" pitchFamily="34" charset="-122"/>
                 <a:cs typeface="Calibri" pitchFamily="34" charset="-120"/>
               </a:rPr>
-              <a:t>¿Dónde se aplica cada tema de la asignatura en la solución?</a:t>
+              <a:t>Distribución</a:t>
+            </a:r>
+            <a:r>
+              <a:rPr lang="en-US" sz="1200" dirty="0">
+                <a:solidFill>
+                  <a:srgbClr val="F0C060"/>
+                </a:solidFill>
+                <a:latin typeface="Calibri" pitchFamily="34" charset="0"/>
+                <a:ea typeface="Calibri" pitchFamily="34" charset="-122"/>
+                <a:cs typeface="Calibri" pitchFamily="34" charset="-120"/>
+              </a:rPr>
+              <a:t> de </a:t>
+            </a:r>
+            <a:r>
+              <a:rPr lang="en-US" sz="1200" dirty="0" err="1">
+                <a:solidFill>
+                  <a:srgbClr val="F0C060"/>
+                </a:solidFill>
+                <a:latin typeface="Calibri" pitchFamily="34" charset="0"/>
+                <a:ea typeface="Calibri" pitchFamily="34" charset="-122"/>
+                <a:cs typeface="Calibri" pitchFamily="34" charset="-120"/>
+              </a:rPr>
+              <a:t>herramientas</a:t>
             </a:r>
             <a:endParaRPr lang="en-US" sz="1200" dirty="0"/>
           </a:p>
@@ -14725,17 +14604,6 @@
             <a:pPr marL="0" indent="0" algn="ctr">
               <a:buNone/>
             </a:pPr>
-            <a:r>
-              <a:rPr lang="en-US" sz="900" dirty="0">
-                <a:solidFill>
-                  <a:srgbClr val="64748B"/>
-                </a:solidFill>
-                <a:latin typeface="Calibri" pitchFamily="34" charset="0"/>
-                <a:ea typeface="Calibri" pitchFamily="34" charset="-122"/>
-                <a:cs typeface="Calibri" pitchFamily="34" charset="-120"/>
-              </a:rPr>
-              <a:t>12</a:t>
-            </a:r>
             <a:endParaRPr lang="en-US" sz="900" dirty="0"/>
           </a:p>
         </p:txBody>
@@ -15901,15 +15769,12 @@
             <a:pPr marL="0" indent="0">
               <a:buNone/>
             </a:pPr>
-            <a:r>
-              <a:rPr lang="es-ES" sz="900" dirty="0">
-                <a:solidFill>
-                  <a:srgbClr val="4A6080"/>
-                </a:solidFill>
-                <a:latin typeface="Calibri" pitchFamily="34" charset="0"/>
-              </a:rPr>
-              <a:t>19</a:t>
-            </a:r>
+            <a:endParaRPr lang="es-ES" sz="900" dirty="0">
+              <a:solidFill>
+                <a:srgbClr val="4A6080"/>
+              </a:solidFill>
+              <a:latin typeface="Calibri" pitchFamily="34" charset="0"/>
+            </a:endParaRPr>
           </a:p>
         </p:txBody>
       </p:sp>
@@ -15948,7 +15813,7 @@
       </p:grpSpPr>
       <p:sp>
         <p:nvSpPr>
-          <p:cNvPr id="2" name="Shape 0"/>
+          <p:cNvPr id="2" name="Gold"/>
           <p:cNvSpPr/>
           <p:nvPr/>
         </p:nvSpPr>
@@ -15968,13 +15833,33 @@
       </p:sp>
       <p:sp>
         <p:nvSpPr>
-          <p:cNvPr id="3" name="Text 1"/>
-          <p:cNvSpPr/>
-          <p:nvPr/>
-        </p:nvSpPr>
-        <p:spPr>
-          <a:xfrm>
-            <a:off x="457200" y="146304"/>
+          <p:cNvPr id="3" name="Hdr"/>
+          <p:cNvSpPr/>
+          <p:nvPr/>
+        </p:nvSpPr>
+        <p:spPr>
+          <a:xfrm>
+            <a:off x="0" y="0"/>
+            <a:ext cx="9144000" cy="822960"/>
+          </a:xfrm>
+          <a:prstGeom prst="rect">
+            <a:avLst/>
+          </a:prstGeom>
+          <a:solidFill>
+            <a:srgbClr val="1A2E4A"/>
+          </a:solidFill>
+          <a:ln/>
+        </p:spPr>
+      </p:sp>
+      <p:sp>
+        <p:nvSpPr>
+          <p:cNvPr id="4" name="Title"/>
+          <p:cNvSpPr/>
+          <p:nvPr/>
+        </p:nvSpPr>
+        <p:spPr>
+          <a:xfrm>
+            <a:off x="457200" y="109728"/>
             <a:ext cx="8229600" cy="457200"/>
           </a:xfrm>
           <a:prstGeom prst="rect">
@@ -15991,50 +15876,63 @@
               <a:buNone/>
             </a:pPr>
             <a:r>
-              <a:rPr lang="en-US" sz="2600" b="1" dirty="0">
+              <a:rPr lang="es-ES" sz="2400" b="1" dirty="0">
                 <a:solidFill>
                   <a:srgbClr val="FFFFFF"/>
                 </a:solidFill>
                 <a:latin typeface="Calibri" pitchFamily="34" charset="0"/>
-                <a:ea typeface="Calibri" pitchFamily="34" charset="-122"/>
-                <a:cs typeface="Calibri" pitchFamily="34" charset="-120"/>
               </a:rPr>
               <a:t>Conclusiones y Trabajo Futuro</a:t>
             </a:r>
-            <a:endParaRPr lang="en-US" sz="2600" dirty="0"/>
-          </a:p>
-        </p:txBody>
-      </p:sp>
-      <p:sp>
-        <p:nvSpPr>
-          <p:cNvPr id="4" name="Shape 2"/>
-          <p:cNvSpPr/>
-          <p:nvPr/>
-        </p:nvSpPr>
-        <p:spPr>
-          <a:xfrm>
-            <a:off x="457200" y="713232"/>
-            <a:ext cx="8229600" cy="36576"/>
-          </a:xfrm>
-          <a:prstGeom prst="rect">
-            <a:avLst/>
-          </a:prstGeom>
-          <a:solidFill>
-            <a:srgbClr val="D4A843"/>
-          </a:solidFill>
-          <a:ln/>
-        </p:spPr>
-      </p:sp>
-      <p:sp>
-        <p:nvSpPr>
-          <p:cNvPr id="5" name="Shape 3"/>
-          <p:cNvSpPr/>
-          <p:nvPr/>
-        </p:nvSpPr>
-        <p:spPr>
-          <a:xfrm>
-            <a:off x="457200" y="896112"/>
-            <a:ext cx="4114800" cy="1078992"/>
+          </a:p>
+        </p:txBody>
+      </p:sp>
+      <p:sp>
+        <p:nvSpPr>
+          <p:cNvPr id="5" name="Sub"/>
+          <p:cNvSpPr/>
+          <p:nvPr/>
+        </p:nvSpPr>
+        <p:spPr>
+          <a:xfrm>
+            <a:off x="457200" y="603504"/>
+            <a:ext cx="8229600" cy="228600"/>
+          </a:xfrm>
+          <a:prstGeom prst="rect">
+            <a:avLst/>
+          </a:prstGeom>
+          <a:noFill/>
+          <a:ln/>
+        </p:spPr>
+        <p:txBody>
+          <a:bodyPr wrap="square" lIns="0" tIns="0" rIns="0" bIns="0" rtlCol="0" anchor="ctr"/>
+          <a:lstStyle/>
+          <a:p>
+            <a:pPr marL="0" indent="0">
+              <a:buNone/>
+            </a:pPr>
+            <a:r>
+              <a:rPr lang="es-ES" sz="1100" dirty="0">
+                <a:solidFill>
+                  <a:srgbClr val="F0C060"/>
+                </a:solidFill>
+                <a:latin typeface="Calibri" pitchFamily="34" charset="0"/>
+              </a:rPr>
+              <a:t>Reflexiones finales sobre el proyecto</a:t>
+            </a:r>
+          </a:p>
+        </p:txBody>
+      </p:sp>
+      <p:sp>
+        <p:nvSpPr>
+          <p:cNvPr id="10" name="Card0"/>
+          <p:cNvSpPr/>
+          <p:nvPr/>
+        </p:nvSpPr>
+        <p:spPr>
+          <a:xfrm>
+            <a:off x="182880" y="948960"/>
+            <a:ext cx="4389120" cy="1463040"/>
           </a:xfrm>
           <a:prstGeom prst="rect">
             <a:avLst/>
@@ -16043,45 +15941,76 @@
             <a:srgbClr val="1E3A5F"/>
           </a:solidFill>
           <a:ln/>
-          <a:effectLst>
-            <a:outerShdw blurRad="101600" dist="38100" dir="8100000" algn="bl" rotWithShape="0">
-              <a:srgbClr val="000000">
-                <a:alpha val="18000"/>
-              </a:srgbClr>
-            </a:outerShdw>
-          </a:effectLst>
-        </p:spPr>
-      </p:sp>
-      <p:sp>
-        <p:nvSpPr>
-          <p:cNvPr id="6" name="Shape 4"/>
-          <p:cNvSpPr/>
-          <p:nvPr/>
-        </p:nvSpPr>
-        <p:spPr>
-          <a:xfrm>
-            <a:off x="457200" y="896112"/>
-            <a:ext cx="4114800" cy="45720"/>
+        </p:spPr>
+      </p:sp>
+      <p:sp>
+        <p:nvSpPr>
+          <p:cNvPr id="50" name="Bar0"/>
+          <p:cNvSpPr/>
+          <p:nvPr/>
+        </p:nvSpPr>
+        <p:spPr>
+          <a:xfrm>
+            <a:off x="182880" y="948960"/>
+            <a:ext cx="54864" cy="1463040"/>
           </a:xfrm>
           <a:prstGeom prst="rect">
             <a:avLst/>
           </a:prstGeom>
           <a:solidFill>
-            <a:srgbClr val="D4A843"/>
+            <a:srgbClr val="1F5C40"/>
           </a:solidFill>
           <a:ln/>
         </p:spPr>
       </p:sp>
       <p:sp>
         <p:nvSpPr>
-          <p:cNvPr id="7" name="Text 5"/>
-          <p:cNvSpPr/>
-          <p:nvPr/>
-        </p:nvSpPr>
-        <p:spPr>
-          <a:xfrm>
-            <a:off x="585216" y="987552"/>
-            <a:ext cx="3858768" cy="256032"/>
+          <p:cNvPr id="60" name="Num0"/>
+          <p:cNvSpPr/>
+          <p:nvPr/>
+        </p:nvSpPr>
+        <p:spPr>
+          <a:xfrm>
+            <a:off x="256320" y="1003824"/>
+            <a:ext cx="365760" cy="365760"/>
+          </a:xfrm>
+          <a:prstGeom prst="rect">
+            <a:avLst/>
+          </a:prstGeom>
+          <a:solidFill>
+            <a:srgbClr val="1F5C40"/>
+          </a:solidFill>
+          <a:ln/>
+        </p:spPr>
+        <p:txBody>
+          <a:bodyPr wrap="square" lIns="0" tIns="0" rIns="0" bIns="0" rtlCol="0" anchor="ctr"/>
+          <a:lstStyle/>
+          <a:p>
+            <a:pPr marL="0" indent="0">
+              <a:buNone/>
+            </a:pPr>
+            <a:r>
+              <a:rPr lang="es-ES" sz="1800" b="1" dirty="0">
+                <a:solidFill>
+                  <a:srgbClr val="FFFFFF"/>
+                </a:solidFill>
+                <a:latin typeface="Calibri" pitchFamily="34" charset="0"/>
+              </a:rPr>
+              <a:t>1</a:t>
+            </a:r>
+          </a:p>
+        </p:txBody>
+      </p:sp>
+      <p:sp>
+        <p:nvSpPr>
+          <p:cNvPr id="70" name="CTitle0"/>
+          <p:cNvSpPr/>
+          <p:nvPr/>
+        </p:nvSpPr>
+        <p:spPr>
+          <a:xfrm>
+            <a:off x="685800" y="1022400"/>
+            <a:ext cx="3831336" cy="320040"/>
           </a:xfrm>
           <a:prstGeom prst="rect">
             <a:avLst/>
@@ -16097,30 +16026,27 @@
               <a:buNone/>
             </a:pPr>
             <a:r>
-              <a:rPr lang="en-US" sz="1000" b="1" dirty="0">
+              <a:rPr lang="es-ES" sz="1050" b="1" dirty="0">
                 <a:solidFill>
                   <a:srgbClr val="D4A843"/>
                 </a:solidFill>
                 <a:latin typeface="Calibri" pitchFamily="34" charset="0"/>
-                <a:ea typeface="Calibri" pitchFamily="34" charset="-122"/>
-                <a:cs typeface="Calibri" pitchFamily="34" charset="-120"/>
-              </a:rPr>
-              <a:t>✅  Pipeline ML end-to-end</a:t>
-            </a:r>
-            <a:endParaRPr lang="en-US" sz="1000" dirty="0"/>
-          </a:p>
-        </p:txBody>
-      </p:sp>
-      <p:sp>
-        <p:nvSpPr>
-          <p:cNvPr id="8" name="Text 6"/>
-          <p:cNvSpPr/>
-          <p:nvPr/>
-        </p:nvSpPr>
-        <p:spPr>
-          <a:xfrm>
-            <a:off x="585216" y="1280160"/>
-            <a:ext cx="3858768" cy="603504"/>
+              </a:rPr>
+              <a:t>El precio “justo” es predecible</a:t>
+            </a:r>
+          </a:p>
+        </p:txBody>
+      </p:sp>
+      <p:sp>
+        <p:nvSpPr>
+          <p:cNvPr id="80" name="CBody0"/>
+          <p:cNvSpPr/>
+          <p:nvPr/>
+        </p:nvSpPr>
+        <p:spPr>
+          <a:xfrm>
+            <a:off x="274320" y="1406160"/>
+            <a:ext cx="4206240" cy="914400"/>
           </a:xfrm>
           <a:prstGeom prst="rect">
             <a:avLst/>
@@ -16129,40 +16055,34 @@
           <a:ln/>
         </p:spPr>
         <p:txBody>
-          <a:bodyPr wrap="square" lIns="0" tIns="0" rIns="0" bIns="0" rtlCol="0" anchor="t"/>
-          <a:lstStyle/>
-          <a:p>
-            <a:pPr marL="0" indent="0">
-              <a:lnSpc>
-                <a:spcPct val="120000"/>
-              </a:lnSpc>
-              <a:buNone/>
-            </a:pPr>
-            <a:r>
-              <a:rPr lang="en-US" sz="900" dirty="0">
+          <a:bodyPr wrap="square" lIns="91440" tIns="45720" rIns="91440" bIns="45720" rtlCol="0" anchor="t"/>
+          <a:lstStyle/>
+          <a:p>
+            <a:pPr marL="0" indent="0">
+              <a:buNone/>
+            </a:pPr>
+            <a:r>
+              <a:rPr lang="es-ES" sz="880" dirty="0">
                 <a:solidFill>
                   <a:srgbClr val="F4F8FC"/>
                 </a:solidFill>
                 <a:latin typeface="Calibri" pitchFamily="34" charset="0"/>
-                <a:ea typeface="Calibri" pitchFamily="34" charset="-122"/>
-                <a:cs typeface="Calibri" pitchFamily="34" charset="-120"/>
-              </a:rPr>
-              <a:t>Scraping → limpieza → regresión → ratio → etiqueta chollo → app web. Todo en un único sistema reproducible con uv y pyproject.toml.</a:t>
-            </a:r>
-            <a:endParaRPr lang="en-US" sz="900" dirty="0"/>
-          </a:p>
-        </p:txBody>
-      </p:sp>
-      <p:sp>
-        <p:nvSpPr>
-          <p:cNvPr id="9" name="Shape 7"/>
-          <p:cNvSpPr/>
-          <p:nvPr/>
-        </p:nvSpPr>
-        <p:spPr>
-          <a:xfrm>
-            <a:off x="4846320" y="896112"/>
-            <a:ext cx="4114800" cy="1078992"/>
+              </a:rPr>
+              <a:t>El Bosque Aleatorio explica el 87,8 % de la varianza del precio (R² = 0.8779) con un error medio de ±19,45 €. El precio de un alojamiento no es aleatorio: depende fundamentalmente del tamaño, la ubicación y la temporalidad.</a:t>
+            </a:r>
+          </a:p>
+        </p:txBody>
+      </p:sp>
+      <p:sp>
+        <p:nvSpPr>
+          <p:cNvPr id="11" name="Card1"/>
+          <p:cNvSpPr/>
+          <p:nvPr/>
+        </p:nvSpPr>
+        <p:spPr>
+          <a:xfrm>
+            <a:off x="4663440" y="948960"/>
+            <a:ext cx="4389120" cy="1463040"/>
           </a:xfrm>
           <a:prstGeom prst="rect">
             <a:avLst/>
@@ -16171,45 +16091,76 @@
             <a:srgbClr val="1E3A5F"/>
           </a:solidFill>
           <a:ln/>
-          <a:effectLst>
-            <a:outerShdw blurRad="101600" dist="38100" dir="8100000" algn="bl" rotWithShape="0">
-              <a:srgbClr val="000000">
-                <a:alpha val="18000"/>
-              </a:srgbClr>
-            </a:outerShdw>
-          </a:effectLst>
-        </p:spPr>
-      </p:sp>
-      <p:sp>
-        <p:nvSpPr>
-          <p:cNvPr id="10" name="Shape 8"/>
-          <p:cNvSpPr/>
-          <p:nvPr/>
-        </p:nvSpPr>
-        <p:spPr>
-          <a:xfrm>
-            <a:off x="4846320" y="896112"/>
-            <a:ext cx="4114800" cy="45720"/>
+        </p:spPr>
+      </p:sp>
+      <p:sp>
+        <p:nvSpPr>
+          <p:cNvPr id="51" name="Bar1"/>
+          <p:cNvSpPr/>
+          <p:nvPr/>
+        </p:nvSpPr>
+        <p:spPr>
+          <a:xfrm>
+            <a:off x="4663440" y="948960"/>
+            <a:ext cx="54864" cy="1463040"/>
           </a:xfrm>
           <a:prstGeom prst="rect">
             <a:avLst/>
           </a:prstGeom>
           <a:solidFill>
-            <a:srgbClr val="D4A843"/>
+            <a:srgbClr val="1A4A8C"/>
           </a:solidFill>
           <a:ln/>
         </p:spPr>
       </p:sp>
       <p:sp>
         <p:nvSpPr>
-          <p:cNvPr id="11" name="Text 9"/>
-          <p:cNvSpPr/>
-          <p:nvPr/>
-        </p:nvSpPr>
-        <p:spPr>
-          <a:xfrm>
-            <a:off x="4974336" y="987552"/>
-            <a:ext cx="3858768" cy="256032"/>
+          <p:cNvPr id="61" name="Num1"/>
+          <p:cNvSpPr/>
+          <p:nvPr/>
+        </p:nvSpPr>
+        <p:spPr>
+          <a:xfrm>
+            <a:off x="4736880" y="1003824"/>
+            <a:ext cx="365760" cy="365760"/>
+          </a:xfrm>
+          <a:prstGeom prst="rect">
+            <a:avLst/>
+          </a:prstGeom>
+          <a:solidFill>
+            <a:srgbClr val="1A4A8C"/>
+          </a:solidFill>
+          <a:ln/>
+        </p:spPr>
+        <p:txBody>
+          <a:bodyPr wrap="square" lIns="0" tIns="0" rIns="0" bIns="0" rtlCol="0" anchor="ctr"/>
+          <a:lstStyle/>
+          <a:p>
+            <a:pPr marL="0" indent="0">
+              <a:buNone/>
+            </a:pPr>
+            <a:r>
+              <a:rPr lang="es-ES" sz="1800" b="1" dirty="0">
+                <a:solidFill>
+                  <a:srgbClr val="FFFFFF"/>
+                </a:solidFill>
+                <a:latin typeface="Calibri" pitchFamily="34" charset="0"/>
+              </a:rPr>
+              <a:t>2</a:t>
+            </a:r>
+          </a:p>
+        </p:txBody>
+      </p:sp>
+      <p:sp>
+        <p:nvSpPr>
+          <p:cNvPr id="71" name="CTitle1"/>
+          <p:cNvSpPr/>
+          <p:nvPr/>
+        </p:nvSpPr>
+        <p:spPr>
+          <a:xfrm>
+            <a:off x="5166360" y="1022400"/>
+            <a:ext cx="3831336" cy="320040"/>
           </a:xfrm>
           <a:prstGeom prst="rect">
             <a:avLst/>
@@ -16225,30 +16176,27 @@
               <a:buNone/>
             </a:pPr>
             <a:r>
-              <a:rPr lang="en-US" sz="1000" b="1" dirty="0">
+              <a:rPr lang="es-ES" sz="1050" b="1" dirty="0">
                 <a:solidFill>
                   <a:srgbClr val="D4A843"/>
                 </a:solidFill>
                 <a:latin typeface="Calibri" pitchFamily="34" charset="0"/>
-                <a:ea typeface="Calibri" pitchFamily="34" charset="-122"/>
-                <a:cs typeface="Calibri" pitchFamily="34" charset="-120"/>
-              </a:rPr>
-              <a:t>✅  Scraping robusto (2 fases)</a:t>
-            </a:r>
-            <a:endParaRPr lang="en-US" sz="1000" dirty="0"/>
-          </a:p>
-        </p:txBody>
-      </p:sp>
-      <p:sp>
-        <p:nvSpPr>
-          <p:cNvPr id="12" name="Text 10"/>
-          <p:cNvSpPr/>
-          <p:nvPr/>
-        </p:nvSpPr>
-        <p:spPr>
-          <a:xfrm>
-            <a:off x="4974336" y="1280160"/>
-            <a:ext cx="3858768" cy="603504"/>
+              </a:rPr>
+              <a:t>Casi 1 de cada 2 alojamientos es un chollo</a:t>
+            </a:r>
+          </a:p>
+        </p:txBody>
+      </p:sp>
+      <p:sp>
+        <p:nvSpPr>
+          <p:cNvPr id="81" name="CBody1"/>
+          <p:cNvSpPr/>
+          <p:nvPr/>
+        </p:nvSpPr>
+        <p:spPr>
+          <a:xfrm>
+            <a:off x="4754880" y="1406160"/>
+            <a:ext cx="4206240" cy="914400"/>
           </a:xfrm>
           <a:prstGeom prst="rect">
             <a:avLst/>
@@ -16257,40 +16205,34 @@
           <a:ln/>
         </p:spPr>
         <p:txBody>
-          <a:bodyPr wrap="square" lIns="0" tIns="0" rIns="0" bIns="0" rtlCol="0" anchor="t"/>
-          <a:lstStyle/>
-          <a:p>
-            <a:pPr marL="0" indent="0">
-              <a:lnSpc>
-                <a:spcPct val="120000"/>
-              </a:lnSpc>
-              <a:buNone/>
-            </a:pPr>
-            <a:r>
-              <a:rPr lang="en-US" sz="900" dirty="0">
+          <a:bodyPr wrap="square" lIns="91440" tIns="45720" rIns="91440" bIns="45720" rtlCol="0" anchor="t"/>
+          <a:lstStyle/>
+          <a:p>
+            <a:pPr marL="0" indent="0">
+              <a:buNone/>
+            </a:pPr>
+            <a:r>
+              <a:rPr lang="es-ES" sz="880" dirty="0">
                 <a:solidFill>
                   <a:srgbClr val="F4F8FC"/>
                 </a:solidFill>
                 <a:latin typeface="Calibri" pitchFamily="34" charset="0"/>
-                <a:ea typeface="Calibri" pitchFamily="34" charset="-122"/>
-                <a:cs typeface="Calibri" pitchFamily="34" charset="-120"/>
-              </a:rPr>
-              <a:t>Selenium para listados (anti-bot, subdivisión precio). Playwright + GraphQL API para fichas (WAF, 365 días). patch_room_size (paralelo).</a:t>
-            </a:r>
-            <a:endParaRPr lang="en-US" sz="900" dirty="0"/>
-          </a:p>
-        </p:txBody>
-      </p:sp>
-      <p:sp>
-        <p:nvSpPr>
-          <p:cNvPr id="13" name="Shape 11"/>
-          <p:cNvSpPr/>
-          <p:nvPr/>
-        </p:nvSpPr>
-        <p:spPr>
-          <a:xfrm>
-            <a:off x="457200" y="2066544"/>
-            <a:ext cx="4114800" cy="1078992"/>
+              </a:rPr>
+              <a:t>El 49,9 % de los alojamientos del conjunto de test tienen un precio inferior al predicho. Booking.com tiene una variabilidad de precios real que el usuario no puede percibir sin apoyo de ML.</a:t>
+            </a:r>
+          </a:p>
+        </p:txBody>
+      </p:sp>
+      <p:sp>
+        <p:nvSpPr>
+          <p:cNvPr id="12" name="Card2"/>
+          <p:cNvSpPr/>
+          <p:nvPr/>
+        </p:nvSpPr>
+        <p:spPr>
+          <a:xfrm>
+            <a:off x="182880" y="2560080"/>
+            <a:ext cx="4389120" cy="1463040"/>
           </a:xfrm>
           <a:prstGeom prst="rect">
             <a:avLst/>
@@ -16299,45 +16241,76 @@
             <a:srgbClr val="1E3A5F"/>
           </a:solidFill>
           <a:ln/>
-          <a:effectLst>
-            <a:outerShdw blurRad="101600" dist="38100" dir="8100000" algn="bl" rotWithShape="0">
-              <a:srgbClr val="000000">
-                <a:alpha val="18000"/>
-              </a:srgbClr>
-            </a:outerShdw>
-          </a:effectLst>
-        </p:spPr>
-      </p:sp>
-      <p:sp>
-        <p:nvSpPr>
-          <p:cNvPr id="14" name="Shape 12"/>
-          <p:cNvSpPr/>
-          <p:nvPr/>
-        </p:nvSpPr>
-        <p:spPr>
-          <a:xfrm>
-            <a:off x="457200" y="2066544"/>
-            <a:ext cx="4114800" cy="45720"/>
+        </p:spPr>
+      </p:sp>
+      <p:sp>
+        <p:nvSpPr>
+          <p:cNvPr id="52" name="Bar2"/>
+          <p:cNvSpPr/>
+          <p:nvPr/>
+        </p:nvSpPr>
+        <p:spPr>
+          <a:xfrm>
+            <a:off x="182880" y="2560080"/>
+            <a:ext cx="54864" cy="1463040"/>
           </a:xfrm>
           <a:prstGeom prst="rect">
             <a:avLst/>
           </a:prstGeom>
           <a:solidFill>
-            <a:srgbClr val="D4A843"/>
+            <a:srgbClr val="7B341E"/>
           </a:solidFill>
           <a:ln/>
         </p:spPr>
       </p:sp>
       <p:sp>
         <p:nvSpPr>
-          <p:cNvPr id="15" name="Text 13"/>
-          <p:cNvSpPr/>
-          <p:nvPr/>
-        </p:nvSpPr>
-        <p:spPr>
-          <a:xfrm>
-            <a:off x="585216" y="2157984"/>
-            <a:ext cx="3858768" cy="256032"/>
+          <p:cNvPr id="62" name="Num2"/>
+          <p:cNvSpPr/>
+          <p:nvPr/>
+        </p:nvSpPr>
+        <p:spPr>
+          <a:xfrm>
+            <a:off x="256320" y="2614944"/>
+            <a:ext cx="365760" cy="365760"/>
+          </a:xfrm>
+          <a:prstGeom prst="rect">
+            <a:avLst/>
+          </a:prstGeom>
+          <a:solidFill>
+            <a:srgbClr val="7B341E"/>
+          </a:solidFill>
+          <a:ln/>
+        </p:spPr>
+        <p:txBody>
+          <a:bodyPr wrap="square" lIns="0" tIns="0" rIns="0" bIns="0" rtlCol="0" anchor="ctr"/>
+          <a:lstStyle/>
+          <a:p>
+            <a:pPr marL="0" indent="0">
+              <a:buNone/>
+            </a:pPr>
+            <a:r>
+              <a:rPr lang="es-ES" sz="1800" b="1" dirty="0">
+                <a:solidFill>
+                  <a:srgbClr val="FFFFFF"/>
+                </a:solidFill>
+                <a:latin typeface="Calibri" pitchFamily="34" charset="0"/>
+              </a:rPr>
+              <a:t>3</a:t>
+            </a:r>
+          </a:p>
+        </p:txBody>
+      </p:sp>
+      <p:sp>
+        <p:nvSpPr>
+          <p:cNvPr id="72" name="CTitle2"/>
+          <p:cNvSpPr/>
+          <p:nvPr/>
+        </p:nvSpPr>
+        <p:spPr>
+          <a:xfrm>
+            <a:off x="685800" y="2633520"/>
+            <a:ext cx="3831336" cy="320040"/>
           </a:xfrm>
           <a:prstGeom prst="rect">
             <a:avLst/>
@@ -16353,30 +16326,27 @@
               <a:buNone/>
             </a:pPr>
             <a:r>
-              <a:rPr lang="en-US" sz="1000" b="1" dirty="0">
+              <a:rPr lang="es-ES" sz="1050" b="1" dirty="0">
                 <a:solidFill>
                   <a:srgbClr val="D4A843"/>
                 </a:solidFill>
                 <a:latin typeface="Calibri" pitchFamily="34" charset="0"/>
-                <a:ea typeface="Calibri" pitchFamily="34" charset="-122"/>
-                <a:cs typeface="Calibri" pitchFamily="34" charset="-120"/>
-              </a:rPr>
-              <a:t>✅  Buenas prácticas ML</a:t>
-            </a:r>
-            <a:endParaRPr lang="en-US" sz="1000" dirty="0"/>
-          </a:p>
-        </p:txBody>
-      </p:sp>
-      <p:sp>
-        <p:nvSpPr>
-          <p:cNvPr id="16" name="Text 14"/>
-          <p:cNvSpPr/>
-          <p:nvPr/>
-        </p:nvSpPr>
-        <p:spPr>
-          <a:xfrm>
-            <a:off x="585216" y="2450592"/>
-            <a:ext cx="3858768" cy="603504"/>
+              </a:rPr>
+              <a:t>La calidad del dato importa más que el modelo</a:t>
+            </a:r>
+          </a:p>
+        </p:txBody>
+      </p:sp>
+      <p:sp>
+        <p:nvSpPr>
+          <p:cNvPr id="82" name="CBody2"/>
+          <p:cNvSpPr/>
+          <p:nvPr/>
+        </p:nvSpPr>
+        <p:spPr>
+          <a:xfrm>
+            <a:off x="274320" y="3017280"/>
+            <a:ext cx="4206240" cy="914400"/>
           </a:xfrm>
           <a:prstGeom prst="rect">
             <a:avLst/>
@@ -16385,40 +16355,34 @@
           <a:ln/>
         </p:spPr>
         <p:txBody>
-          <a:bodyPr wrap="square" lIns="0" tIns="0" rIns="0" bIns="0" rtlCol="0" anchor="t"/>
-          <a:lstStyle/>
-          <a:p>
-            <a:pPr marL="0" indent="0">
-              <a:lnSpc>
-                <a:spcPct val="120000"/>
-              </a:lnSpc>
-              <a:buNone/>
-            </a:pPr>
-            <a:r>
-              <a:rPr lang="en-US" sz="900" dirty="0">
+          <a:bodyPr wrap="square" lIns="91440" tIns="45720" rIns="91440" bIns="45720" rtlCol="0" anchor="t"/>
+          <a:lstStyle/>
+          <a:p>
+            <a:pPr marL="0" indent="0">
+              <a:buNone/>
+            </a:pPr>
+            <a:r>
+              <a:rPr lang="es-ES" sz="880" dirty="0">
                 <a:solidFill>
                   <a:srgbClr val="F4F8FC"/>
                 </a:solidFill>
                 <a:latin typeface="Calibri" pitchFamily="34" charset="0"/>
-                <a:ea typeface="Calibri" pitchFamily="34" charset="-122"/>
-                <a:cs typeface="Calibri" pitchFamily="34" charset="-120"/>
-              </a:rPr>
-              <a:t>Holdout 70/15/15 + GridSearchCV K-Fold cv=3. fit() solo en X_train. Test tocado una sola vez. Escalado diferenciado por modelo. Sin data leakage.</a:t>
-            </a:r>
-            <a:endParaRPr lang="en-US" sz="900" dirty="0"/>
-          </a:p>
-        </p:txBody>
-      </p:sp>
-      <p:sp>
-        <p:nvSpPr>
-          <p:cNvPr id="17" name="Shape 15"/>
-          <p:cNvSpPr/>
-          <p:nvPr/>
-        </p:nvSpPr>
-        <p:spPr>
-          <a:xfrm>
-            <a:off x="4846320" y="2066544"/>
-            <a:ext cx="4114800" cy="1078992"/>
+              </a:rPr>
+              <a:t>El scraping en 2 fases, la geocodificación, la extracción de servicios binarios y la gestión de outliers fueron más determinantes para el resultado final que la elección del algoritmo.</a:t>
+            </a:r>
+          </a:p>
+        </p:txBody>
+      </p:sp>
+      <p:sp>
+        <p:nvSpPr>
+          <p:cNvPr id="13" name="Card3"/>
+          <p:cNvSpPr/>
+          <p:nvPr/>
+        </p:nvSpPr>
+        <p:spPr>
+          <a:xfrm>
+            <a:off x="4663440" y="2560080"/>
+            <a:ext cx="4389120" cy="1463040"/>
           </a:xfrm>
           <a:prstGeom prst="rect">
             <a:avLst/>
@@ -16427,45 +16391,76 @@
             <a:srgbClr val="1E3A5F"/>
           </a:solidFill>
           <a:ln/>
-          <a:effectLst>
-            <a:outerShdw blurRad="101600" dist="38100" dir="8100000" algn="bl" rotWithShape="0">
-              <a:srgbClr val="000000">
-                <a:alpha val="18000"/>
-              </a:srgbClr>
-            </a:outerShdw>
-          </a:effectLst>
-        </p:spPr>
-      </p:sp>
-      <p:sp>
-        <p:nvSpPr>
-          <p:cNvPr id="18" name="Shape 16"/>
-          <p:cNvSpPr/>
-          <p:nvPr/>
-        </p:nvSpPr>
-        <p:spPr>
-          <a:xfrm>
-            <a:off x="4846320" y="2066544"/>
-            <a:ext cx="4114800" cy="45720"/>
+        </p:spPr>
+      </p:sp>
+      <p:sp>
+        <p:nvSpPr>
+          <p:cNvPr id="53" name="Bar3"/>
+          <p:cNvSpPr/>
+          <p:nvPr/>
+        </p:nvSpPr>
+        <p:spPr>
+          <a:xfrm>
+            <a:off x="4663440" y="2560080"/>
+            <a:ext cx="54864" cy="1463040"/>
           </a:xfrm>
           <a:prstGeom prst="rect">
             <a:avLst/>
           </a:prstGeom>
           <a:solidFill>
-            <a:srgbClr val="D4A843"/>
+            <a:srgbClr val="4A1A6B"/>
           </a:solidFill>
           <a:ln/>
         </p:spPr>
       </p:sp>
       <p:sp>
         <p:nvSpPr>
-          <p:cNvPr id="19" name="Text 17"/>
-          <p:cNvSpPr/>
-          <p:nvPr/>
-        </p:nvSpPr>
-        <p:spPr>
-          <a:xfrm>
-            <a:off x="4974336" y="2157984"/>
-            <a:ext cx="3858768" cy="256032"/>
+          <p:cNvPr id="63" name="Num3"/>
+          <p:cNvSpPr/>
+          <p:nvPr/>
+        </p:nvSpPr>
+        <p:spPr>
+          <a:xfrm>
+            <a:off x="4736880" y="2614944"/>
+            <a:ext cx="365760" cy="365760"/>
+          </a:xfrm>
+          <a:prstGeom prst="rect">
+            <a:avLst/>
+          </a:prstGeom>
+          <a:solidFill>
+            <a:srgbClr val="4A1A6B"/>
+          </a:solidFill>
+          <a:ln/>
+        </p:spPr>
+        <p:txBody>
+          <a:bodyPr wrap="square" lIns="0" tIns="0" rIns="0" bIns="0" rtlCol="0" anchor="ctr"/>
+          <a:lstStyle/>
+          <a:p>
+            <a:pPr marL="0" indent="0">
+              <a:buNone/>
+            </a:pPr>
+            <a:r>
+              <a:rPr lang="es-ES" sz="1800" b="1" dirty="0">
+                <a:solidFill>
+                  <a:srgbClr val="FFFFFF"/>
+                </a:solidFill>
+                <a:latin typeface="Calibri" pitchFamily="34" charset="0"/>
+              </a:rPr>
+              <a:t>4</a:t>
+            </a:r>
+          </a:p>
+        </p:txBody>
+      </p:sp>
+      <p:sp>
+        <p:nvSpPr>
+          <p:cNvPr id="73" name="CTitle3"/>
+          <p:cNvSpPr/>
+          <p:nvPr/>
+        </p:nvSpPr>
+        <p:spPr>
+          <a:xfrm>
+            <a:off x="5166360" y="2633520"/>
+            <a:ext cx="3831336" cy="320040"/>
           </a:xfrm>
           <a:prstGeom prst="rect">
             <a:avLst/>
@@ -16481,30 +16476,27 @@
               <a:buNone/>
             </a:pPr>
             <a:r>
-              <a:rPr lang="en-US" sz="1000" b="1" dirty="0">
+              <a:rPr lang="es-ES" sz="1050" b="1" dirty="0">
                 <a:solidFill>
                   <a:srgbClr val="D4A843"/>
                 </a:solidFill>
                 <a:latin typeface="Calibri" pitchFamily="34" charset="0"/>
-                <a:ea typeface="Calibri" pitchFamily="34" charset="-122"/>
-                <a:cs typeface="Calibri" pitchFamily="34" charset="-120"/>
-              </a:rPr>
-              <a:t>✅  Categorización determinista</a:t>
-            </a:r>
-            <a:endParaRPr lang="en-US" sz="1000" dirty="0"/>
-          </a:p>
-        </p:txBody>
-      </p:sp>
-      <p:sp>
-        <p:nvSpPr>
-          <p:cNvPr id="20" name="Text 18"/>
-          <p:cNvSpPr/>
-          <p:nvPr/>
-        </p:nvSpPr>
-        <p:spPr>
-          <a:xfrm>
-            <a:off x="4974336" y="2450592"/>
-            <a:ext cx="3858768" cy="603504"/>
+              </a:rPr>
+              <a:t>Un sistema end-to-end es más que la suma de sus partes</a:t>
+            </a:r>
+          </a:p>
+        </p:txBody>
+      </p:sp>
+      <p:sp>
+        <p:nvSpPr>
+          <p:cNvPr id="83" name="CBody3"/>
+          <p:cNvSpPr/>
+          <p:nvPr/>
+        </p:nvSpPr>
+        <p:spPr>
+          <a:xfrm>
+            <a:off x="4754880" y="3017280"/>
+            <a:ext cx="4206240" cy="914400"/>
           </a:xfrm>
           <a:prstGeom prst="rect">
             <a:avLst/>
@@ -16513,40 +16505,34 @@
           <a:ln/>
         </p:spPr>
         <p:txBody>
-          <a:bodyPr wrap="square" lIns="0" tIns="0" rIns="0" bIns="0" rtlCol="0" anchor="t"/>
-          <a:lstStyle/>
-          <a:p>
-            <a:pPr marL="0" indent="0">
-              <a:lnSpc>
-                <a:spcPct val="120000"/>
-              </a:lnSpc>
-              <a:buNone/>
-            </a:pPr>
-            <a:r>
-              <a:rPr lang="en-US" sz="900" dirty="0">
+          <a:bodyPr wrap="square" lIns="91440" tIns="45720" rIns="91440" bIns="45720" rtlCol="0" anchor="t"/>
+          <a:lstStyle/>
+          <a:p>
+            <a:pPr marL="0" indent="0">
+              <a:buNone/>
+            </a:pPr>
+            <a:r>
+              <a:rPr lang="es-ES" sz="880" dirty="0">
                 <a:solidFill>
                   <a:srgbClr val="F4F8FC"/>
                 </a:solidFill>
                 <a:latin typeface="Calibri" pitchFamily="34" charset="0"/>
-                <a:ea typeface="Calibri" pitchFamily="34" charset="-122"/>
-                <a:cs typeface="Calibri" pitchFamily="34" charset="-120"/>
-              </a:rPr>
-              <a:t>La etiqueta chollo es una regla interpretable (ratio real/pred), no un modelo adicional. Evita redundancia y es reproducible y explicable al usuario.</a:t>
-            </a:r>
-            <a:endParaRPr lang="en-US" sz="900" dirty="0"/>
-          </a:p>
-        </p:txBody>
-      </p:sp>
-      <p:sp>
-        <p:nvSpPr>
-          <p:cNvPr id="21" name="Shape 19"/>
-          <p:cNvSpPr/>
-          <p:nvPr/>
-        </p:nvSpPr>
-        <p:spPr>
-          <a:xfrm>
-            <a:off x="457200" y="3310128"/>
-            <a:ext cx="8229600" cy="256032"/>
+              </a:rPr>
+              <a:t>Conectar scraping → preprocesamiento → modelización → app web en un único sistema reproducible es el verdadero reto de ingeniería. El modelo solo funciona si todos los eslabónes están bien alineados.</a:t>
+            </a:r>
+          </a:p>
+        </p:txBody>
+      </p:sp>
+      <p:sp>
+        <p:nvSpPr>
+          <p:cNvPr id="30" name="FutLbl"/>
+          <p:cNvSpPr/>
+          <p:nvPr/>
+        </p:nvSpPr>
+        <p:spPr>
+          <a:xfrm>
+            <a:off x="182880" y="4097400"/>
+            <a:ext cx="8778240" cy="228600"/>
           </a:xfrm>
           <a:prstGeom prst="rect">
             <a:avLst/>
@@ -16556,56 +16542,35 @@
           </a:solidFill>
           <a:ln/>
         </p:spPr>
-      </p:sp>
-      <p:sp>
-        <p:nvSpPr>
-          <p:cNvPr id="22" name="Text 20"/>
-          <p:cNvSpPr/>
-          <p:nvPr/>
-        </p:nvSpPr>
-        <p:spPr>
-          <a:xfrm>
-            <a:off x="548640" y="3310128"/>
-            <a:ext cx="8229600" cy="256032"/>
-          </a:xfrm>
-          <a:prstGeom prst="rect">
-            <a:avLst/>
-          </a:prstGeom>
-          <a:noFill/>
-          <a:ln/>
-        </p:spPr>
-        <p:txBody>
-          <a:bodyPr wrap="square" lIns="0" tIns="0" rIns="0" bIns="0" rtlCol="0" anchor="ctr"/>
-          <a:lstStyle/>
-          <a:p>
-            <a:pPr marL="0" indent="0">
-              <a:buNone/>
-            </a:pPr>
-            <a:r>
-              <a:rPr lang="en-US" sz="1000" b="1" dirty="0">
+        <p:txBody>
+          <a:bodyPr wrap="square" lIns="91440" tIns="45720" rIns="91440" bIns="45720" rtlCol="0" anchor="ctr"/>
+          <a:lstStyle/>
+          <a:p>
+            <a:pPr marL="0" indent="0">
+              <a:buNone/>
+            </a:pPr>
+            <a:r>
+              <a:rPr lang="es-ES" sz="1000" b="1" dirty="0">
                 <a:solidFill>
                   <a:srgbClr val="D4A843"/>
                 </a:solidFill>
                 <a:latin typeface="Calibri" pitchFamily="34" charset="0"/>
-                <a:ea typeface="Calibri" pitchFamily="34" charset="-122"/>
-                <a:cs typeface="Calibri" pitchFamily="34" charset="-120"/>
-              </a:rPr>
-              <a:t>Líneas de trabajo futuro</a:t>
-            </a:r>
-            <a:endParaRPr lang="en-US" sz="1000" dirty="0"/>
-          </a:p>
-        </p:txBody>
-      </p:sp>
-      <p:sp>
-        <p:nvSpPr>
-          <p:cNvPr id="23" name="Shape 21"/>
-          <p:cNvSpPr/>
-          <p:nvPr/>
-        </p:nvSpPr>
-        <p:spPr>
-          <a:xfrm>
-            <a:off x="457200" y="3630168"/>
-            <a:ext cx="2697480" cy="384048"/>
+              </a:rPr>
+              <a:t>🔭  Líneas de trabajo futuro</a:t>
+            </a:r>
+          </a:p>
+        </p:txBody>
+      </p:sp>
+      <p:sp>
+        <p:nvSpPr>
+          <p:cNvPr id="40" name="Fut0"/>
+          <p:cNvSpPr/>
+          <p:nvPr/>
+        </p:nvSpPr>
+        <p:spPr>
+          <a:xfrm>
+            <a:off x="182880" y="4371480"/>
+            <a:ext cx="2184840" cy="365760"/>
           </a:xfrm>
           <a:prstGeom prst="rect">
             <a:avLst/>
@@ -16613,65 +16578,41 @@
           <a:solidFill>
             <a:srgbClr val="1E3A5F"/>
           </a:solidFill>
-          <a:ln/>
-          <a:effectLst>
-            <a:outerShdw blurRad="50800" dist="25400" dir="8100000" algn="bl" rotWithShape="0">
-              <a:srgbClr val="000000">
-                <a:alpha val="10000"/>
-              </a:srgbClr>
-            </a:outerShdw>
-          </a:effectLst>
-        </p:spPr>
-      </p:sp>
-      <p:sp>
-        <p:nvSpPr>
-          <p:cNvPr id="24" name="Text 22"/>
-          <p:cNvSpPr/>
-          <p:nvPr/>
-        </p:nvSpPr>
-        <p:spPr>
-          <a:xfrm>
-            <a:off x="548640" y="3630168"/>
-            <a:ext cx="2560320" cy="384048"/>
-          </a:xfrm>
-          <a:prstGeom prst="rect">
-            <a:avLst/>
-          </a:prstGeom>
-          <a:noFill/>
-          <a:ln/>
-        </p:spPr>
-        <p:txBody>
-          <a:bodyPr wrap="square" lIns="0" tIns="0" rIns="0" bIns="0" rtlCol="0" anchor="ctr"/>
-          <a:lstStyle/>
-          <a:p>
-            <a:pPr marL="0" indent="0">
-              <a:buNone/>
-            </a:pPr>
-            <a:r>
-              <a:rPr lang="en-US" sz="900" dirty="0">
+          <a:ln>
+            <a:solidFill>
+              <a:srgbClr val="2A5080"/>
+            </a:solidFill>
+          </a:ln>
+        </p:spPr>
+        <p:txBody>
+          <a:bodyPr wrap="square" lIns="91440" tIns="45720" rIns="91440" bIns="45720" rtlCol="0" anchor="ctr"/>
+          <a:lstStyle/>
+          <a:p>
+            <a:pPr marL="0" indent="0">
+              <a:buNone/>
+            </a:pPr>
+            <a:r>
+              <a:rPr lang="es-ES" sz="880" dirty="0">
                 <a:solidFill>
                   <a:srgbClr val="F4F8FC"/>
                 </a:solidFill>
                 <a:latin typeface="Calibri" pitchFamily="34" charset="0"/>
-                <a:ea typeface="Calibri" pitchFamily="34" charset="-122"/>
-                <a:cs typeface="Calibri" pitchFamily="34" charset="-120"/>
-              </a:rPr>
-              <a:t>→ Despliegue Streamlit Cloud</a:t>
-            </a:r>
-            <a:endParaRPr lang="en-US" sz="900" dirty="0"/>
-          </a:p>
-        </p:txBody>
-      </p:sp>
-      <p:sp>
-        <p:nvSpPr>
-          <p:cNvPr id="25" name="Shape 23"/>
-          <p:cNvSpPr/>
-          <p:nvPr/>
-        </p:nvSpPr>
-        <p:spPr>
-          <a:xfrm>
-            <a:off x="3291840" y="3630168"/>
-            <a:ext cx="2697480" cy="384048"/>
+              </a:rPr>
+              <a:t>→  Despliegue Streamlit Cloud</a:t>
+            </a:r>
+          </a:p>
+        </p:txBody>
+      </p:sp>
+      <p:sp>
+        <p:nvSpPr>
+          <p:cNvPr id="41" name="Fut1"/>
+          <p:cNvSpPr/>
+          <p:nvPr/>
+        </p:nvSpPr>
+        <p:spPr>
+          <a:xfrm>
+            <a:off x="2377440" y="4371480"/>
+            <a:ext cx="2184840" cy="365760"/>
           </a:xfrm>
           <a:prstGeom prst="rect">
             <a:avLst/>
@@ -16679,65 +16620,41 @@
           <a:solidFill>
             <a:srgbClr val="1E3A5F"/>
           </a:solidFill>
-          <a:ln/>
-          <a:effectLst>
-            <a:outerShdw blurRad="50800" dist="25400" dir="8100000" algn="bl" rotWithShape="0">
-              <a:srgbClr val="000000">
-                <a:alpha val="10000"/>
-              </a:srgbClr>
-            </a:outerShdw>
-          </a:effectLst>
-        </p:spPr>
-      </p:sp>
-      <p:sp>
-        <p:nvSpPr>
-          <p:cNvPr id="26" name="Text 24"/>
-          <p:cNvSpPr/>
-          <p:nvPr/>
-        </p:nvSpPr>
-        <p:spPr>
-          <a:xfrm>
-            <a:off x="3383280" y="3630168"/>
-            <a:ext cx="2560320" cy="384048"/>
-          </a:xfrm>
-          <a:prstGeom prst="rect">
-            <a:avLst/>
-          </a:prstGeom>
-          <a:noFill/>
-          <a:ln/>
-        </p:spPr>
-        <p:txBody>
-          <a:bodyPr wrap="square" lIns="0" tIns="0" rIns="0" bIns="0" rtlCol="0" anchor="ctr"/>
-          <a:lstStyle/>
-          <a:p>
-            <a:pPr marL="0" indent="0">
-              <a:buNone/>
-            </a:pPr>
-            <a:r>
-              <a:rPr lang="en-US" sz="900" dirty="0">
+          <a:ln>
+            <a:solidFill>
+              <a:srgbClr val="1F5C40"/>
+            </a:solidFill>
+          </a:ln>
+        </p:spPr>
+        <p:txBody>
+          <a:bodyPr wrap="square" lIns="91440" tIns="45720" rIns="91440" bIns="45720" rtlCol="0" anchor="ctr"/>
+          <a:lstStyle/>
+          <a:p>
+            <a:pPr marL="0" indent="0">
+              <a:buNone/>
+            </a:pPr>
+            <a:r>
+              <a:rPr lang="es-ES" sz="880" dirty="0">
                 <a:solidFill>
                   <a:srgbClr val="F4F8FC"/>
                 </a:solidFill>
                 <a:latin typeface="Calibri" pitchFamily="34" charset="0"/>
-                <a:ea typeface="Calibri" pitchFamily="34" charset="-122"/>
-                <a:cs typeface="Calibri" pitchFamily="34" charset="-120"/>
-              </a:rPr>
-              <a:t>→ Isolation Forest (ML no supervisado)</a:t>
-            </a:r>
-            <a:endParaRPr lang="en-US" sz="900" dirty="0"/>
-          </a:p>
-        </p:txBody>
-      </p:sp>
-      <p:sp>
-        <p:nvSpPr>
-          <p:cNvPr id="27" name="Shape 25"/>
-          <p:cNvSpPr/>
-          <p:nvPr/>
-        </p:nvSpPr>
-        <p:spPr>
-          <a:xfrm>
-            <a:off x="6126480" y="3630168"/>
-            <a:ext cx="2697480" cy="384048"/>
+              </a:rPr>
+              <a:t>→  ML no supervisado</a:t>
+            </a:r>
+          </a:p>
+        </p:txBody>
+      </p:sp>
+      <p:sp>
+        <p:nvSpPr>
+          <p:cNvPr id="42" name="Fut2"/>
+          <p:cNvSpPr/>
+          <p:nvPr/>
+        </p:nvSpPr>
+        <p:spPr>
+          <a:xfrm>
+            <a:off x="4572000" y="4371480"/>
+            <a:ext cx="2184840" cy="365760"/>
           </a:xfrm>
           <a:prstGeom prst="rect">
             <a:avLst/>
@@ -16745,65 +16662,41 @@
           <a:solidFill>
             <a:srgbClr val="1E3A5F"/>
           </a:solidFill>
-          <a:ln/>
-          <a:effectLst>
-            <a:outerShdw blurRad="50800" dist="25400" dir="8100000" algn="bl" rotWithShape="0">
-              <a:srgbClr val="000000">
-                <a:alpha val="10000"/>
-              </a:srgbClr>
-            </a:outerShdw>
-          </a:effectLst>
-        </p:spPr>
-      </p:sp>
-      <p:sp>
-        <p:nvSpPr>
-          <p:cNvPr id="28" name="Text 26"/>
-          <p:cNvSpPr/>
-          <p:nvPr/>
-        </p:nvSpPr>
-        <p:spPr>
-          <a:xfrm>
-            <a:off x="6217920" y="3630168"/>
-            <a:ext cx="2560320" cy="384048"/>
-          </a:xfrm>
-          <a:prstGeom prst="rect">
-            <a:avLst/>
-          </a:prstGeom>
-          <a:noFill/>
-          <a:ln/>
-        </p:spPr>
-        <p:txBody>
-          <a:bodyPr wrap="square" lIns="0" tIns="0" rIns="0" bIns="0" rtlCol="0" anchor="ctr"/>
-          <a:lstStyle/>
-          <a:p>
-            <a:pPr marL="0" indent="0">
-              <a:buNone/>
-            </a:pPr>
-            <a:r>
-              <a:rPr lang="en-US" sz="900" dirty="0">
+          <a:ln>
+            <a:solidFill>
+              <a:srgbClr val="5C3A1E"/>
+            </a:solidFill>
+          </a:ln>
+        </p:spPr>
+        <p:txBody>
+          <a:bodyPr wrap="square" lIns="91440" tIns="45720" rIns="91440" bIns="45720" rtlCol="0" anchor="ctr"/>
+          <a:lstStyle/>
+          <a:p>
+            <a:pPr marL="0" indent="0">
+              <a:buNone/>
+            </a:pPr>
+            <a:r>
+              <a:rPr lang="es-ES" sz="880" dirty="0">
                 <a:solidFill>
                   <a:srgbClr val="F4F8FC"/>
                 </a:solidFill>
                 <a:latin typeface="Calibri" pitchFamily="34" charset="0"/>
-                <a:ea typeface="Calibri" pitchFamily="34" charset="-122"/>
-                <a:cs typeface="Calibri" pitchFamily="34" charset="-120"/>
-              </a:rPr>
-              <a:t>→ Ampliar a Airbnb / Idealista</a:t>
-            </a:r>
-            <a:endParaRPr lang="en-US" sz="900" dirty="0"/>
-          </a:p>
-        </p:txBody>
-      </p:sp>
-      <p:sp>
-        <p:nvSpPr>
-          <p:cNvPr id="29" name="Shape 27"/>
-          <p:cNvSpPr/>
-          <p:nvPr/>
-        </p:nvSpPr>
-        <p:spPr>
-          <a:xfrm>
-            <a:off x="457200" y="4087368"/>
-            <a:ext cx="2697480" cy="384048"/>
+              </a:rPr>
+              <a:t>→  Ampliar a Airbnb / Idealista</a:t>
+            </a:r>
+          </a:p>
+        </p:txBody>
+      </p:sp>
+      <p:sp>
+        <p:nvSpPr>
+          <p:cNvPr id="43" name="Fut3"/>
+          <p:cNvSpPr/>
+          <p:nvPr/>
+        </p:nvSpPr>
+        <p:spPr>
+          <a:xfrm>
+            <a:off x="6766560" y="4371480"/>
+            <a:ext cx="2184840" cy="365760"/>
           </a:xfrm>
           <a:prstGeom prst="rect">
             <a:avLst/>
@@ -16811,26 +16704,41 @@
           <a:solidFill>
             <a:srgbClr val="1E3A5F"/>
           </a:solidFill>
-          <a:ln/>
-          <a:effectLst>
-            <a:outerShdw blurRad="50800" dist="25400" dir="8100000" algn="bl" rotWithShape="0">
-              <a:srgbClr val="000000">
-                <a:alpha val="10000"/>
-              </a:srgbClr>
-            </a:outerShdw>
-          </a:effectLst>
-        </p:spPr>
-      </p:sp>
-      <p:sp>
-        <p:nvSpPr>
-          <p:cNvPr id="30" name="Text 28"/>
-          <p:cNvSpPr/>
-          <p:nvPr/>
-        </p:nvSpPr>
-        <p:spPr>
-          <a:xfrm>
-            <a:off x="548640" y="4087368"/>
-            <a:ext cx="2560320" cy="384048"/>
+          <a:ln>
+            <a:solidFill>
+              <a:srgbClr val="4A1A6B"/>
+            </a:solidFill>
+          </a:ln>
+        </p:spPr>
+        <p:txBody>
+          <a:bodyPr wrap="square" lIns="91440" tIns="45720" rIns="91440" bIns="45720" rtlCol="0" anchor="ctr"/>
+          <a:lstStyle/>
+          <a:p>
+            <a:pPr marL="0" indent="0">
+              <a:buNone/>
+            </a:pPr>
+            <a:r>
+              <a:rPr lang="es-ES" sz="880" dirty="0">
+                <a:solidFill>
+                  <a:srgbClr val="F4F8FC"/>
+                </a:solidFill>
+                <a:latin typeface="Calibri" pitchFamily="34" charset="0"/>
+              </a:rPr>
+              <a:t>→  Alertas automáticas</a:t>
+            </a:r>
+          </a:p>
+        </p:txBody>
+      </p:sp>
+      <p:sp>
+        <p:nvSpPr>
+          <p:cNvPr id="97" name="Footer"/>
+          <p:cNvSpPr/>
+          <p:nvPr/>
+        </p:nvSpPr>
+        <p:spPr>
+          <a:xfrm>
+            <a:off x="457200" y="4826520"/>
+            <a:ext cx="7772400" cy="200000"/>
           </a:xfrm>
           <a:prstGeom prst="rect">
             <a:avLst/>
@@ -16846,57 +16754,27 @@
               <a:buNone/>
             </a:pPr>
             <a:r>
-              <a:rPr lang="en-US" sz="900" dirty="0">
-                <a:solidFill>
-                  <a:srgbClr val="F4F8FC"/>
-                </a:solidFill>
-                <a:latin typeface="Calibri" pitchFamily="34" charset="0"/>
-                <a:ea typeface="Calibri" pitchFamily="34" charset="-122"/>
-                <a:cs typeface="Calibri" pitchFamily="34" charset="-120"/>
-              </a:rPr>
-              <a:t>→ Alertas email de nuevos chollos</a:t>
-            </a:r>
-            <a:endParaRPr lang="en-US" sz="900" dirty="0"/>
-          </a:p>
-        </p:txBody>
-      </p:sp>
-      <p:sp>
-        <p:nvSpPr>
-          <p:cNvPr id="31" name="Shape 29"/>
-          <p:cNvSpPr/>
-          <p:nvPr/>
-        </p:nvSpPr>
-        <p:spPr>
-          <a:xfrm>
-            <a:off x="3291840" y="4087368"/>
-            <a:ext cx="2697480" cy="384048"/>
-          </a:xfrm>
-          <a:prstGeom prst="rect">
-            <a:avLst/>
-          </a:prstGeom>
-          <a:solidFill>
-            <a:srgbClr val="1E3A5F"/>
-          </a:solidFill>
-          <a:ln/>
-          <a:effectLst>
-            <a:outerShdw blurRad="50800" dist="25400" dir="8100000" algn="bl" rotWithShape="0">
-              <a:srgbClr val="000000">
-                <a:alpha val="10000"/>
-              </a:srgbClr>
-            </a:outerShdw>
-          </a:effectLst>
-        </p:spPr>
-      </p:sp>
-      <p:sp>
-        <p:nvSpPr>
-          <p:cNvPr id="32" name="Text 30"/>
-          <p:cNvSpPr/>
-          <p:nvPr/>
-        </p:nvSpPr>
-        <p:spPr>
-          <a:xfrm>
-            <a:off x="3383280" y="4087368"/>
-            <a:ext cx="2560320" cy="384048"/>
+              <a:rPr lang="es-ES" sz="800" dirty="0">
+                <a:solidFill>
+                  <a:srgbClr val="4A6080"/>
+                </a:solidFill>
+                <a:latin typeface="Calibri" pitchFamily="34" charset="0"/>
+              </a:rPr>
+              <a:t>TFG · Detector de Chollos en Andalucía · Mario Jiménez · Universidad de Sevilla</a:t>
+            </a:r>
+          </a:p>
+        </p:txBody>
+      </p:sp>
+      <p:sp>
+        <p:nvSpPr>
+          <p:cNvPr id="98" name="PageNum"/>
+          <p:cNvSpPr/>
+          <p:nvPr/>
+        </p:nvSpPr>
+        <p:spPr>
+          <a:xfrm>
+            <a:off x="8594640" y="4754880"/>
+            <a:ext cx="365760" cy="228600"/>
           </a:xfrm>
           <a:prstGeom prst="rect">
             <a:avLst/>
@@ -16911,166 +16789,12 @@
             <a:pPr marL="0" indent="0">
               <a:buNone/>
             </a:pPr>
-            <a:r>
-              <a:rPr lang="en-US" sz="900" dirty="0">
-                <a:solidFill>
-                  <a:srgbClr val="F4F8FC"/>
-                </a:solidFill>
-                <a:latin typeface="Calibri" pitchFamily="34" charset="0"/>
-                <a:ea typeface="Calibri" pitchFamily="34" charset="-122"/>
-                <a:cs typeface="Calibri" pitchFamily="34" charset="-120"/>
-              </a:rPr>
-              <a:t>→ API REST para integración externa</a:t>
-            </a:r>
-            <a:endParaRPr lang="en-US" sz="900" dirty="0"/>
-          </a:p>
-        </p:txBody>
-      </p:sp>
-      <p:sp>
-        <p:nvSpPr>
-          <p:cNvPr id="33" name="Shape 31"/>
-          <p:cNvSpPr/>
-          <p:nvPr/>
-        </p:nvSpPr>
-        <p:spPr>
-          <a:xfrm>
-            <a:off x="457200" y="4544568"/>
-            <a:ext cx="8229600" cy="256032"/>
-          </a:xfrm>
-          <a:prstGeom prst="rect">
-            <a:avLst/>
-          </a:prstGeom>
-          <a:solidFill>
-            <a:srgbClr val="1F5C40"/>
-          </a:solidFill>
-          <a:ln/>
-        </p:spPr>
-      </p:sp>
-      <p:sp>
-        <p:nvSpPr>
-          <p:cNvPr id="34" name="Text 32"/>
-          <p:cNvSpPr/>
-          <p:nvPr/>
-        </p:nvSpPr>
-        <p:spPr>
-          <a:xfrm>
-            <a:off x="548640" y="4544568"/>
-            <a:ext cx="8046720" cy="256032"/>
-          </a:xfrm>
-          <a:prstGeom prst="rect">
-            <a:avLst/>
-          </a:prstGeom>
-          <a:noFill/>
-          <a:ln/>
-        </p:spPr>
-        <p:txBody>
-          <a:bodyPr wrap="square" lIns="0" tIns="0" rIns="0" bIns="0" rtlCol="0" anchor="ctr"/>
-          <a:lstStyle/>
-          <a:p>
-            <a:pPr marL="0" indent="0">
-              <a:buNone/>
-            </a:pPr>
-            <a:r>
-              <a:rPr lang="en-US" sz="900" dirty="0" err="1">
-                <a:solidFill>
-                  <a:srgbClr val="FFFFFF"/>
-                </a:solidFill>
-                <a:latin typeface="Calibri" pitchFamily="34" charset="0"/>
-                <a:ea typeface="Calibri" pitchFamily="34" charset="-122"/>
-                <a:cs typeface="Calibri" pitchFamily="34" charset="-120"/>
-              </a:rPr>
-              <a:t>Lenguaje</a:t>
-            </a:r>
-            <a:r>
-              <a:rPr lang="en-US" sz="900" dirty="0">
-                <a:solidFill>
-                  <a:srgbClr val="FFFFFF"/>
-                </a:solidFill>
-                <a:latin typeface="Calibri" pitchFamily="34" charset="0"/>
-                <a:ea typeface="Calibri" pitchFamily="34" charset="-122"/>
-                <a:cs typeface="Calibri" pitchFamily="34" charset="-120"/>
-              </a:rPr>
-              <a:t> dual: Python 3.12 y R.</a:t>
-            </a:r>
-            <a:endParaRPr lang="en-US" sz="900" dirty="0"/>
-          </a:p>
-        </p:txBody>
-      </p:sp>
-      <p:sp>
-        <p:nvSpPr>
-          <p:cNvPr id="35" name="Text 33"/>
-          <p:cNvSpPr/>
-          <p:nvPr/>
-        </p:nvSpPr>
-        <p:spPr>
-          <a:xfrm>
-            <a:off x="457200" y="4828032"/>
-            <a:ext cx="7772400" cy="201168"/>
-          </a:xfrm>
-          <a:prstGeom prst="rect">
-            <a:avLst/>
-          </a:prstGeom>
-          <a:noFill/>
-          <a:ln/>
-        </p:spPr>
-        <p:txBody>
-          <a:bodyPr wrap="square" lIns="0" tIns="0" rIns="0" bIns="0" rtlCol="0" anchor="ctr"/>
-          <a:lstStyle/>
-          <a:p>
-            <a:pPr marL="0" indent="0" algn="l">
-              <a:buNone/>
-            </a:pPr>
-            <a:r>
-              <a:rPr lang="en-US" sz="800" dirty="0">
-                <a:solidFill>
-                  <a:srgbClr val="4A6080"/>
-                </a:solidFill>
-                <a:latin typeface="Calibri" pitchFamily="34" charset="0"/>
-                <a:ea typeface="Calibri" pitchFamily="34" charset="-122"/>
-                <a:cs typeface="Calibri" pitchFamily="34" charset="-120"/>
-              </a:rPr>
-              <a:t>TFG · Detector de Chollos en Andalucía · Mario Jiménez · Universidad de Sevilla</a:t>
-            </a:r>
-            <a:endParaRPr lang="en-US" sz="800" dirty="0"/>
-          </a:p>
-        </p:txBody>
-      </p:sp>
-      <p:sp>
-        <p:nvSpPr>
-          <p:cNvPr id="36" name="Text 34"/>
-          <p:cNvSpPr/>
-          <p:nvPr/>
-        </p:nvSpPr>
-        <p:spPr>
-          <a:xfrm>
-            <a:off x="8595360" y="4754880"/>
-            <a:ext cx="365760" cy="228600"/>
-          </a:xfrm>
-          <a:prstGeom prst="rect">
-            <a:avLst/>
-          </a:prstGeom>
-          <a:noFill/>
-          <a:ln/>
-        </p:spPr>
-        <p:txBody>
-          <a:bodyPr wrap="square" lIns="0" tIns="0" rIns="0" bIns="0" rtlCol="0" anchor="ctr"/>
-          <a:lstStyle/>
-          <a:p>
-            <a:pPr marL="0" indent="0" algn="ctr">
-              <a:buNone/>
-            </a:pPr>
-            <a:r>
-              <a:rPr lang="en-US" sz="900" dirty="0">
-                <a:solidFill>
-                  <a:srgbClr val="CBD5E1"/>
-                </a:solidFill>
-                <a:latin typeface="Calibri" pitchFamily="34" charset="0"/>
-                <a:ea typeface="Calibri" pitchFamily="34" charset="-122"/>
-                <a:cs typeface="Calibri" pitchFamily="34" charset="-120"/>
-              </a:rPr>
-              <a:t>13</a:t>
-            </a:r>
-            <a:endParaRPr lang="en-US" sz="900" dirty="0"/>
+            <a:endParaRPr lang="es-ES" sz="900" dirty="0">
+              <a:solidFill>
+                <a:srgbClr val="CBD5E1"/>
+              </a:solidFill>
+              <a:latin typeface="Calibri" pitchFamily="34" charset="0"/>
+            </a:endParaRPr>
           </a:p>
         </p:txBody>
       </p:sp>
@@ -17380,1851 +17104,6 @@
 
 <file path=ppt/slides/slide3.xml><?xml version="1.0" encoding="utf-8"?>
 <p:sld xmlns:a="http://schemas.openxmlformats.org/drawingml/2006/main" xmlns:r="http://schemas.openxmlformats.org/officeDocument/2006/relationships" xmlns:p="http://schemas.openxmlformats.org/presentationml/2006/main">
-  <p:cSld name="Slide 4">
-    <p:bg>
-      <p:bgPr>
-        <a:solidFill>
-          <a:srgbClr val="1A2E4A"/>
-        </a:solidFill>
-        <a:effectLst/>
-      </p:bgPr>
-    </p:bg>
-    <p:spTree>
-      <p:nvGrpSpPr>
-        <p:cNvPr id="1" name=""/>
-        <p:cNvGrpSpPr/>
-        <p:nvPr/>
-      </p:nvGrpSpPr>
-      <p:grpSpPr>
-        <a:xfrm>
-          <a:off x="0" y="0"/>
-          <a:ext cx="0" cy="0"/>
-          <a:chOff x="0" y="0"/>
-          <a:chExt cx="0" cy="0"/>
-        </a:xfrm>
-      </p:grpSpPr>
-      <p:sp>
-        <p:nvSpPr>
-          <p:cNvPr id="2" name="Shape 0"/>
-          <p:cNvSpPr/>
-          <p:nvPr/>
-        </p:nvSpPr>
-        <p:spPr>
-          <a:xfrm>
-            <a:off x="0" y="0"/>
-            <a:ext cx="9144000" cy="54864"/>
-          </a:xfrm>
-          <a:prstGeom prst="rect">
-            <a:avLst/>
-          </a:prstGeom>
-          <a:solidFill>
-            <a:srgbClr val="D4A843"/>
-          </a:solidFill>
-          <a:ln/>
-        </p:spPr>
-      </p:sp>
-      <p:sp>
-        <p:nvSpPr>
-          <p:cNvPr id="3" name="Text 1"/>
-          <p:cNvSpPr/>
-          <p:nvPr/>
-        </p:nvSpPr>
-        <p:spPr>
-          <a:xfrm>
-            <a:off x="457200" y="146304"/>
-            <a:ext cx="8229600" cy="457200"/>
-          </a:xfrm>
-          <a:prstGeom prst="rect">
-            <a:avLst/>
-          </a:prstGeom>
-          <a:noFill/>
-          <a:ln/>
-        </p:spPr>
-        <p:txBody>
-          <a:bodyPr wrap="square" lIns="0" tIns="0" rIns="0" bIns="0" rtlCol="0" anchor="ctr"/>
-          <a:lstStyle/>
-          <a:p>
-            <a:pPr marL="0" indent="0">
-              <a:buNone/>
-            </a:pPr>
-            <a:r>
-              <a:rPr lang="en-US" sz="2800" b="1" dirty="0">
-                <a:solidFill>
-                  <a:srgbClr val="FFFFFF"/>
-                </a:solidFill>
-                <a:latin typeface="Calibri" pitchFamily="34" charset="0"/>
-                <a:ea typeface="Calibri" pitchFamily="34" charset="-122"/>
-                <a:cs typeface="Calibri" pitchFamily="34" charset="-120"/>
-              </a:rPr>
-              <a:t>Temas de la Asignatura Aplicados</a:t>
-            </a:r>
-            <a:endParaRPr lang="en-US" sz="2800" dirty="0"/>
-          </a:p>
-        </p:txBody>
-      </p:sp>
-      <p:sp>
-        <p:nvSpPr>
-          <p:cNvPr id="4" name="Shape 2"/>
-          <p:cNvSpPr/>
-          <p:nvPr/>
-        </p:nvSpPr>
-        <p:spPr>
-          <a:xfrm>
-            <a:off x="457200" y="713232"/>
-            <a:ext cx="8229600" cy="36576"/>
-          </a:xfrm>
-          <a:prstGeom prst="rect">
-            <a:avLst/>
-          </a:prstGeom>
-          <a:solidFill>
-            <a:srgbClr val="D4A843"/>
-          </a:solidFill>
-          <a:ln/>
-        </p:spPr>
-      </p:sp>
-      <p:sp>
-        <p:nvSpPr>
-          <p:cNvPr id="5" name="Shape 3"/>
-          <p:cNvSpPr/>
-          <p:nvPr/>
-        </p:nvSpPr>
-        <p:spPr>
-          <a:xfrm>
-            <a:off x="457200" y="914400"/>
-            <a:ext cx="2084832" cy="1499616"/>
-          </a:xfrm>
-          <a:prstGeom prst="rect">
-            <a:avLst/>
-          </a:prstGeom>
-          <a:solidFill>
-            <a:srgbClr val="2A5080"/>
-          </a:solidFill>
-          <a:ln/>
-          <a:effectLst>
-            <a:outerShdw blurRad="101600" dist="38100" dir="8100000" algn="bl" rotWithShape="0">
-              <a:srgbClr val="000000">
-                <a:alpha val="18000"/>
-              </a:srgbClr>
-            </a:outerShdw>
-          </a:effectLst>
-        </p:spPr>
-      </p:sp>
-      <p:sp>
-        <p:nvSpPr>
-          <p:cNvPr id="6" name="Shape 4"/>
-          <p:cNvSpPr/>
-          <p:nvPr/>
-        </p:nvSpPr>
-        <p:spPr>
-          <a:xfrm>
-            <a:off x="457200" y="914400"/>
-            <a:ext cx="2084832" cy="45720"/>
-          </a:xfrm>
-          <a:prstGeom prst="rect">
-            <a:avLst/>
-          </a:prstGeom>
-          <a:solidFill>
-            <a:srgbClr val="D4A843"/>
-          </a:solidFill>
-          <a:ln/>
-        </p:spPr>
-      </p:sp>
-      <p:sp>
-        <p:nvSpPr>
-          <p:cNvPr id="7" name="Text 5"/>
-          <p:cNvSpPr/>
-          <p:nvPr/>
-        </p:nvSpPr>
-        <p:spPr>
-          <a:xfrm>
-            <a:off x="548640" y="1005840"/>
-            <a:ext cx="1901952" cy="256032"/>
-          </a:xfrm>
-          <a:prstGeom prst="rect">
-            <a:avLst/>
-          </a:prstGeom>
-          <a:noFill/>
-          <a:ln/>
-        </p:spPr>
-        <p:txBody>
-          <a:bodyPr wrap="square" lIns="0" tIns="0" rIns="0" bIns="0" rtlCol="0" anchor="ctr"/>
-          <a:lstStyle/>
-          <a:p>
-            <a:pPr marL="0" indent="0">
-              <a:buNone/>
-            </a:pPr>
-            <a:r>
-              <a:rPr lang="en-US" sz="1000" b="1" dirty="0">
-                <a:solidFill>
-                  <a:srgbClr val="D4A843"/>
-                </a:solidFill>
-                <a:latin typeface="Calibri" pitchFamily="34" charset="0"/>
-                <a:ea typeface="Calibri" pitchFamily="34" charset="-122"/>
-                <a:cs typeface="Calibri" pitchFamily="34" charset="-120"/>
-              </a:rPr>
-              <a:t>🌐  Web Scraping (2 fases)</a:t>
-            </a:r>
-            <a:endParaRPr lang="en-US" sz="1000" dirty="0"/>
-          </a:p>
-        </p:txBody>
-      </p:sp>
-      <p:sp>
-        <p:nvSpPr>
-          <p:cNvPr id="8" name="Text 6"/>
-          <p:cNvSpPr/>
-          <p:nvPr/>
-        </p:nvSpPr>
-        <p:spPr>
-          <a:xfrm>
-            <a:off x="548640" y="1298448"/>
-            <a:ext cx="1901952" cy="841248"/>
-          </a:xfrm>
-          <a:prstGeom prst="rect">
-            <a:avLst/>
-          </a:prstGeom>
-          <a:noFill/>
-          <a:ln/>
-        </p:spPr>
-        <p:txBody>
-          <a:bodyPr wrap="square" lIns="0" tIns="0" rIns="0" bIns="0" rtlCol="0" anchor="t"/>
-          <a:lstStyle/>
-          <a:p>
-            <a:pPr marL="0" indent="0">
-              <a:lnSpc>
-                <a:spcPct val="120000"/>
-              </a:lnSpc>
-              <a:buNone/>
-            </a:pPr>
-            <a:r>
-              <a:rPr lang="en-US" sz="850" dirty="0">
-                <a:solidFill>
-                  <a:srgbClr val="F4F8FC"/>
-                </a:solidFill>
-                <a:latin typeface="Calibri" pitchFamily="34" charset="0"/>
-                <a:ea typeface="Calibri" pitchFamily="34" charset="-122"/>
-                <a:cs typeface="Calibri" pitchFamily="34" charset="-120"/>
-              </a:rPr>
-              <a:t>Selenium → listados por provincia</a:t>
-            </a:r>
-            <a:endParaRPr lang="en-US" sz="850" dirty="0"/>
-          </a:p>
-          <a:p>
-            <a:pPr marL="0" indent="0">
-              <a:lnSpc>
-                <a:spcPct val="120000"/>
-              </a:lnSpc>
-              <a:buNone/>
-            </a:pPr>
-            <a:r>
-              <a:rPr lang="en-US" sz="850" dirty="0">
-                <a:solidFill>
-                  <a:srgbClr val="F4F8FC"/>
-                </a:solidFill>
-                <a:latin typeface="Calibri" pitchFamily="34" charset="0"/>
-                <a:ea typeface="Calibri" pitchFamily="34" charset="-122"/>
-                <a:cs typeface="Calibri" pitchFamily="34" charset="-120"/>
-              </a:rPr>
-              <a:t>Playwright + GraphQL API → fichas</a:t>
-            </a:r>
-            <a:endParaRPr lang="en-US" sz="850" dirty="0"/>
-          </a:p>
-          <a:p>
-            <a:pPr marL="0" indent="0">
-              <a:lnSpc>
-                <a:spcPct val="120000"/>
-              </a:lnSpc>
-              <a:buNone/>
-            </a:pPr>
-            <a:r>
-              <a:rPr lang="en-US" sz="850" dirty="0">
-                <a:solidFill>
-                  <a:srgbClr val="F4F8FC"/>
-                </a:solidFill>
-                <a:latin typeface="Calibri" pitchFamily="34" charset="0"/>
-                <a:ea typeface="Calibri" pitchFamily="34" charset="-122"/>
-                <a:cs typeface="Calibri" pitchFamily="34" charset="-120"/>
-              </a:rPr>
-              <a:t>patch_room_size.py (ThreadPoolExecutor)</a:t>
-            </a:r>
-            <a:endParaRPr lang="en-US" sz="850" dirty="0"/>
-          </a:p>
-        </p:txBody>
-      </p:sp>
-      <p:sp>
-        <p:nvSpPr>
-          <p:cNvPr id="9" name="Shape 7"/>
-          <p:cNvSpPr/>
-          <p:nvPr/>
-        </p:nvSpPr>
-        <p:spPr>
-          <a:xfrm>
-            <a:off x="457200" y="2167128"/>
-            <a:ext cx="2084832" cy="246888"/>
-          </a:xfrm>
-          <a:prstGeom prst="rect">
-            <a:avLst/>
-          </a:prstGeom>
-          <a:solidFill>
-            <a:srgbClr val="000000"/>
-          </a:solidFill>
-          <a:ln/>
-        </p:spPr>
-      </p:sp>
-      <p:sp>
-        <p:nvSpPr>
-          <p:cNvPr id="10" name="Text 8"/>
-          <p:cNvSpPr/>
-          <p:nvPr/>
-        </p:nvSpPr>
-        <p:spPr>
-          <a:xfrm>
-            <a:off x="530352" y="2185416"/>
-            <a:ext cx="1993392" cy="210312"/>
-          </a:xfrm>
-          <a:prstGeom prst="rect">
-            <a:avLst/>
-          </a:prstGeom>
-          <a:noFill/>
-          <a:ln/>
-        </p:spPr>
-        <p:txBody>
-          <a:bodyPr wrap="square" lIns="0" tIns="0" rIns="0" bIns="0" rtlCol="0" anchor="ctr"/>
-          <a:lstStyle/>
-          <a:p>
-            <a:pPr marL="0" indent="0">
-              <a:buNone/>
-            </a:pPr>
-            <a:r>
-              <a:rPr lang="en-US" sz="800" dirty="0">
-                <a:solidFill>
-                  <a:srgbClr val="F0C060"/>
-                </a:solidFill>
-                <a:latin typeface="Calibri" pitchFamily="34" charset="0"/>
-                <a:ea typeface="Calibri" pitchFamily="34" charset="-122"/>
-                <a:cs typeface="Calibri" pitchFamily="34" charset="-120"/>
-              </a:rPr>
-              <a:t>📍 Scraping/</a:t>
-            </a:r>
-            <a:endParaRPr lang="en-US" sz="800" dirty="0"/>
-          </a:p>
-        </p:txBody>
-      </p:sp>
-      <p:sp>
-        <p:nvSpPr>
-          <p:cNvPr id="11" name="Shape 9"/>
-          <p:cNvSpPr/>
-          <p:nvPr/>
-        </p:nvSpPr>
-        <p:spPr>
-          <a:xfrm>
-            <a:off x="2578608" y="914400"/>
-            <a:ext cx="2084832" cy="1499616"/>
-          </a:xfrm>
-          <a:prstGeom prst="rect">
-            <a:avLst/>
-          </a:prstGeom>
-          <a:solidFill>
-            <a:srgbClr val="1B4E6B"/>
-          </a:solidFill>
-          <a:ln/>
-          <a:effectLst>
-            <a:outerShdw blurRad="101600" dist="38100" dir="8100000" algn="bl" rotWithShape="0">
-              <a:srgbClr val="000000">
-                <a:alpha val="18000"/>
-              </a:srgbClr>
-            </a:outerShdw>
-          </a:effectLst>
-        </p:spPr>
-      </p:sp>
-      <p:sp>
-        <p:nvSpPr>
-          <p:cNvPr id="12" name="Shape 10"/>
-          <p:cNvSpPr/>
-          <p:nvPr/>
-        </p:nvSpPr>
-        <p:spPr>
-          <a:xfrm>
-            <a:off x="2578608" y="914400"/>
-            <a:ext cx="2084832" cy="45720"/>
-          </a:xfrm>
-          <a:prstGeom prst="rect">
-            <a:avLst/>
-          </a:prstGeom>
-          <a:solidFill>
-            <a:srgbClr val="D4A843"/>
-          </a:solidFill>
-          <a:ln/>
-        </p:spPr>
-      </p:sp>
-      <p:sp>
-        <p:nvSpPr>
-          <p:cNvPr id="13" name="Text 11"/>
-          <p:cNvSpPr/>
-          <p:nvPr/>
-        </p:nvSpPr>
-        <p:spPr>
-          <a:xfrm>
-            <a:off x="2670048" y="1005840"/>
-            <a:ext cx="1901952" cy="256032"/>
-          </a:xfrm>
-          <a:prstGeom prst="rect">
-            <a:avLst/>
-          </a:prstGeom>
-          <a:noFill/>
-          <a:ln/>
-        </p:spPr>
-        <p:txBody>
-          <a:bodyPr wrap="square" lIns="0" tIns="0" rIns="0" bIns="0" rtlCol="0" anchor="ctr"/>
-          <a:lstStyle/>
-          <a:p>
-            <a:pPr marL="0" indent="0">
-              <a:buNone/>
-            </a:pPr>
-            <a:r>
-              <a:rPr lang="en-US" sz="1000" b="1" dirty="0">
-                <a:solidFill>
-                  <a:srgbClr val="D4A843"/>
-                </a:solidFill>
-                <a:latin typeface="Calibri" pitchFamily="34" charset="0"/>
-                <a:ea typeface="Calibri" pitchFamily="34" charset="-122"/>
-                <a:cs typeface="Calibri" pitchFamily="34" charset="-120"/>
-              </a:rPr>
-              <a:t>🧹  Preprocesamiento</a:t>
-            </a:r>
-            <a:endParaRPr lang="en-US" sz="1000" dirty="0"/>
-          </a:p>
-        </p:txBody>
-      </p:sp>
-      <p:sp>
-        <p:nvSpPr>
-          <p:cNvPr id="14" name="Text 12"/>
-          <p:cNvSpPr/>
-          <p:nvPr/>
-        </p:nvSpPr>
-        <p:spPr>
-          <a:xfrm>
-            <a:off x="2670048" y="1298448"/>
-            <a:ext cx="1901952" cy="841248"/>
-          </a:xfrm>
-          <a:prstGeom prst="rect">
-            <a:avLst/>
-          </a:prstGeom>
-          <a:noFill/>
-          <a:ln/>
-        </p:spPr>
-        <p:txBody>
-          <a:bodyPr wrap="square" lIns="0" tIns="0" rIns="0" bIns="0" rtlCol="0" anchor="t"/>
-          <a:lstStyle/>
-          <a:p>
-            <a:pPr marL="0" indent="0">
-              <a:lnSpc>
-                <a:spcPct val="120000"/>
-              </a:lnSpc>
-              <a:buNone/>
-            </a:pPr>
-            <a:r>
-              <a:rPr lang="en-US" sz="850" dirty="0">
-                <a:solidFill>
-                  <a:srgbClr val="F4F8FC"/>
-                </a:solidFill>
-                <a:latin typeface="Calibri" pitchFamily="34" charset="0"/>
-                <a:ea typeface="Calibri" pitchFamily="34" charset="-122"/>
-                <a:cs typeface="Calibri" pitchFamily="34" charset="-120"/>
-              </a:rPr>
-              <a:t>pandas · JSON/regex · Haversine</a:t>
-            </a:r>
-            <a:endParaRPr lang="en-US" sz="850" dirty="0"/>
-          </a:p>
-          <a:p>
-            <a:pPr marL="0" indent="0">
-              <a:lnSpc>
-                <a:spcPct val="120000"/>
-              </a:lnSpc>
-              <a:buNone/>
-            </a:pPr>
-            <a:r>
-              <a:rPr lang="en-US" sz="850" dirty="0" err="1">
-                <a:solidFill>
-                  <a:srgbClr val="F4F8FC"/>
-                </a:solidFill>
-                <a:latin typeface="Calibri" pitchFamily="34" charset="0"/>
-                <a:ea typeface="Calibri" pitchFamily="34" charset="-122"/>
-                <a:cs typeface="Calibri" pitchFamily="34" charset="-120"/>
-              </a:rPr>
-              <a:t>LabelEncoder</a:t>
-            </a:r>
-            <a:r>
-              <a:rPr lang="en-US" sz="850" dirty="0">
-                <a:solidFill>
-                  <a:srgbClr val="F4F8FC"/>
-                </a:solidFill>
-                <a:latin typeface="Calibri" pitchFamily="34" charset="0"/>
-                <a:ea typeface="Calibri" pitchFamily="34" charset="-122"/>
-                <a:cs typeface="Calibri" pitchFamily="34" charset="-120"/>
-              </a:rPr>
-              <a:t> · IQR outliers</a:t>
-            </a:r>
-            <a:endParaRPr lang="en-US" sz="850" dirty="0"/>
-          </a:p>
-          <a:p>
-            <a:pPr marL="0" indent="0">
-              <a:lnSpc>
-                <a:spcPct val="120000"/>
-              </a:lnSpc>
-              <a:buNone/>
-            </a:pPr>
-            <a:r>
-              <a:rPr lang="en-US" sz="850" dirty="0">
-                <a:solidFill>
-                  <a:srgbClr val="F4F8FC"/>
-                </a:solidFill>
-                <a:latin typeface="Calibri" pitchFamily="34" charset="0"/>
-                <a:ea typeface="Calibri" pitchFamily="34" charset="-122"/>
-                <a:cs typeface="Calibri" pitchFamily="34" charset="-120"/>
-              </a:rPr>
-              <a:t>Feature </a:t>
-            </a:r>
-            <a:r>
-              <a:rPr lang="en-US" sz="850" dirty="0" err="1">
-                <a:solidFill>
-                  <a:srgbClr val="F4F8FC"/>
-                </a:solidFill>
-                <a:latin typeface="Calibri" pitchFamily="34" charset="0"/>
-                <a:ea typeface="Calibri" pitchFamily="34" charset="-122"/>
-                <a:cs typeface="Calibri" pitchFamily="34" charset="-120"/>
-              </a:rPr>
-              <a:t>eng</a:t>
-            </a:r>
-            <a:r>
-              <a:rPr lang="en-US" sz="850" dirty="0">
-                <a:solidFill>
-                  <a:srgbClr val="F4F8FC"/>
-                </a:solidFill>
-                <a:latin typeface="Calibri" pitchFamily="34" charset="0"/>
-                <a:ea typeface="Calibri" pitchFamily="34" charset="-122"/>
-                <a:cs typeface="Calibri" pitchFamily="34" charset="-120"/>
-              </a:rPr>
-              <a:t>: </a:t>
-            </a:r>
-            <a:r>
-              <a:rPr lang="en-US" sz="850" dirty="0" err="1">
-                <a:solidFill>
-                  <a:srgbClr val="F4F8FC"/>
-                </a:solidFill>
-                <a:latin typeface="Calibri" pitchFamily="34" charset="0"/>
-                <a:ea typeface="Calibri" pitchFamily="34" charset="-122"/>
-                <a:cs typeface="Calibri" pitchFamily="34" charset="-120"/>
-              </a:rPr>
-              <a:t>es_finde</a:t>
-            </a:r>
-            <a:r>
-              <a:rPr lang="en-US" sz="850" dirty="0">
-                <a:solidFill>
-                  <a:srgbClr val="F4F8FC"/>
-                </a:solidFill>
-                <a:latin typeface="Calibri" pitchFamily="34" charset="0"/>
-                <a:ea typeface="Calibri" pitchFamily="34" charset="-122"/>
-                <a:cs typeface="Calibri" pitchFamily="34" charset="-120"/>
-              </a:rPr>
-              <a:t>, </a:t>
-            </a:r>
-            <a:r>
-              <a:rPr lang="en-US" sz="850" dirty="0" err="1">
-                <a:solidFill>
-                  <a:srgbClr val="F4F8FC"/>
-                </a:solidFill>
-                <a:latin typeface="Calibri" pitchFamily="34" charset="0"/>
-                <a:ea typeface="Calibri" pitchFamily="34" charset="-122"/>
-                <a:cs typeface="Calibri" pitchFamily="34" charset="-120"/>
-              </a:rPr>
-              <a:t>dias_restantes</a:t>
-            </a:r>
-            <a:endParaRPr lang="en-US" sz="850" dirty="0"/>
-          </a:p>
-        </p:txBody>
-      </p:sp>
-      <p:sp>
-        <p:nvSpPr>
-          <p:cNvPr id="15" name="Shape 13"/>
-          <p:cNvSpPr/>
-          <p:nvPr/>
-        </p:nvSpPr>
-        <p:spPr>
-          <a:xfrm>
-            <a:off x="2578608" y="2167128"/>
-            <a:ext cx="2084832" cy="246888"/>
-          </a:xfrm>
-          <a:prstGeom prst="rect">
-            <a:avLst/>
-          </a:prstGeom>
-          <a:solidFill>
-            <a:srgbClr val="000000"/>
-          </a:solidFill>
-          <a:ln/>
-        </p:spPr>
-      </p:sp>
-      <p:sp>
-        <p:nvSpPr>
-          <p:cNvPr id="16" name="Text 14"/>
-          <p:cNvSpPr/>
-          <p:nvPr/>
-        </p:nvSpPr>
-        <p:spPr>
-          <a:xfrm>
-            <a:off x="2651760" y="2185416"/>
-            <a:ext cx="1993392" cy="210312"/>
-          </a:xfrm>
-          <a:prstGeom prst="rect">
-            <a:avLst/>
-          </a:prstGeom>
-          <a:noFill/>
-          <a:ln/>
-        </p:spPr>
-        <p:txBody>
-          <a:bodyPr wrap="square" lIns="0" tIns="0" rIns="0" bIns="0" rtlCol="0" anchor="ctr"/>
-          <a:lstStyle/>
-          <a:p>
-            <a:pPr marL="0" indent="0">
-              <a:buNone/>
-            </a:pPr>
-            <a:r>
-              <a:rPr lang="en-US" sz="800" dirty="0">
-                <a:solidFill>
-                  <a:srgbClr val="F0C060"/>
-                </a:solidFill>
-                <a:latin typeface="Calibri" pitchFamily="34" charset="0"/>
-                <a:ea typeface="Calibri" pitchFamily="34" charset="-122"/>
-                <a:cs typeface="Calibri" pitchFamily="34" charset="-120"/>
-              </a:rPr>
-              <a:t>📍 Cleaning/preprocessing.py</a:t>
-            </a:r>
-            <a:endParaRPr lang="en-US" sz="800" dirty="0"/>
-          </a:p>
-        </p:txBody>
-      </p:sp>
-      <p:sp>
-        <p:nvSpPr>
-          <p:cNvPr id="17" name="Shape 15"/>
-          <p:cNvSpPr/>
-          <p:nvPr/>
-        </p:nvSpPr>
-        <p:spPr>
-          <a:xfrm>
-            <a:off x="4700016" y="914400"/>
-            <a:ext cx="2084832" cy="1499616"/>
-          </a:xfrm>
-          <a:prstGeom prst="rect">
-            <a:avLst/>
-          </a:prstGeom>
-          <a:solidFill>
-            <a:srgbClr val="1F5C40"/>
-          </a:solidFill>
-          <a:ln/>
-          <a:effectLst>
-            <a:outerShdw blurRad="101600" dist="38100" dir="8100000" algn="bl" rotWithShape="0">
-              <a:srgbClr val="000000">
-                <a:alpha val="18000"/>
-              </a:srgbClr>
-            </a:outerShdw>
-          </a:effectLst>
-        </p:spPr>
-      </p:sp>
-      <p:sp>
-        <p:nvSpPr>
-          <p:cNvPr id="18" name="Shape 16"/>
-          <p:cNvSpPr/>
-          <p:nvPr/>
-        </p:nvSpPr>
-        <p:spPr>
-          <a:xfrm>
-            <a:off x="4700016" y="914400"/>
-            <a:ext cx="2084832" cy="45720"/>
-          </a:xfrm>
-          <a:prstGeom prst="rect">
-            <a:avLst/>
-          </a:prstGeom>
-          <a:solidFill>
-            <a:srgbClr val="D4A843"/>
-          </a:solidFill>
-          <a:ln/>
-        </p:spPr>
-      </p:sp>
-      <p:sp>
-        <p:nvSpPr>
-          <p:cNvPr id="19" name="Text 17"/>
-          <p:cNvSpPr/>
-          <p:nvPr/>
-        </p:nvSpPr>
-        <p:spPr>
-          <a:xfrm>
-            <a:off x="4791456" y="1005840"/>
-            <a:ext cx="1901952" cy="256032"/>
-          </a:xfrm>
-          <a:prstGeom prst="rect">
-            <a:avLst/>
-          </a:prstGeom>
-          <a:noFill/>
-          <a:ln/>
-        </p:spPr>
-        <p:txBody>
-          <a:bodyPr wrap="square" lIns="0" tIns="0" rIns="0" bIns="0" rtlCol="0" anchor="ctr"/>
-          <a:lstStyle/>
-          <a:p>
-            <a:pPr marL="0" indent="0">
-              <a:buNone/>
-            </a:pPr>
-            <a:r>
-              <a:rPr lang="en-US" sz="1000" b="1" dirty="0">
-                <a:solidFill>
-                  <a:srgbClr val="D4A843"/>
-                </a:solidFill>
-                <a:latin typeface="Calibri" pitchFamily="34" charset="0"/>
-                <a:ea typeface="Calibri" pitchFamily="34" charset="-122"/>
-                <a:cs typeface="Calibri" pitchFamily="34" charset="-120"/>
-              </a:rPr>
-              <a:t>📈  Regresión (ML Supervisado)</a:t>
-            </a:r>
-            <a:endParaRPr lang="en-US" sz="1000" dirty="0"/>
-          </a:p>
-        </p:txBody>
-      </p:sp>
-      <p:sp>
-        <p:nvSpPr>
-          <p:cNvPr id="20" name="Text 18"/>
-          <p:cNvSpPr/>
-          <p:nvPr/>
-        </p:nvSpPr>
-        <p:spPr>
-          <a:xfrm>
-            <a:off x="4791456" y="1298448"/>
-            <a:ext cx="1901952" cy="841248"/>
-          </a:xfrm>
-          <a:prstGeom prst="rect">
-            <a:avLst/>
-          </a:prstGeom>
-          <a:noFill/>
-          <a:ln/>
-        </p:spPr>
-        <p:txBody>
-          <a:bodyPr wrap="square" lIns="0" tIns="0" rIns="0" bIns="0" rtlCol="0" anchor="t"/>
-          <a:lstStyle/>
-          <a:p>
-            <a:pPr marL="0" indent="0">
-              <a:lnSpc>
-                <a:spcPct val="120000"/>
-              </a:lnSpc>
-              <a:buNone/>
-            </a:pPr>
-            <a:r>
-              <a:rPr lang="en-US" sz="850" dirty="0">
-                <a:solidFill>
-                  <a:srgbClr val="F4F8FC"/>
-                </a:solidFill>
-                <a:latin typeface="Calibri" pitchFamily="34" charset="0"/>
-                <a:ea typeface="Calibri" pitchFamily="34" charset="-122"/>
-                <a:cs typeface="Calibri" pitchFamily="34" charset="-120"/>
-              </a:rPr>
-              <a:t>Linear · DT · Random Forest · XGBoost</a:t>
-            </a:r>
-            <a:endParaRPr lang="en-US" sz="850" dirty="0"/>
-          </a:p>
-          <a:p>
-            <a:pPr marL="0" indent="0">
-              <a:lnSpc>
-                <a:spcPct val="120000"/>
-              </a:lnSpc>
-              <a:buNone/>
-            </a:pPr>
-            <a:r>
-              <a:rPr lang="en-US" sz="850" dirty="0">
-                <a:solidFill>
-                  <a:srgbClr val="F4F8FC"/>
-                </a:solidFill>
-                <a:latin typeface="Calibri" pitchFamily="34" charset="0"/>
-                <a:ea typeface="Calibri" pitchFamily="34" charset="-122"/>
-                <a:cs typeface="Calibri" pitchFamily="34" charset="-120"/>
-              </a:rPr>
-              <a:t>GridSearchCV + K-Fold cv=3</a:t>
-            </a:r>
-            <a:endParaRPr lang="en-US" sz="850" dirty="0"/>
-          </a:p>
-          <a:p>
-            <a:pPr marL="0" indent="0">
-              <a:lnSpc>
-                <a:spcPct val="120000"/>
-              </a:lnSpc>
-              <a:buNone/>
-            </a:pPr>
-            <a:r>
-              <a:rPr lang="en-US" sz="850" dirty="0">
-                <a:solidFill>
-                  <a:srgbClr val="F4F8FC"/>
-                </a:solidFill>
-                <a:latin typeface="Calibri" pitchFamily="34" charset="0"/>
-                <a:ea typeface="Calibri" pitchFamily="34" charset="-122"/>
-                <a:cs typeface="Calibri" pitchFamily="34" charset="-120"/>
-              </a:rPr>
-              <a:t>Holdout 70/15/15 · R², MAE, RMSE</a:t>
-            </a:r>
-            <a:endParaRPr lang="en-US" sz="850" dirty="0"/>
-          </a:p>
-        </p:txBody>
-      </p:sp>
-      <p:sp>
-        <p:nvSpPr>
-          <p:cNvPr id="21" name="Shape 19"/>
-          <p:cNvSpPr/>
-          <p:nvPr/>
-        </p:nvSpPr>
-        <p:spPr>
-          <a:xfrm>
-            <a:off x="4700016" y="2167128"/>
-            <a:ext cx="2084832" cy="246888"/>
-          </a:xfrm>
-          <a:prstGeom prst="rect">
-            <a:avLst/>
-          </a:prstGeom>
-          <a:solidFill>
-            <a:srgbClr val="000000"/>
-          </a:solidFill>
-          <a:ln/>
-        </p:spPr>
-      </p:sp>
-      <p:sp>
-        <p:nvSpPr>
-          <p:cNvPr id="22" name="Text 20"/>
-          <p:cNvSpPr/>
-          <p:nvPr/>
-        </p:nvSpPr>
-        <p:spPr>
-          <a:xfrm>
-            <a:off x="4773168" y="2185416"/>
-            <a:ext cx="1993392" cy="210312"/>
-          </a:xfrm>
-          <a:prstGeom prst="rect">
-            <a:avLst/>
-          </a:prstGeom>
-          <a:noFill/>
-          <a:ln/>
-        </p:spPr>
-        <p:txBody>
-          <a:bodyPr wrap="square" lIns="0" tIns="0" rIns="0" bIns="0" rtlCol="0" anchor="ctr"/>
-          <a:lstStyle/>
-          <a:p>
-            <a:pPr marL="0" indent="0">
-              <a:buNone/>
-            </a:pPr>
-            <a:r>
-              <a:rPr lang="en-US" sz="800" dirty="0">
-                <a:solidFill>
-                  <a:srgbClr val="F0C060"/>
-                </a:solidFill>
-                <a:latin typeface="Calibri" pitchFamily="34" charset="0"/>
-                <a:ea typeface="Calibri" pitchFamily="34" charset="-122"/>
-                <a:cs typeface="Calibri" pitchFamily="34" charset="-120"/>
-              </a:rPr>
-              <a:t>📍 Modelizacion/Modelizacion.py</a:t>
-            </a:r>
-            <a:endParaRPr lang="en-US" sz="800" dirty="0"/>
-          </a:p>
-        </p:txBody>
-      </p:sp>
-      <p:sp>
-        <p:nvSpPr>
-          <p:cNvPr id="23" name="Shape 21"/>
-          <p:cNvSpPr/>
-          <p:nvPr/>
-        </p:nvSpPr>
-        <p:spPr>
-          <a:xfrm>
-            <a:off x="6821424" y="914400"/>
-            <a:ext cx="2084832" cy="1499616"/>
-          </a:xfrm>
-          <a:prstGeom prst="rect">
-            <a:avLst/>
-          </a:prstGeom>
-          <a:solidFill>
-            <a:srgbClr val="5C3A1E"/>
-          </a:solidFill>
-          <a:ln/>
-          <a:effectLst>
-            <a:outerShdw blurRad="101600" dist="38100" dir="8100000" algn="bl" rotWithShape="0">
-              <a:srgbClr val="000000">
-                <a:alpha val="18000"/>
-              </a:srgbClr>
-            </a:outerShdw>
-          </a:effectLst>
-        </p:spPr>
-      </p:sp>
-      <p:sp>
-        <p:nvSpPr>
-          <p:cNvPr id="24" name="Shape 22"/>
-          <p:cNvSpPr/>
-          <p:nvPr/>
-        </p:nvSpPr>
-        <p:spPr>
-          <a:xfrm>
-            <a:off x="6821424" y="914400"/>
-            <a:ext cx="2084832" cy="45720"/>
-          </a:xfrm>
-          <a:prstGeom prst="rect">
-            <a:avLst/>
-          </a:prstGeom>
-          <a:solidFill>
-            <a:srgbClr val="D4A843"/>
-          </a:solidFill>
-          <a:ln/>
-        </p:spPr>
-      </p:sp>
-      <p:sp>
-        <p:nvSpPr>
-          <p:cNvPr id="25" name="Text 23"/>
-          <p:cNvSpPr/>
-          <p:nvPr/>
-        </p:nvSpPr>
-        <p:spPr>
-          <a:xfrm>
-            <a:off x="6912864" y="1005840"/>
-            <a:ext cx="1901952" cy="256032"/>
-          </a:xfrm>
-          <a:prstGeom prst="rect">
-            <a:avLst/>
-          </a:prstGeom>
-          <a:noFill/>
-          <a:ln/>
-        </p:spPr>
-        <p:txBody>
-          <a:bodyPr wrap="square" lIns="0" tIns="0" rIns="0" bIns="0" rtlCol="0" anchor="ctr"/>
-          <a:lstStyle/>
-          <a:p>
-            <a:pPr marL="0" indent="0">
-              <a:buNone/>
-            </a:pPr>
-            <a:r>
-              <a:rPr lang="en-US" sz="1000" b="1" dirty="0">
-                <a:solidFill>
-                  <a:srgbClr val="D4A843"/>
-                </a:solidFill>
-                <a:latin typeface="Calibri" pitchFamily="34" charset="0"/>
-                <a:ea typeface="Calibri" pitchFamily="34" charset="-122"/>
-                <a:cs typeface="Calibri" pitchFamily="34" charset="-120"/>
-              </a:rPr>
-              <a:t>🏷️  Categorización Chollo</a:t>
-            </a:r>
-            <a:endParaRPr lang="en-US" sz="1000" dirty="0"/>
-          </a:p>
-        </p:txBody>
-      </p:sp>
-      <p:sp>
-        <p:nvSpPr>
-          <p:cNvPr id="26" name="Text 24"/>
-          <p:cNvSpPr/>
-          <p:nvPr/>
-        </p:nvSpPr>
-        <p:spPr>
-          <a:xfrm>
-            <a:off x="6912864" y="1298448"/>
-            <a:ext cx="1901952" cy="841248"/>
-          </a:xfrm>
-          <a:prstGeom prst="rect">
-            <a:avLst/>
-          </a:prstGeom>
-          <a:noFill/>
-          <a:ln/>
-        </p:spPr>
-        <p:txBody>
-          <a:bodyPr wrap="square" lIns="0" tIns="0" rIns="0" bIns="0" rtlCol="0" anchor="t"/>
-          <a:lstStyle/>
-          <a:p>
-            <a:pPr marL="0" indent="0">
-              <a:lnSpc>
-                <a:spcPct val="120000"/>
-              </a:lnSpc>
-              <a:buNone/>
-            </a:pPr>
-            <a:r>
-              <a:rPr lang="en-US" sz="850" dirty="0">
-                <a:solidFill>
-                  <a:srgbClr val="F4F8FC"/>
-                </a:solidFill>
-                <a:latin typeface="Calibri" pitchFamily="34" charset="0"/>
-                <a:ea typeface="Calibri" pitchFamily="34" charset="-122"/>
-                <a:cs typeface="Calibri" pitchFamily="34" charset="-120"/>
-              </a:rPr>
-              <a:t>ratio = precio_real / precio_predicho</a:t>
-            </a:r>
-            <a:endParaRPr lang="en-US" sz="850" dirty="0"/>
-          </a:p>
-          <a:p>
-            <a:pPr marL="0" indent="0">
-              <a:lnSpc>
-                <a:spcPct val="120000"/>
-              </a:lnSpc>
-              <a:buNone/>
-            </a:pPr>
-            <a:r>
-              <a:rPr lang="en-US" sz="850" dirty="0">
-                <a:solidFill>
-                  <a:srgbClr val="F4F8FC"/>
-                </a:solidFill>
-                <a:latin typeface="Calibri" pitchFamily="34" charset="0"/>
-                <a:ea typeface="Calibri" pitchFamily="34" charset="-122"/>
-                <a:cs typeface="Calibri" pitchFamily="34" charset="-120"/>
-              </a:rPr>
-              <a:t>5 etiquetas: inflado/normal/chollo/</a:t>
-            </a:r>
-            <a:endParaRPr lang="en-US" sz="850" dirty="0"/>
-          </a:p>
-          <a:p>
-            <a:pPr marL="0" indent="0">
-              <a:lnSpc>
-                <a:spcPct val="120000"/>
-              </a:lnSpc>
-              <a:buNone/>
-            </a:pPr>
-            <a:r>
-              <a:rPr lang="en-US" sz="850" dirty="0">
-                <a:solidFill>
-                  <a:srgbClr val="F4F8FC"/>
-                </a:solidFill>
-                <a:latin typeface="Calibri" pitchFamily="34" charset="0"/>
-                <a:ea typeface="Calibri" pitchFamily="34" charset="-122"/>
-                <a:cs typeface="Calibri" pitchFamily="34" charset="-120"/>
-              </a:rPr>
-              <a:t>super_chollo/hiper_chollo · np.select()</a:t>
-            </a:r>
-            <a:endParaRPr lang="en-US" sz="850" dirty="0"/>
-          </a:p>
-        </p:txBody>
-      </p:sp>
-      <p:sp>
-        <p:nvSpPr>
-          <p:cNvPr id="27" name="Shape 25"/>
-          <p:cNvSpPr/>
-          <p:nvPr/>
-        </p:nvSpPr>
-        <p:spPr>
-          <a:xfrm>
-            <a:off x="6821424" y="2167128"/>
-            <a:ext cx="2084832" cy="246888"/>
-          </a:xfrm>
-          <a:prstGeom prst="rect">
-            <a:avLst/>
-          </a:prstGeom>
-          <a:solidFill>
-            <a:srgbClr val="000000"/>
-          </a:solidFill>
-          <a:ln/>
-        </p:spPr>
-      </p:sp>
-      <p:sp>
-        <p:nvSpPr>
-          <p:cNvPr id="28" name="Text 26"/>
-          <p:cNvSpPr/>
-          <p:nvPr/>
-        </p:nvSpPr>
-        <p:spPr>
-          <a:xfrm>
-            <a:off x="6894576" y="2185416"/>
-            <a:ext cx="1993392" cy="210312"/>
-          </a:xfrm>
-          <a:prstGeom prst="rect">
-            <a:avLst/>
-          </a:prstGeom>
-          <a:noFill/>
-          <a:ln/>
-        </p:spPr>
-        <p:txBody>
-          <a:bodyPr wrap="square" lIns="0" tIns="0" rIns="0" bIns="0" rtlCol="0" anchor="ctr"/>
-          <a:lstStyle/>
-          <a:p>
-            <a:pPr marL="0" indent="0">
-              <a:buNone/>
-            </a:pPr>
-            <a:r>
-              <a:rPr lang="en-US" sz="800" dirty="0">
-                <a:solidFill>
-                  <a:srgbClr val="F0C060"/>
-                </a:solidFill>
-                <a:latin typeface="Calibri" pitchFamily="34" charset="0"/>
-                <a:ea typeface="Calibri" pitchFamily="34" charset="-122"/>
-                <a:cs typeface="Calibri" pitchFamily="34" charset="-120"/>
-              </a:rPr>
-              <a:t>📍 crear_etiqueta_chollo()</a:t>
-            </a:r>
-            <a:endParaRPr lang="en-US" sz="800" dirty="0"/>
-          </a:p>
-        </p:txBody>
-      </p:sp>
-      <p:sp>
-        <p:nvSpPr>
-          <p:cNvPr id="29" name="Shape 27"/>
-          <p:cNvSpPr/>
-          <p:nvPr/>
-        </p:nvSpPr>
-        <p:spPr>
-          <a:xfrm>
-            <a:off x="1282889" y="2513440"/>
-            <a:ext cx="2084832" cy="1499616"/>
-          </a:xfrm>
-          <a:prstGeom prst="rect">
-            <a:avLst/>
-          </a:prstGeom>
-          <a:solidFill>
-            <a:srgbClr val="4A1A6B"/>
-          </a:solidFill>
-          <a:ln/>
-          <a:effectLst>
-            <a:outerShdw blurRad="101600" dist="38100" dir="8100000" algn="bl" rotWithShape="0">
-              <a:srgbClr val="000000">
-                <a:alpha val="18000"/>
-              </a:srgbClr>
-            </a:outerShdw>
-          </a:effectLst>
-        </p:spPr>
-      </p:sp>
-      <p:sp>
-        <p:nvSpPr>
-          <p:cNvPr id="30" name="Shape 28"/>
-          <p:cNvSpPr/>
-          <p:nvPr/>
-        </p:nvSpPr>
-        <p:spPr>
-          <a:xfrm>
-            <a:off x="1282889" y="2513440"/>
-            <a:ext cx="2084832" cy="45720"/>
-          </a:xfrm>
-          <a:prstGeom prst="rect">
-            <a:avLst/>
-          </a:prstGeom>
-          <a:solidFill>
-            <a:srgbClr val="D4A843"/>
-          </a:solidFill>
-          <a:ln/>
-        </p:spPr>
-      </p:sp>
-      <p:sp>
-        <p:nvSpPr>
-          <p:cNvPr id="31" name="Text 29"/>
-          <p:cNvSpPr/>
-          <p:nvPr/>
-        </p:nvSpPr>
-        <p:spPr>
-          <a:xfrm>
-            <a:off x="1374329" y="2604880"/>
-            <a:ext cx="1901952" cy="256032"/>
-          </a:xfrm>
-          <a:prstGeom prst="rect">
-            <a:avLst/>
-          </a:prstGeom>
-          <a:noFill/>
-          <a:ln/>
-        </p:spPr>
-        <p:txBody>
-          <a:bodyPr wrap="square" lIns="0" tIns="0" rIns="0" bIns="0" rtlCol="0" anchor="ctr"/>
-          <a:lstStyle/>
-          <a:p>
-            <a:pPr marL="0" indent="0">
-              <a:buNone/>
-            </a:pPr>
-            <a:r>
-              <a:rPr lang="en-US" sz="1000" b="1" dirty="0">
-                <a:solidFill>
-                  <a:srgbClr val="D4A843"/>
-                </a:solidFill>
-                <a:latin typeface="Calibri" pitchFamily="34" charset="0"/>
-                <a:ea typeface="Calibri" pitchFamily="34" charset="-122"/>
-                <a:cs typeface="Calibri" pitchFamily="34" charset="-120"/>
-              </a:rPr>
-              <a:t>⚙️  Validación y Tuning</a:t>
-            </a:r>
-            <a:endParaRPr lang="en-US" sz="1000" dirty="0"/>
-          </a:p>
-        </p:txBody>
-      </p:sp>
-      <p:sp>
-        <p:nvSpPr>
-          <p:cNvPr id="32" name="Text 30"/>
-          <p:cNvSpPr/>
-          <p:nvPr/>
-        </p:nvSpPr>
-        <p:spPr>
-          <a:xfrm>
-            <a:off x="1374329" y="2897488"/>
-            <a:ext cx="1901952" cy="841248"/>
-          </a:xfrm>
-          <a:prstGeom prst="rect">
-            <a:avLst/>
-          </a:prstGeom>
-          <a:noFill/>
-          <a:ln/>
-        </p:spPr>
-        <p:txBody>
-          <a:bodyPr wrap="square" lIns="0" tIns="0" rIns="0" bIns="0" rtlCol="0" anchor="t"/>
-          <a:lstStyle/>
-          <a:p>
-            <a:pPr marL="0" indent="0">
-              <a:lnSpc>
-                <a:spcPct val="120000"/>
-              </a:lnSpc>
-              <a:buNone/>
-            </a:pPr>
-            <a:r>
-              <a:rPr lang="en-US" sz="850" dirty="0">
-                <a:solidFill>
-                  <a:srgbClr val="F4F8FC"/>
-                </a:solidFill>
-                <a:latin typeface="Calibri" pitchFamily="34" charset="0"/>
-                <a:ea typeface="Calibri" pitchFamily="34" charset="-122"/>
-                <a:cs typeface="Calibri" pitchFamily="34" charset="-120"/>
-              </a:rPr>
-              <a:t>GridSearchCV · K-Fold cv=3</a:t>
-            </a:r>
-            <a:endParaRPr lang="en-US" sz="850" dirty="0"/>
-          </a:p>
-          <a:p>
-            <a:pPr marL="0" indent="0">
-              <a:lnSpc>
-                <a:spcPct val="120000"/>
-              </a:lnSpc>
-              <a:buNone/>
-            </a:pPr>
-            <a:r>
-              <a:rPr lang="en-US" sz="850" dirty="0">
-                <a:solidFill>
-                  <a:srgbClr val="F4F8FC"/>
-                </a:solidFill>
-                <a:latin typeface="Calibri" pitchFamily="34" charset="0"/>
-                <a:ea typeface="Calibri" pitchFamily="34" charset="-122"/>
-                <a:cs typeface="Calibri" pitchFamily="34" charset="-120"/>
-              </a:rPr>
-              <a:t>Holdout 70/15/15 · sin data leakage</a:t>
-            </a:r>
-            <a:endParaRPr lang="en-US" sz="850" dirty="0"/>
-          </a:p>
-          <a:p>
-            <a:pPr marL="0" indent="0">
-              <a:lnSpc>
-                <a:spcPct val="120000"/>
-              </a:lnSpc>
-              <a:buNone/>
-            </a:pPr>
-            <a:r>
-              <a:rPr lang="en-US" sz="850" dirty="0">
-                <a:solidFill>
-                  <a:srgbClr val="F4F8FC"/>
-                </a:solidFill>
-                <a:latin typeface="Calibri" pitchFamily="34" charset="0"/>
-                <a:ea typeface="Calibri" pitchFamily="34" charset="-122"/>
-                <a:cs typeface="Calibri" pitchFamily="34" charset="-120"/>
-              </a:rPr>
-              <a:t>fit() solo en X_train</a:t>
-            </a:r>
-            <a:endParaRPr lang="en-US" sz="850" dirty="0"/>
-          </a:p>
-        </p:txBody>
-      </p:sp>
-      <p:sp>
-        <p:nvSpPr>
-          <p:cNvPr id="33" name="Shape 31"/>
-          <p:cNvSpPr/>
-          <p:nvPr/>
-        </p:nvSpPr>
-        <p:spPr>
-          <a:xfrm>
-            <a:off x="1282889" y="3766168"/>
-            <a:ext cx="2084832" cy="246888"/>
-          </a:xfrm>
-          <a:prstGeom prst="rect">
-            <a:avLst/>
-          </a:prstGeom>
-          <a:solidFill>
-            <a:srgbClr val="000000"/>
-          </a:solidFill>
-          <a:ln/>
-        </p:spPr>
-      </p:sp>
-      <p:sp>
-        <p:nvSpPr>
-          <p:cNvPr id="34" name="Text 32"/>
-          <p:cNvSpPr/>
-          <p:nvPr/>
-        </p:nvSpPr>
-        <p:spPr>
-          <a:xfrm>
-            <a:off x="1356041" y="3784456"/>
-            <a:ext cx="1993392" cy="210312"/>
-          </a:xfrm>
-          <a:prstGeom prst="rect">
-            <a:avLst/>
-          </a:prstGeom>
-          <a:noFill/>
-          <a:ln/>
-        </p:spPr>
-        <p:txBody>
-          <a:bodyPr wrap="square" lIns="0" tIns="0" rIns="0" bIns="0" rtlCol="0" anchor="ctr"/>
-          <a:lstStyle/>
-          <a:p>
-            <a:pPr marL="0" indent="0">
-              <a:buNone/>
-            </a:pPr>
-            <a:r>
-              <a:rPr lang="en-US" sz="800" dirty="0">
-                <a:solidFill>
-                  <a:srgbClr val="F0C060"/>
-                </a:solidFill>
-                <a:latin typeface="Calibri" pitchFamily="34" charset="0"/>
-                <a:ea typeface="Calibri" pitchFamily="34" charset="-122"/>
-                <a:cs typeface="Calibri" pitchFamily="34" charset="-120"/>
-              </a:rPr>
-              <a:t>📍 Modelizacion/Modelizacion.py</a:t>
-            </a:r>
-            <a:endParaRPr lang="en-US" sz="800" dirty="0"/>
-          </a:p>
-        </p:txBody>
-      </p:sp>
-      <p:sp>
-        <p:nvSpPr>
-          <p:cNvPr id="35" name="Shape 33"/>
-          <p:cNvSpPr/>
-          <p:nvPr/>
-        </p:nvSpPr>
-        <p:spPr>
-          <a:xfrm>
-            <a:off x="3404297" y="2513440"/>
-            <a:ext cx="2084832" cy="1499616"/>
-          </a:xfrm>
-          <a:prstGeom prst="rect">
-            <a:avLst/>
-          </a:prstGeom>
-          <a:solidFill>
-            <a:srgbClr val="1A5C5C"/>
-          </a:solidFill>
-          <a:ln/>
-          <a:effectLst>
-            <a:outerShdw blurRad="101600" dist="38100" dir="8100000" algn="bl" rotWithShape="0">
-              <a:srgbClr val="000000">
-                <a:alpha val="18000"/>
-              </a:srgbClr>
-            </a:outerShdw>
-          </a:effectLst>
-        </p:spPr>
-      </p:sp>
-      <p:sp>
-        <p:nvSpPr>
-          <p:cNvPr id="36" name="Shape 34"/>
-          <p:cNvSpPr/>
-          <p:nvPr/>
-        </p:nvSpPr>
-        <p:spPr>
-          <a:xfrm>
-            <a:off x="3404297" y="2513440"/>
-            <a:ext cx="2084832" cy="45720"/>
-          </a:xfrm>
-          <a:prstGeom prst="rect">
-            <a:avLst/>
-          </a:prstGeom>
-          <a:solidFill>
-            <a:srgbClr val="D4A843"/>
-          </a:solidFill>
-          <a:ln/>
-        </p:spPr>
-      </p:sp>
-      <p:sp>
-        <p:nvSpPr>
-          <p:cNvPr id="37" name="Text 35"/>
-          <p:cNvSpPr/>
-          <p:nvPr/>
-        </p:nvSpPr>
-        <p:spPr>
-          <a:xfrm>
-            <a:off x="3495737" y="2604880"/>
-            <a:ext cx="1901952" cy="256032"/>
-          </a:xfrm>
-          <a:prstGeom prst="rect">
-            <a:avLst/>
-          </a:prstGeom>
-          <a:noFill/>
-          <a:ln/>
-        </p:spPr>
-        <p:txBody>
-          <a:bodyPr wrap="square" lIns="0" tIns="0" rIns="0" bIns="0" rtlCol="0" anchor="ctr"/>
-          <a:lstStyle/>
-          <a:p>
-            <a:pPr marL="0" indent="0">
-              <a:buNone/>
-            </a:pPr>
-            <a:r>
-              <a:rPr lang="en-US" sz="1000" b="1" dirty="0">
-                <a:solidFill>
-                  <a:srgbClr val="D4A843"/>
-                </a:solidFill>
-                <a:latin typeface="Calibri" pitchFamily="34" charset="0"/>
-                <a:ea typeface="Calibri" pitchFamily="34" charset="-122"/>
-                <a:cs typeface="Calibri" pitchFamily="34" charset="-120"/>
-              </a:rPr>
-              <a:t>📊  Visualización</a:t>
-            </a:r>
-            <a:endParaRPr lang="en-US" sz="1000" dirty="0"/>
-          </a:p>
-        </p:txBody>
-      </p:sp>
-      <p:sp>
-        <p:nvSpPr>
-          <p:cNvPr id="38" name="Text 36"/>
-          <p:cNvSpPr/>
-          <p:nvPr/>
-        </p:nvSpPr>
-        <p:spPr>
-          <a:xfrm>
-            <a:off x="3495737" y="2897488"/>
-            <a:ext cx="1901952" cy="841248"/>
-          </a:xfrm>
-          <a:prstGeom prst="rect">
-            <a:avLst/>
-          </a:prstGeom>
-          <a:noFill/>
-          <a:ln/>
-        </p:spPr>
-        <p:txBody>
-          <a:bodyPr wrap="square" lIns="0" tIns="0" rIns="0" bIns="0" rtlCol="0" anchor="t"/>
-          <a:lstStyle/>
-          <a:p>
-            <a:pPr marL="0" indent="0">
-              <a:lnSpc>
-                <a:spcPct val="120000"/>
-              </a:lnSpc>
-              <a:buNone/>
-            </a:pPr>
-            <a:r>
-              <a:rPr lang="en-US" sz="850" dirty="0">
-                <a:solidFill>
-                  <a:srgbClr val="F4F8FC"/>
-                </a:solidFill>
-                <a:latin typeface="Calibri" pitchFamily="34" charset="0"/>
-                <a:ea typeface="Calibri" pitchFamily="34" charset="-122"/>
-                <a:cs typeface="Calibri" pitchFamily="34" charset="-120"/>
-              </a:rPr>
-              <a:t>seaborn · matplotlib · plotly</a:t>
-            </a:r>
-            <a:endParaRPr lang="en-US" sz="850" dirty="0"/>
-          </a:p>
-          <a:p>
-            <a:pPr marL="0" indent="0">
-              <a:lnSpc>
-                <a:spcPct val="120000"/>
-              </a:lnSpc>
-              <a:buNone/>
-            </a:pPr>
-            <a:r>
-              <a:rPr lang="en-US" sz="850" dirty="0">
-                <a:solidFill>
-                  <a:srgbClr val="F4F8FC"/>
-                </a:solidFill>
-                <a:latin typeface="Calibri" pitchFamily="34" charset="0"/>
-                <a:ea typeface="Calibri" pitchFamily="34" charset="-122"/>
-                <a:cs typeface="Calibri" pitchFamily="34" charset="-120"/>
-              </a:rPr>
-              <a:t>Mapa coroplético Andalucía</a:t>
-            </a:r>
-            <a:endParaRPr lang="en-US" sz="850" dirty="0"/>
-          </a:p>
-          <a:p>
-            <a:pPr marL="0" indent="0">
-              <a:lnSpc>
-                <a:spcPct val="120000"/>
-              </a:lnSpc>
-              <a:buNone/>
-            </a:pPr>
-            <a:r>
-              <a:rPr lang="en-US" sz="850" dirty="0">
-                <a:solidFill>
-                  <a:srgbClr val="F4F8FC"/>
-                </a:solidFill>
-                <a:latin typeface="Calibri" pitchFamily="34" charset="0"/>
-                <a:ea typeface="Calibri" pitchFamily="34" charset="-122"/>
-                <a:cs typeface="Calibri" pitchFamily="34" charset="-120"/>
-              </a:rPr>
-              <a:t>Heatmap correlación · árbol visual</a:t>
-            </a:r>
-            <a:endParaRPr lang="en-US" sz="850" dirty="0"/>
-          </a:p>
-        </p:txBody>
-      </p:sp>
-      <p:sp>
-        <p:nvSpPr>
-          <p:cNvPr id="39" name="Shape 37"/>
-          <p:cNvSpPr/>
-          <p:nvPr/>
-        </p:nvSpPr>
-        <p:spPr>
-          <a:xfrm>
-            <a:off x="3404297" y="3766168"/>
-            <a:ext cx="2084832" cy="246888"/>
-          </a:xfrm>
-          <a:prstGeom prst="rect">
-            <a:avLst/>
-          </a:prstGeom>
-          <a:solidFill>
-            <a:srgbClr val="000000"/>
-          </a:solidFill>
-          <a:ln/>
-        </p:spPr>
-      </p:sp>
-      <p:sp>
-        <p:nvSpPr>
-          <p:cNvPr id="40" name="Text 38"/>
-          <p:cNvSpPr/>
-          <p:nvPr/>
-        </p:nvSpPr>
-        <p:spPr>
-          <a:xfrm>
-            <a:off x="3477449" y="3784456"/>
-            <a:ext cx="1993392" cy="210312"/>
-          </a:xfrm>
-          <a:prstGeom prst="rect">
-            <a:avLst/>
-          </a:prstGeom>
-          <a:noFill/>
-          <a:ln/>
-        </p:spPr>
-        <p:txBody>
-          <a:bodyPr wrap="square" lIns="0" tIns="0" rIns="0" bIns="0" rtlCol="0" anchor="ctr"/>
-          <a:lstStyle/>
-          <a:p>
-            <a:pPr marL="0" indent="0">
-              <a:buNone/>
-            </a:pPr>
-            <a:r>
-              <a:rPr lang="en-US" sz="800" dirty="0">
-                <a:solidFill>
-                  <a:srgbClr val="F0C060"/>
-                </a:solidFill>
-                <a:latin typeface="Calibri" pitchFamily="34" charset="0"/>
-                <a:ea typeface="Calibri" pitchFamily="34" charset="-122"/>
-                <a:cs typeface="Calibri" pitchFamily="34" charset="-120"/>
-              </a:rPr>
-              <a:t>📍 Graficos/</a:t>
-            </a:r>
-            <a:endParaRPr lang="en-US" sz="800" dirty="0"/>
-          </a:p>
-        </p:txBody>
-      </p:sp>
-      <p:sp>
-        <p:nvSpPr>
-          <p:cNvPr id="41" name="Shape 39"/>
-          <p:cNvSpPr/>
-          <p:nvPr/>
-        </p:nvSpPr>
-        <p:spPr>
-          <a:xfrm>
-            <a:off x="5525705" y="2513440"/>
-            <a:ext cx="2084832" cy="1499616"/>
-          </a:xfrm>
-          <a:prstGeom prst="rect">
-            <a:avLst/>
-          </a:prstGeom>
-          <a:solidFill>
-            <a:srgbClr val="5C1A1A"/>
-          </a:solidFill>
-          <a:ln/>
-          <a:effectLst>
-            <a:outerShdw blurRad="101600" dist="38100" dir="8100000" algn="bl" rotWithShape="0">
-              <a:srgbClr val="000000">
-                <a:alpha val="18000"/>
-              </a:srgbClr>
-            </a:outerShdw>
-          </a:effectLst>
-        </p:spPr>
-      </p:sp>
-      <p:sp>
-        <p:nvSpPr>
-          <p:cNvPr id="42" name="Shape 40"/>
-          <p:cNvSpPr/>
-          <p:nvPr/>
-        </p:nvSpPr>
-        <p:spPr>
-          <a:xfrm>
-            <a:off x="5525705" y="2513440"/>
-            <a:ext cx="2084832" cy="45720"/>
-          </a:xfrm>
-          <a:prstGeom prst="rect">
-            <a:avLst/>
-          </a:prstGeom>
-          <a:solidFill>
-            <a:srgbClr val="D4A843"/>
-          </a:solidFill>
-          <a:ln/>
-        </p:spPr>
-      </p:sp>
-      <p:sp>
-        <p:nvSpPr>
-          <p:cNvPr id="43" name="Text 41"/>
-          <p:cNvSpPr/>
-          <p:nvPr/>
-        </p:nvSpPr>
-        <p:spPr>
-          <a:xfrm>
-            <a:off x="5617145" y="2604880"/>
-            <a:ext cx="1901952" cy="256032"/>
-          </a:xfrm>
-          <a:prstGeom prst="rect">
-            <a:avLst/>
-          </a:prstGeom>
-          <a:noFill/>
-          <a:ln/>
-        </p:spPr>
-        <p:txBody>
-          <a:bodyPr wrap="square" lIns="0" tIns="0" rIns="0" bIns="0" rtlCol="0" anchor="ctr"/>
-          <a:lstStyle/>
-          <a:p>
-            <a:pPr marL="0" indent="0">
-              <a:buNone/>
-            </a:pPr>
-            <a:r>
-              <a:rPr lang="en-US" sz="1000" b="1" dirty="0">
-                <a:solidFill>
-                  <a:srgbClr val="D4A843"/>
-                </a:solidFill>
-                <a:latin typeface="Calibri" pitchFamily="34" charset="0"/>
-                <a:ea typeface="Calibri" pitchFamily="34" charset="-122"/>
-                <a:cs typeface="Calibri" pitchFamily="34" charset="-120"/>
-              </a:rPr>
-              <a:t>🖥️  Aplicación Web Streamlit</a:t>
-            </a:r>
-            <a:endParaRPr lang="en-US" sz="1000" dirty="0"/>
-          </a:p>
-        </p:txBody>
-      </p:sp>
-      <p:sp>
-        <p:nvSpPr>
-          <p:cNvPr id="44" name="Text 42"/>
-          <p:cNvSpPr/>
-          <p:nvPr/>
-        </p:nvSpPr>
-        <p:spPr>
-          <a:xfrm>
-            <a:off x="5617145" y="2897488"/>
-            <a:ext cx="1901952" cy="841248"/>
-          </a:xfrm>
-          <a:prstGeom prst="rect">
-            <a:avLst/>
-          </a:prstGeom>
-          <a:noFill/>
-          <a:ln/>
-        </p:spPr>
-        <p:txBody>
-          <a:bodyPr wrap="square" lIns="0" tIns="0" rIns="0" bIns="0" rtlCol="0" anchor="t"/>
-          <a:lstStyle/>
-          <a:p>
-            <a:pPr marL="0" indent="0">
-              <a:lnSpc>
-                <a:spcPct val="120000"/>
-              </a:lnSpc>
-              <a:buNone/>
-            </a:pPr>
-            <a:r>
-              <a:rPr lang="en-US" sz="850" dirty="0">
-                <a:solidFill>
-                  <a:srgbClr val="F4F8FC"/>
-                </a:solidFill>
-                <a:latin typeface="Calibri" pitchFamily="34" charset="0"/>
-                <a:ea typeface="Calibri" pitchFamily="34" charset="-122"/>
-                <a:cs typeface="Calibri" pitchFamily="34" charset="-120"/>
-              </a:rPr>
-              <a:t>Formulario usuario · búsqueda real</a:t>
-            </a:r>
-            <a:endParaRPr lang="en-US" sz="850" dirty="0"/>
-          </a:p>
-          <a:p>
-            <a:pPr marL="0" indent="0">
-              <a:lnSpc>
-                <a:spcPct val="120000"/>
-              </a:lnSpc>
-              <a:buNone/>
-            </a:pPr>
-            <a:r>
-              <a:rPr lang="en-US" sz="850" dirty="0">
-                <a:solidFill>
-                  <a:srgbClr val="F4F8FC"/>
-                </a:solidFill>
-                <a:latin typeface="Calibri" pitchFamily="34" charset="0"/>
-                <a:ea typeface="Calibri" pitchFamily="34" charset="-122"/>
-                <a:cs typeface="Calibri" pitchFamily="34" charset="-120"/>
-              </a:rPr>
-              <a:t>Carga modelo con joblib · Streamlit</a:t>
-            </a:r>
-            <a:endParaRPr lang="en-US" sz="850" dirty="0"/>
-          </a:p>
-          <a:p>
-            <a:pPr marL="0" indent="0">
-              <a:lnSpc>
-                <a:spcPct val="120000"/>
-              </a:lnSpc>
-              <a:buNone/>
-            </a:pPr>
-            <a:r>
-              <a:rPr lang="en-US" sz="850" dirty="0">
-                <a:solidFill>
-                  <a:srgbClr val="F4F8FC"/>
-                </a:solidFill>
-                <a:latin typeface="Calibri" pitchFamily="34" charset="0"/>
-                <a:ea typeface="Calibri" pitchFamily="34" charset="-122"/>
-                <a:cs typeface="Calibri" pitchFamily="34" charset="-120"/>
-              </a:rPr>
-              <a:t>Muestra solo chollos (ratio ≤ 0.99)</a:t>
-            </a:r>
-            <a:endParaRPr lang="en-US" sz="850" dirty="0"/>
-          </a:p>
-        </p:txBody>
-      </p:sp>
-      <p:sp>
-        <p:nvSpPr>
-          <p:cNvPr id="45" name="Shape 43"/>
-          <p:cNvSpPr/>
-          <p:nvPr/>
-        </p:nvSpPr>
-        <p:spPr>
-          <a:xfrm>
-            <a:off x="5525705" y="3766168"/>
-            <a:ext cx="2084832" cy="246888"/>
-          </a:xfrm>
-          <a:prstGeom prst="rect">
-            <a:avLst/>
-          </a:prstGeom>
-          <a:solidFill>
-            <a:srgbClr val="000000"/>
-          </a:solidFill>
-          <a:ln/>
-        </p:spPr>
-      </p:sp>
-      <p:sp>
-        <p:nvSpPr>
-          <p:cNvPr id="46" name="Text 44"/>
-          <p:cNvSpPr/>
-          <p:nvPr/>
-        </p:nvSpPr>
-        <p:spPr>
-          <a:xfrm>
-            <a:off x="5598857" y="3784456"/>
-            <a:ext cx="1993392" cy="210312"/>
-          </a:xfrm>
-          <a:prstGeom prst="rect">
-            <a:avLst/>
-          </a:prstGeom>
-          <a:noFill/>
-          <a:ln/>
-        </p:spPr>
-        <p:txBody>
-          <a:bodyPr wrap="square" lIns="0" tIns="0" rIns="0" bIns="0" rtlCol="0" anchor="ctr"/>
-          <a:lstStyle/>
-          <a:p>
-            <a:pPr marL="0" indent="0">
-              <a:buNone/>
-            </a:pPr>
-            <a:r>
-              <a:rPr lang="en-US" sz="800" dirty="0">
-                <a:solidFill>
-                  <a:srgbClr val="F0C060"/>
-                </a:solidFill>
-                <a:latin typeface="Calibri" pitchFamily="34" charset="0"/>
-                <a:ea typeface="Calibri" pitchFamily="34" charset="-122"/>
-                <a:cs typeface="Calibri" pitchFamily="34" charset="-120"/>
-              </a:rPr>
-              <a:t>📍 App/</a:t>
-            </a:r>
-            <a:endParaRPr lang="en-US" sz="800" dirty="0"/>
-          </a:p>
-        </p:txBody>
-      </p:sp>
-      <p:sp>
-        <p:nvSpPr>
-          <p:cNvPr id="53" name="Text 51"/>
-          <p:cNvSpPr/>
-          <p:nvPr/>
-        </p:nvSpPr>
-        <p:spPr>
-          <a:xfrm>
-            <a:off x="457200" y="4828032"/>
-            <a:ext cx="7772400" cy="201168"/>
-          </a:xfrm>
-          <a:prstGeom prst="rect">
-            <a:avLst/>
-          </a:prstGeom>
-          <a:noFill/>
-          <a:ln/>
-        </p:spPr>
-        <p:txBody>
-          <a:bodyPr wrap="square" lIns="0" tIns="0" rIns="0" bIns="0" rtlCol="0" anchor="ctr"/>
-          <a:lstStyle/>
-          <a:p>
-            <a:pPr marL="0" indent="0" algn="l">
-              <a:buNone/>
-            </a:pPr>
-            <a:r>
-              <a:rPr lang="en-US" sz="800" dirty="0">
-                <a:solidFill>
-                  <a:srgbClr val="4A6080"/>
-                </a:solidFill>
-                <a:latin typeface="Calibri" pitchFamily="34" charset="0"/>
-                <a:ea typeface="Calibri" pitchFamily="34" charset="-122"/>
-                <a:cs typeface="Calibri" pitchFamily="34" charset="-120"/>
-              </a:rPr>
-              <a:t>TFG · Detector de Chollos en Andalucía · Mario Jiménez · Universidad de Sevilla</a:t>
-            </a:r>
-            <a:endParaRPr lang="en-US" sz="800" dirty="0"/>
-          </a:p>
-        </p:txBody>
-      </p:sp>
-      <p:sp>
-        <p:nvSpPr>
-          <p:cNvPr id="54" name="Text 52"/>
-          <p:cNvSpPr/>
-          <p:nvPr/>
-        </p:nvSpPr>
-        <p:spPr>
-          <a:xfrm>
-            <a:off x="8595360" y="4754880"/>
-            <a:ext cx="365760" cy="228600"/>
-          </a:xfrm>
-          <a:prstGeom prst="rect">
-            <a:avLst/>
-          </a:prstGeom>
-          <a:noFill/>
-          <a:ln/>
-        </p:spPr>
-        <p:txBody>
-          <a:bodyPr wrap="square" lIns="0" tIns="0" rIns="0" bIns="0" rtlCol="0" anchor="ctr"/>
-          <a:lstStyle/>
-          <a:p>
-            <a:pPr marL="0" indent="0" algn="ctr">
-              <a:buNone/>
-            </a:pPr>
-            <a:r>
-              <a:rPr lang="en-US" sz="900" dirty="0">
-                <a:solidFill>
-                  <a:srgbClr val="CBD5E1"/>
-                </a:solidFill>
-                <a:latin typeface="Calibri" pitchFamily="34" charset="0"/>
-                <a:ea typeface="Calibri" pitchFamily="34" charset="-122"/>
-                <a:cs typeface="Calibri" pitchFamily="34" charset="-120"/>
-              </a:rPr>
-              <a:t>4</a:t>
-            </a:r>
-            <a:endParaRPr lang="en-US" sz="900" dirty="0"/>
-          </a:p>
-        </p:txBody>
-      </p:sp>
-    </p:spTree>
-  </p:cSld>
-  <p:clrMapOvr>
-    <a:masterClrMapping/>
-  </p:clrMapOvr>
-</p:sld>
-</file>
-
-<file path=ppt/slides/slide4.xml><?xml version="1.0" encoding="utf-8"?>
-<p:sld xmlns:a="http://schemas.openxmlformats.org/drawingml/2006/main" xmlns:r="http://schemas.openxmlformats.org/officeDocument/2006/relationships" xmlns:p="http://schemas.openxmlformats.org/presentationml/2006/main">
   <p:cSld name="Slide 11">
     <p:bg>
       <p:bgPr>
@@ -19387,8 +17266,8 @@
         </p:nvSpPr>
         <p:spPr>
           <a:xfrm>
-            <a:off x="1593581" y="1115568"/>
-            <a:ext cx="2743200" cy="2519923"/>
+            <a:off x="1321990" y="962508"/>
+            <a:ext cx="2743200" cy="3088284"/>
           </a:xfrm>
           <a:prstGeom prst="rect">
             <a:avLst/>
@@ -19414,7 +17293,7 @@
         </p:nvSpPr>
         <p:spPr>
           <a:xfrm>
-            <a:off x="1593581" y="914401"/>
+            <a:off x="1321990" y="761341"/>
             <a:ext cx="1554480" cy="201168"/>
           </a:xfrm>
           <a:prstGeom prst="rect">
@@ -19434,7 +17313,7 @@
         </p:nvSpPr>
         <p:spPr>
           <a:xfrm>
-            <a:off x="1648445" y="914401"/>
+            <a:off x="1376854" y="761341"/>
             <a:ext cx="2697480" cy="201168"/>
           </a:xfrm>
           <a:prstGeom prst="rect">
@@ -19473,7 +17352,7 @@
         </p:nvSpPr>
         <p:spPr>
           <a:xfrm>
-            <a:off x="1721597" y="1188721"/>
+            <a:off x="1450006" y="1035661"/>
             <a:ext cx="2487168" cy="2139696"/>
           </a:xfrm>
           <a:prstGeom prst="rect">
@@ -19549,9 +17428,8 @@
                 <a:ea typeface="Consolas" pitchFamily="34" charset="-122"/>
                 <a:cs typeface="Consolas" pitchFamily="34" charset="-120"/>
               </a:rPr>
-              <a:t>requires-python = "&gt;=3.12"</a:t>
-            </a:r>
-            <a:endParaRPr lang="en-US" sz="850" dirty="0"/>
+              <a:t>dependencies = [</a:t>
+            </a:r>
           </a:p>
           <a:p>
             <a:pPr marL="0" indent="0">
@@ -19566,9 +17444,8 @@
                 <a:ea typeface="Consolas" pitchFamily="34" charset="-122"/>
                 <a:cs typeface="Consolas" pitchFamily="34" charset="-120"/>
               </a:rPr>
-              <a:t>dependencies = [</a:t>
-            </a:r>
-            <a:endParaRPr lang="en-US" sz="850" dirty="0"/>
+              <a:t>    "beautifulsoup4&gt;=4.14.3",</a:t>
+            </a:r>
           </a:p>
           <a:p>
             <a:pPr marL="0" indent="0">
@@ -19583,16 +17460,10 @@
                 <a:ea typeface="Consolas" pitchFamily="34" charset="-122"/>
                 <a:cs typeface="Consolas" pitchFamily="34" charset="-120"/>
               </a:rPr>
-              <a:t>  "beautifulsoup4&gt;=4.14.3",</a:t>
-            </a:r>
-            <a:endParaRPr lang="en-US" sz="850" dirty="0"/>
-          </a:p>
-          <a:p>
-            <a:pPr marL="0" indent="0">
-              <a:buNone/>
-            </a:pPr>
-            <a:r>
-              <a:rPr lang="en-US" sz="850" dirty="0">
+              <a:t>    "</a:t>
+            </a:r>
+            <a:r>
+              <a:rPr lang="en-US" sz="850" dirty="0" err="1">
                 <a:solidFill>
                   <a:srgbClr val="E2E8F0"/>
                 </a:solidFill>
@@ -19600,14 +17471,8 @@
                 <a:ea typeface="Consolas" pitchFamily="34" charset="-122"/>
                 <a:cs typeface="Consolas" pitchFamily="34" charset="-120"/>
               </a:rPr>
-              <a:t>  "playwright&gt;=1.58.0",</a:t>
-            </a:r>
-            <a:endParaRPr lang="en-US" sz="850" dirty="0"/>
-          </a:p>
-          <a:p>
-            <a:pPr marL="0" indent="0">
-              <a:buNone/>
-            </a:pPr>
+              <a:t>ipykernel</a:t>
+            </a:r>
             <a:r>
               <a:rPr lang="en-US" sz="850" dirty="0">
                 <a:solidFill>
@@ -19617,9 +17482,8 @@
                 <a:ea typeface="Consolas" pitchFamily="34" charset="-122"/>
                 <a:cs typeface="Consolas" pitchFamily="34" charset="-120"/>
               </a:rPr>
-              <a:t>  "selenium&gt;=4.41.0",</a:t>
-            </a:r>
-            <a:endParaRPr lang="en-US" sz="850" dirty="0"/>
+              <a:t>&gt;=7.2.0",</a:t>
+            </a:r>
           </a:p>
           <a:p>
             <a:pPr marL="0" indent="0">
@@ -19634,16 +17498,10 @@
                 <a:ea typeface="Consolas" pitchFamily="34" charset="-122"/>
                 <a:cs typeface="Consolas" pitchFamily="34" charset="-120"/>
               </a:rPr>
-              <a:t>  "pandas&gt;=3.0.1",</a:t>
-            </a:r>
-            <a:endParaRPr lang="en-US" sz="850" dirty="0"/>
-          </a:p>
-          <a:p>
-            <a:pPr marL="0" indent="0">
-              <a:buNone/>
-            </a:pPr>
-            <a:r>
-              <a:rPr lang="en-US" sz="850" dirty="0">
+              <a:t>    "</a:t>
+            </a:r>
+            <a:r>
+              <a:rPr lang="en-US" sz="850" dirty="0" err="1">
                 <a:solidFill>
                   <a:srgbClr val="E2E8F0"/>
                 </a:solidFill>
@@ -19651,14 +17509,8 @@
                 <a:ea typeface="Consolas" pitchFamily="34" charset="-122"/>
                 <a:cs typeface="Consolas" pitchFamily="34" charset="-120"/>
               </a:rPr>
-              <a:t>  "scikit-learn&gt;=1.8.0",</a:t>
-            </a:r>
-            <a:endParaRPr lang="en-US" sz="850" dirty="0"/>
-          </a:p>
-          <a:p>
-            <a:pPr marL="0" indent="0">
-              <a:buNone/>
-            </a:pPr>
+              <a:t>joblib</a:t>
+            </a:r>
             <a:r>
               <a:rPr lang="en-US" sz="850" dirty="0">
                 <a:solidFill>
@@ -19668,9 +17520,8 @@
                 <a:ea typeface="Consolas" pitchFamily="34" charset="-122"/>
                 <a:cs typeface="Consolas" pitchFamily="34" charset="-120"/>
               </a:rPr>
-              <a:t>  "xgboost&gt;=3.2.0",</a:t>
-            </a:r>
-            <a:endParaRPr lang="en-US" sz="850" dirty="0"/>
+              <a:t>&gt;=1.4.0",</a:t>
+            </a:r>
           </a:p>
           <a:p>
             <a:pPr marL="0" indent="0">
@@ -19685,16 +17536,10 @@
                 <a:ea typeface="Consolas" pitchFamily="34" charset="-122"/>
                 <a:cs typeface="Consolas" pitchFamily="34" charset="-120"/>
               </a:rPr>
-              <a:t>  "seaborn&gt;=0.13.2",</a:t>
-            </a:r>
-            <a:endParaRPr lang="en-US" sz="850" dirty="0"/>
-          </a:p>
-          <a:p>
-            <a:pPr marL="0" indent="0">
-              <a:buNone/>
-            </a:pPr>
-            <a:r>
-              <a:rPr lang="en-US" sz="850" dirty="0">
+              <a:t>    "</a:t>
+            </a:r>
+            <a:r>
+              <a:rPr lang="en-US" sz="850" dirty="0" err="1">
                 <a:solidFill>
                   <a:srgbClr val="E2E8F0"/>
                 </a:solidFill>
@@ -19702,14 +17547,8 @@
                 <a:ea typeface="Consolas" pitchFamily="34" charset="-122"/>
                 <a:cs typeface="Consolas" pitchFamily="34" charset="-120"/>
               </a:rPr>
-              <a:t>  "plotly&gt;=6.6.0",</a:t>
-            </a:r>
-            <a:endParaRPr lang="en-US" sz="850" dirty="0"/>
-          </a:p>
-          <a:p>
-            <a:pPr marL="0" indent="0">
-              <a:buNone/>
-            </a:pPr>
+              <a:t>lxml</a:t>
+            </a:r>
             <a:r>
               <a:rPr lang="en-US" sz="850" dirty="0">
                 <a:solidFill>
@@ -19719,9 +17558,8 @@
                 <a:ea typeface="Consolas" pitchFamily="34" charset="-122"/>
                 <a:cs typeface="Consolas" pitchFamily="34" charset="-120"/>
               </a:rPr>
-              <a:t>  "streamlit&gt;=1.35",</a:t>
-            </a:r>
-            <a:endParaRPr lang="en-US" sz="850" dirty="0"/>
+              <a:t>&gt;=6.0.2",</a:t>
+            </a:r>
           </a:p>
           <a:p>
             <a:pPr marL="0" indent="0">
@@ -19736,9 +17574,8 @@
                 <a:ea typeface="Consolas" pitchFamily="34" charset="-122"/>
                 <a:cs typeface="Consolas" pitchFamily="34" charset="-120"/>
               </a:rPr>
-              <a:t>  "cloudscraper&gt;=1.2.71",</a:t>
-            </a:r>
-            <a:endParaRPr lang="en-US" sz="850" dirty="0"/>
+              <a:t>    "matplotlib&gt;=3.9.0",</a:t>
+            </a:r>
           </a:p>
           <a:p>
             <a:pPr marL="0" indent="0">
@@ -19753,16 +17590,10 @@
                 <a:ea typeface="Consolas" pitchFamily="34" charset="-122"/>
                 <a:cs typeface="Consolas" pitchFamily="34" charset="-120"/>
               </a:rPr>
-              <a:t>  "fake-useragent&gt;=2.2.0",</a:t>
-            </a:r>
-            <a:endParaRPr lang="en-US" sz="850" dirty="0"/>
-          </a:p>
-          <a:p>
-            <a:pPr marL="0" indent="0">
-              <a:buNone/>
-            </a:pPr>
-            <a:r>
-              <a:rPr lang="en-US" sz="850" dirty="0">
+              <a:t>    "</a:t>
+            </a:r>
+            <a:r>
+              <a:rPr lang="en-US" sz="850" dirty="0" err="1">
                 <a:solidFill>
                   <a:srgbClr val="E2E8F0"/>
                 </a:solidFill>
@@ -19770,14 +17601,8 @@
                 <a:ea typeface="Consolas" pitchFamily="34" charset="-122"/>
                 <a:cs typeface="Consolas" pitchFamily="34" charset="-120"/>
               </a:rPr>
-              <a:t>  "joblib", "requests", "lxml",</a:t>
-            </a:r>
-            <a:endParaRPr lang="en-US" sz="850" dirty="0"/>
-          </a:p>
-          <a:p>
-            <a:pPr marL="0" indent="0">
-              <a:buNone/>
-            </a:pPr>
+              <a:t>nbformat</a:t>
+            </a:r>
             <a:r>
               <a:rPr lang="en-US" sz="850" dirty="0">
                 <a:solidFill>
@@ -19787,7 +17612,369 @@
                 <a:ea typeface="Consolas" pitchFamily="34" charset="-122"/>
                 <a:cs typeface="Consolas" pitchFamily="34" charset="-120"/>
               </a:rPr>
-              <a:t>]</a:t>
+              <a:t>&gt;=4.2.0",</a:t>
+            </a:r>
+          </a:p>
+          <a:p>
+            <a:pPr marL="0" indent="0">
+              <a:buNone/>
+            </a:pPr>
+            <a:r>
+              <a:rPr lang="en-US" sz="850" dirty="0">
+                <a:solidFill>
+                  <a:srgbClr val="E2E8F0"/>
+                </a:solidFill>
+                <a:latin typeface="Consolas" pitchFamily="34" charset="0"/>
+                <a:ea typeface="Consolas" pitchFamily="34" charset="-122"/>
+                <a:cs typeface="Consolas" pitchFamily="34" charset="-120"/>
+              </a:rPr>
+              <a:t>    "</a:t>
+            </a:r>
+            <a:r>
+              <a:rPr lang="en-US" sz="850" dirty="0" err="1">
+                <a:solidFill>
+                  <a:srgbClr val="E2E8F0"/>
+                </a:solidFill>
+                <a:latin typeface="Consolas" pitchFamily="34" charset="0"/>
+                <a:ea typeface="Consolas" pitchFamily="34" charset="-122"/>
+                <a:cs typeface="Consolas" pitchFamily="34" charset="-120"/>
+              </a:rPr>
+              <a:t>numpy</a:t>
+            </a:r>
+            <a:r>
+              <a:rPr lang="en-US" sz="850" dirty="0">
+                <a:solidFill>
+                  <a:srgbClr val="E2E8F0"/>
+                </a:solidFill>
+                <a:latin typeface="Consolas" pitchFamily="34" charset="0"/>
+                <a:ea typeface="Consolas" pitchFamily="34" charset="-122"/>
+                <a:cs typeface="Consolas" pitchFamily="34" charset="-120"/>
+              </a:rPr>
+              <a:t>&gt;=2.0.0",</a:t>
+            </a:r>
+          </a:p>
+          <a:p>
+            <a:pPr marL="0" indent="0">
+              <a:buNone/>
+            </a:pPr>
+            <a:r>
+              <a:rPr lang="en-US" sz="850" dirty="0">
+                <a:solidFill>
+                  <a:srgbClr val="E2E8F0"/>
+                </a:solidFill>
+                <a:latin typeface="Consolas" pitchFamily="34" charset="0"/>
+                <a:ea typeface="Consolas" pitchFamily="34" charset="-122"/>
+                <a:cs typeface="Consolas" pitchFamily="34" charset="-120"/>
+              </a:rPr>
+              <a:t>    "pandas&gt;=3.0.1",</a:t>
+            </a:r>
+          </a:p>
+          <a:p>
+            <a:pPr marL="0" indent="0">
+              <a:buNone/>
+            </a:pPr>
+            <a:r>
+              <a:rPr lang="en-US" sz="850" dirty="0">
+                <a:solidFill>
+                  <a:srgbClr val="E2E8F0"/>
+                </a:solidFill>
+                <a:latin typeface="Consolas" pitchFamily="34" charset="0"/>
+                <a:ea typeface="Consolas" pitchFamily="34" charset="-122"/>
+                <a:cs typeface="Consolas" pitchFamily="34" charset="-120"/>
+              </a:rPr>
+              <a:t>    "playwright&gt;=1.58.0",</a:t>
+            </a:r>
+          </a:p>
+          <a:p>
+            <a:pPr marL="0" indent="0">
+              <a:buNone/>
+            </a:pPr>
+            <a:r>
+              <a:rPr lang="en-US" sz="850" dirty="0">
+                <a:solidFill>
+                  <a:srgbClr val="E2E8F0"/>
+                </a:solidFill>
+                <a:latin typeface="Consolas" pitchFamily="34" charset="0"/>
+                <a:ea typeface="Consolas" pitchFamily="34" charset="-122"/>
+                <a:cs typeface="Consolas" pitchFamily="34" charset="-120"/>
+              </a:rPr>
+              <a:t>    "</a:t>
+            </a:r>
+            <a:r>
+              <a:rPr lang="en-US" sz="850" dirty="0" err="1">
+                <a:solidFill>
+                  <a:srgbClr val="E2E8F0"/>
+                </a:solidFill>
+                <a:latin typeface="Consolas" pitchFamily="34" charset="0"/>
+                <a:ea typeface="Consolas" pitchFamily="34" charset="-122"/>
+                <a:cs typeface="Consolas" pitchFamily="34" charset="-120"/>
+              </a:rPr>
+              <a:t>plotly</a:t>
+            </a:r>
+            <a:r>
+              <a:rPr lang="en-US" sz="850" dirty="0">
+                <a:solidFill>
+                  <a:srgbClr val="E2E8F0"/>
+                </a:solidFill>
+                <a:latin typeface="Consolas" pitchFamily="34" charset="0"/>
+                <a:ea typeface="Consolas" pitchFamily="34" charset="-122"/>
+                <a:cs typeface="Consolas" pitchFamily="34" charset="-120"/>
+              </a:rPr>
+              <a:t>&gt;=6.6.0",</a:t>
+            </a:r>
+          </a:p>
+          <a:p>
+            <a:pPr marL="0" indent="0">
+              <a:buNone/>
+            </a:pPr>
+            <a:r>
+              <a:rPr lang="en-US" sz="850" dirty="0">
+                <a:solidFill>
+                  <a:srgbClr val="E2E8F0"/>
+                </a:solidFill>
+                <a:latin typeface="Consolas" pitchFamily="34" charset="0"/>
+                <a:ea typeface="Consolas" pitchFamily="34" charset="-122"/>
+                <a:cs typeface="Consolas" pitchFamily="34" charset="-120"/>
+              </a:rPr>
+              <a:t>    "python-</a:t>
+            </a:r>
+            <a:r>
+              <a:rPr lang="en-US" sz="850" dirty="0" err="1">
+                <a:solidFill>
+                  <a:srgbClr val="E2E8F0"/>
+                </a:solidFill>
+                <a:latin typeface="Consolas" pitchFamily="34" charset="0"/>
+                <a:ea typeface="Consolas" pitchFamily="34" charset="-122"/>
+                <a:cs typeface="Consolas" pitchFamily="34" charset="-120"/>
+              </a:rPr>
+              <a:t>dotenv</a:t>
+            </a:r>
+            <a:r>
+              <a:rPr lang="en-US" sz="850" dirty="0">
+                <a:solidFill>
+                  <a:srgbClr val="E2E8F0"/>
+                </a:solidFill>
+                <a:latin typeface="Consolas" pitchFamily="34" charset="0"/>
+                <a:ea typeface="Consolas" pitchFamily="34" charset="-122"/>
+                <a:cs typeface="Consolas" pitchFamily="34" charset="-120"/>
+              </a:rPr>
+              <a:t>&gt;=1.0.0",</a:t>
+            </a:r>
+          </a:p>
+          <a:p>
+            <a:pPr marL="0" indent="0">
+              <a:buNone/>
+            </a:pPr>
+            <a:r>
+              <a:rPr lang="en-US" sz="850" dirty="0">
+                <a:solidFill>
+                  <a:srgbClr val="E2E8F0"/>
+                </a:solidFill>
+                <a:latin typeface="Consolas" pitchFamily="34" charset="0"/>
+                <a:ea typeface="Consolas" pitchFamily="34" charset="-122"/>
+                <a:cs typeface="Consolas" pitchFamily="34" charset="-120"/>
+              </a:rPr>
+              <a:t>    "requests&gt;=2.32.5",</a:t>
+            </a:r>
+          </a:p>
+          <a:p>
+            <a:pPr marL="0" indent="0">
+              <a:buNone/>
+            </a:pPr>
+            <a:r>
+              <a:rPr lang="en-US" sz="850" dirty="0">
+                <a:solidFill>
+                  <a:srgbClr val="E2E8F0"/>
+                </a:solidFill>
+                <a:latin typeface="Consolas" pitchFamily="34" charset="0"/>
+                <a:ea typeface="Consolas" pitchFamily="34" charset="-122"/>
+                <a:cs typeface="Consolas" pitchFamily="34" charset="-120"/>
+              </a:rPr>
+              <a:t>    "scikit-learn&gt;=1.8.0",</a:t>
+            </a:r>
+          </a:p>
+          <a:p>
+            <a:pPr marL="0" indent="0">
+              <a:buNone/>
+            </a:pPr>
+            <a:r>
+              <a:rPr lang="en-US" sz="850" dirty="0">
+                <a:solidFill>
+                  <a:srgbClr val="E2E8F0"/>
+                </a:solidFill>
+                <a:latin typeface="Consolas" pitchFamily="34" charset="0"/>
+                <a:ea typeface="Consolas" pitchFamily="34" charset="-122"/>
+                <a:cs typeface="Consolas" pitchFamily="34" charset="-120"/>
+              </a:rPr>
+              <a:t>    "seaborn&gt;=0.13.2",</a:t>
+            </a:r>
+          </a:p>
+          <a:p>
+            <a:pPr marL="0" indent="0">
+              <a:buNone/>
+            </a:pPr>
+            <a:r>
+              <a:rPr lang="en-US" sz="850" dirty="0">
+                <a:solidFill>
+                  <a:srgbClr val="E2E8F0"/>
+                </a:solidFill>
+                <a:latin typeface="Consolas" pitchFamily="34" charset="0"/>
+                <a:ea typeface="Consolas" pitchFamily="34" charset="-122"/>
+                <a:cs typeface="Consolas" pitchFamily="34" charset="-120"/>
+              </a:rPr>
+              <a:t>    "selenium&gt;=4.41.0",</a:t>
+            </a:r>
+          </a:p>
+          <a:p>
+            <a:pPr marL="0" indent="0">
+              <a:buNone/>
+            </a:pPr>
+            <a:r>
+              <a:rPr lang="en-US" sz="850" dirty="0">
+                <a:solidFill>
+                  <a:srgbClr val="E2E8F0"/>
+                </a:solidFill>
+                <a:latin typeface="Consolas" pitchFamily="34" charset="0"/>
+                <a:ea typeface="Consolas" pitchFamily="34" charset="-122"/>
+                <a:cs typeface="Consolas" pitchFamily="34" charset="-120"/>
+              </a:rPr>
+              <a:t>    "</a:t>
+            </a:r>
+            <a:r>
+              <a:rPr lang="en-US" sz="850" dirty="0" err="1">
+                <a:solidFill>
+                  <a:srgbClr val="E2E8F0"/>
+                </a:solidFill>
+                <a:latin typeface="Consolas" pitchFamily="34" charset="0"/>
+                <a:ea typeface="Consolas" pitchFamily="34" charset="-122"/>
+                <a:cs typeface="Consolas" pitchFamily="34" charset="-120"/>
+              </a:rPr>
+              <a:t>setuptools</a:t>
+            </a:r>
+            <a:r>
+              <a:rPr lang="en-US" sz="850" dirty="0">
+                <a:solidFill>
+                  <a:srgbClr val="E2E8F0"/>
+                </a:solidFill>
+                <a:latin typeface="Consolas" pitchFamily="34" charset="0"/>
+                <a:ea typeface="Consolas" pitchFamily="34" charset="-122"/>
+                <a:cs typeface="Consolas" pitchFamily="34" charset="-120"/>
+              </a:rPr>
+              <a:t>&gt;=82.0.1",</a:t>
+            </a:r>
+          </a:p>
+          <a:p>
+            <a:pPr marL="0" indent="0">
+              <a:buNone/>
+            </a:pPr>
+            <a:r>
+              <a:rPr lang="en-US" sz="850" dirty="0">
+                <a:solidFill>
+                  <a:srgbClr val="E2E8F0"/>
+                </a:solidFill>
+                <a:latin typeface="Consolas" pitchFamily="34" charset="0"/>
+                <a:ea typeface="Consolas" pitchFamily="34" charset="-122"/>
+                <a:cs typeface="Consolas" pitchFamily="34" charset="-120"/>
+              </a:rPr>
+              <a:t>    "</a:t>
+            </a:r>
+            <a:r>
+              <a:rPr lang="en-US" sz="850" dirty="0" err="1">
+                <a:solidFill>
+                  <a:srgbClr val="E2E8F0"/>
+                </a:solidFill>
+                <a:latin typeface="Consolas" pitchFamily="34" charset="0"/>
+                <a:ea typeface="Consolas" pitchFamily="34" charset="-122"/>
+                <a:cs typeface="Consolas" pitchFamily="34" charset="-120"/>
+              </a:rPr>
+              <a:t>streamlit</a:t>
+            </a:r>
+            <a:r>
+              <a:rPr lang="en-US" sz="850" dirty="0">
+                <a:solidFill>
+                  <a:srgbClr val="E2E8F0"/>
+                </a:solidFill>
+                <a:latin typeface="Consolas" pitchFamily="34" charset="0"/>
+                <a:ea typeface="Consolas" pitchFamily="34" charset="-122"/>
+                <a:cs typeface="Consolas" pitchFamily="34" charset="-120"/>
+              </a:rPr>
+              <a:t>&gt;=1.35",</a:t>
+            </a:r>
+          </a:p>
+          <a:p>
+            <a:pPr marL="0" indent="0">
+              <a:buNone/>
+            </a:pPr>
+            <a:r>
+              <a:rPr lang="en-US" sz="850" dirty="0">
+                <a:solidFill>
+                  <a:srgbClr val="E2E8F0"/>
+                </a:solidFill>
+                <a:latin typeface="Consolas" pitchFamily="34" charset="0"/>
+                <a:ea typeface="Consolas" pitchFamily="34" charset="-122"/>
+                <a:cs typeface="Consolas" pitchFamily="34" charset="-120"/>
+              </a:rPr>
+              <a:t>    "</a:t>
+            </a:r>
+            <a:r>
+              <a:rPr lang="en-US" sz="850" dirty="0" err="1">
+                <a:solidFill>
+                  <a:srgbClr val="E2E8F0"/>
+                </a:solidFill>
+                <a:latin typeface="Consolas" pitchFamily="34" charset="0"/>
+                <a:ea typeface="Consolas" pitchFamily="34" charset="-122"/>
+                <a:cs typeface="Consolas" pitchFamily="34" charset="-120"/>
+              </a:rPr>
+              <a:t>webdriver</a:t>
+            </a:r>
+            <a:r>
+              <a:rPr lang="en-US" sz="850" dirty="0">
+                <a:solidFill>
+                  <a:srgbClr val="E2E8F0"/>
+                </a:solidFill>
+                <a:latin typeface="Consolas" pitchFamily="34" charset="0"/>
+                <a:ea typeface="Consolas" pitchFamily="34" charset="-122"/>
+                <a:cs typeface="Consolas" pitchFamily="34" charset="-120"/>
+              </a:rPr>
+              <a:t>-manager&gt;=4.0.2",</a:t>
+            </a:r>
+          </a:p>
+          <a:p>
+            <a:pPr marL="0" indent="0">
+              <a:buNone/>
+            </a:pPr>
+            <a:r>
+              <a:rPr lang="en-US" sz="850" dirty="0">
+                <a:solidFill>
+                  <a:srgbClr val="E2E8F0"/>
+                </a:solidFill>
+                <a:latin typeface="Consolas" pitchFamily="34" charset="0"/>
+                <a:ea typeface="Consolas" pitchFamily="34" charset="-122"/>
+                <a:cs typeface="Consolas" pitchFamily="34" charset="-120"/>
+              </a:rPr>
+              <a:t>    "</a:t>
+            </a:r>
+            <a:r>
+              <a:rPr lang="en-US" sz="850" dirty="0" err="1">
+                <a:solidFill>
+                  <a:srgbClr val="E2E8F0"/>
+                </a:solidFill>
+                <a:latin typeface="Consolas" pitchFamily="34" charset="0"/>
+                <a:ea typeface="Consolas" pitchFamily="34" charset="-122"/>
+                <a:cs typeface="Consolas" pitchFamily="34" charset="-120"/>
+              </a:rPr>
+              <a:t>xgboost</a:t>
+            </a:r>
+            <a:r>
+              <a:rPr lang="en-US" sz="850" dirty="0">
+                <a:solidFill>
+                  <a:srgbClr val="E2E8F0"/>
+                </a:solidFill>
+                <a:latin typeface="Consolas" pitchFamily="34" charset="0"/>
+                <a:ea typeface="Consolas" pitchFamily="34" charset="-122"/>
+                <a:cs typeface="Consolas" pitchFamily="34" charset="-120"/>
+              </a:rPr>
+              <a:t>&gt;=3.2.0"]</a:t>
             </a:r>
             <a:endParaRPr lang="en-US" sz="850" dirty="0"/>
           </a:p>
@@ -20438,8 +18625,8 @@
         </p:nvSpPr>
         <p:spPr>
           <a:xfrm>
-            <a:off x="6390974" y="4429859"/>
-            <a:ext cx="2276992" cy="256032"/>
+            <a:off x="6340340" y="4429859"/>
+            <a:ext cx="2396411" cy="256032"/>
           </a:xfrm>
           <a:prstGeom prst="rect">
             <a:avLst/>
@@ -20690,18 +18877,1377 @@
             <a:pPr marL="0" indent="0" algn="ctr">
               <a:buNone/>
             </a:pPr>
-            <a:r>
-              <a:rPr lang="en-US" sz="900" dirty="0">
+            <a:endParaRPr lang="en-US" sz="900" dirty="0"/>
+          </a:p>
+        </p:txBody>
+      </p:sp>
+    </p:spTree>
+  </p:cSld>
+  <p:clrMapOvr>
+    <a:masterClrMapping/>
+  </p:clrMapOvr>
+</p:sld>
+</file>
+
+<file path=ppt/slides/slide4.xml><?xml version="1.0" encoding="utf-8"?>
+<p:sld xmlns:a="http://schemas.openxmlformats.org/drawingml/2006/main" xmlns:r="http://schemas.openxmlformats.org/officeDocument/2006/relationships" xmlns:p="http://schemas.openxmlformats.org/presentationml/2006/main">
+  <p:cSld>
+    <p:bg>
+      <p:bgPr>
+        <a:solidFill>
+          <a:srgbClr val="1A2E4A"/>
+        </a:solidFill>
+        <a:effectLst/>
+      </p:bgPr>
+    </p:bg>
+    <p:spTree>
+      <p:nvGrpSpPr>
+        <p:cNvPr id="1" name=""/>
+        <p:cNvGrpSpPr/>
+        <p:nvPr/>
+      </p:nvGrpSpPr>
+      <p:grpSpPr>
+        <a:xfrm>
+          <a:off x="0" y="0"/>
+          <a:ext cx="0" cy="0"/>
+          <a:chOff x="0" y="0"/>
+          <a:chExt cx="0" cy="0"/>
+        </a:xfrm>
+      </p:grpSpPr>
+      <p:sp>
+        <p:nvSpPr>
+          <p:cNvPr id="2" name="Gold"/>
+          <p:cNvSpPr/>
+          <p:nvPr/>
+        </p:nvSpPr>
+        <p:spPr>
+          <a:xfrm>
+            <a:off x="0" y="0"/>
+            <a:ext cx="9144000" cy="54864"/>
+          </a:xfrm>
+          <a:prstGeom prst="rect">
+            <a:avLst/>
+          </a:prstGeom>
+          <a:solidFill>
+            <a:srgbClr val="D4A843"/>
+          </a:solidFill>
+          <a:ln/>
+        </p:spPr>
+      </p:sp>
+      <p:sp>
+        <p:nvSpPr>
+          <p:cNvPr id="3" name="Title"/>
+          <p:cNvSpPr/>
+          <p:nvPr/>
+        </p:nvSpPr>
+        <p:spPr>
+          <a:xfrm>
+            <a:off x="457200" y="109728"/>
+            <a:ext cx="8229600" cy="457200"/>
+          </a:xfrm>
+          <a:prstGeom prst="rect">
+            <a:avLst/>
+          </a:prstGeom>
+          <a:noFill/>
+          <a:ln/>
+        </p:spPr>
+        <p:txBody>
+          <a:bodyPr wrap="square" lIns="0" tIns="0" rIns="0" bIns="0" rtlCol="0" anchor="ctr"/>
+          <a:lstStyle/>
+          <a:p>
+            <a:pPr marL="0" indent="0">
+              <a:buNone/>
+            </a:pPr>
+            <a:r>
+              <a:rPr lang="es-ES" sz="2400" b="1" dirty="0">
+                <a:solidFill>
+                  <a:srgbClr val="FFFFFF"/>
+                </a:solidFill>
+                <a:latin typeface="Calibri" pitchFamily="34" charset="0"/>
+              </a:rPr>
+              <a:t>Estructura del Proyecto</a:t>
+            </a:r>
+          </a:p>
+        </p:txBody>
+      </p:sp>
+      <p:sp>
+        <p:nvSpPr>
+          <p:cNvPr id="4" name="Sub"/>
+          <p:cNvSpPr/>
+          <p:nvPr/>
+        </p:nvSpPr>
+        <p:spPr>
+          <a:xfrm>
+            <a:off x="457200" y="603504"/>
+            <a:ext cx="8229600" cy="228600"/>
+          </a:xfrm>
+          <a:prstGeom prst="rect">
+            <a:avLst/>
+          </a:prstGeom>
+          <a:noFill/>
+          <a:ln/>
+        </p:spPr>
+        <p:txBody>
+          <a:bodyPr wrap="square" lIns="0" tIns="0" rIns="0" bIns="0" rtlCol="0" anchor="ctr"/>
+          <a:lstStyle/>
+          <a:p>
+            <a:pPr marL="0" indent="0">
+              <a:buNone/>
+            </a:pPr>
+            <a:r>
+              <a:rPr lang="es-ES" sz="1000" dirty="0">
+                <a:solidFill>
+                  <a:srgbClr val="F0C060"/>
+                </a:solidFill>
+                <a:latin typeface="Calibri" pitchFamily="34" charset="0"/>
+              </a:rPr>
+              <a:t>TFG_Chollos/  ·  data/  ·  pyproject.toml  —  arquitectura modular por responsabilidad</a:t>
+            </a:r>
+          </a:p>
+        </p:txBody>
+      </p:sp>
+      <p:sp>
+        <p:nvSpPr>
+          <p:cNvPr id="10" name="Hdr0"/>
+          <p:cNvSpPr/>
+          <p:nvPr/>
+        </p:nvSpPr>
+        <p:spPr>
+          <a:xfrm>
+            <a:off x="182880" y="875880"/>
+            <a:ext cx="1755648" cy="228600"/>
+          </a:xfrm>
+          <a:prstGeom prst="rect">
+            <a:avLst/>
+          </a:prstGeom>
+          <a:solidFill>
+            <a:srgbClr val="5C3A1E"/>
+          </a:solidFill>
+          <a:ln/>
+        </p:spPr>
+        <p:txBody>
+          <a:bodyPr wrap="square" lIns="60960" tIns="30480" rIns="60960" bIns="30480" rtlCol="0" anchor="ctr"/>
+          <a:lstStyle/>
+          <a:p>
+            <a:pPr marL="0" indent="0">
+              <a:buNone/>
+            </a:pPr>
+            <a:r>
+              <a:rPr lang="es-ES" sz="900" b="1" dirty="0">
+                <a:solidFill>
+                  <a:srgbClr val="D4A843"/>
+                </a:solidFill>
+                <a:latin typeface="Calibri" pitchFamily="34" charset="0"/>
+              </a:rPr>
+              <a:t>🕸️  Scraping/</a:t>
+            </a:r>
+          </a:p>
+        </p:txBody>
+      </p:sp>
+      <p:sp>
+        <p:nvSpPr>
+          <p:cNvPr id="20" name="Code0"/>
+          <p:cNvSpPr/>
+          <p:nvPr/>
+        </p:nvSpPr>
+        <p:spPr>
+          <a:xfrm>
+            <a:off x="182880" y="1114200"/>
+            <a:ext cx="1755648" cy="3236400"/>
+          </a:xfrm>
+          <a:prstGeom prst="rect">
+            <a:avLst/>
+          </a:prstGeom>
+          <a:solidFill>
+            <a:srgbClr val="0D1117"/>
+          </a:solidFill>
+          <a:ln/>
+        </p:spPr>
+        <p:txBody>
+          <a:bodyPr wrap="square" lIns="91440" tIns="73440" rIns="73440" bIns="73440" rtlCol="0" anchor="t"/>
+          <a:lstStyle/>
+          <a:p>
+            <a:pPr marL="0" indent="0">
+              <a:buNone/>
+            </a:pPr>
+            <a:r>
+              <a:rPr lang="es-ES" sz="740" dirty="0">
+                <a:solidFill>
+                  <a:srgbClr val="F0C060"/>
+                </a:solidFill>
+                <a:latin typeface="Consolas" pitchFamily="34" charset="0"/>
+              </a:rPr>
+              <a:t>Generador_urls_generales.py</a:t>
+            </a:r>
+          </a:p>
+          <a:p>
+            <a:pPr marL="0" indent="0">
+              <a:buNone/>
+            </a:pPr>
+            <a:r>
+              <a:rPr lang="es-ES" sz="760" b="1" dirty="0">
+                <a:solidFill>
+                  <a:srgbClr val="FFFFFF"/>
+                </a:solidFill>
+                <a:latin typeface="Consolas" pitchFamily="34" charset="0"/>
+              </a:rPr>
+              <a:t>Scrp_estancias_provincias.py</a:t>
+            </a:r>
+          </a:p>
+          <a:p>
+            <a:pPr marL="0" indent="0">
+              <a:buNone/>
+            </a:pPr>
+            <a:r>
+              <a:rPr lang="es-ES" sz="700" dirty="0">
+                <a:solidFill>
+                  <a:srgbClr val="64748B"/>
+                </a:solidFill>
+                <a:latin typeface="Consolas" pitchFamily="34" charset="0"/>
+              </a:rPr>
+              <a:t>  # Selenium · listados</a:t>
+            </a:r>
+          </a:p>
+          <a:p>
+            <a:pPr marL="0" indent="0">
+              <a:buNone/>
+            </a:pPr>
+            <a:r>
+              <a:rPr lang="es-ES" sz="740" b="1" dirty="0">
+                <a:solidFill>
+                  <a:srgbClr val="FFFFFF"/>
+                </a:solidFill>
+                <a:latin typeface="Consolas" pitchFamily="34" charset="0"/>
+              </a:rPr>
+              <a:t>Scrp_caracteristicas_estancias.py</a:t>
+            </a:r>
+          </a:p>
+          <a:p>
+            <a:pPr marL="0" indent="0">
+              <a:buNone/>
+            </a:pPr>
+            <a:r>
+              <a:rPr lang="es-ES" sz="700" dirty="0">
+                <a:solidFill>
+                  <a:srgbClr val="64748B"/>
+                </a:solidFill>
+                <a:latin typeface="Consolas" pitchFamily="34" charset="0"/>
+              </a:rPr>
+              <a:t>  # Playwright · fichas detalle</a:t>
+            </a:r>
+          </a:p>
+          <a:p>
+            <a:pPr marL="0" indent="0">
+              <a:buNone/>
+            </a:pPr>
+            <a:r>
+              <a:rPr lang="es-ES" sz="740" dirty="0">
+                <a:solidFill>
+                  <a:srgbClr val="F0C060"/>
+                </a:solidFill>
+                <a:latin typeface="Consolas" pitchFamily="34" charset="0"/>
+              </a:rPr>
+              <a:t>obtener_coordenadas_centros.py</a:t>
+            </a:r>
+          </a:p>
+          <a:p>
+            <a:pPr marL="0" indent="0">
+              <a:buNone/>
+            </a:pPr>
+            <a:r>
+              <a:rPr lang="es-ES" sz="700" dirty="0">
+                <a:solidFill>
+                  <a:srgbClr val="64748B"/>
+                </a:solidFill>
+                <a:latin typeface="Consolas" pitchFamily="34" charset="0"/>
+              </a:rPr>
+              <a:t>  # Geocodificación Nominatim</a:t>
+            </a:r>
+          </a:p>
+          <a:p>
+            <a:pPr marL="0" indent="0">
+              <a:buNone/>
+            </a:pPr>
+            <a:r>
+              <a:rPr lang="es-ES" sz="760" dirty="0">
+                <a:solidFill>
+                  <a:srgbClr val="F0C060"/>
+                </a:solidFill>
+                <a:latin typeface="Consolas" pitchFamily="34" charset="0"/>
+              </a:rPr>
+              <a:t>patch_room_size.py</a:t>
+            </a:r>
+          </a:p>
+          <a:p>
+            <a:pPr marL="0" indent="0">
+              <a:buNone/>
+            </a:pPr>
+            <a:r>
+              <a:rPr lang="es-ES" sz="700" dirty="0">
+                <a:solidFill>
+                  <a:srgbClr val="64748B"/>
+                </a:solidFill>
+                <a:latin typeface="Consolas" pitchFamily="34" charset="0"/>
+              </a:rPr>
+              <a:t>  # ThreadPoolExecutor</a:t>
+            </a:r>
+          </a:p>
+          <a:p>
+            <a:pPr marL="0" indent="0">
+              <a:buNone/>
+            </a:pPr>
+            <a:r>
+              <a:rPr lang="es-ES" sz="700" dirty="0">
+                <a:solidFill>
+                  <a:srgbClr val="64748B"/>
+                </a:solidFill>
+                <a:latin typeface="Consolas" pitchFamily="34" charset="0"/>
+              </a:rPr>
+              <a:t>  # (5 workers)</a:t>
+            </a:r>
+          </a:p>
+        </p:txBody>
+      </p:sp>
+      <p:sp>
+        <p:nvSpPr>
+          <p:cNvPr id="11" name="Hdr1"/>
+          <p:cNvSpPr/>
+          <p:nvPr/>
+        </p:nvSpPr>
+        <p:spPr>
+          <a:xfrm>
+            <a:off x="1948248" y="875880"/>
+            <a:ext cx="1755648" cy="228600"/>
+          </a:xfrm>
+          <a:prstGeom prst="rect">
+            <a:avLst/>
+          </a:prstGeom>
+          <a:solidFill>
+            <a:srgbClr val="1B4E6B"/>
+          </a:solidFill>
+          <a:ln/>
+        </p:spPr>
+        <p:txBody>
+          <a:bodyPr wrap="square" lIns="60960" tIns="30480" rIns="60960" bIns="30480" rtlCol="0" anchor="ctr"/>
+          <a:lstStyle/>
+          <a:p>
+            <a:pPr marL="0" indent="0">
+              <a:buNone/>
+            </a:pPr>
+            <a:r>
+              <a:rPr lang="es-ES" sz="900" b="1" dirty="0">
+                <a:solidFill>
+                  <a:srgbClr val="D4A843"/>
+                </a:solidFill>
+                <a:latin typeface="Calibri" pitchFamily="34" charset="0"/>
+              </a:rPr>
+              <a:t>🧹  Cleaning/</a:t>
+            </a:r>
+          </a:p>
+        </p:txBody>
+      </p:sp>
+      <p:sp>
+        <p:nvSpPr>
+          <p:cNvPr id="21" name="Code1"/>
+          <p:cNvSpPr/>
+          <p:nvPr/>
+        </p:nvSpPr>
+        <p:spPr>
+          <a:xfrm>
+            <a:off x="1948248" y="1114200"/>
+            <a:ext cx="1755648" cy="3236400"/>
+          </a:xfrm>
+          <a:prstGeom prst="rect">
+            <a:avLst/>
+          </a:prstGeom>
+          <a:solidFill>
+            <a:srgbClr val="0D1117"/>
+          </a:solidFill>
+          <a:ln/>
+        </p:spPr>
+        <p:txBody>
+          <a:bodyPr wrap="square" lIns="91440" tIns="73440" rIns="73440" bIns="73440" rtlCol="0" anchor="t"/>
+          <a:lstStyle/>
+          <a:p>
+            <a:pPr marL="0" indent="0">
+              <a:buNone/>
+            </a:pPr>
+            <a:r>
+              <a:rPr lang="es-ES" sz="800" b="1" dirty="0">
+                <a:solidFill>
+                  <a:srgbClr val="FFFFFF"/>
+                </a:solidFill>
+                <a:latin typeface="Consolas" pitchFamily="34" charset="0"/>
+              </a:rPr>
+              <a:t>preprocessing.py</a:t>
+            </a:r>
+          </a:p>
+          <a:p>
+            <a:pPr marL="0" indent="0">
+              <a:buNone/>
+            </a:pPr>
+            <a:r>
+              <a:rPr lang="es-ES" sz="710" dirty="0">
+                <a:solidFill>
+                  <a:srgbClr val="64748B"/>
+                </a:solidFill>
+                <a:latin typeface="Consolas" pitchFamily="34" charset="0"/>
+              </a:rPr>
+              <a:t>  # Limpieza y estructuración</a:t>
+            </a:r>
+          </a:p>
+          <a:p>
+            <a:pPr marL="0" indent="0">
+              <a:buNone/>
+            </a:pPr>
+            <a:r>
+              <a:rPr lang="es-ES" sz="500" dirty="0">
+                <a:latin typeface="Consolas" pitchFamily="34" charset="0"/>
+              </a:rPr>
+              <a:t> </a:t>
+            </a:r>
+          </a:p>
+          <a:p>
+            <a:pPr marL="0" indent="0">
+              <a:buNone/>
+            </a:pPr>
+            <a:r>
+              <a:rPr lang="es-ES" sz="800" b="1" dirty="0">
+                <a:solidFill>
+                  <a:srgbClr val="FFFFFF"/>
+                </a:solidFill>
+                <a:latin typeface="Consolas" pitchFamily="34" charset="0"/>
+              </a:rPr>
+              <a:t>post_analisis.py</a:t>
+            </a:r>
+          </a:p>
+          <a:p>
+            <a:pPr marL="0" indent="0">
+              <a:buNone/>
+            </a:pPr>
+            <a:r>
+              <a:rPr lang="es-ES" sz="710" dirty="0">
+                <a:solidFill>
+                  <a:srgbClr val="64748B"/>
+                </a:solidFill>
+                <a:latin typeface="Consolas" pitchFamily="34" charset="0"/>
+              </a:rPr>
+              <a:t>  # Eliminación de outliers</a:t>
+            </a:r>
+          </a:p>
+          <a:p>
+            <a:pPr marL="0" indent="0">
+              <a:buNone/>
+            </a:pPr>
+            <a:r>
+              <a:rPr lang="es-ES" sz="710" dirty="0">
+                <a:solidFill>
+                  <a:srgbClr val="64748B"/>
+                </a:solidFill>
+                <a:latin typeface="Consolas" pitchFamily="34" charset="0"/>
+              </a:rPr>
+              <a:t>  # IQR · Tukey</a:t>
+            </a:r>
+          </a:p>
+          <a:p>
+            <a:pPr marL="0" indent="0">
+              <a:buNone/>
+            </a:pPr>
+            <a:r>
+              <a:rPr lang="es-ES" sz="500" dirty="0">
+                <a:latin typeface="Consolas" pitchFamily="34" charset="0"/>
+              </a:rPr>
+              <a:t> </a:t>
+            </a:r>
+          </a:p>
+          <a:p>
+            <a:pPr marL="0" indent="0">
+              <a:buNone/>
+            </a:pPr>
+            <a:r>
+              <a:rPr lang="es-ES" sz="800" b="1" dirty="0">
+                <a:solidFill>
+                  <a:srgbClr val="FFFFFF"/>
+                </a:solidFill>
+                <a:latin typeface="Consolas" pitchFamily="34" charset="0"/>
+              </a:rPr>
+              <a:t>encoding.py</a:t>
+            </a:r>
+          </a:p>
+          <a:p>
+            <a:pPr marL="0" indent="0">
+              <a:buNone/>
+            </a:pPr>
+            <a:r>
+              <a:rPr lang="es-ES" sz="710" dirty="0">
+                <a:solidFill>
+                  <a:srgbClr val="64748B"/>
+                </a:solidFill>
+                <a:latin typeface="Consolas" pitchFamily="34" charset="0"/>
+              </a:rPr>
+              <a:t>  # Codificación para ML</a:t>
+            </a:r>
+          </a:p>
+          <a:p>
+            <a:pPr marL="0" indent="0">
+              <a:buNone/>
+            </a:pPr>
+            <a:r>
+              <a:rPr lang="es-ES" sz="710" dirty="0">
+                <a:solidFill>
+                  <a:srgbClr val="64748B"/>
+                </a:solidFill>
+                <a:latin typeface="Consolas" pitchFamily="34" charset="0"/>
+              </a:rPr>
+              <a:t>  # LabelEnc · OHE · joblib</a:t>
+            </a:r>
+          </a:p>
+        </p:txBody>
+      </p:sp>
+      <p:sp>
+        <p:nvSpPr>
+          <p:cNvPr id="12" name="Hdr2"/>
+          <p:cNvSpPr/>
+          <p:nvPr/>
+        </p:nvSpPr>
+        <p:spPr>
+          <a:xfrm>
+            <a:off x="3713616" y="875880"/>
+            <a:ext cx="1755648" cy="228600"/>
+          </a:xfrm>
+          <a:prstGeom prst="rect">
+            <a:avLst/>
+          </a:prstGeom>
+          <a:solidFill>
+            <a:srgbClr val="1F5C40"/>
+          </a:solidFill>
+          <a:ln/>
+        </p:spPr>
+        <p:txBody>
+          <a:bodyPr wrap="square" lIns="60960" tIns="30480" rIns="60960" bIns="30480" rtlCol="0" anchor="ctr"/>
+          <a:lstStyle/>
+          <a:p>
+            <a:pPr marL="0" indent="0">
+              <a:buNone/>
+            </a:pPr>
+            <a:r>
+              <a:rPr lang="es-ES" sz="900" b="1" dirty="0">
+                <a:solidFill>
+                  <a:srgbClr val="D4A843"/>
+                </a:solidFill>
+                <a:latin typeface="Calibri" pitchFamily="34" charset="0"/>
+              </a:rPr>
+              <a:t>🧠  Modelizacion/</a:t>
+            </a:r>
+          </a:p>
+        </p:txBody>
+      </p:sp>
+      <p:sp>
+        <p:nvSpPr>
+          <p:cNvPr id="22" name="Code2"/>
+          <p:cNvSpPr/>
+          <p:nvPr/>
+        </p:nvSpPr>
+        <p:spPr>
+          <a:xfrm>
+            <a:off x="3713616" y="1114200"/>
+            <a:ext cx="1755648" cy="3236400"/>
+          </a:xfrm>
+          <a:prstGeom prst="rect">
+            <a:avLst/>
+          </a:prstGeom>
+          <a:solidFill>
+            <a:srgbClr val="0D1117"/>
+          </a:solidFill>
+          <a:ln/>
+        </p:spPr>
+        <p:txBody>
+          <a:bodyPr wrap="square" lIns="91440" tIns="73440" rIns="73440" bIns="73440" rtlCol="0" anchor="t"/>
+          <a:lstStyle/>
+          <a:p>
+            <a:pPr marL="0" indent="0">
+              <a:buNone/>
+            </a:pPr>
+            <a:r>
+              <a:rPr lang="es-ES" sz="800" b="1" dirty="0">
+                <a:solidFill>
+                  <a:srgbClr val="FFFFFF"/>
+                </a:solidFill>
+                <a:latin typeface="Consolas" pitchFamily="34" charset="0"/>
+              </a:rPr>
+              <a:t>Modelizacion.py</a:t>
+            </a:r>
+          </a:p>
+          <a:p>
+            <a:pPr marL="0" indent="0">
+              <a:buNone/>
+            </a:pPr>
+            <a:r>
+              <a:rPr lang="es-ES" sz="710" dirty="0">
+                <a:solidFill>
+                  <a:srgbClr val="64748B"/>
+                </a:solidFill>
+                <a:latin typeface="Consolas" pitchFamily="34" charset="0"/>
+              </a:rPr>
+              <a:t>  # Entrenamiento y evaluación</a:t>
+            </a:r>
+          </a:p>
+          <a:p>
+            <a:pPr marL="0" indent="0">
+              <a:buNone/>
+            </a:pPr>
+            <a:r>
+              <a:rPr lang="es-ES" sz="710" dirty="0">
+                <a:solidFill>
+                  <a:srgbClr val="64748B"/>
+                </a:solidFill>
+                <a:latin typeface="Consolas" pitchFamily="34" charset="0"/>
+              </a:rPr>
+              <a:t>  # LR · DT · RF · XGBoost</a:t>
+            </a:r>
+          </a:p>
+          <a:p>
+            <a:pPr marL="0" indent="0">
+              <a:buNone/>
+            </a:pPr>
+            <a:r>
+              <a:rPr lang="es-ES" sz="500" dirty="0">
+                <a:latin typeface="Consolas" pitchFamily="34" charset="0"/>
+              </a:rPr>
+              <a:t> </a:t>
+            </a:r>
+          </a:p>
+          <a:p>
+            <a:pPr marL="0" indent="0">
+              <a:buNone/>
+            </a:pPr>
+            <a:r>
+              <a:rPr lang="es-ES" sz="800" b="1" dirty="0">
+                <a:solidFill>
+                  <a:srgbClr val="FFFFFF"/>
+                </a:solidFill>
+                <a:latin typeface="Consolas" pitchFamily="34" charset="0"/>
+              </a:rPr>
+              <a:t>transformaciones.py</a:t>
+            </a:r>
+          </a:p>
+          <a:p>
+            <a:pPr marL="0" indent="0">
+              <a:buNone/>
+            </a:pPr>
+            <a:r>
+              <a:rPr lang="es-ES" sz="710" dirty="0">
+                <a:solidFill>
+                  <a:srgbClr val="64748B"/>
+                </a:solidFill>
+                <a:latin typeface="Consolas" pitchFamily="34" charset="0"/>
+              </a:rPr>
+              <a:t>  # Partición 70 / 15 / 15</a:t>
+            </a:r>
+          </a:p>
+          <a:p>
+            <a:pPr marL="0" indent="0">
+              <a:buNone/>
+            </a:pPr>
+            <a:r>
+              <a:rPr lang="es-ES" sz="710" dirty="0">
+                <a:solidFill>
+                  <a:srgbClr val="64748B"/>
+                </a:solidFill>
+                <a:latin typeface="Consolas" pitchFamily="34" charset="0"/>
+              </a:rPr>
+              <a:t>  # StandardScaler</a:t>
+            </a:r>
+          </a:p>
+          <a:p>
+            <a:pPr marL="0" indent="0">
+              <a:buNone/>
+            </a:pPr>
+            <a:r>
+              <a:rPr lang="es-ES" sz="500" dirty="0">
+                <a:latin typeface="Consolas" pitchFamily="34" charset="0"/>
+              </a:rPr>
+              <a:t> </a:t>
+            </a:r>
+          </a:p>
+          <a:p>
+            <a:pPr marL="0" indent="0">
+              <a:buNone/>
+            </a:pPr>
+            <a:r>
+              <a:rPr lang="es-ES" sz="800" b="1" dirty="0">
+                <a:solidFill>
+                  <a:srgbClr val="D4A843"/>
+                </a:solidFill>
+                <a:latin typeface="Consolas" pitchFamily="34" charset="0"/>
+              </a:rPr>
+              <a:t>Graficos/</a:t>
+            </a:r>
+          </a:p>
+          <a:p>
+            <a:pPr marL="0" indent="0">
+              <a:buNone/>
+            </a:pPr>
+            <a:r>
+              <a:rPr lang="es-ES" sz="760" dirty="0">
+                <a:solidFill>
+                  <a:srgbClr val="F0C060"/>
+                </a:solidFill>
+                <a:latin typeface="Consolas" pitchFamily="34" charset="0"/>
+              </a:rPr>
+              <a:t>  Grafico_Alojamientos.py</a:t>
+            </a:r>
+          </a:p>
+          <a:p>
+            <a:pPr marL="0" indent="0">
+              <a:buNone/>
+            </a:pPr>
+            <a:r>
+              <a:rPr lang="es-ES" sz="780" b="1" dirty="0">
+                <a:solidFill>
+                  <a:srgbClr val="4FC3F7"/>
+                </a:solidFill>
+                <a:latin typeface="Consolas" pitchFamily="34" charset="0"/>
+              </a:rPr>
+              <a:t>  correlacion.R</a:t>
+            </a:r>
+          </a:p>
+          <a:p>
+            <a:pPr marL="0" indent="0">
+              <a:buNone/>
+            </a:pPr>
+            <a:r>
+              <a:rPr lang="es-ES" sz="700" dirty="0">
+                <a:solidFill>
+                  <a:srgbClr val="4FC3F7"/>
+                </a:solidFill>
+                <a:latin typeface="Consolas" pitchFamily="34" charset="0"/>
+              </a:rPr>
+              <a:t>  # Pearson · R 4.x · arrow</a:t>
+            </a:r>
+          </a:p>
+        </p:txBody>
+      </p:sp>
+      <p:sp>
+        <p:nvSpPr>
+          <p:cNvPr id="13" name="Hdr3"/>
+          <p:cNvSpPr/>
+          <p:nvPr/>
+        </p:nvSpPr>
+        <p:spPr>
+          <a:xfrm>
+            <a:off x="5478984" y="875880"/>
+            <a:ext cx="1755648" cy="228600"/>
+          </a:xfrm>
+          <a:prstGeom prst="rect">
+            <a:avLst/>
+          </a:prstGeom>
+          <a:solidFill>
+            <a:srgbClr val="5C1A1A"/>
+          </a:solidFill>
+          <a:ln/>
+        </p:spPr>
+        <p:txBody>
+          <a:bodyPr wrap="square" lIns="60960" tIns="30480" rIns="60960" bIns="30480" rtlCol="0" anchor="ctr"/>
+          <a:lstStyle/>
+          <a:p>
+            <a:pPr marL="0" indent="0">
+              <a:buNone/>
+            </a:pPr>
+            <a:r>
+              <a:rPr lang="es-ES" sz="900" b="1" dirty="0">
+                <a:solidFill>
+                  <a:srgbClr val="D4A843"/>
+                </a:solidFill>
+                <a:latin typeface="Calibri" pitchFamily="34" charset="0"/>
+              </a:rPr>
+              <a:t>🖥️  App/</a:t>
+            </a:r>
+          </a:p>
+        </p:txBody>
+      </p:sp>
+      <p:sp>
+        <p:nvSpPr>
+          <p:cNvPr id="23" name="Code3"/>
+          <p:cNvSpPr/>
+          <p:nvPr/>
+        </p:nvSpPr>
+        <p:spPr>
+          <a:xfrm>
+            <a:off x="5478984" y="1114200"/>
+            <a:ext cx="1755648" cy="3236400"/>
+          </a:xfrm>
+          <a:prstGeom prst="rect">
+            <a:avLst/>
+          </a:prstGeom>
+          <a:solidFill>
+            <a:srgbClr val="0D1117"/>
+          </a:solidFill>
+          <a:ln/>
+        </p:spPr>
+        <p:txBody>
+          <a:bodyPr wrap="square" lIns="91440" tIns="73440" rIns="73440" bIns="73440" rtlCol="0" anchor="t"/>
+          <a:lstStyle/>
+          <a:p>
+            <a:pPr marL="0" indent="0">
+              <a:buNone/>
+            </a:pPr>
+            <a:r>
+              <a:rPr lang="es-ES" sz="790" b="1" dirty="0">
+                <a:solidFill>
+                  <a:srgbClr val="FFFFFF"/>
+                </a:solidFill>
+                <a:latin typeface="Consolas" pitchFamily="34" charset="0"/>
+              </a:rPr>
+              <a:t>main.py</a:t>
+            </a:r>
+          </a:p>
+          <a:p>
+            <a:pPr marL="0" indent="0">
+              <a:buNone/>
+            </a:pPr>
+            <a:r>
+              <a:rPr lang="es-ES" sz="710" dirty="0">
+                <a:solidFill>
+                  <a:srgbClr val="64748B"/>
+                </a:solidFill>
+                <a:latin typeface="Consolas" pitchFamily="34" charset="0"/>
+              </a:rPr>
+              <a:t>  # Página principal (mapa)</a:t>
+            </a:r>
+          </a:p>
+          <a:p>
+            <a:pPr marL="0" indent="0">
+              <a:buNone/>
+            </a:pPr>
+            <a:r>
+              <a:rPr lang="es-ES" sz="780" dirty="0">
+                <a:solidFill>
+                  <a:srgbClr val="F0C060"/>
+                </a:solidFill>
+                <a:latin typeface="Consolas" pitchFamily="34" charset="0"/>
+              </a:rPr>
+              <a:t>run.py  # Lanzador</a:t>
+            </a:r>
+          </a:p>
+          <a:p>
+            <a:pPr marL="0" indent="0">
+              <a:buNone/>
+            </a:pPr>
+            <a:r>
+              <a:rPr lang="es-ES" sz="780" dirty="0">
+                <a:solidFill>
+                  <a:srgbClr val="F0C060"/>
+                </a:solidFill>
+                <a:latin typeface="Consolas" pitchFamily="34" charset="0"/>
+              </a:rPr>
+              <a:t>graficos_analisis.py</a:t>
+            </a:r>
+          </a:p>
+          <a:p>
+            <a:pPr marL="0" indent="0">
+              <a:buNone/>
+            </a:pPr>
+            <a:r>
+              <a:rPr lang="es-ES" sz="790" b="1" dirty="0">
+                <a:solidFill>
+                  <a:srgbClr val="FFFFFF"/>
+                </a:solidFill>
+                <a:latin typeface="Consolas" pitchFamily="34" charset="0"/>
+              </a:rPr>
+              <a:t>_predictor.py</a:t>
+            </a:r>
+          </a:p>
+          <a:p>
+            <a:pPr marL="0" indent="0">
+              <a:buNone/>
+            </a:pPr>
+            <a:r>
+              <a:rPr lang="es-ES" sz="710" dirty="0">
+                <a:solidFill>
+                  <a:srgbClr val="64748B"/>
+                </a:solidFill>
+                <a:latin typeface="Consolas" pitchFamily="34" charset="0"/>
+              </a:rPr>
+              <a:t>  # Predicción (joblib)</a:t>
+            </a:r>
+          </a:p>
+          <a:p>
+            <a:pPr marL="0" indent="0">
+              <a:buNone/>
+            </a:pPr>
+            <a:r>
+              <a:rPr lang="es-ES" sz="790" b="1" dirty="0">
+                <a:solidFill>
+                  <a:srgbClr val="FFFFFF"/>
+                </a:solidFill>
+                <a:latin typeface="Consolas" pitchFamily="34" charset="0"/>
+              </a:rPr>
+              <a:t>_scraper_app.py</a:t>
+            </a:r>
+          </a:p>
+          <a:p>
+            <a:pPr marL="0" indent="0">
+              <a:buNone/>
+            </a:pPr>
+            <a:r>
+              <a:rPr lang="es-ES" sz="710" dirty="0">
+                <a:solidFill>
+                  <a:srgbClr val="64748B"/>
+                </a:solidFill>
+                <a:latin typeface="Consolas" pitchFamily="34" charset="0"/>
+              </a:rPr>
+              <a:t>  # Scraping en real-time</a:t>
+            </a:r>
+          </a:p>
+          <a:p>
+            <a:pPr marL="0" indent="0">
+              <a:buNone/>
+            </a:pPr>
+            <a:r>
+              <a:rPr lang="es-ES" sz="790" b="1" dirty="0">
+                <a:solidFill>
+                  <a:srgbClr val="FFFFFF"/>
+                </a:solidFill>
+                <a:latin typeface="Consolas" pitchFamily="34" charset="0"/>
+              </a:rPr>
+              <a:t>_feature_engineering.py</a:t>
+            </a:r>
+          </a:p>
+          <a:p>
+            <a:pPr marL="0" indent="0">
+              <a:buNone/>
+            </a:pPr>
+            <a:r>
+              <a:rPr lang="es-ES" sz="710" dirty="0">
+                <a:solidFill>
+                  <a:srgbClr val="64748B"/>
+                </a:solidFill>
+                <a:latin typeface="Consolas" pitchFamily="34" charset="0"/>
+              </a:rPr>
+              <a:t>  # Preprocesado predicción</a:t>
+            </a:r>
+          </a:p>
+          <a:p>
+            <a:pPr marL="0" indent="0">
+              <a:buNone/>
+            </a:pPr>
+            <a:r>
+              <a:rPr lang="es-ES" sz="800" b="1" dirty="0">
+                <a:solidFill>
+                  <a:srgbClr val="D4A843"/>
+                </a:solidFill>
+                <a:latin typeface="Consolas" pitchFamily="34" charset="0"/>
+              </a:rPr>
+              <a:t>pages/</a:t>
+            </a:r>
+          </a:p>
+          <a:p>
+            <a:pPr marL="0" indent="0">
+              <a:buNone/>
+            </a:pPr>
+            <a:r>
+              <a:rPr lang="es-ES" sz="800" b="1" dirty="0">
+                <a:solidFill>
+                  <a:srgbClr val="FFFFFF"/>
+                </a:solidFill>
+                <a:latin typeface="Consolas" pitchFamily="34" charset="0"/>
+              </a:rPr>
+              <a:t>  Busqueda.py</a:t>
+            </a:r>
+          </a:p>
+          <a:p>
+            <a:pPr marL="0" indent="0">
+              <a:buNone/>
+            </a:pPr>
+            <a:r>
+              <a:rPr lang="es-ES" sz="710" dirty="0">
+                <a:solidFill>
+                  <a:srgbClr val="64748B"/>
+                </a:solidFill>
+                <a:latin typeface="Consolas" pitchFamily="34" charset="0"/>
+              </a:rPr>
+              <a:t>  # Búsqueda de chollos</a:t>
+            </a:r>
+          </a:p>
+        </p:txBody>
+      </p:sp>
+      <p:sp>
+        <p:nvSpPr>
+          <p:cNvPr id="14" name="Hdr4"/>
+          <p:cNvSpPr/>
+          <p:nvPr/>
+        </p:nvSpPr>
+        <p:spPr>
+          <a:xfrm>
+            <a:off x="7244352" y="875880"/>
+            <a:ext cx="1755648" cy="228600"/>
+          </a:xfrm>
+          <a:prstGeom prst="rect">
+            <a:avLst/>
+          </a:prstGeom>
+          <a:solidFill>
+            <a:srgbClr val="2C4A1A"/>
+          </a:solidFill>
+          <a:ln/>
+        </p:spPr>
+        <p:txBody>
+          <a:bodyPr wrap="square" lIns="60960" tIns="30480" rIns="60960" bIns="30480" rtlCol="0" anchor="ctr"/>
+          <a:lstStyle/>
+          <a:p>
+            <a:pPr marL="0" indent="0">
+              <a:buNone/>
+            </a:pPr>
+            <a:r>
+              <a:rPr lang="es-ES" sz="900" b="1" dirty="0">
+                <a:solidFill>
+                  <a:srgbClr val="D4A843"/>
+                </a:solidFill>
+                <a:latin typeface="Calibri" pitchFamily="34" charset="0"/>
+              </a:rPr>
+              <a:t>💾  data/</a:t>
+            </a:r>
+          </a:p>
+        </p:txBody>
+      </p:sp>
+      <p:sp>
+        <p:nvSpPr>
+          <p:cNvPr id="24" name="Code4"/>
+          <p:cNvSpPr/>
+          <p:nvPr/>
+        </p:nvSpPr>
+        <p:spPr>
+          <a:xfrm>
+            <a:off x="7244352" y="1114200"/>
+            <a:ext cx="1755648" cy="3236400"/>
+          </a:xfrm>
+          <a:prstGeom prst="rect">
+            <a:avLst/>
+          </a:prstGeom>
+          <a:solidFill>
+            <a:srgbClr val="0D1117"/>
+          </a:solidFill>
+          <a:ln/>
+        </p:spPr>
+        <p:txBody>
+          <a:bodyPr wrap="square" lIns="91440" tIns="73440" rIns="73440" bIns="73440" rtlCol="0" anchor="t"/>
+          <a:lstStyle/>
+          <a:p>
+            <a:pPr marL="0" indent="0">
+              <a:buNone/>
+            </a:pPr>
+            <a:r>
+              <a:rPr lang="es-ES" sz="820" b="1" dirty="0">
+                <a:solidFill>
+                  <a:srgbClr val="F0C060"/>
+                </a:solidFill>
+                <a:latin typeface="Consolas" pitchFamily="34" charset="0"/>
+              </a:rPr>
+              <a:t>raw/</a:t>
+            </a:r>
+          </a:p>
+          <a:p>
+            <a:pPr marL="0" indent="0">
+              <a:buNone/>
+            </a:pPr>
+            <a:r>
+              <a:rPr lang="es-ES" sz="710" dirty="0">
+                <a:solidFill>
+                  <a:srgbClr val="64748B"/>
+                </a:solidFill>
+                <a:latin typeface="Consolas" pitchFamily="34" charset="0"/>
+              </a:rPr>
+              <a:t>  # Datos brutos del</a:t>
+            </a:r>
+          </a:p>
+          <a:p>
+            <a:pPr marL="0" indent="0">
+              <a:buNone/>
+            </a:pPr>
+            <a:r>
+              <a:rPr lang="es-ES" sz="710" dirty="0">
+                <a:solidFill>
+                  <a:srgbClr val="64748B"/>
+                </a:solidFill>
+                <a:latin typeface="Consolas" pitchFamily="34" charset="0"/>
+              </a:rPr>
+              <a:t>  # scraping (CSV)</a:t>
+            </a:r>
+          </a:p>
+          <a:p>
+            <a:pPr marL="0" indent="0">
+              <a:buNone/>
+            </a:pPr>
+            <a:r>
+              <a:rPr lang="es-ES" sz="500" dirty="0">
+                <a:latin typeface="Consolas" pitchFamily="34" charset="0"/>
+              </a:rPr>
+              <a:t> </a:t>
+            </a:r>
+          </a:p>
+          <a:p>
+            <a:pPr marL="0" indent="0">
+              <a:buNone/>
+            </a:pPr>
+            <a:r>
+              <a:rPr lang="es-ES" sz="820" b="1" dirty="0">
+                <a:solidFill>
+                  <a:srgbClr val="F0C060"/>
+                </a:solidFill>
+                <a:latin typeface="Consolas" pitchFamily="34" charset="0"/>
+              </a:rPr>
+              <a:t>processed/</a:t>
+            </a:r>
+          </a:p>
+          <a:p>
+            <a:pPr marL="0" indent="0">
+              <a:buNone/>
+            </a:pPr>
+            <a:r>
+              <a:rPr lang="es-ES" sz="710" dirty="0">
+                <a:solidFill>
+                  <a:srgbClr val="64748B"/>
+                </a:solidFill>
+                <a:latin typeface="Consolas" pitchFamily="34" charset="0"/>
+              </a:rPr>
+              <a:t>  # Limpios + codificados</a:t>
+            </a:r>
+          </a:p>
+          <a:p>
+            <a:pPr marL="0" indent="0">
+              <a:buNone/>
+            </a:pPr>
+            <a:r>
+              <a:rPr lang="es-ES" sz="710" dirty="0">
+                <a:solidFill>
+                  <a:srgbClr val="64748B"/>
+                </a:solidFill>
+                <a:latin typeface="Consolas" pitchFamily="34" charset="0"/>
+              </a:rPr>
+              <a:t>  # (.parquet)</a:t>
+            </a:r>
+          </a:p>
+          <a:p>
+            <a:pPr marL="0" indent="0">
+              <a:buNone/>
+            </a:pPr>
+            <a:r>
+              <a:rPr lang="es-ES" sz="500" dirty="0">
+                <a:latin typeface="Consolas" pitchFamily="34" charset="0"/>
+              </a:rPr>
+              <a:t> </a:t>
+            </a:r>
+          </a:p>
+          <a:p>
+            <a:pPr marL="0" indent="0">
+              <a:buNone/>
+            </a:pPr>
+            <a:r>
+              <a:rPr lang="es-ES" sz="820" b="1" dirty="0">
+                <a:solidFill>
+                  <a:srgbClr val="16A34A"/>
+                </a:solidFill>
+                <a:latin typeface="Consolas" pitchFamily="34" charset="0"/>
+              </a:rPr>
+              <a:t>models/</a:t>
+            </a:r>
+          </a:p>
+          <a:p>
+            <a:pPr marL="0" indent="0">
+              <a:buNone/>
+            </a:pPr>
+            <a:r>
+              <a:rPr lang="es-ES" sz="710" dirty="0">
+                <a:solidFill>
+                  <a:srgbClr val="64748B"/>
+                </a:solidFill>
+                <a:latin typeface="Consolas" pitchFamily="34" charset="0"/>
+              </a:rPr>
+              <a:t>  # .pkl entrenados</a:t>
+            </a:r>
+          </a:p>
+          <a:p>
+            <a:pPr marL="0" indent="0">
+              <a:buNone/>
+            </a:pPr>
+            <a:r>
+              <a:rPr lang="es-ES" sz="500" dirty="0">
+                <a:latin typeface="Consolas" pitchFamily="34" charset="0"/>
+              </a:rPr>
+              <a:t> </a:t>
+            </a:r>
+          </a:p>
+          <a:p>
+            <a:pPr marL="0" indent="0">
+              <a:buNone/>
+            </a:pPr>
+            <a:r>
+              <a:rPr lang="es-ES" sz="820" b="1" dirty="0">
+                <a:solidFill>
+                  <a:srgbClr val="F0C060"/>
+                </a:solidFill>
+                <a:latin typeface="Consolas" pitchFamily="34" charset="0"/>
+              </a:rPr>
+              <a:t>resultados/</a:t>
+            </a:r>
+          </a:p>
+          <a:p>
+            <a:pPr marL="0" indent="0">
+              <a:buNone/>
+            </a:pPr>
+            <a:r>
+              <a:rPr lang="es-ES" sz="710" dirty="0">
+                <a:solidFill>
+                  <a:srgbClr val="64748B"/>
+                </a:solidFill>
+                <a:latin typeface="Consolas" pitchFamily="34" charset="0"/>
+              </a:rPr>
+              <a:t>  # Métricas evaluación</a:t>
+            </a:r>
+          </a:p>
+        </p:txBody>
+      </p:sp>
+      <p:sp>
+        <p:nvSpPr>
+          <p:cNvPr id="30" name="Bottom"/>
+          <p:cNvSpPr/>
+          <p:nvPr/>
+        </p:nvSpPr>
+        <p:spPr>
+          <a:xfrm>
+            <a:off x="182880" y="4390920"/>
+            <a:ext cx="8778240" cy="274320"/>
+          </a:xfrm>
+          <a:prstGeom prst="rect">
+            <a:avLst/>
+          </a:prstGeom>
+          <a:solidFill>
+            <a:srgbClr val="1E3A5F"/>
+          </a:solidFill>
+          <a:ln>
+            <a:solidFill>
+              <a:srgbClr val="2A5080"/>
+            </a:solidFill>
+          </a:ln>
+        </p:spPr>
+        <p:txBody>
+          <a:bodyPr wrap="square" lIns="182880" tIns="45720" rIns="182880" bIns="45720" rtlCol="0" anchor="ctr"/>
+          <a:lstStyle/>
+          <a:p>
+            <a:pPr marL="0" indent="0">
+              <a:buNone/>
+            </a:pPr>
+            <a:r>
+              <a:rPr lang="es-ES" sz="880" b="1" dirty="0">
+                <a:solidFill>
+                  <a:srgbClr val="D4A843"/>
+                </a:solidFill>
+                <a:latin typeface="Consolas" pitchFamily="34" charset="0"/>
+              </a:rPr>
+              <a:t>pyproject.toml</a:t>
+            </a:r>
+            <a:r>
+              <a:rPr lang="es-ES" sz="820" dirty="0">
                 <a:solidFill>
                   <a:srgbClr val="CBD5E1"/>
                 </a:solidFill>
                 <a:latin typeface="Calibri" pitchFamily="34" charset="0"/>
-                <a:ea typeface="Calibri" pitchFamily="34" charset="-122"/>
-                <a:cs typeface="Calibri" pitchFamily="34" charset="-120"/>
-              </a:rPr>
-              <a:t>11</a:t>
-            </a:r>
-            <a:endParaRPr lang="en-US" sz="900" dirty="0"/>
+              </a:rPr>
+              <a:t>  ·  uv · dependencias reproducibles · pip install -e .</a:t>
+            </a:r>
+            <a:r>
+              <a:rPr lang="es-ES" sz="820" dirty="0">
+                <a:latin typeface="Calibri" pitchFamily="34" charset="0"/>
+              </a:rPr>
+              <a:t>          </a:t>
+            </a:r>
+            <a:r>
+              <a:rPr lang="es-ES" sz="880" b="1" dirty="0">
+                <a:solidFill>
+                  <a:srgbClr val="D4A843"/>
+                </a:solidFill>
+                <a:latin typeface="Consolas" pitchFamily="34" charset="0"/>
+              </a:rPr>
+              <a:t>utils.py</a:t>
+            </a:r>
+            <a:r>
+              <a:rPr lang="es-ES" sz="820" dirty="0">
+                <a:solidFill>
+                  <a:srgbClr val="CBD5E1"/>
+                </a:solidFill>
+                <a:latin typeface="Calibri" pitchFamily="34" charset="0"/>
+              </a:rPr>
+              <a:t>  ·  conseguir_ruta_general_TFG() · configurar_logger() · python-dotenv</a:t>
+            </a:r>
+          </a:p>
+        </p:txBody>
+      </p:sp>
+      <p:sp>
+        <p:nvSpPr>
+          <p:cNvPr id="97" name="Footer"/>
+          <p:cNvSpPr/>
+          <p:nvPr/>
+        </p:nvSpPr>
+        <p:spPr>
+          <a:xfrm>
+            <a:off x="457200" y="4826520"/>
+            <a:ext cx="7772400" cy="200000"/>
+          </a:xfrm>
+          <a:prstGeom prst="rect">
+            <a:avLst/>
+          </a:prstGeom>
+          <a:noFill/>
+          <a:ln/>
+        </p:spPr>
+        <p:txBody>
+          <a:bodyPr wrap="square" lIns="0" tIns="0" rIns="0" bIns="0" rtlCol="0" anchor="ctr"/>
+          <a:lstStyle/>
+          <a:p>
+            <a:pPr marL="0" indent="0">
+              <a:buNone/>
+            </a:pPr>
+            <a:r>
+              <a:rPr lang="es-ES" sz="800" dirty="0">
+                <a:solidFill>
+                  <a:srgbClr val="4A6080"/>
+                </a:solidFill>
+                <a:latin typeface="Calibri" pitchFamily="34" charset="0"/>
+              </a:rPr>
+              <a:t>TFG · Detector de Chollos en Andalucía · Mario Jiménez · Universidad de Sevilla</a:t>
+            </a:r>
+          </a:p>
+        </p:txBody>
+      </p:sp>
+      <p:sp>
+        <p:nvSpPr>
+          <p:cNvPr id="98" name="PageNum"/>
+          <p:cNvSpPr/>
+          <p:nvPr/>
+        </p:nvSpPr>
+        <p:spPr>
+          <a:xfrm>
+            <a:off x="8594640" y="4754880"/>
+            <a:ext cx="365760" cy="228600"/>
+          </a:xfrm>
+          <a:prstGeom prst="rect">
+            <a:avLst/>
+          </a:prstGeom>
+          <a:noFill/>
+          <a:ln/>
+        </p:spPr>
+        <p:txBody>
+          <a:bodyPr wrap="square" lIns="0" tIns="0" rIns="0" bIns="0" rtlCol="0" anchor="ctr"/>
+          <a:lstStyle/>
+          <a:p>
+            <a:pPr marL="0" indent="0">
+              <a:buNone/>
+            </a:pPr>
+            <a:endParaRPr lang="es-ES" sz="900" dirty="0">
+              <a:solidFill>
+                <a:srgbClr val="4A6080"/>
+              </a:solidFill>
+              <a:latin typeface="Calibri" pitchFamily="34" charset="0"/>
+            </a:endParaRPr>
           </a:p>
         </p:txBody>
       </p:sp>
@@ -21909,17 +21455,6 @@
             <a:pPr marL="0" indent="0" algn="ctr">
               <a:buNone/>
             </a:pPr>
-            <a:r>
-              <a:rPr lang="en-US" sz="900" dirty="0">
-                <a:solidFill>
-                  <a:srgbClr val="CBD5E1"/>
-                </a:solidFill>
-                <a:latin typeface="Calibri" pitchFamily="34" charset="0"/>
-                <a:ea typeface="Calibri" pitchFamily="34" charset="-122"/>
-                <a:cs typeface="Calibri" pitchFamily="34" charset="-120"/>
-              </a:rPr>
-              <a:t>2</a:t>
-            </a:r>
             <a:endParaRPr lang="en-US" sz="900" dirty="0"/>
           </a:p>
         </p:txBody>
@@ -24033,17 +23568,6 @@
             <a:pPr marL="0" indent="0" algn="ctr">
               <a:buNone/>
             </a:pPr>
-            <a:r>
-              <a:rPr lang="en-US" sz="900" dirty="0">
-                <a:solidFill>
-                  <a:srgbClr val="64748B"/>
-                </a:solidFill>
-                <a:latin typeface="Calibri" pitchFamily="34" charset="0"/>
-                <a:ea typeface="Calibri" pitchFamily="34" charset="-122"/>
-                <a:cs typeface="Calibri" pitchFamily="34" charset="-120"/>
-              </a:rPr>
-              <a:t>3</a:t>
-            </a:r>
             <a:endParaRPr lang="en-US" sz="900" dirty="0"/>
           </a:p>
         </p:txBody>
@@ -25576,17 +25100,6 @@
             <a:pPr marL="0" indent="0" algn="ctr">
               <a:buNone/>
             </a:pPr>
-            <a:r>
-              <a:rPr lang="en-US" sz="900" dirty="0">
-                <a:solidFill>
-                  <a:srgbClr val="64748B"/>
-                </a:solidFill>
-                <a:latin typeface="Calibri" pitchFamily="34" charset="0"/>
-                <a:ea typeface="Calibri" pitchFamily="34" charset="-122"/>
-                <a:cs typeface="Calibri" pitchFamily="34" charset="-120"/>
-              </a:rPr>
-              <a:t>5</a:t>
-            </a:r>
             <a:endParaRPr lang="en-US" sz="900" dirty="0"/>
           </a:p>
         </p:txBody>
@@ -28289,17 +27802,6 @@
             <a:pPr marL="0" indent="0" algn="ctr">
               <a:buNone/>
             </a:pPr>
-            <a:r>
-              <a:rPr lang="en-US" sz="900" dirty="0">
-                <a:solidFill>
-                  <a:srgbClr val="64748B"/>
-                </a:solidFill>
-                <a:latin typeface="Calibri" pitchFamily="34" charset="0"/>
-                <a:ea typeface="Calibri" pitchFamily="34" charset="-122"/>
-                <a:cs typeface="Calibri" pitchFamily="34" charset="-120"/>
-              </a:rPr>
-              <a:t>6</a:t>
-            </a:r>
             <a:endParaRPr lang="en-US" sz="900" dirty="0"/>
           </a:p>
         </p:txBody>
@@ -29403,15 +28905,12 @@
             <a:pPr marL="0" indent="0">
               <a:buNone/>
             </a:pPr>
-            <a:r>
-              <a:rPr lang="es-ES" sz="900" dirty="0">
-                <a:solidFill>
-                  <a:srgbClr val="CBD5E1"/>
-                </a:solidFill>
-                <a:latin typeface="Calibri" pitchFamily="34" charset="0"/>
-              </a:rPr>
-              <a:t>6b</a:t>
-            </a:r>
+            <a:endParaRPr lang="es-ES" sz="900" dirty="0">
+              <a:solidFill>
+                <a:srgbClr val="CBD5E1"/>
+              </a:solidFill>
+              <a:latin typeface="Calibri" pitchFamily="34" charset="0"/>
+            </a:endParaRPr>
           </a:p>
         </p:txBody>
       </p:sp>

--- a/TFG_Chollos/TFG_Presentacion_final.pptx
+++ b/TFG_Chollos/TFG_Presentacion_final.pptx
@@ -10734,7 +10734,7 @@
                 <a:ea typeface="Calibri" pitchFamily="34" charset="-122"/>
                 <a:cs typeface="Calibri" pitchFamily="34" charset="-120"/>
               </a:rPr>
-              <a:t>0.85 ≤ ratio &lt; 0.99</a:t>
+              <a:t>0.85 ≤ ratio &lt; 0.97</a:t>
             </a:r>
             <a:endParaRPr lang="en-US" sz="800" dirty="0"/>
           </a:p>
@@ -10751,7 +10751,7 @@
                 <a:ea typeface="Calibri" pitchFamily="34" charset="-122"/>
                 <a:cs typeface="Calibri" pitchFamily="34" charset="-120"/>
               </a:rPr>
-              <a:t>1–15% más barato</a:t>
+              <a:t>3–15% más barato</a:t>
             </a:r>
             <a:endParaRPr lang="en-US" sz="800" dirty="0"/>
           </a:p>
@@ -10856,7 +10856,7 @@
                 <a:ea typeface="Calibri" pitchFamily="34" charset="-122"/>
                 <a:cs typeface="Calibri" pitchFamily="34" charset="-120"/>
               </a:rPr>
-              <a:t>0.99 ≤ ratio ≤ 1.01</a:t>
+              <a:t>0.97 ≤ ratio ≤ 1.03</a:t>
             </a:r>
             <a:endParaRPr lang="en-US" sz="800" dirty="0"/>
           </a:p>
@@ -10873,7 +10873,7 @@
                 <a:ea typeface="Calibri" pitchFamily="34" charset="-122"/>
                 <a:cs typeface="Calibri" pitchFamily="34" charset="-120"/>
               </a:rPr>
-              <a:t>precio dentro del ±1%</a:t>
+              <a:t>precio dentro del ±3%</a:t>
             </a:r>
             <a:endParaRPr lang="en-US" sz="800" dirty="0"/>
           </a:p>
@@ -10978,7 +10978,7 @@
                 <a:ea typeface="Calibri" pitchFamily="34" charset="-122"/>
                 <a:cs typeface="Calibri" pitchFamily="34" charset="-120"/>
               </a:rPr>
-              <a:t>ratio &gt; 1.05</a:t>
+              <a:t>ratio &gt; 1.03</a:t>
             </a:r>
             <a:endParaRPr lang="en-US" sz="800" dirty="0"/>
           </a:p>
@@ -10995,7 +10995,7 @@
                 <a:ea typeface="Calibri" pitchFamily="34" charset="-122"/>
                 <a:cs typeface="Calibri" pitchFamily="34" charset="-120"/>
               </a:rPr>
-              <a:t>más de un 5% por encima</a:t>
+              <a:t>más de un 3% por encima</a:t>
             </a:r>
             <a:endParaRPr lang="en-US" sz="800" dirty="0"/>
           </a:p>
@@ -11296,7 +11296,7 @@
                 <a:ea typeface="Consolas" pitchFamily="34" charset="-122"/>
                 <a:cs typeface="Consolas" pitchFamily="34" charset="-120"/>
               </a:rPr>
-              <a:t>    (ratio &gt;= 0.85) &amp; (ratio &lt; 0.99),   # chollo</a:t>
+              <a:t>    (ratio &gt;= 0.85) &amp; (ratio &lt; 0.97),   # chollo</a:t>
             </a:r>
             <a:endParaRPr lang="en-US" sz="800" dirty="0"/>
           </a:p>
@@ -11313,7 +11313,7 @@
                 <a:ea typeface="Consolas" pitchFamily="34" charset="-122"/>
                 <a:cs typeface="Consolas" pitchFamily="34" charset="-120"/>
               </a:rPr>
-              <a:t>    (ratio &gt;= 0.99) &amp; (ratio &lt;= 1.01),  # normal</a:t>
+              <a:t>    (ratio &gt;= 0.97) &amp; (ratio &lt;= 1.03),  # normal</a:t>
             </a:r>
             <a:endParaRPr lang="en-US" sz="800" dirty="0"/>
           </a:p>
@@ -11330,7 +11330,7 @@
                 <a:ea typeface="Consolas" pitchFamily="34" charset="-122"/>
                 <a:cs typeface="Consolas" pitchFamily="34" charset="-120"/>
               </a:rPr>
-              <a:t>    ratio &gt; 1.05                         # inflado</a:t>
+              <a:t>    ratio &gt; 1.03                         # inflado</a:t>
             </a:r>
             <a:endParaRPr lang="en-US" sz="800" dirty="0"/>
           </a:p>

--- a/TFG_Chollos/TFG_Presentacion_final.pptx
+++ b/TFG_Chollos/TFG_Presentacion_final.pptx
@@ -5,7 +5,7 @@
     <p:sldMasterId id="2147483648" r:id="rId1"/>
   </p:sldMasterIdLst>
   <p:notesMasterIdLst>
-    <p:notesMasterId r:id="rId24"/>
+    <p:notesMasterId r:id="rId25"/>
   </p:notesMasterIdLst>
   <p:sldIdLst>
     <p:sldId id="256" r:id="rId2"/>
@@ -20,16 +20,17 @@
     <p:sldId id="273" r:id="rId11"/>
     <p:sldId id="276" r:id="rId12"/>
     <p:sldId id="274" r:id="rId13"/>
-    <p:sldId id="277" r:id="rId14"/>
-    <p:sldId id="262" r:id="rId15"/>
-    <p:sldId id="264" r:id="rId16"/>
-    <p:sldId id="270" r:id="rId17"/>
-    <p:sldId id="271" r:id="rId18"/>
-    <p:sldId id="275" r:id="rId19"/>
-    <p:sldId id="263" r:id="rId20"/>
-    <p:sldId id="265" r:id="rId21"/>
-    <p:sldId id="268" r:id="rId22"/>
-    <p:sldId id="269" r:id="rId23"/>
+    <p:sldId id="279" r:id="rId14"/>
+    <p:sldId id="277" r:id="rId15"/>
+    <p:sldId id="262" r:id="rId16"/>
+    <p:sldId id="264" r:id="rId17"/>
+    <p:sldId id="270" r:id="rId18"/>
+    <p:sldId id="271" r:id="rId19"/>
+    <p:sldId id="275" r:id="rId20"/>
+    <p:sldId id="263" r:id="rId21"/>
+    <p:sldId id="265" r:id="rId22"/>
+    <p:sldId id="268" r:id="rId23"/>
+    <p:sldId id="269" r:id="rId24"/>
   </p:sldIdLst>
   <p:sldSz cx="9144000" cy="5143500" type="screen16x9"/>
   <p:notesSz cx="5143500" cy="9144000"/>
@@ -407,7 +408,7 @@
           <a:p>
             <a:fld id="{F7021451-1387-4CA6-816F-3879F97B5CBC}" type="slidenum">
               <a:rPr lang="en-US"/>
-              <a:t>19</a:t>
+              <a:t>20</a:t>
             </a:fld>
             <a:endParaRPr lang="en-US"/>
           </a:p>
@@ -491,7 +492,7 @@
           <a:p>
             <a:fld id="{F7021451-1387-4CA6-816F-3879F97B5CBC}" type="slidenum">
               <a:rPr lang="en-US"/>
-              <a:t>20</a:t>
+              <a:t>21</a:t>
             </a:fld>
             <a:endParaRPr lang="en-US"/>
           </a:p>
@@ -575,7 +576,7 @@
           <a:p>
             <a:fld id="{F7021451-1387-4CA6-816F-3879F97B5CBC}" type="slidenum">
               <a:rPr lang="en-US"/>
-              <a:t>21</a:t>
+              <a:t>22</a:t>
             </a:fld>
             <a:endParaRPr lang="en-US"/>
           </a:p>
@@ -659,7 +660,7 @@
           <a:p>
             <a:fld id="{F7021451-1387-4CA6-816F-3879F97B5CBC}" type="slidenum">
               <a:rPr lang="en-US"/>
-              <a:t>22</a:t>
+              <a:t>23</a:t>
             </a:fld>
             <a:endParaRPr lang="en-US"/>
           </a:p>
@@ -1247,7 +1248,7 @@
           <a:p>
             <a:fld id="{F7021451-1387-4CA6-816F-3879F97B5CBC}" type="slidenum">
               <a:rPr lang="en-US"/>
-              <a:t>14</a:t>
+              <a:t>15</a:t>
             </a:fld>
             <a:endParaRPr lang="en-US"/>
           </a:p>
@@ -1331,7 +1332,7 @@
           <a:p>
             <a:fld id="{F7021451-1387-4CA6-816F-3879F97B5CBC}" type="slidenum">
               <a:rPr lang="en-US"/>
-              <a:t>15</a:t>
+              <a:t>16</a:t>
             </a:fld>
             <a:endParaRPr lang="en-US"/>
           </a:p>
@@ -5555,6 +5556,1252 @@
     <p:bg>
       <p:bgPr>
         <a:solidFill>
+          <a:srgbClr val="1A2E4A"/>
+        </a:solidFill>
+        <a:effectLst/>
+      </p:bgPr>
+    </p:bg>
+    <p:spTree>
+      <p:nvGrpSpPr>
+        <p:cNvPr id="1" name=""/>
+        <p:cNvGrpSpPr/>
+        <p:nvPr/>
+      </p:nvGrpSpPr>
+      <p:grpSpPr>
+        <a:xfrm>
+          <a:off x="0" y="0"/>
+          <a:ext cx="0" cy="0"/>
+          <a:chOff x="0" y="0"/>
+          <a:chExt cx="0" cy="0"/>
+        </a:xfrm>
+      </p:grpSpPr>
+      <p:sp>
+        <p:nvSpPr>
+          <p:cNvPr id="2" name="Rectangle 1"/>
+          <p:cNvSpPr/>
+          <p:nvPr/>
+        </p:nvSpPr>
+        <p:spPr>
+          <a:xfrm>
+            <a:off x="0" y="0"/>
+            <a:ext cx="9144000" cy="54864"/>
+          </a:xfrm>
+          <a:prstGeom prst="rect">
+            <a:avLst/>
+          </a:prstGeom>
+          <a:solidFill>
+            <a:srgbClr val="D4A843"/>
+          </a:solidFill>
+          <a:ln>
+            <a:noFill/>
+          </a:ln>
+          <a:effectLst/>
+        </p:spPr>
+        <p:style>
+          <a:lnRef idx="1">
+            <a:schemeClr val="accent1"/>
+          </a:lnRef>
+          <a:fillRef idx="3">
+            <a:schemeClr val="accent1"/>
+          </a:fillRef>
+          <a:effectRef idx="2">
+            <a:schemeClr val="accent1"/>
+          </a:effectRef>
+          <a:fontRef idx="minor">
+            <a:schemeClr val="lt1"/>
+          </a:fontRef>
+        </p:style>
+        <p:txBody>
+          <a:bodyPr rtlCol="0" anchor="ctr"/>
+          <a:lstStyle/>
+          <a:p>
+            <a:pPr algn="ctr"/>
+            <a:endParaRPr/>
+          </a:p>
+        </p:txBody>
+      </p:sp>
+      <p:sp>
+        <p:nvSpPr>
+          <p:cNvPr id="3" name="TextBox 2"/>
+          <p:cNvSpPr txBox="1"/>
+          <p:nvPr/>
+        </p:nvSpPr>
+        <p:spPr>
+          <a:xfrm>
+            <a:off x="457200" y="109728"/>
+            <a:ext cx="8229600" cy="457200"/>
+          </a:xfrm>
+          <a:prstGeom prst="rect">
+            <a:avLst/>
+          </a:prstGeom>
+          <a:noFill/>
+        </p:spPr>
+        <p:txBody>
+          <a:bodyPr wrap="square" lIns="0" tIns="0" rIns="0" bIns="0">
+            <a:spAutoFit/>
+          </a:bodyPr>
+          <a:lstStyle/>
+          <a:p>
+            <a:pPr algn="l"/>
+            <a:r>
+              <a:rPr sz="2400" b="1">
+                <a:solidFill>
+                  <a:srgbClr val="FFFFFF"/>
+                </a:solidFill>
+                <a:latin typeface="Calibri"/>
+              </a:rPr>
+              <a:t>Paralelización con Dask · preprocessing_dask.py</a:t>
+            </a:r>
+          </a:p>
+        </p:txBody>
+      </p:sp>
+      <p:sp>
+        <p:nvSpPr>
+          <p:cNvPr id="4" name="TextBox 3"/>
+          <p:cNvSpPr txBox="1"/>
+          <p:nvPr/>
+        </p:nvSpPr>
+        <p:spPr>
+          <a:xfrm>
+            <a:off x="457200" y="603504"/>
+            <a:ext cx="8229600" cy="274320"/>
+          </a:xfrm>
+          <a:prstGeom prst="rect">
+            <a:avLst/>
+          </a:prstGeom>
+          <a:noFill/>
+        </p:spPr>
+        <p:txBody>
+          <a:bodyPr wrap="square" lIns="0" tIns="0" rIns="0" bIns="0">
+            <a:spAutoFit/>
+          </a:bodyPr>
+          <a:lstStyle/>
+          <a:p>
+            <a:pPr algn="l"/>
+            <a:r>
+              <a:rPr sz="1000" b="0" dirty="0">
+                <a:solidFill>
+                  <a:srgbClr val="F0C060"/>
+                </a:solidFill>
+                <a:latin typeface="Consolas"/>
+              </a:rPr>
+              <a:t>Cleaning/preprocessing_dask.py  ·  </a:t>
+            </a:r>
+            <a:r>
+              <a:rPr sz="1000" b="0" dirty="0" err="1">
+                <a:solidFill>
+                  <a:srgbClr val="F0C060"/>
+                </a:solidFill>
+                <a:latin typeface="Consolas"/>
+              </a:rPr>
+              <a:t>dask.distributed</a:t>
+            </a:r>
+            <a:r>
+              <a:rPr sz="1000" b="0" dirty="0">
+                <a:solidFill>
+                  <a:srgbClr val="F0C060"/>
+                </a:solidFill>
+                <a:latin typeface="Consolas"/>
+              </a:rPr>
+              <a:t> Client  ·  benchmark </a:t>
+            </a:r>
+            <a:r>
+              <a:rPr sz="1000" b="0" dirty="0" err="1">
+                <a:solidFill>
+                  <a:srgbClr val="F0C060"/>
+                </a:solidFill>
+                <a:latin typeface="Consolas"/>
+              </a:rPr>
+              <a:t>secuencial</a:t>
+            </a:r>
+            <a:r>
+              <a:rPr sz="1000" b="0" dirty="0">
+                <a:solidFill>
+                  <a:srgbClr val="F0C060"/>
+                </a:solidFill>
+                <a:latin typeface="Consolas"/>
+              </a:rPr>
+              <a:t> vs </a:t>
+            </a:r>
+            <a:r>
+              <a:rPr sz="1000" b="0" dirty="0" err="1">
+                <a:solidFill>
+                  <a:srgbClr val="F0C060"/>
+                </a:solidFill>
+                <a:latin typeface="Consolas"/>
+              </a:rPr>
+              <a:t>paralelo</a:t>
+            </a:r>
+            <a:endParaRPr sz="1000" b="0" dirty="0">
+              <a:solidFill>
+                <a:srgbClr val="F0C060"/>
+              </a:solidFill>
+              <a:latin typeface="Consolas"/>
+            </a:endParaRPr>
+          </a:p>
+        </p:txBody>
+      </p:sp>
+      <p:sp>
+        <p:nvSpPr>
+          <p:cNvPr id="5" name="Rectangle 4"/>
+          <p:cNvSpPr/>
+          <p:nvPr/>
+        </p:nvSpPr>
+        <p:spPr>
+          <a:xfrm>
+            <a:off x="85329" y="1042415"/>
+            <a:ext cx="4903473" cy="219456"/>
+          </a:xfrm>
+          <a:prstGeom prst="rect">
+            <a:avLst/>
+          </a:prstGeom>
+          <a:solidFill>
+            <a:srgbClr val="2A5080"/>
+          </a:solidFill>
+          <a:ln>
+            <a:noFill/>
+          </a:ln>
+          <a:effectLst/>
+        </p:spPr>
+        <p:style>
+          <a:lnRef idx="1">
+            <a:schemeClr val="accent1"/>
+          </a:lnRef>
+          <a:fillRef idx="3">
+            <a:schemeClr val="accent1"/>
+          </a:fillRef>
+          <a:effectRef idx="2">
+            <a:schemeClr val="accent1"/>
+          </a:effectRef>
+          <a:fontRef idx="minor">
+            <a:schemeClr val="lt1"/>
+          </a:fontRef>
+        </p:style>
+        <p:txBody>
+          <a:bodyPr rtlCol="0" anchor="ctr"/>
+          <a:lstStyle/>
+          <a:p>
+            <a:pPr algn="ctr"/>
+            <a:endParaRPr/>
+          </a:p>
+        </p:txBody>
+      </p:sp>
+      <p:sp>
+        <p:nvSpPr>
+          <p:cNvPr id="6" name="TextBox 5"/>
+          <p:cNvSpPr txBox="1"/>
+          <p:nvPr/>
+        </p:nvSpPr>
+        <p:spPr>
+          <a:xfrm>
+            <a:off x="159163" y="1097786"/>
+            <a:ext cx="4822779" cy="138499"/>
+          </a:xfrm>
+          <a:prstGeom prst="rect">
+            <a:avLst/>
+          </a:prstGeom>
+          <a:noFill/>
+        </p:spPr>
+        <p:txBody>
+          <a:bodyPr wrap="square" lIns="0" tIns="0" rIns="0" bIns="0" anchor="ctr">
+            <a:spAutoFit/>
+          </a:bodyPr>
+          <a:lstStyle/>
+          <a:p>
+            <a:pPr algn="ctr"/>
+            <a:r>
+              <a:rPr sz="900" b="1" dirty="0">
+                <a:solidFill>
+                  <a:srgbClr val="F0C060"/>
+                </a:solidFill>
+                <a:latin typeface="Consolas"/>
+              </a:rPr>
+              <a:t>Dashboard </a:t>
+            </a:r>
+            <a:r>
+              <a:rPr sz="900" b="1" dirty="0" err="1">
+                <a:solidFill>
+                  <a:srgbClr val="F0C060"/>
+                </a:solidFill>
+                <a:latin typeface="Consolas"/>
+              </a:rPr>
+              <a:t>Dask</a:t>
+            </a:r>
+            <a:r>
+              <a:rPr sz="900" b="1" dirty="0">
+                <a:solidFill>
+                  <a:srgbClr val="F0C060"/>
+                </a:solidFill>
+                <a:latin typeface="Consolas"/>
+              </a:rPr>
+              <a:t> — localhost:8787</a:t>
+            </a:r>
+          </a:p>
+        </p:txBody>
+      </p:sp>
+      <p:pic>
+        <p:nvPicPr>
+          <p:cNvPr id="7" name="Picture 6" descr="Dask_Client.png"/>
+          <p:cNvPicPr>
+            <a:picLocks noChangeAspect="1"/>
+          </p:cNvPicPr>
+          <p:nvPr/>
+        </p:nvPicPr>
+        <p:blipFill>
+          <a:blip r:embed="rId2"/>
+          <a:stretch>
+            <a:fillRect/>
+          </a:stretch>
+        </p:blipFill>
+        <p:spPr>
+          <a:xfrm>
+            <a:off x="85329" y="1298448"/>
+            <a:ext cx="4903473" cy="2764856"/>
+          </a:xfrm>
+          <a:prstGeom prst="rect">
+            <a:avLst/>
+          </a:prstGeom>
+        </p:spPr>
+      </p:pic>
+      <p:sp>
+        <p:nvSpPr>
+          <p:cNvPr id="8" name="Rectangle 7"/>
+          <p:cNvSpPr/>
+          <p:nvPr/>
+        </p:nvSpPr>
+        <p:spPr>
+          <a:xfrm>
+            <a:off x="457200" y="4191582"/>
+            <a:ext cx="4114800" cy="634621"/>
+          </a:xfrm>
+          <a:prstGeom prst="rect">
+            <a:avLst/>
+          </a:prstGeom>
+          <a:solidFill>
+            <a:srgbClr val="1E3A5F"/>
+          </a:solidFill>
+          <a:ln w="9525">
+            <a:solidFill>
+              <a:srgbClr val="2A5080"/>
+            </a:solidFill>
+          </a:ln>
+          <a:effectLst/>
+        </p:spPr>
+        <p:style>
+          <a:lnRef idx="1">
+            <a:schemeClr val="accent1"/>
+          </a:lnRef>
+          <a:fillRef idx="3">
+            <a:schemeClr val="accent1"/>
+          </a:fillRef>
+          <a:effectRef idx="2">
+            <a:schemeClr val="accent1"/>
+          </a:effectRef>
+          <a:fontRef idx="minor">
+            <a:schemeClr val="lt1"/>
+          </a:fontRef>
+        </p:style>
+        <p:txBody>
+          <a:bodyPr rtlCol="0" anchor="ctr"/>
+          <a:lstStyle/>
+          <a:p>
+            <a:pPr algn="ctr"/>
+            <a:endParaRPr/>
+          </a:p>
+        </p:txBody>
+      </p:sp>
+      <p:sp>
+        <p:nvSpPr>
+          <p:cNvPr id="9" name="TextBox 8"/>
+          <p:cNvSpPr txBox="1"/>
+          <p:nvPr/>
+        </p:nvSpPr>
+        <p:spPr>
+          <a:xfrm>
+            <a:off x="530352" y="4260717"/>
+            <a:ext cx="3895344" cy="777240"/>
+          </a:xfrm>
+          <a:prstGeom prst="rect">
+            <a:avLst/>
+          </a:prstGeom>
+          <a:noFill/>
+        </p:spPr>
+        <p:txBody>
+          <a:bodyPr wrap="square" lIns="0" tIns="0" rIns="0" bIns="0">
+            <a:spAutoFit/>
+          </a:bodyPr>
+          <a:lstStyle/>
+          <a:p>
+            <a:pPr algn="l">
+              <a:lnSpc>
+                <a:spcPct val="115000"/>
+              </a:lnSpc>
+            </a:pPr>
+            <a:r>
+              <a:rPr sz="1000" b="1" dirty="0">
+                <a:solidFill>
+                  <a:srgbClr val="F0C060"/>
+                </a:solidFill>
+                <a:latin typeface="Calibri"/>
+              </a:rPr>
+              <a:t>Task Stream  </a:t>
+            </a:r>
+            <a:r>
+              <a:rPr sz="900" b="0" dirty="0">
+                <a:solidFill>
+                  <a:srgbClr val="CBD5E1"/>
+                </a:solidFill>
+                <a:latin typeface="Calibri"/>
+              </a:rPr>
+              <a:t>· </a:t>
+            </a:r>
+            <a:r>
+              <a:rPr sz="900" b="0" dirty="0" err="1">
+                <a:solidFill>
+                  <a:srgbClr val="CBD5E1"/>
+                </a:solidFill>
+                <a:latin typeface="Calibri"/>
+              </a:rPr>
+              <a:t>cada</a:t>
+            </a:r>
+            <a:r>
+              <a:rPr sz="900" b="0" dirty="0">
+                <a:solidFill>
+                  <a:srgbClr val="CBD5E1"/>
+                </a:solidFill>
+                <a:latin typeface="Calibri"/>
+              </a:rPr>
+              <a:t> fila es un worker</a:t>
+            </a:r>
+          </a:p>
+          <a:p>
+            <a:pPr algn="l">
+              <a:lnSpc>
+                <a:spcPct val="115000"/>
+              </a:lnSpc>
+            </a:pPr>
+            <a:r>
+              <a:rPr sz="900" b="0" dirty="0">
+                <a:solidFill>
+                  <a:srgbClr val="E2E8F0"/>
+                </a:solidFill>
+                <a:latin typeface="Calibri"/>
+              </a:rPr>
+              <a:t>4 workers </a:t>
+            </a:r>
+            <a:r>
+              <a:rPr sz="900" b="0" dirty="0" err="1">
+                <a:solidFill>
+                  <a:srgbClr val="E2E8F0"/>
+                </a:solidFill>
+                <a:latin typeface="Calibri"/>
+              </a:rPr>
+              <a:t>ejecutan</a:t>
+            </a:r>
+            <a:r>
+              <a:rPr sz="900" b="0" dirty="0">
+                <a:solidFill>
+                  <a:srgbClr val="E2E8F0"/>
+                </a:solidFill>
+                <a:latin typeface="Calibri"/>
+              </a:rPr>
+              <a:t> </a:t>
+            </a:r>
+            <a:r>
+              <a:rPr sz="900" b="1" dirty="0" err="1">
+                <a:solidFill>
+                  <a:srgbClr val="F0C060"/>
+                </a:solidFill>
+                <a:latin typeface="Consolas"/>
+              </a:rPr>
+              <a:t>procesar_provincia</a:t>
+            </a:r>
+            <a:r>
+              <a:rPr sz="900" b="1" dirty="0">
+                <a:solidFill>
+                  <a:srgbClr val="F0C060"/>
+                </a:solidFill>
+                <a:latin typeface="Consolas"/>
+              </a:rPr>
+              <a:t>()</a:t>
+            </a:r>
+            <a:r>
+              <a:rPr sz="900" b="0" dirty="0">
+                <a:solidFill>
+                  <a:srgbClr val="E2E8F0"/>
+                </a:solidFill>
+                <a:latin typeface="Calibri"/>
+              </a:rPr>
+              <a:t> </a:t>
+            </a:r>
+            <a:r>
+              <a:rPr sz="900" b="0" dirty="0" err="1">
+                <a:solidFill>
+                  <a:srgbClr val="E2E8F0"/>
+                </a:solidFill>
+                <a:latin typeface="Calibri"/>
+              </a:rPr>
+              <a:t>en</a:t>
+            </a:r>
+            <a:r>
+              <a:rPr sz="900" b="0" dirty="0">
+                <a:solidFill>
+                  <a:srgbClr val="E2E8F0"/>
+                </a:solidFill>
+                <a:latin typeface="Calibri"/>
+              </a:rPr>
+              <a:t> </a:t>
+            </a:r>
+            <a:r>
+              <a:rPr sz="900" b="0" dirty="0" err="1">
+                <a:solidFill>
+                  <a:srgbClr val="E2E8F0"/>
+                </a:solidFill>
+                <a:latin typeface="Calibri"/>
+              </a:rPr>
+              <a:t>paralelo</a:t>
+            </a:r>
+            <a:r>
+              <a:rPr sz="900" b="0" dirty="0">
+                <a:solidFill>
+                  <a:srgbClr val="E2E8F0"/>
+                </a:solidFill>
+                <a:latin typeface="Calibri"/>
+              </a:rPr>
+              <a:t> </a:t>
+            </a:r>
+            <a:r>
+              <a:rPr sz="900" b="0" dirty="0" err="1">
+                <a:solidFill>
+                  <a:srgbClr val="E2E8F0"/>
+                </a:solidFill>
+                <a:latin typeface="Calibri"/>
+              </a:rPr>
+              <a:t>vía</a:t>
+            </a:r>
+            <a:r>
+              <a:rPr sz="900" b="0" dirty="0">
+                <a:solidFill>
+                  <a:srgbClr val="E2E8F0"/>
+                </a:solidFill>
+                <a:latin typeface="Calibri"/>
+              </a:rPr>
+              <a:t> </a:t>
+            </a:r>
+            <a:r>
+              <a:rPr sz="900" b="1" dirty="0" err="1">
+                <a:solidFill>
+                  <a:srgbClr val="F0C060"/>
+                </a:solidFill>
+                <a:latin typeface="Consolas"/>
+              </a:rPr>
+              <a:t>client.submit</a:t>
+            </a:r>
+            <a:r>
+              <a:rPr sz="900" b="1" dirty="0">
+                <a:solidFill>
+                  <a:srgbClr val="F0C060"/>
+                </a:solidFill>
+                <a:latin typeface="Consolas"/>
+              </a:rPr>
+              <a:t>()</a:t>
+            </a:r>
+            <a:r>
+              <a:rPr sz="900" b="0" dirty="0">
+                <a:solidFill>
+                  <a:srgbClr val="E2E8F0"/>
+                </a:solidFill>
+                <a:latin typeface="Calibri"/>
+              </a:rPr>
+              <a:t>, </a:t>
+            </a:r>
+            <a:r>
+              <a:rPr sz="900" b="0" dirty="0" err="1">
+                <a:solidFill>
+                  <a:srgbClr val="E2E8F0"/>
+                </a:solidFill>
+                <a:latin typeface="Calibri"/>
+              </a:rPr>
+              <a:t>una</a:t>
+            </a:r>
+            <a:r>
+              <a:rPr sz="900" b="0" dirty="0">
+                <a:solidFill>
+                  <a:srgbClr val="E2E8F0"/>
+                </a:solidFill>
+                <a:latin typeface="Calibri"/>
+              </a:rPr>
+              <a:t> </a:t>
+            </a:r>
+            <a:r>
+              <a:rPr sz="900" b="0" dirty="0" err="1">
+                <a:solidFill>
+                  <a:srgbClr val="E2E8F0"/>
+                </a:solidFill>
+                <a:latin typeface="Calibri"/>
+              </a:rPr>
+              <a:t>tarea</a:t>
+            </a:r>
+            <a:r>
+              <a:rPr sz="900" b="0" dirty="0">
+                <a:solidFill>
+                  <a:srgbClr val="E2E8F0"/>
+                </a:solidFill>
+                <a:latin typeface="Calibri"/>
+              </a:rPr>
+              <a:t> (</a:t>
+            </a:r>
+            <a:r>
+              <a:rPr sz="900" b="0" dirty="0" err="1">
+                <a:solidFill>
+                  <a:srgbClr val="E2E8F0"/>
+                </a:solidFill>
+                <a:latin typeface="Calibri"/>
+              </a:rPr>
+              <a:t>provincia</a:t>
+            </a:r>
+            <a:r>
+              <a:rPr sz="900" b="0" dirty="0">
+                <a:solidFill>
+                  <a:srgbClr val="E2E8F0"/>
+                </a:solidFill>
+                <a:latin typeface="Calibri"/>
+              </a:rPr>
+              <a:t>) </a:t>
+            </a:r>
+            <a:r>
+              <a:rPr sz="900" b="0" dirty="0" err="1">
+                <a:solidFill>
+                  <a:srgbClr val="E2E8F0"/>
+                </a:solidFill>
+                <a:latin typeface="Calibri"/>
+              </a:rPr>
+              <a:t>por</a:t>
+            </a:r>
+            <a:r>
+              <a:rPr sz="900" b="0" dirty="0">
+                <a:solidFill>
+                  <a:srgbClr val="E2E8F0"/>
+                </a:solidFill>
+                <a:latin typeface="Calibri"/>
+              </a:rPr>
+              <a:t> worker · 739 MiB </a:t>
+            </a:r>
+            <a:r>
+              <a:rPr sz="900" b="0" dirty="0" err="1">
+                <a:solidFill>
+                  <a:srgbClr val="E2E8F0"/>
+                </a:solidFill>
+                <a:latin typeface="Calibri"/>
+              </a:rPr>
+              <a:t>en</a:t>
+            </a:r>
+            <a:r>
+              <a:rPr sz="900" b="0" dirty="0">
+                <a:solidFill>
+                  <a:srgbClr val="E2E8F0"/>
+                </a:solidFill>
+                <a:latin typeface="Calibri"/>
+              </a:rPr>
+              <a:t> </a:t>
+            </a:r>
+            <a:r>
+              <a:rPr sz="900" b="0" dirty="0" err="1">
+                <a:solidFill>
+                  <a:srgbClr val="E2E8F0"/>
+                </a:solidFill>
+                <a:latin typeface="Calibri"/>
+              </a:rPr>
+              <a:t>memoria</a:t>
+            </a:r>
+            <a:r>
+              <a:rPr sz="900" b="0" dirty="0">
+                <a:solidFill>
+                  <a:srgbClr val="E2E8F0"/>
+                </a:solidFill>
+                <a:latin typeface="Calibri"/>
+              </a:rPr>
+              <a:t> </a:t>
+            </a:r>
+            <a:r>
+              <a:rPr sz="900" b="0" dirty="0" err="1">
+                <a:solidFill>
+                  <a:srgbClr val="E2E8F0"/>
+                </a:solidFill>
+                <a:latin typeface="Calibri"/>
+              </a:rPr>
+              <a:t>distribuida</a:t>
+            </a:r>
+            <a:r>
+              <a:rPr sz="900" b="0" dirty="0">
+                <a:solidFill>
+                  <a:srgbClr val="E2E8F0"/>
+                </a:solidFill>
+                <a:latin typeface="Calibri"/>
+              </a:rPr>
+              <a:t>.</a:t>
+            </a:r>
+          </a:p>
+        </p:txBody>
+      </p:sp>
+      <p:sp>
+        <p:nvSpPr>
+          <p:cNvPr id="10" name="Rectangle 9"/>
+          <p:cNvSpPr/>
+          <p:nvPr/>
+        </p:nvSpPr>
+        <p:spPr>
+          <a:xfrm>
+            <a:off x="5329450" y="1042415"/>
+            <a:ext cx="3243253" cy="219456"/>
+          </a:xfrm>
+          <a:prstGeom prst="rect">
+            <a:avLst/>
+          </a:prstGeom>
+          <a:solidFill>
+            <a:srgbClr val="2A5080"/>
+          </a:solidFill>
+          <a:ln>
+            <a:noFill/>
+          </a:ln>
+          <a:effectLst/>
+        </p:spPr>
+        <p:style>
+          <a:lnRef idx="1">
+            <a:schemeClr val="accent1"/>
+          </a:lnRef>
+          <a:fillRef idx="3">
+            <a:schemeClr val="accent1"/>
+          </a:fillRef>
+          <a:effectRef idx="2">
+            <a:schemeClr val="accent1"/>
+          </a:effectRef>
+          <a:fontRef idx="minor">
+            <a:schemeClr val="lt1"/>
+          </a:fontRef>
+        </p:style>
+        <p:txBody>
+          <a:bodyPr rtlCol="0" anchor="ctr"/>
+          <a:lstStyle/>
+          <a:p>
+            <a:pPr algn="ctr"/>
+            <a:endParaRPr/>
+          </a:p>
+        </p:txBody>
+      </p:sp>
+      <p:sp>
+        <p:nvSpPr>
+          <p:cNvPr id="11" name="TextBox 10"/>
+          <p:cNvSpPr txBox="1"/>
+          <p:nvPr/>
+        </p:nvSpPr>
+        <p:spPr>
+          <a:xfrm>
+            <a:off x="5352514" y="1082893"/>
+            <a:ext cx="3220189" cy="138499"/>
+          </a:xfrm>
+          <a:prstGeom prst="rect">
+            <a:avLst/>
+          </a:prstGeom>
+          <a:noFill/>
+        </p:spPr>
+        <p:txBody>
+          <a:bodyPr wrap="square" lIns="0" tIns="0" rIns="0" bIns="0" anchor="ctr">
+            <a:spAutoFit/>
+          </a:bodyPr>
+          <a:lstStyle/>
+          <a:p>
+            <a:pPr algn="l"/>
+            <a:r>
+              <a:rPr sz="900" b="1" dirty="0" err="1">
+                <a:solidFill>
+                  <a:srgbClr val="F0C060"/>
+                </a:solidFill>
+                <a:latin typeface="Consolas"/>
+              </a:rPr>
+              <a:t>Secuencial</a:t>
+            </a:r>
+            <a:r>
+              <a:rPr sz="900" b="1" dirty="0">
+                <a:solidFill>
+                  <a:srgbClr val="F0C060"/>
+                </a:solidFill>
+                <a:latin typeface="Consolas"/>
+              </a:rPr>
+              <a:t> vs </a:t>
+            </a:r>
+            <a:r>
+              <a:rPr sz="900" b="1" dirty="0" err="1">
+                <a:solidFill>
+                  <a:srgbClr val="F0C060"/>
+                </a:solidFill>
+                <a:latin typeface="Consolas"/>
+              </a:rPr>
+              <a:t>Dask</a:t>
+            </a:r>
+            <a:r>
+              <a:rPr sz="900" b="1" dirty="0">
+                <a:solidFill>
+                  <a:srgbClr val="F0C060"/>
+                </a:solidFill>
+                <a:latin typeface="Consolas"/>
+              </a:rPr>
+              <a:t> — benchmark de </a:t>
+            </a:r>
+            <a:r>
+              <a:rPr sz="900" b="1" dirty="0" err="1">
+                <a:solidFill>
+                  <a:srgbClr val="F0C060"/>
+                </a:solidFill>
+                <a:latin typeface="Consolas"/>
+              </a:rPr>
+              <a:t>preprocesamiento</a:t>
+            </a:r>
+            <a:endParaRPr sz="900" b="1" dirty="0">
+              <a:solidFill>
+                <a:srgbClr val="F0C060"/>
+              </a:solidFill>
+              <a:latin typeface="Consolas"/>
+            </a:endParaRPr>
+          </a:p>
+        </p:txBody>
+      </p:sp>
+      <p:pic>
+        <p:nvPicPr>
+          <p:cNvPr id="12" name="Picture 11" descr="Dask_vs_Pandas.png"/>
+          <p:cNvPicPr>
+            <a:picLocks noChangeAspect="1"/>
+          </p:cNvPicPr>
+          <p:nvPr/>
+        </p:nvPicPr>
+        <p:blipFill>
+          <a:blip r:embed="rId3"/>
+          <a:stretch>
+            <a:fillRect/>
+          </a:stretch>
+        </p:blipFill>
+        <p:spPr>
+          <a:xfrm>
+            <a:off x="5329450" y="1283072"/>
+            <a:ext cx="3243253" cy="2162169"/>
+          </a:xfrm>
+          <a:prstGeom prst="rect">
+            <a:avLst/>
+          </a:prstGeom>
+        </p:spPr>
+      </p:pic>
+      <p:sp>
+        <p:nvSpPr>
+          <p:cNvPr id="13" name="Rectangle 12"/>
+          <p:cNvSpPr/>
+          <p:nvPr/>
+        </p:nvSpPr>
+        <p:spPr>
+          <a:xfrm>
+            <a:off x="5061955" y="3674189"/>
+            <a:ext cx="3931920" cy="201168"/>
+          </a:xfrm>
+          <a:prstGeom prst="rect">
+            <a:avLst/>
+          </a:prstGeom>
+          <a:solidFill>
+            <a:srgbClr val="2A5080"/>
+          </a:solidFill>
+          <a:ln>
+            <a:noFill/>
+          </a:ln>
+          <a:effectLst/>
+        </p:spPr>
+        <p:style>
+          <a:lnRef idx="1">
+            <a:schemeClr val="accent1"/>
+          </a:lnRef>
+          <a:fillRef idx="3">
+            <a:schemeClr val="accent1"/>
+          </a:fillRef>
+          <a:effectRef idx="2">
+            <a:schemeClr val="accent1"/>
+          </a:effectRef>
+          <a:fontRef idx="minor">
+            <a:schemeClr val="lt1"/>
+          </a:fontRef>
+        </p:style>
+        <p:txBody>
+          <a:bodyPr rtlCol="0" anchor="ctr"/>
+          <a:lstStyle/>
+          <a:p>
+            <a:pPr algn="ctr"/>
+            <a:endParaRPr/>
+          </a:p>
+        </p:txBody>
+      </p:sp>
+      <p:sp>
+        <p:nvSpPr>
+          <p:cNvPr id="14" name="TextBox 13"/>
+          <p:cNvSpPr txBox="1"/>
+          <p:nvPr/>
+        </p:nvSpPr>
+        <p:spPr>
+          <a:xfrm>
+            <a:off x="5116819" y="3674189"/>
+            <a:ext cx="3822191" cy="201168"/>
+          </a:xfrm>
+          <a:prstGeom prst="rect">
+            <a:avLst/>
+          </a:prstGeom>
+          <a:noFill/>
+        </p:spPr>
+        <p:txBody>
+          <a:bodyPr wrap="square" lIns="0" tIns="0" rIns="0" bIns="0" anchor="ctr">
+            <a:spAutoFit/>
+          </a:bodyPr>
+          <a:lstStyle/>
+          <a:p>
+            <a:pPr algn="l"/>
+            <a:r>
+              <a:rPr sz="900" b="1">
+                <a:solidFill>
+                  <a:srgbClr val="F0C060"/>
+                </a:solidFill>
+                <a:latin typeface="Consolas"/>
+              </a:rPr>
+              <a:t>preprocessing_dask.py — paralelización por provincia</a:t>
+            </a:r>
+          </a:p>
+        </p:txBody>
+      </p:sp>
+      <p:sp>
+        <p:nvSpPr>
+          <p:cNvPr id="15" name="Rectangle 14"/>
+          <p:cNvSpPr/>
+          <p:nvPr/>
+        </p:nvSpPr>
+        <p:spPr>
+          <a:xfrm>
+            <a:off x="5061955" y="3875357"/>
+            <a:ext cx="3931920" cy="796748"/>
+          </a:xfrm>
+          <a:prstGeom prst="rect">
+            <a:avLst/>
+          </a:prstGeom>
+          <a:solidFill>
+            <a:srgbClr val="0D1117"/>
+          </a:solidFill>
+          <a:ln>
+            <a:noFill/>
+          </a:ln>
+          <a:effectLst/>
+        </p:spPr>
+        <p:style>
+          <a:lnRef idx="1">
+            <a:schemeClr val="accent1"/>
+          </a:lnRef>
+          <a:fillRef idx="3">
+            <a:schemeClr val="accent1"/>
+          </a:fillRef>
+          <a:effectRef idx="2">
+            <a:schemeClr val="accent1"/>
+          </a:effectRef>
+          <a:fontRef idx="minor">
+            <a:schemeClr val="lt1"/>
+          </a:fontRef>
+        </p:style>
+        <p:txBody>
+          <a:bodyPr rtlCol="0" anchor="ctr"/>
+          <a:lstStyle/>
+          <a:p>
+            <a:pPr algn="ctr"/>
+            <a:endParaRPr/>
+          </a:p>
+        </p:txBody>
+      </p:sp>
+      <p:sp>
+        <p:nvSpPr>
+          <p:cNvPr id="16" name="TextBox 15"/>
+          <p:cNvSpPr txBox="1"/>
+          <p:nvPr/>
+        </p:nvSpPr>
+        <p:spPr>
+          <a:xfrm>
+            <a:off x="5135107" y="3930221"/>
+            <a:ext cx="3785615" cy="469392"/>
+          </a:xfrm>
+          <a:prstGeom prst="rect">
+            <a:avLst/>
+          </a:prstGeom>
+          <a:noFill/>
+        </p:spPr>
+        <p:txBody>
+          <a:bodyPr wrap="square" lIns="0" tIns="0" rIns="0" bIns="0">
+            <a:spAutoFit/>
+          </a:bodyPr>
+          <a:lstStyle/>
+          <a:p>
+            <a:pPr algn="l">
+              <a:lnSpc>
+                <a:spcPct val="105000"/>
+              </a:lnSpc>
+            </a:pPr>
+            <a:r>
+              <a:rPr sz="800" b="0" dirty="0">
+                <a:solidFill>
+                  <a:srgbClr val="E2E8F0"/>
+                </a:solidFill>
+                <a:latin typeface="Consolas"/>
+              </a:rPr>
+              <a:t>client = Client('</a:t>
+            </a:r>
+            <a:r>
+              <a:rPr sz="800" b="0" dirty="0" err="1">
+                <a:solidFill>
+                  <a:srgbClr val="E2E8F0"/>
+                </a:solidFill>
+                <a:latin typeface="Consolas"/>
+              </a:rPr>
+              <a:t>tcp</a:t>
+            </a:r>
+            <a:r>
+              <a:rPr sz="800" b="0" dirty="0">
+                <a:solidFill>
+                  <a:srgbClr val="E2E8F0"/>
+                </a:solidFill>
+                <a:latin typeface="Consolas"/>
+              </a:rPr>
+              <a:t>://localhost:8786')</a:t>
+            </a:r>
+          </a:p>
+          <a:p>
+            <a:pPr algn="l">
+              <a:lnSpc>
+                <a:spcPct val="105000"/>
+              </a:lnSpc>
+            </a:pPr>
+            <a:r>
+              <a:rPr sz="800" b="0" dirty="0">
+                <a:solidFill>
+                  <a:srgbClr val="E2E8F0"/>
+                </a:solidFill>
+                <a:latin typeface="Consolas"/>
+              </a:rPr>
+              <a:t>futures = [</a:t>
+            </a:r>
+            <a:r>
+              <a:rPr sz="800" b="0" dirty="0" err="1">
+                <a:solidFill>
+                  <a:srgbClr val="E2E8F0"/>
+                </a:solidFill>
+                <a:latin typeface="Consolas"/>
+              </a:rPr>
+              <a:t>client.submit</a:t>
+            </a:r>
+            <a:r>
+              <a:rPr sz="800" b="0" dirty="0">
+                <a:solidFill>
+                  <a:srgbClr val="E2E8F0"/>
+                </a:solidFill>
+                <a:latin typeface="Consolas"/>
+              </a:rPr>
+              <a:t>(</a:t>
+            </a:r>
+            <a:r>
+              <a:rPr sz="800" b="0" dirty="0" err="1">
+                <a:solidFill>
+                  <a:srgbClr val="E2E8F0"/>
+                </a:solidFill>
+                <a:latin typeface="Consolas"/>
+              </a:rPr>
+              <a:t>procesar_provincia</a:t>
+            </a:r>
+            <a:r>
+              <a:rPr sz="800" b="0" dirty="0">
+                <a:solidFill>
+                  <a:srgbClr val="E2E8F0"/>
+                </a:solidFill>
+                <a:latin typeface="Consolas"/>
+              </a:rPr>
+              <a:t>,</a:t>
+            </a:r>
+          </a:p>
+          <a:p>
+            <a:pPr algn="l">
+              <a:lnSpc>
+                <a:spcPct val="105000"/>
+              </a:lnSpc>
+            </a:pPr>
+            <a:r>
+              <a:rPr sz="800" b="0" dirty="0">
+                <a:solidFill>
+                  <a:srgbClr val="E2E8F0"/>
+                </a:solidFill>
+                <a:latin typeface="Consolas"/>
+              </a:rPr>
+              <a:t>           p, </a:t>
+            </a:r>
+            <a:r>
+              <a:rPr sz="800" b="0" dirty="0" err="1">
+                <a:solidFill>
+                  <a:srgbClr val="E2E8F0"/>
+                </a:solidFill>
+                <a:latin typeface="Consolas"/>
+              </a:rPr>
+              <a:t>tamaño_habitacion</a:t>
+            </a:r>
+            <a:r>
+              <a:rPr sz="800" b="0" dirty="0">
+                <a:solidFill>
+                  <a:srgbClr val="E2E8F0"/>
+                </a:solidFill>
+                <a:latin typeface="Consolas"/>
+              </a:rPr>
+              <a:t>, </a:t>
+            </a:r>
+            <a:r>
+              <a:rPr sz="800" b="0" dirty="0" err="1">
+                <a:solidFill>
+                  <a:srgbClr val="E2E8F0"/>
+                </a:solidFill>
+                <a:latin typeface="Consolas"/>
+              </a:rPr>
+              <a:t>coords_centros</a:t>
+            </a:r>
+            <a:r>
+              <a:rPr sz="800" b="0" dirty="0">
+                <a:solidFill>
+                  <a:srgbClr val="E2E8F0"/>
+                </a:solidFill>
+                <a:latin typeface="Consolas"/>
+              </a:rPr>
+              <a:t>)</a:t>
+            </a:r>
+          </a:p>
+          <a:p>
+            <a:pPr algn="l">
+              <a:lnSpc>
+                <a:spcPct val="105000"/>
+              </a:lnSpc>
+            </a:pPr>
+            <a:r>
+              <a:rPr sz="800" b="0" dirty="0">
+                <a:solidFill>
+                  <a:srgbClr val="E2E8F0"/>
+                </a:solidFill>
+                <a:latin typeface="Consolas"/>
+              </a:rPr>
+              <a:t>           for p in </a:t>
+            </a:r>
+            <a:r>
+              <a:rPr sz="800" b="0" dirty="0" err="1">
+                <a:solidFill>
+                  <a:srgbClr val="E2E8F0"/>
+                </a:solidFill>
+                <a:latin typeface="Consolas"/>
+              </a:rPr>
+              <a:t>lista_provincias</a:t>
+            </a:r>
+            <a:r>
+              <a:rPr sz="800" b="0" dirty="0">
+                <a:solidFill>
+                  <a:srgbClr val="E2E8F0"/>
+                </a:solidFill>
+                <a:latin typeface="Consolas"/>
+              </a:rPr>
+              <a:t>]</a:t>
+            </a:r>
+          </a:p>
+          <a:p>
+            <a:pPr algn="l">
+              <a:lnSpc>
+                <a:spcPct val="105000"/>
+              </a:lnSpc>
+            </a:pPr>
+            <a:r>
+              <a:rPr sz="800" b="0" dirty="0" err="1">
+                <a:solidFill>
+                  <a:srgbClr val="E2E8F0"/>
+                </a:solidFill>
+                <a:latin typeface="Consolas"/>
+              </a:rPr>
+              <a:t>dfs_dask</a:t>
+            </a:r>
+            <a:r>
+              <a:rPr sz="800" b="0" dirty="0">
+                <a:solidFill>
+                  <a:srgbClr val="E2E8F0"/>
+                </a:solidFill>
+                <a:latin typeface="Consolas"/>
+              </a:rPr>
+              <a:t> = </a:t>
+            </a:r>
+            <a:r>
+              <a:rPr sz="800" b="0" dirty="0" err="1">
+                <a:solidFill>
+                  <a:srgbClr val="E2E8F0"/>
+                </a:solidFill>
+                <a:latin typeface="Consolas"/>
+              </a:rPr>
+              <a:t>client.gather</a:t>
+            </a:r>
+            <a:r>
+              <a:rPr sz="800" b="0" dirty="0">
+                <a:solidFill>
+                  <a:srgbClr val="E2E8F0"/>
+                </a:solidFill>
+                <a:latin typeface="Consolas"/>
+              </a:rPr>
+              <a:t>(futures)</a:t>
+            </a:r>
+          </a:p>
+        </p:txBody>
+      </p:sp>
+      <p:sp>
+        <p:nvSpPr>
+          <p:cNvPr id="17" name="TextBox 16"/>
+          <p:cNvSpPr txBox="1"/>
+          <p:nvPr/>
+        </p:nvSpPr>
+        <p:spPr>
+          <a:xfrm>
+            <a:off x="457200" y="4826203"/>
+            <a:ext cx="7772400" cy="201168"/>
+          </a:xfrm>
+          <a:prstGeom prst="rect">
+            <a:avLst/>
+          </a:prstGeom>
+          <a:noFill/>
+        </p:spPr>
+        <p:txBody>
+          <a:bodyPr wrap="square" lIns="0" tIns="0" rIns="0" bIns="0">
+            <a:spAutoFit/>
+          </a:bodyPr>
+          <a:lstStyle/>
+          <a:p>
+            <a:pPr algn="l"/>
+            <a:r>
+              <a:rPr sz="800" b="0">
+                <a:solidFill>
+                  <a:srgbClr val="4A6080"/>
+                </a:solidFill>
+                <a:latin typeface="Calibri"/>
+              </a:rPr>
+              <a:t>TFG · Detector de Chollos en Andalucía · Mario Jiménez · Universidad de Sevilla · 2025–2026</a:t>
+            </a:r>
+          </a:p>
+        </p:txBody>
+      </p:sp>
+    </p:spTree>
+  </p:cSld>
+  <p:clrMapOvr>
+    <a:masterClrMapping/>
+  </p:clrMapOvr>
+</p:sld>
+</file>
+
+<file path=ppt/slides/slide14.xml><?xml version="1.0" encoding="utf-8"?>
+<p:sld xmlns:a="http://schemas.openxmlformats.org/drawingml/2006/main" xmlns:r="http://schemas.openxmlformats.org/officeDocument/2006/relationships" xmlns:p="http://schemas.openxmlformats.org/presentationml/2006/main">
+  <p:cSld>
+    <p:bg>
+      <p:bgPr>
+        <a:solidFill>
           <a:srgbClr val="F4F8FC"/>
         </a:solidFill>
         <a:effectLst/>
@@ -6897,7 +8144,7 @@
 </p:sld>
 </file>
 
-<file path=ppt/slides/slide14.xml><?xml version="1.0" encoding="utf-8"?>
+<file path=ppt/slides/slide15.xml><?xml version="1.0" encoding="utf-8"?>
 <p:sld xmlns:a="http://schemas.openxmlformats.org/drawingml/2006/main" xmlns:r="http://schemas.openxmlformats.org/officeDocument/2006/relationships" xmlns:p="http://schemas.openxmlformats.org/presentationml/2006/main">
   <p:cSld name="Slide 7">
     <p:bg>
@@ -8680,344 +9927,6 @@
               <a:buNone/>
             </a:pPr>
             <a:endParaRPr lang="en-US" sz="900" dirty="0"/>
-          </a:p>
-        </p:txBody>
-      </p:sp>
-    </p:spTree>
-  </p:cSld>
-  <p:clrMapOvr>
-    <a:masterClrMapping/>
-  </p:clrMapOvr>
-</p:sld>
-</file>
-
-<file path=ppt/slides/slide15.xml><?xml version="1.0" encoding="utf-8"?>
-<p:sld xmlns:a="http://schemas.openxmlformats.org/drawingml/2006/main" xmlns:r="http://schemas.openxmlformats.org/officeDocument/2006/relationships" xmlns:p="http://schemas.openxmlformats.org/presentationml/2006/main">
-  <p:cSld name="Slide 9">
-    <p:bg>
-      <p:bgPr>
-        <a:solidFill>
-          <a:srgbClr val="1A2E4A"/>
-        </a:solidFill>
-        <a:effectLst/>
-      </p:bgPr>
-    </p:bg>
-    <p:spTree>
-      <p:nvGrpSpPr>
-        <p:cNvPr id="1" name=""/>
-        <p:cNvGrpSpPr/>
-        <p:nvPr/>
-      </p:nvGrpSpPr>
-      <p:grpSpPr>
-        <a:xfrm>
-          <a:off x="0" y="0"/>
-          <a:ext cx="0" cy="0"/>
-          <a:chOff x="0" y="0"/>
-          <a:chExt cx="0" cy="0"/>
-        </a:xfrm>
-      </p:grpSpPr>
-      <p:sp>
-        <p:nvSpPr>
-          <p:cNvPr id="2" name="Shape 0"/>
-          <p:cNvSpPr/>
-          <p:nvPr/>
-        </p:nvSpPr>
-        <p:spPr>
-          <a:xfrm>
-            <a:off x="0" y="0"/>
-            <a:ext cx="9144000" cy="54864"/>
-          </a:xfrm>
-          <a:prstGeom prst="rect">
-            <a:avLst/>
-          </a:prstGeom>
-          <a:solidFill>
-            <a:srgbClr val="D4A843"/>
-          </a:solidFill>
-          <a:ln/>
-        </p:spPr>
-      </p:sp>
-      <p:sp>
-        <p:nvSpPr>
-          <p:cNvPr id="3" name="Text 1"/>
-          <p:cNvSpPr/>
-          <p:nvPr/>
-        </p:nvSpPr>
-        <p:spPr>
-          <a:xfrm>
-            <a:off x="457200" y="146304"/>
-            <a:ext cx="8229600" cy="457200"/>
-          </a:xfrm>
-          <a:prstGeom prst="rect">
-            <a:avLst/>
-          </a:prstGeom>
-          <a:noFill/>
-          <a:ln/>
-        </p:spPr>
-        <p:txBody>
-          <a:bodyPr wrap="square" lIns="0" tIns="0" rIns="0" bIns="0" rtlCol="0" anchor="ctr"/>
-          <a:lstStyle/>
-          <a:p>
-            <a:pPr marL="0" indent="0">
-              <a:buNone/>
-            </a:pPr>
-            <a:r>
-              <a:rPr lang="en-US" sz="2600" b="1" dirty="0">
-                <a:solidFill>
-                  <a:srgbClr val="FFFFFF"/>
-                </a:solidFill>
-                <a:latin typeface="Calibri" pitchFamily="34" charset="0"/>
-                <a:ea typeface="Calibri" pitchFamily="34" charset="-122"/>
-                <a:cs typeface="Calibri" pitchFamily="34" charset="-120"/>
-              </a:rPr>
-              <a:t>Visualización · </a:t>
-            </a:r>
-            <a:r>
-              <a:rPr lang="en-US" sz="2600" b="1" dirty="0" err="1">
-                <a:solidFill>
-                  <a:srgbClr val="FFFFFF"/>
-                </a:solidFill>
-                <a:latin typeface="Calibri" pitchFamily="34" charset="0"/>
-                <a:ea typeface="Calibri" pitchFamily="34" charset="-122"/>
-                <a:cs typeface="Calibri" pitchFamily="34" charset="-120"/>
-              </a:rPr>
-              <a:t>Corrplot</a:t>
-            </a:r>
-            <a:r>
-              <a:rPr lang="en-US" sz="2600" b="1" dirty="0">
-                <a:solidFill>
-                  <a:srgbClr val="FFFFFF"/>
-                </a:solidFill>
-                <a:latin typeface="Calibri" pitchFamily="34" charset="0"/>
-                <a:ea typeface="Calibri" pitchFamily="34" charset="-122"/>
-                <a:cs typeface="Calibri" pitchFamily="34" charset="-120"/>
-              </a:rPr>
-              <a:t> de </a:t>
-            </a:r>
-            <a:r>
-              <a:rPr lang="en-US" sz="2600" b="1" u="sng" dirty="0">
-                <a:solidFill>
-                  <a:srgbClr val="FFFFFF"/>
-                </a:solidFill>
-                <a:latin typeface="Calibri" pitchFamily="34" charset="0"/>
-                <a:ea typeface="Calibri" pitchFamily="34" charset="-122"/>
-                <a:cs typeface="Calibri" pitchFamily="34" charset="-120"/>
-              </a:rPr>
-              <a:t>R Studio</a:t>
-            </a:r>
-            <a:r>
-              <a:rPr lang="en-US" sz="2600" b="1" dirty="0">
-                <a:solidFill>
-                  <a:srgbClr val="FFFFFF"/>
-                </a:solidFill>
-                <a:latin typeface="Calibri" pitchFamily="34" charset="0"/>
-                <a:ea typeface="Calibri" pitchFamily="34" charset="-122"/>
-                <a:cs typeface="Calibri" pitchFamily="34" charset="-120"/>
-              </a:rPr>
-              <a:t> (1/3)</a:t>
-            </a:r>
-            <a:endParaRPr lang="en-US" sz="2600" dirty="0"/>
-          </a:p>
-        </p:txBody>
-      </p:sp>
-      <p:sp>
-        <p:nvSpPr>
-          <p:cNvPr id="4" name="Text 2"/>
-          <p:cNvSpPr/>
-          <p:nvPr/>
-        </p:nvSpPr>
-        <p:spPr>
-          <a:xfrm>
-            <a:off x="457200" y="562726"/>
-            <a:ext cx="8229600" cy="228600"/>
-          </a:xfrm>
-          <a:prstGeom prst="rect">
-            <a:avLst/>
-          </a:prstGeom>
-          <a:noFill/>
-          <a:ln/>
-        </p:spPr>
-        <p:txBody>
-          <a:bodyPr wrap="square" lIns="0" tIns="0" rIns="0" bIns="0" rtlCol="0" anchor="ctr"/>
-          <a:lstStyle/>
-          <a:p>
-            <a:pPr marL="0" indent="0">
-              <a:buNone/>
-            </a:pPr>
-            <a:r>
-              <a:rPr lang="en-US" sz="1000" dirty="0">
-                <a:solidFill>
-                  <a:srgbClr val="F0C060"/>
-                </a:solidFill>
-                <a:latin typeface="Consolas" pitchFamily="34" charset="0"/>
-                <a:ea typeface="Consolas" pitchFamily="34" charset="-122"/>
-                <a:cs typeface="Consolas" pitchFamily="34" charset="-120"/>
-              </a:rPr>
-              <a:t>Correlación lineal (Pearson) · dataset codificado numéricamente</a:t>
-            </a:r>
-            <a:endParaRPr lang="en-US" sz="1000" dirty="0"/>
-          </a:p>
-        </p:txBody>
-      </p:sp>
-      <p:pic>
-        <p:nvPicPr>
-          <p:cNvPr id="10" name="Image 0" descr="preencoded.png"/>
-          <p:cNvPicPr>
-            <a:picLocks noChangeAspect="1"/>
-          </p:cNvPicPr>
-          <p:nvPr/>
-        </p:nvPicPr>
-        <p:blipFill>
-          <a:blip r:embed="rId3"/>
-          <a:stretch>
-            <a:fillRect/>
-          </a:stretch>
-        </p:blipFill>
-        <p:spPr>
-          <a:xfrm>
-            <a:off x="1451819" y="982104"/>
-            <a:ext cx="6788377" cy="3940928"/>
-          </a:xfrm>
-          <a:prstGeom prst="rect">
-            <a:avLst/>
-          </a:prstGeom>
-        </p:spPr>
-      </p:pic>
-      <p:sp>
-        <p:nvSpPr>
-          <p:cNvPr id="33" name="Text 30"/>
-          <p:cNvSpPr/>
-          <p:nvPr/>
-        </p:nvSpPr>
-        <p:spPr>
-          <a:xfrm>
-            <a:off x="457200" y="4928616"/>
-            <a:ext cx="7772400" cy="201168"/>
-          </a:xfrm>
-          <a:prstGeom prst="rect">
-            <a:avLst/>
-          </a:prstGeom>
-          <a:noFill/>
-          <a:ln/>
-        </p:spPr>
-        <p:txBody>
-          <a:bodyPr wrap="square" lIns="0" tIns="0" rIns="0" bIns="0" rtlCol="0" anchor="ctr"/>
-          <a:lstStyle/>
-          <a:p>
-            <a:pPr marL="0" indent="0" algn="l">
-              <a:buNone/>
-            </a:pPr>
-            <a:r>
-              <a:rPr lang="en-US" sz="800" dirty="0">
-                <a:solidFill>
-                  <a:srgbClr val="4A6080"/>
-                </a:solidFill>
-                <a:latin typeface="Calibri" pitchFamily="34" charset="0"/>
-                <a:ea typeface="Calibri" pitchFamily="34" charset="-122"/>
-                <a:cs typeface="Calibri" pitchFamily="34" charset="-120"/>
-              </a:rPr>
-              <a:t>TFG · Detector de Chollos en Andalucía · Mario Jiménez · Universidad de Sevilla</a:t>
-            </a:r>
-            <a:endParaRPr lang="en-US" sz="800" dirty="0"/>
-          </a:p>
-        </p:txBody>
-      </p:sp>
-      <p:sp>
-        <p:nvSpPr>
-          <p:cNvPr id="34" name="Text 31"/>
-          <p:cNvSpPr/>
-          <p:nvPr/>
-        </p:nvSpPr>
-        <p:spPr>
-          <a:xfrm>
-            <a:off x="8595360" y="4754880"/>
-            <a:ext cx="365760" cy="228600"/>
-          </a:xfrm>
-          <a:prstGeom prst="rect">
-            <a:avLst/>
-          </a:prstGeom>
-          <a:noFill/>
-          <a:ln/>
-        </p:spPr>
-        <p:txBody>
-          <a:bodyPr wrap="square" lIns="0" tIns="0" rIns="0" bIns="0" rtlCol="0" anchor="ctr"/>
-          <a:lstStyle/>
-          <a:p>
-            <a:pPr marL="0" indent="0" algn="ctr">
-              <a:buNone/>
-            </a:pPr>
-            <a:endParaRPr lang="en-US" sz="900" dirty="0"/>
-          </a:p>
-        </p:txBody>
-      </p:sp>
-      <p:sp>
-        <p:nvSpPr>
-          <p:cNvPr id="50" name="LabelCorrplot"/>
-          <p:cNvSpPr/>
-          <p:nvPr/>
-        </p:nvSpPr>
-        <p:spPr>
-          <a:xfrm>
-            <a:off x="274680" y="786436"/>
-            <a:ext cx="8594640" cy="182880"/>
-          </a:xfrm>
-          <a:prstGeom prst="rect">
-            <a:avLst/>
-          </a:prstGeom>
-          <a:noFill/>
-          <a:ln/>
-        </p:spPr>
-        <p:txBody>
-          <a:bodyPr wrap="square" lIns="0" tIns="0" rIns="0" bIns="0" rtlCol="0" anchor="ctr"/>
-          <a:lstStyle/>
-          <a:p>
-            <a:pPr marL="0" indent="0">
-              <a:buNone/>
-            </a:pPr>
-            <a:r>
-              <a:rPr lang="es-ES" sz="900" b="1" dirty="0">
-                <a:solidFill>
-                  <a:srgbClr val="D4A843"/>
-                </a:solidFill>
-                <a:latin typeface="Calibri" pitchFamily="34" charset="0"/>
-              </a:rPr>
-              <a:t>📊  Pearson · </a:t>
-            </a:r>
-            <a:r>
-              <a:rPr lang="es-ES" sz="900" b="1" dirty="0">
-                <a:solidFill>
-                  <a:srgbClr val="FF0000"/>
-                </a:solidFill>
-                <a:latin typeface="Calibri" pitchFamily="34" charset="0"/>
-              </a:rPr>
-              <a:t>R Studio </a:t>
-            </a:r>
-            <a:r>
-              <a:rPr lang="es-ES" sz="900" b="1" dirty="0" err="1">
-                <a:solidFill>
-                  <a:srgbClr val="FF0000"/>
-                </a:solidFill>
-                <a:latin typeface="Calibri" pitchFamily="34" charset="0"/>
-              </a:rPr>
-              <a:t>corrplot</a:t>
-            </a:r>
-            <a:r>
-              <a:rPr lang="es-ES" sz="900" b="1" dirty="0">
-                <a:solidFill>
-                  <a:srgbClr val="FF0000"/>
-                </a:solidFill>
-                <a:latin typeface="Calibri" pitchFamily="34" charset="0"/>
-              </a:rPr>
-              <a:t> </a:t>
-            </a:r>
-            <a:r>
-              <a:rPr lang="es-ES" sz="900" b="1" dirty="0">
-                <a:solidFill>
-                  <a:srgbClr val="D4A843"/>
-                </a:solidFill>
-                <a:latin typeface="Calibri" pitchFamily="34" charset="0"/>
-              </a:rPr>
-              <a:t>· 30 variables · LabelEncoder + get_dummies</a:t>
-            </a:r>
           </a:p>
         </p:txBody>
       </p:sp>
@@ -9107,7 +10016,51 @@
                 <a:ea typeface="Calibri" pitchFamily="34" charset="-122"/>
                 <a:cs typeface="Calibri" pitchFamily="34" charset="-120"/>
               </a:rPr>
-              <a:t>Visualización de Datos  (2/3)</a:t>
+              <a:t>Visualización · </a:t>
+            </a:r>
+            <a:r>
+              <a:rPr lang="en-US" sz="2600" b="1" dirty="0" err="1">
+                <a:solidFill>
+                  <a:srgbClr val="FFFFFF"/>
+                </a:solidFill>
+                <a:latin typeface="Calibri" pitchFamily="34" charset="0"/>
+                <a:ea typeface="Calibri" pitchFamily="34" charset="-122"/>
+                <a:cs typeface="Calibri" pitchFamily="34" charset="-120"/>
+              </a:rPr>
+              <a:t>Corrplot</a:t>
+            </a:r>
+            <a:r>
+              <a:rPr lang="en-US" sz="2600" b="1" dirty="0">
+                <a:solidFill>
+                  <a:srgbClr val="FFFFFF"/>
+                </a:solidFill>
+                <a:latin typeface="Calibri" pitchFamily="34" charset="0"/>
+                <a:ea typeface="Calibri" pitchFamily="34" charset="-122"/>
+                <a:cs typeface="Calibri" pitchFamily="34" charset="-120"/>
+              </a:rPr>
+              <a:t> de </a:t>
+            </a:r>
+            <a:r>
+              <a:rPr lang="en-US" sz="2600" b="1" u="sng" dirty="0">
+                <a:solidFill>
+                  <a:srgbClr val="FFFFFF"/>
+                </a:solidFill>
+                <a:latin typeface="Calibri" pitchFamily="34" charset="0"/>
+                <a:ea typeface="Calibri" pitchFamily="34" charset="-122"/>
+                <a:cs typeface="Calibri" pitchFamily="34" charset="-120"/>
+              </a:rPr>
+              <a:t>R Studio</a:t>
+            </a:r>
+            <a:r>
+              <a:rPr lang="en-US" sz="2600" b="1" dirty="0">
+                <a:solidFill>
+                  <a:srgbClr val="FFFFFF"/>
+                </a:solidFill>
+                <a:latin typeface="Calibri" pitchFamily="34" charset="0"/>
+                <a:ea typeface="Calibri" pitchFamily="34" charset="-122"/>
+                <a:cs typeface="Calibri" pitchFamily="34" charset="-120"/>
+              </a:rPr>
+              <a:t> (1/3)</a:t>
             </a:r>
             <a:endParaRPr lang="en-US" sz="2600" dirty="0"/>
           </a:p>
@@ -9121,7 +10074,7 @@
         </p:nvSpPr>
         <p:spPr>
           <a:xfrm>
-            <a:off x="457200" y="603504"/>
+            <a:off x="457200" y="562726"/>
             <a:ext cx="8229600" cy="228600"/>
           </a:xfrm>
           <a:prstGeom prst="rect">
@@ -9146,7 +10099,7 @@
                 <a:ea typeface="Consolas" pitchFamily="34" charset="-122"/>
                 <a:cs typeface="Consolas" pitchFamily="34" charset="-120"/>
               </a:rPr>
-              <a:t>Regresión Lineal  ·  Mapa Coroplético Andalucía</a:t>
+              <a:t>Correlación lineal (Pearson) · dataset codificado numéricamente</a:t>
             </a:r>
             <a:endParaRPr lang="en-US" sz="1000" dirty="0"/>
           </a:p>
@@ -9161,15 +10114,15 @@
           <p:nvPr/>
         </p:nvPicPr>
         <p:blipFill>
-          <a:blip r:embed="rId2"/>
+          <a:blip r:embed="rId3"/>
           <a:stretch>
             <a:fillRect/>
           </a:stretch>
         </p:blipFill>
         <p:spPr>
           <a:xfrm>
-            <a:off x="96336" y="1175004"/>
-            <a:ext cx="4535424" cy="3310128"/>
+            <a:off x="1451819" y="982104"/>
+            <a:ext cx="6788377" cy="3940928"/>
           </a:xfrm>
           <a:prstGeom prst="rect">
             <a:avLst/>
@@ -9184,7 +10137,7 @@
         </p:nvSpPr>
         <p:spPr>
           <a:xfrm>
-            <a:off x="457200" y="4828032"/>
+            <a:off x="457200" y="4928616"/>
             <a:ext cx="7772400" cy="201168"/>
           </a:xfrm>
           <a:prstGeom prst="rect">
@@ -9251,8 +10204,8 @@
         </p:nvSpPr>
         <p:spPr>
           <a:xfrm>
-            <a:off x="274320" y="770400"/>
-            <a:ext cx="4389120" cy="190500"/>
+            <a:off x="274680" y="786436"/>
+            <a:ext cx="8594640" cy="182880"/>
           </a:xfrm>
           <a:prstGeom prst="rect">
             <a:avLst/>
@@ -9274,131 +10227,43 @@
                 </a:solidFill>
                 <a:latin typeface="Calibri" pitchFamily="34" charset="0"/>
               </a:rPr>
-              <a:t>Regresión Lineal: tamaño_habitacion vs precio</a:t>
-            </a:r>
-          </a:p>
-        </p:txBody>
-      </p:sp>
-      <p:sp>
-        <p:nvSpPr>
-          <p:cNvPr id="51" name="LabelArbol"/>
-          <p:cNvSpPr/>
-          <p:nvPr/>
-        </p:nvSpPr>
-        <p:spPr>
-          <a:xfrm>
-            <a:off x="4731120" y="770400"/>
-            <a:ext cx="4130640" cy="190500"/>
-          </a:xfrm>
-          <a:prstGeom prst="rect">
-            <a:avLst/>
-          </a:prstGeom>
-          <a:noFill/>
-          <a:ln/>
-        </p:spPr>
-        <p:txBody>
-          <a:bodyPr wrap="square" lIns="0" tIns="0" rIns="0" bIns="0" rtlCol="0" anchor="ctr"/>
-          <a:lstStyle/>
-          <a:p>
-            <a:pPr marL="0" indent="0">
-              <a:buNone/>
-            </a:pPr>
+              <a:t>📊  Pearson · </a:t>
+            </a:r>
             <a:r>
               <a:rPr lang="es-ES" sz="900" b="1" dirty="0">
                 <a:solidFill>
+                  <a:srgbClr val="FF0000"/>
+                </a:solidFill>
+                <a:latin typeface="Calibri" pitchFamily="34" charset="0"/>
+              </a:rPr>
+              <a:t>R Studio </a:t>
+            </a:r>
+            <a:r>
+              <a:rPr lang="es-ES" sz="900" b="1" dirty="0" err="1">
+                <a:solidFill>
+                  <a:srgbClr val="FF0000"/>
+                </a:solidFill>
+                <a:latin typeface="Calibri" pitchFamily="34" charset="0"/>
+              </a:rPr>
+              <a:t>corrplot</a:t>
+            </a:r>
+            <a:r>
+              <a:rPr lang="es-ES" sz="900" b="1" dirty="0">
+                <a:solidFill>
+                  <a:srgbClr val="FF0000"/>
+                </a:solidFill>
+                <a:latin typeface="Calibri" pitchFamily="34" charset="0"/>
+              </a:rPr>
+              <a:t> </a:t>
+            </a:r>
+            <a:r>
+              <a:rPr lang="es-ES" sz="900" b="1" dirty="0">
+                <a:solidFill>
                   <a:srgbClr val="D4A843"/>
                 </a:solidFill>
                 <a:latin typeface="Calibri" pitchFamily="34" charset="0"/>
               </a:rPr>
-              <a:t>🗺️  Mapa Coroplético Andalucía  ·  plotly.express</a:t>
-            </a:r>
-          </a:p>
-        </p:txBody>
-      </p:sp>
-      <p:sp>
-        <p:nvSpPr>
-          <p:cNvPr id="60" name="MapaDesc"/>
-          <p:cNvSpPr/>
-          <p:nvPr/>
-        </p:nvSpPr>
-        <p:spPr>
-          <a:xfrm>
-            <a:off x="4731120" y="960120"/>
-            <a:ext cx="4130640" cy="1143000"/>
-          </a:xfrm>
-          <a:prstGeom prst="rect">
-            <a:avLst/>
-          </a:prstGeom>
-          <a:solidFill>
-            <a:srgbClr val="1E3A5F"/>
-          </a:solidFill>
-          <a:ln/>
-        </p:spPr>
-        <p:txBody>
-          <a:bodyPr wrap="square" lIns="91440" tIns="91440" rIns="91440" bIns="91440" rtlCol="0" anchor="t"/>
-          <a:lstStyle/>
-          <a:p>
-            <a:pPr marL="0" indent="0">
-              <a:buNone/>
-            </a:pPr>
-            <a:r>
-              <a:rPr lang="es-ES" sz="900" dirty="0">
-                <a:solidFill>
-                  <a:srgbClr val="F4F8FC"/>
-                </a:solidFill>
-                <a:latin typeface="Calibri" pitchFamily="34" charset="0"/>
-              </a:rPr>
-              <a:t>Choropleth por provincias andaluzas (GeoJSON spain-provinces) + scatter de alojamientos únicos (lat/lon). El HTML resultante se usa como mapa por defecto en la app Streamlit del usuario final.</a:t>
-            </a:r>
-          </a:p>
-        </p:txBody>
-      </p:sp>
-      <p:sp>
-        <p:nvSpPr>
-          <p:cNvPr id="61" name="MapaCode"/>
-          <p:cNvSpPr/>
-          <p:nvPr/>
-        </p:nvSpPr>
-        <p:spPr>
-          <a:xfrm>
-            <a:off x="4731120" y="2160120"/>
-            <a:ext cx="4130640" cy="1761876"/>
-          </a:xfrm>
-          <a:prstGeom prst="rect">
-            <a:avLst/>
-          </a:prstGeom>
-          <a:solidFill>
-            <a:srgbClr val="0D1117"/>
-          </a:solidFill>
-          <a:ln/>
-        </p:spPr>
-        <p:txBody>
-          <a:bodyPr wrap="square" lIns="91440" tIns="91440" rIns="91440" bIns="91440" rtlCol="0" anchor="t"/>
-          <a:lstStyle/>
-          <a:p>
-            <a:pPr marL="0" indent="0">
-              <a:buNone/>
-            </a:pPr>
-            <a:r>
-              <a:rPr lang="en-US" sz="800" dirty="0">
-                <a:solidFill>
-                  <a:srgbClr val="E2E8F0"/>
-                </a:solidFill>
-                <a:latin typeface="Consolas" pitchFamily="49" charset="0"/>
-              </a:rPr>
-              <a:t># Mapa coroplético + scatter
-fig = px.choropleth(
-  locations=NOMBRES_PROVINCIAS,
-  geojson=geojson,
-  featureidkey="properties.name",
-  color=alojamientos_por_provincia,
-  color_continuous_scale="Reds")
-fig.add_scattergeo(
-  lat=df['latitud'],
-  lon=df['longitud'],
-  mode="markers",
-  marker=dict(size=5,color="green"))
-fig.write_html(salida)  # → Streamlit</a:t>
+              <a:t>· 30 variables · LabelEncoder + get_dummies</a:t>
             </a:r>
           </a:p>
         </p:txBody>
@@ -9489,6 +10354,388 @@
                 <a:ea typeface="Calibri" pitchFamily="34" charset="-122"/>
                 <a:cs typeface="Calibri" pitchFamily="34" charset="-120"/>
               </a:rPr>
+              <a:t>Visualización de Datos  (2/3)</a:t>
+            </a:r>
+            <a:endParaRPr lang="en-US" sz="2600" dirty="0"/>
+          </a:p>
+        </p:txBody>
+      </p:sp>
+      <p:sp>
+        <p:nvSpPr>
+          <p:cNvPr id="4" name="Text 2"/>
+          <p:cNvSpPr/>
+          <p:nvPr/>
+        </p:nvSpPr>
+        <p:spPr>
+          <a:xfrm>
+            <a:off x="457200" y="603504"/>
+            <a:ext cx="8229600" cy="228600"/>
+          </a:xfrm>
+          <a:prstGeom prst="rect">
+            <a:avLst/>
+          </a:prstGeom>
+          <a:noFill/>
+          <a:ln/>
+        </p:spPr>
+        <p:txBody>
+          <a:bodyPr wrap="square" lIns="0" tIns="0" rIns="0" bIns="0" rtlCol="0" anchor="ctr"/>
+          <a:lstStyle/>
+          <a:p>
+            <a:pPr marL="0" indent="0">
+              <a:buNone/>
+            </a:pPr>
+            <a:r>
+              <a:rPr lang="en-US" sz="1000" dirty="0">
+                <a:solidFill>
+                  <a:srgbClr val="F0C060"/>
+                </a:solidFill>
+                <a:latin typeface="Consolas" pitchFamily="34" charset="0"/>
+                <a:ea typeface="Consolas" pitchFamily="34" charset="-122"/>
+                <a:cs typeface="Consolas" pitchFamily="34" charset="-120"/>
+              </a:rPr>
+              <a:t>Regresión Lineal  ·  Mapa Coroplético Andalucía</a:t>
+            </a:r>
+            <a:endParaRPr lang="en-US" sz="1000" dirty="0"/>
+          </a:p>
+        </p:txBody>
+      </p:sp>
+      <p:pic>
+        <p:nvPicPr>
+          <p:cNvPr id="10" name="Image 0" descr="preencoded.png"/>
+          <p:cNvPicPr>
+            <a:picLocks noChangeAspect="1"/>
+          </p:cNvPicPr>
+          <p:nvPr/>
+        </p:nvPicPr>
+        <p:blipFill>
+          <a:blip r:embed="rId2"/>
+          <a:stretch>
+            <a:fillRect/>
+          </a:stretch>
+        </p:blipFill>
+        <p:spPr>
+          <a:xfrm>
+            <a:off x="96336" y="1175004"/>
+            <a:ext cx="4535424" cy="3310128"/>
+          </a:xfrm>
+          <a:prstGeom prst="rect">
+            <a:avLst/>
+          </a:prstGeom>
+        </p:spPr>
+      </p:pic>
+      <p:sp>
+        <p:nvSpPr>
+          <p:cNvPr id="33" name="Text 30"/>
+          <p:cNvSpPr/>
+          <p:nvPr/>
+        </p:nvSpPr>
+        <p:spPr>
+          <a:xfrm>
+            <a:off x="457200" y="4828032"/>
+            <a:ext cx="7772400" cy="201168"/>
+          </a:xfrm>
+          <a:prstGeom prst="rect">
+            <a:avLst/>
+          </a:prstGeom>
+          <a:noFill/>
+          <a:ln/>
+        </p:spPr>
+        <p:txBody>
+          <a:bodyPr wrap="square" lIns="0" tIns="0" rIns="0" bIns="0" rtlCol="0" anchor="ctr"/>
+          <a:lstStyle/>
+          <a:p>
+            <a:pPr marL="0" indent="0" algn="l">
+              <a:buNone/>
+            </a:pPr>
+            <a:r>
+              <a:rPr lang="en-US" sz="800" dirty="0">
+                <a:solidFill>
+                  <a:srgbClr val="4A6080"/>
+                </a:solidFill>
+                <a:latin typeface="Calibri" pitchFamily="34" charset="0"/>
+                <a:ea typeface="Calibri" pitchFamily="34" charset="-122"/>
+                <a:cs typeface="Calibri" pitchFamily="34" charset="-120"/>
+              </a:rPr>
+              <a:t>TFG · Detector de Chollos en Andalucía · Mario Jiménez · Universidad de Sevilla</a:t>
+            </a:r>
+            <a:endParaRPr lang="en-US" sz="800" dirty="0"/>
+          </a:p>
+        </p:txBody>
+      </p:sp>
+      <p:sp>
+        <p:nvSpPr>
+          <p:cNvPr id="34" name="Text 31"/>
+          <p:cNvSpPr/>
+          <p:nvPr/>
+        </p:nvSpPr>
+        <p:spPr>
+          <a:xfrm>
+            <a:off x="8595360" y="4754880"/>
+            <a:ext cx="365760" cy="228600"/>
+          </a:xfrm>
+          <a:prstGeom prst="rect">
+            <a:avLst/>
+          </a:prstGeom>
+          <a:noFill/>
+          <a:ln/>
+        </p:spPr>
+        <p:txBody>
+          <a:bodyPr wrap="square" lIns="0" tIns="0" rIns="0" bIns="0" rtlCol="0" anchor="ctr"/>
+          <a:lstStyle/>
+          <a:p>
+            <a:pPr marL="0" indent="0" algn="ctr">
+              <a:buNone/>
+            </a:pPr>
+            <a:endParaRPr lang="en-US" sz="900" dirty="0"/>
+          </a:p>
+        </p:txBody>
+      </p:sp>
+      <p:sp>
+        <p:nvSpPr>
+          <p:cNvPr id="50" name="LabelCorrplot"/>
+          <p:cNvSpPr/>
+          <p:nvPr/>
+        </p:nvSpPr>
+        <p:spPr>
+          <a:xfrm>
+            <a:off x="274320" y="770400"/>
+            <a:ext cx="4389120" cy="190500"/>
+          </a:xfrm>
+          <a:prstGeom prst="rect">
+            <a:avLst/>
+          </a:prstGeom>
+          <a:noFill/>
+          <a:ln/>
+        </p:spPr>
+        <p:txBody>
+          <a:bodyPr wrap="square" lIns="0" tIns="0" rIns="0" bIns="0" rtlCol="0" anchor="ctr"/>
+          <a:lstStyle/>
+          <a:p>
+            <a:pPr marL="0" indent="0">
+              <a:buNone/>
+            </a:pPr>
+            <a:r>
+              <a:rPr lang="es-ES" sz="900" b="1" dirty="0">
+                <a:solidFill>
+                  <a:srgbClr val="D4A843"/>
+                </a:solidFill>
+                <a:latin typeface="Calibri" pitchFamily="34" charset="0"/>
+              </a:rPr>
+              <a:t>Regresión Lineal: tamaño_habitacion vs precio</a:t>
+            </a:r>
+          </a:p>
+        </p:txBody>
+      </p:sp>
+      <p:sp>
+        <p:nvSpPr>
+          <p:cNvPr id="51" name="LabelArbol"/>
+          <p:cNvSpPr/>
+          <p:nvPr/>
+        </p:nvSpPr>
+        <p:spPr>
+          <a:xfrm>
+            <a:off x="4731120" y="770400"/>
+            <a:ext cx="4130640" cy="190500"/>
+          </a:xfrm>
+          <a:prstGeom prst="rect">
+            <a:avLst/>
+          </a:prstGeom>
+          <a:noFill/>
+          <a:ln/>
+        </p:spPr>
+        <p:txBody>
+          <a:bodyPr wrap="square" lIns="0" tIns="0" rIns="0" bIns="0" rtlCol="0" anchor="ctr"/>
+          <a:lstStyle/>
+          <a:p>
+            <a:pPr marL="0" indent="0">
+              <a:buNone/>
+            </a:pPr>
+            <a:r>
+              <a:rPr lang="es-ES" sz="900" b="1" dirty="0">
+                <a:solidFill>
+                  <a:srgbClr val="D4A843"/>
+                </a:solidFill>
+                <a:latin typeface="Calibri" pitchFamily="34" charset="0"/>
+              </a:rPr>
+              <a:t>🗺️  Mapa Coroplético Andalucía  ·  plotly.express</a:t>
+            </a:r>
+          </a:p>
+        </p:txBody>
+      </p:sp>
+      <p:sp>
+        <p:nvSpPr>
+          <p:cNvPr id="60" name="MapaDesc"/>
+          <p:cNvSpPr/>
+          <p:nvPr/>
+        </p:nvSpPr>
+        <p:spPr>
+          <a:xfrm>
+            <a:off x="4731120" y="960120"/>
+            <a:ext cx="4130640" cy="1143000"/>
+          </a:xfrm>
+          <a:prstGeom prst="rect">
+            <a:avLst/>
+          </a:prstGeom>
+          <a:solidFill>
+            <a:srgbClr val="1E3A5F"/>
+          </a:solidFill>
+          <a:ln/>
+        </p:spPr>
+        <p:txBody>
+          <a:bodyPr wrap="square" lIns="91440" tIns="91440" rIns="91440" bIns="91440" rtlCol="0" anchor="t"/>
+          <a:lstStyle/>
+          <a:p>
+            <a:pPr marL="0" indent="0">
+              <a:buNone/>
+            </a:pPr>
+            <a:r>
+              <a:rPr lang="es-ES" sz="900" dirty="0">
+                <a:solidFill>
+                  <a:srgbClr val="F4F8FC"/>
+                </a:solidFill>
+                <a:latin typeface="Calibri" pitchFamily="34" charset="0"/>
+              </a:rPr>
+              <a:t>Choropleth por provincias andaluzas (GeoJSON spain-provinces) + scatter de alojamientos únicos (lat/lon). El HTML resultante se usa como mapa por defecto en la app Streamlit del usuario final.</a:t>
+            </a:r>
+          </a:p>
+        </p:txBody>
+      </p:sp>
+      <p:sp>
+        <p:nvSpPr>
+          <p:cNvPr id="61" name="MapaCode"/>
+          <p:cNvSpPr/>
+          <p:nvPr/>
+        </p:nvSpPr>
+        <p:spPr>
+          <a:xfrm>
+            <a:off x="4731120" y="2160120"/>
+            <a:ext cx="4130640" cy="1761876"/>
+          </a:xfrm>
+          <a:prstGeom prst="rect">
+            <a:avLst/>
+          </a:prstGeom>
+          <a:solidFill>
+            <a:srgbClr val="0D1117"/>
+          </a:solidFill>
+          <a:ln/>
+        </p:spPr>
+        <p:txBody>
+          <a:bodyPr wrap="square" lIns="91440" tIns="91440" rIns="91440" bIns="91440" rtlCol="0" anchor="t"/>
+          <a:lstStyle/>
+          <a:p>
+            <a:pPr marL="0" indent="0">
+              <a:buNone/>
+            </a:pPr>
+            <a:r>
+              <a:rPr lang="en-US" sz="800" dirty="0">
+                <a:solidFill>
+                  <a:srgbClr val="E2E8F0"/>
+                </a:solidFill>
+                <a:latin typeface="Consolas" pitchFamily="49" charset="0"/>
+              </a:rPr>
+              <a:t># Mapa coroplético + scatter
+fig = px.choropleth(
+  locations=NOMBRES_PROVINCIAS,
+  geojson=geojson,
+  featureidkey="properties.name",
+  color=alojamientos_por_provincia,
+  color_continuous_scale="Reds")
+fig.add_scattergeo(
+  lat=df['latitud'],
+  lon=df['longitud'],
+  mode="markers",
+  marker=dict(size=5,color="green"))
+fig.write_html(salida)  # → Streamlit</a:t>
+            </a:r>
+          </a:p>
+        </p:txBody>
+      </p:sp>
+    </p:spTree>
+  </p:cSld>
+  <p:clrMapOvr>
+    <a:masterClrMapping/>
+  </p:clrMapOvr>
+</p:sld>
+</file>
+
+<file path=ppt/slides/slide18.xml><?xml version="1.0" encoding="utf-8"?>
+<p:sld xmlns:a="http://schemas.openxmlformats.org/drawingml/2006/main" xmlns:r="http://schemas.openxmlformats.org/officeDocument/2006/relationships" xmlns:p="http://schemas.openxmlformats.org/presentationml/2006/main">
+  <p:cSld name="Slide 9">
+    <p:bg>
+      <p:bgPr>
+        <a:solidFill>
+          <a:srgbClr val="1A2E4A"/>
+        </a:solidFill>
+        <a:effectLst/>
+      </p:bgPr>
+    </p:bg>
+    <p:spTree>
+      <p:nvGrpSpPr>
+        <p:cNvPr id="1" name=""/>
+        <p:cNvGrpSpPr/>
+        <p:nvPr/>
+      </p:nvGrpSpPr>
+      <p:grpSpPr>
+        <a:xfrm>
+          <a:off x="0" y="0"/>
+          <a:ext cx="0" cy="0"/>
+          <a:chOff x="0" y="0"/>
+          <a:chExt cx="0" cy="0"/>
+        </a:xfrm>
+      </p:grpSpPr>
+      <p:sp>
+        <p:nvSpPr>
+          <p:cNvPr id="2" name="Shape 0"/>
+          <p:cNvSpPr/>
+          <p:nvPr/>
+        </p:nvSpPr>
+        <p:spPr>
+          <a:xfrm>
+            <a:off x="0" y="0"/>
+            <a:ext cx="9144000" cy="54864"/>
+          </a:xfrm>
+          <a:prstGeom prst="rect">
+            <a:avLst/>
+          </a:prstGeom>
+          <a:solidFill>
+            <a:srgbClr val="D4A843"/>
+          </a:solidFill>
+          <a:ln/>
+        </p:spPr>
+      </p:sp>
+      <p:sp>
+        <p:nvSpPr>
+          <p:cNvPr id="3" name="Text 1"/>
+          <p:cNvSpPr/>
+          <p:nvPr/>
+        </p:nvSpPr>
+        <p:spPr>
+          <a:xfrm>
+            <a:off x="457200" y="146304"/>
+            <a:ext cx="8229600" cy="457200"/>
+          </a:xfrm>
+          <a:prstGeom prst="rect">
+            <a:avLst/>
+          </a:prstGeom>
+          <a:noFill/>
+          <a:ln/>
+        </p:spPr>
+        <p:txBody>
+          <a:bodyPr wrap="square" lIns="0" tIns="0" rIns="0" bIns="0" rtlCol="0" anchor="ctr"/>
+          <a:lstStyle/>
+          <a:p>
+            <a:pPr marL="0" indent="0">
+              <a:buNone/>
+            </a:pPr>
+            <a:r>
+              <a:rPr lang="en-US" sz="2600" b="1" dirty="0">
+                <a:solidFill>
+                  <a:srgbClr val="FFFFFF"/>
+                </a:solidFill>
+                <a:latin typeface="Calibri" pitchFamily="34" charset="0"/>
+                <a:ea typeface="Calibri" pitchFamily="34" charset="-122"/>
+                <a:cs typeface="Calibri" pitchFamily="34" charset="-120"/>
+              </a:rPr>
               <a:t>Visualización · Árbol de </a:t>
             </a:r>
             <a:r>
@@ -9590,7 +10837,7 @@
 </p:sld>
 </file>
 
-<file path=ppt/slides/slide18.xml><?xml version="1.0" encoding="utf-8"?>
+<file path=ppt/slides/slide19.xml><?xml version="1.0" encoding="utf-8"?>
 <p:sld xmlns:a="http://schemas.openxmlformats.org/drawingml/2006/main" xmlns:r="http://schemas.openxmlformats.org/officeDocument/2006/relationships" xmlns:p="http://schemas.openxmlformats.org/presentationml/2006/main">
   <p:cSld>
     <p:bg>
@@ -10237,2198 +11484,6 @@
               </a:solidFill>
               <a:latin typeface="Calibri" pitchFamily="34" charset="0"/>
             </a:endParaRPr>
-          </a:p>
-        </p:txBody>
-      </p:sp>
-    </p:spTree>
-  </p:cSld>
-  <p:clrMapOvr>
-    <a:masterClrMapping/>
-  </p:clrMapOvr>
-</p:sld>
-</file>
-
-<file path=ppt/slides/slide19.xml><?xml version="1.0" encoding="utf-8"?>
-<p:sld xmlns:a="http://schemas.openxmlformats.org/drawingml/2006/main" xmlns:r="http://schemas.openxmlformats.org/officeDocument/2006/relationships" xmlns:p="http://schemas.openxmlformats.org/presentationml/2006/main">
-  <p:cSld name="Slide 8">
-    <p:bg>
-      <p:bgPr>
-        <a:solidFill>
-          <a:srgbClr val="F4F8FC"/>
-        </a:solidFill>
-        <a:effectLst/>
-      </p:bgPr>
-    </p:bg>
-    <p:spTree>
-      <p:nvGrpSpPr>
-        <p:cNvPr id="1" name=""/>
-        <p:cNvGrpSpPr/>
-        <p:nvPr/>
-      </p:nvGrpSpPr>
-      <p:grpSpPr>
-        <a:xfrm>
-          <a:off x="0" y="0"/>
-          <a:ext cx="0" cy="0"/>
-          <a:chOff x="0" y="0"/>
-          <a:chExt cx="0" cy="0"/>
-        </a:xfrm>
-      </p:grpSpPr>
-      <p:sp>
-        <p:nvSpPr>
-          <p:cNvPr id="2" name="Shape 0"/>
-          <p:cNvSpPr/>
-          <p:nvPr/>
-        </p:nvSpPr>
-        <p:spPr>
-          <a:xfrm>
-            <a:off x="0" y="0"/>
-            <a:ext cx="9144000" cy="1005840"/>
-          </a:xfrm>
-          <a:prstGeom prst="rect">
-            <a:avLst/>
-          </a:prstGeom>
-          <a:solidFill>
-            <a:srgbClr val="1A2E4A"/>
-          </a:solidFill>
-          <a:ln/>
-        </p:spPr>
-      </p:sp>
-      <p:sp>
-        <p:nvSpPr>
-          <p:cNvPr id="3" name="Shape 1"/>
-          <p:cNvSpPr/>
-          <p:nvPr/>
-        </p:nvSpPr>
-        <p:spPr>
-          <a:xfrm>
-            <a:off x="0" y="0"/>
-            <a:ext cx="9144000" cy="54864"/>
-          </a:xfrm>
-          <a:prstGeom prst="rect">
-            <a:avLst/>
-          </a:prstGeom>
-          <a:solidFill>
-            <a:srgbClr val="D4A843"/>
-          </a:solidFill>
-          <a:ln/>
-        </p:spPr>
-      </p:sp>
-      <p:sp>
-        <p:nvSpPr>
-          <p:cNvPr id="4" name="Text 2"/>
-          <p:cNvSpPr/>
-          <p:nvPr/>
-        </p:nvSpPr>
-        <p:spPr>
-          <a:xfrm>
-            <a:off x="457200" y="164592"/>
-            <a:ext cx="8229600" cy="457200"/>
-          </a:xfrm>
-          <a:prstGeom prst="rect">
-            <a:avLst/>
-          </a:prstGeom>
-          <a:noFill/>
-          <a:ln/>
-        </p:spPr>
-        <p:txBody>
-          <a:bodyPr wrap="square" lIns="0" tIns="0" rIns="0" bIns="0" rtlCol="0" anchor="ctr"/>
-          <a:lstStyle/>
-          <a:p>
-            <a:pPr marL="0" indent="0">
-              <a:buNone/>
-            </a:pPr>
-            <a:r>
-              <a:rPr lang="en-US" sz="2400" b="1" dirty="0">
-                <a:solidFill>
-                  <a:srgbClr val="FFFFFF"/>
-                </a:solidFill>
-                <a:latin typeface="Calibri" pitchFamily="34" charset="0"/>
-                <a:ea typeface="Calibri" pitchFamily="34" charset="-122"/>
-                <a:cs typeface="Calibri" pitchFamily="34" charset="-120"/>
-              </a:rPr>
-              <a:t>Categorización de Chollos · Núcleo del Proyecto</a:t>
-            </a:r>
-            <a:endParaRPr lang="en-US" sz="2400" dirty="0"/>
-          </a:p>
-        </p:txBody>
-      </p:sp>
-      <p:sp>
-        <p:nvSpPr>
-          <p:cNvPr id="5" name="Text 3"/>
-          <p:cNvSpPr/>
-          <p:nvPr/>
-        </p:nvSpPr>
-        <p:spPr>
-          <a:xfrm>
-            <a:off x="457200" y="621792"/>
-            <a:ext cx="8229600" cy="274320"/>
-          </a:xfrm>
-          <a:prstGeom prst="rect">
-            <a:avLst/>
-          </a:prstGeom>
-          <a:noFill/>
-          <a:ln/>
-        </p:spPr>
-        <p:txBody>
-          <a:bodyPr wrap="square" lIns="0" tIns="0" rIns="0" bIns="0" rtlCol="0" anchor="ctr"/>
-          <a:lstStyle/>
-          <a:p>
-            <a:pPr marL="0" indent="0">
-              <a:buNone/>
-            </a:pPr>
-            <a:r>
-              <a:rPr lang="en-US" sz="1000" dirty="0">
-                <a:solidFill>
-                  <a:srgbClr val="F0C060"/>
-                </a:solidFill>
-                <a:latin typeface="Consolas" pitchFamily="34" charset="0"/>
-                <a:ea typeface="Consolas" pitchFamily="34" charset="-122"/>
-                <a:cs typeface="Consolas" pitchFamily="34" charset="-120"/>
-              </a:rPr>
-              <a:t>crear_etiqueta_chollo(y_real, y_predicho)  →  ratio precio_real / precio_predicho</a:t>
-            </a:r>
-            <a:endParaRPr lang="en-US" sz="1000" dirty="0"/>
-          </a:p>
-        </p:txBody>
-      </p:sp>
-      <p:sp>
-        <p:nvSpPr>
-          <p:cNvPr id="6" name="Shape 4"/>
-          <p:cNvSpPr/>
-          <p:nvPr/>
-        </p:nvSpPr>
-        <p:spPr>
-          <a:xfrm>
-            <a:off x="457200" y="1115568"/>
-            <a:ext cx="2148840" cy="475488"/>
-          </a:xfrm>
-          <a:prstGeom prst="rect">
-            <a:avLst/>
-          </a:prstGeom>
-          <a:solidFill>
-            <a:srgbClr val="1A7A2A"/>
-          </a:solidFill>
-          <a:ln/>
-          <a:effectLst>
-            <a:outerShdw blurRad="50800" dist="25400" dir="8100000" algn="bl" rotWithShape="0">
-              <a:srgbClr val="000000">
-                <a:alpha val="10000"/>
-              </a:srgbClr>
-            </a:outerShdw>
-          </a:effectLst>
-        </p:spPr>
-      </p:sp>
-      <p:sp>
-        <p:nvSpPr>
-          <p:cNvPr id="7" name="Text 5"/>
-          <p:cNvSpPr/>
-          <p:nvPr/>
-        </p:nvSpPr>
-        <p:spPr>
-          <a:xfrm>
-            <a:off x="548640" y="1133856"/>
-            <a:ext cx="1965960" cy="201168"/>
-          </a:xfrm>
-          <a:prstGeom prst="rect">
-            <a:avLst/>
-          </a:prstGeom>
-          <a:noFill/>
-          <a:ln/>
-        </p:spPr>
-        <p:txBody>
-          <a:bodyPr wrap="square" lIns="0" tIns="0" rIns="0" bIns="0" rtlCol="0" anchor="ctr"/>
-          <a:lstStyle/>
-          <a:p>
-            <a:pPr marL="0" indent="0">
-              <a:buNone/>
-            </a:pPr>
-            <a:r>
-              <a:rPr lang="en-US" sz="950" b="1" dirty="0">
-                <a:solidFill>
-                  <a:srgbClr val="FFFFFF"/>
-                </a:solidFill>
-                <a:latin typeface="Calibri" pitchFamily="34" charset="0"/>
-                <a:ea typeface="Calibri" pitchFamily="34" charset="-122"/>
-                <a:cs typeface="Calibri" pitchFamily="34" charset="-120"/>
-              </a:rPr>
-              <a:t>4  Hiper-chollo</a:t>
-            </a:r>
-            <a:endParaRPr lang="en-US" sz="950" dirty="0"/>
-          </a:p>
-        </p:txBody>
-      </p:sp>
-      <p:sp>
-        <p:nvSpPr>
-          <p:cNvPr id="8" name="Text 6"/>
-          <p:cNvSpPr/>
-          <p:nvPr/>
-        </p:nvSpPr>
-        <p:spPr>
-          <a:xfrm>
-            <a:off x="548640" y="1335024"/>
-            <a:ext cx="1965960" cy="237744"/>
-          </a:xfrm>
-          <a:prstGeom prst="rect">
-            <a:avLst/>
-          </a:prstGeom>
-          <a:noFill/>
-          <a:ln/>
-        </p:spPr>
-        <p:txBody>
-          <a:bodyPr wrap="square" lIns="0" tIns="0" rIns="0" bIns="0" rtlCol="0" anchor="ctr"/>
-          <a:lstStyle/>
-          <a:p>
-            <a:pPr marL="0" indent="0">
-              <a:buNone/>
-            </a:pPr>
-            <a:r>
-              <a:rPr lang="en-US" sz="800" dirty="0">
-                <a:solidFill>
-                  <a:srgbClr val="F4F8FC"/>
-                </a:solidFill>
-                <a:latin typeface="Calibri" pitchFamily="34" charset="0"/>
-                <a:ea typeface="Calibri" pitchFamily="34" charset="-122"/>
-                <a:cs typeface="Calibri" pitchFamily="34" charset="-120"/>
-              </a:rPr>
-              <a:t>ratio ≤ 0.75</a:t>
-            </a:r>
-            <a:endParaRPr lang="en-US" sz="800" dirty="0"/>
-          </a:p>
-          <a:p>
-            <a:pPr marL="0" indent="0">
-              <a:buNone/>
-            </a:pPr>
-            <a:r>
-              <a:rPr lang="en-US" sz="800" dirty="0">
-                <a:solidFill>
-                  <a:srgbClr val="F4F8FC"/>
-                </a:solidFill>
-                <a:latin typeface="Calibri" pitchFamily="34" charset="0"/>
-                <a:ea typeface="Calibri" pitchFamily="34" charset="-122"/>
-                <a:cs typeface="Calibri" pitchFamily="34" charset="-120"/>
-              </a:rPr>
-              <a:t>&gt;25% más barato que el precio justo</a:t>
-            </a:r>
-            <a:endParaRPr lang="en-US" sz="800" dirty="0"/>
-          </a:p>
-        </p:txBody>
-      </p:sp>
-      <p:sp>
-        <p:nvSpPr>
-          <p:cNvPr id="9" name="Shape 7"/>
-          <p:cNvSpPr/>
-          <p:nvPr/>
-        </p:nvSpPr>
-        <p:spPr>
-          <a:xfrm>
-            <a:off x="457200" y="1636776"/>
-            <a:ext cx="2148840" cy="475488"/>
-          </a:xfrm>
-          <a:prstGeom prst="rect">
-            <a:avLst/>
-          </a:prstGeom>
-          <a:solidFill>
-            <a:srgbClr val="2E8B4A"/>
-          </a:solidFill>
-          <a:ln/>
-          <a:effectLst>
-            <a:outerShdw blurRad="50800" dist="25400" dir="8100000" algn="bl" rotWithShape="0">
-              <a:srgbClr val="000000">
-                <a:alpha val="10000"/>
-              </a:srgbClr>
-            </a:outerShdw>
-          </a:effectLst>
-        </p:spPr>
-      </p:sp>
-      <p:sp>
-        <p:nvSpPr>
-          <p:cNvPr id="10" name="Text 8"/>
-          <p:cNvSpPr/>
-          <p:nvPr/>
-        </p:nvSpPr>
-        <p:spPr>
-          <a:xfrm>
-            <a:off x="548640" y="1655064"/>
-            <a:ext cx="1965960" cy="201168"/>
-          </a:xfrm>
-          <a:prstGeom prst="rect">
-            <a:avLst/>
-          </a:prstGeom>
-          <a:noFill/>
-          <a:ln/>
-        </p:spPr>
-        <p:txBody>
-          <a:bodyPr wrap="square" lIns="0" tIns="0" rIns="0" bIns="0" rtlCol="0" anchor="ctr"/>
-          <a:lstStyle/>
-          <a:p>
-            <a:pPr marL="0" indent="0">
-              <a:buNone/>
-            </a:pPr>
-            <a:r>
-              <a:rPr lang="en-US" sz="950" b="1" dirty="0">
-                <a:solidFill>
-                  <a:srgbClr val="FFFFFF"/>
-                </a:solidFill>
-                <a:latin typeface="Calibri" pitchFamily="34" charset="0"/>
-                <a:ea typeface="Calibri" pitchFamily="34" charset="-122"/>
-                <a:cs typeface="Calibri" pitchFamily="34" charset="-120"/>
-              </a:rPr>
-              <a:t>3  Super-chollo</a:t>
-            </a:r>
-            <a:endParaRPr lang="en-US" sz="950" dirty="0"/>
-          </a:p>
-        </p:txBody>
-      </p:sp>
-      <p:sp>
-        <p:nvSpPr>
-          <p:cNvPr id="11" name="Text 9"/>
-          <p:cNvSpPr/>
-          <p:nvPr/>
-        </p:nvSpPr>
-        <p:spPr>
-          <a:xfrm>
-            <a:off x="548640" y="1856232"/>
-            <a:ext cx="1965960" cy="237744"/>
-          </a:xfrm>
-          <a:prstGeom prst="rect">
-            <a:avLst/>
-          </a:prstGeom>
-          <a:noFill/>
-          <a:ln/>
-        </p:spPr>
-        <p:txBody>
-          <a:bodyPr wrap="square" lIns="0" tIns="0" rIns="0" bIns="0" rtlCol="0" anchor="ctr"/>
-          <a:lstStyle/>
-          <a:p>
-            <a:pPr marL="0" indent="0">
-              <a:buNone/>
-            </a:pPr>
-            <a:r>
-              <a:rPr lang="en-US" sz="800" dirty="0">
-                <a:solidFill>
-                  <a:srgbClr val="F4F8FC"/>
-                </a:solidFill>
-                <a:latin typeface="Calibri" pitchFamily="34" charset="0"/>
-                <a:ea typeface="Calibri" pitchFamily="34" charset="-122"/>
-                <a:cs typeface="Calibri" pitchFamily="34" charset="-120"/>
-              </a:rPr>
-              <a:t>0.75 &lt; ratio &lt; 0.85</a:t>
-            </a:r>
-            <a:endParaRPr lang="en-US" sz="800" dirty="0"/>
-          </a:p>
-          <a:p>
-            <a:pPr marL="0" indent="0">
-              <a:buNone/>
-            </a:pPr>
-            <a:r>
-              <a:rPr lang="en-US" sz="800" dirty="0">
-                <a:solidFill>
-                  <a:srgbClr val="F4F8FC"/>
-                </a:solidFill>
-                <a:latin typeface="Calibri" pitchFamily="34" charset="0"/>
-                <a:ea typeface="Calibri" pitchFamily="34" charset="-122"/>
-                <a:cs typeface="Calibri" pitchFamily="34" charset="-120"/>
-              </a:rPr>
-              <a:t>15–25% más barato</a:t>
-            </a:r>
-            <a:endParaRPr lang="en-US" sz="800" dirty="0"/>
-          </a:p>
-        </p:txBody>
-      </p:sp>
-      <p:sp>
-        <p:nvSpPr>
-          <p:cNvPr id="12" name="Shape 10"/>
-          <p:cNvSpPr/>
-          <p:nvPr/>
-        </p:nvSpPr>
-        <p:spPr>
-          <a:xfrm>
-            <a:off x="457200" y="2157984"/>
-            <a:ext cx="2148840" cy="475488"/>
-          </a:xfrm>
-          <a:prstGeom prst="rect">
-            <a:avLst/>
-          </a:prstGeom>
-          <a:solidFill>
-            <a:srgbClr val="3DA85E"/>
-          </a:solidFill>
-          <a:ln/>
-          <a:effectLst>
-            <a:outerShdw blurRad="50800" dist="25400" dir="8100000" algn="bl" rotWithShape="0">
-              <a:srgbClr val="000000">
-                <a:alpha val="10000"/>
-              </a:srgbClr>
-            </a:outerShdw>
-          </a:effectLst>
-        </p:spPr>
-      </p:sp>
-      <p:sp>
-        <p:nvSpPr>
-          <p:cNvPr id="13" name="Text 11"/>
-          <p:cNvSpPr/>
-          <p:nvPr/>
-        </p:nvSpPr>
-        <p:spPr>
-          <a:xfrm>
-            <a:off x="548640" y="2176272"/>
-            <a:ext cx="1965960" cy="201168"/>
-          </a:xfrm>
-          <a:prstGeom prst="rect">
-            <a:avLst/>
-          </a:prstGeom>
-          <a:noFill/>
-          <a:ln/>
-        </p:spPr>
-        <p:txBody>
-          <a:bodyPr wrap="square" lIns="0" tIns="0" rIns="0" bIns="0" rtlCol="0" anchor="ctr"/>
-          <a:lstStyle/>
-          <a:p>
-            <a:pPr marL="0" indent="0">
-              <a:buNone/>
-            </a:pPr>
-            <a:r>
-              <a:rPr lang="en-US" sz="950" b="1" dirty="0">
-                <a:solidFill>
-                  <a:srgbClr val="FFFFFF"/>
-                </a:solidFill>
-                <a:latin typeface="Calibri" pitchFamily="34" charset="0"/>
-                <a:ea typeface="Calibri" pitchFamily="34" charset="-122"/>
-                <a:cs typeface="Calibri" pitchFamily="34" charset="-120"/>
-              </a:rPr>
-              <a:t>2  Chollo</a:t>
-            </a:r>
-            <a:endParaRPr lang="en-US" sz="950" dirty="0"/>
-          </a:p>
-        </p:txBody>
-      </p:sp>
-      <p:sp>
-        <p:nvSpPr>
-          <p:cNvPr id="14" name="Text 12"/>
-          <p:cNvSpPr/>
-          <p:nvPr/>
-        </p:nvSpPr>
-        <p:spPr>
-          <a:xfrm>
-            <a:off x="548640" y="2377440"/>
-            <a:ext cx="1965960" cy="237744"/>
-          </a:xfrm>
-          <a:prstGeom prst="rect">
-            <a:avLst/>
-          </a:prstGeom>
-          <a:noFill/>
-          <a:ln/>
-        </p:spPr>
-        <p:txBody>
-          <a:bodyPr wrap="square" lIns="0" tIns="0" rIns="0" bIns="0" rtlCol="0" anchor="ctr"/>
-          <a:lstStyle/>
-          <a:p>
-            <a:pPr marL="0" indent="0">
-              <a:buNone/>
-            </a:pPr>
-            <a:r>
-              <a:rPr lang="en-US" sz="800" dirty="0">
-                <a:solidFill>
-                  <a:srgbClr val="F4F8FC"/>
-                </a:solidFill>
-                <a:latin typeface="Calibri" pitchFamily="34" charset="0"/>
-                <a:ea typeface="Calibri" pitchFamily="34" charset="-122"/>
-                <a:cs typeface="Calibri" pitchFamily="34" charset="-120"/>
-              </a:rPr>
-              <a:t>0.85 ≤ ratio &lt; 0.97</a:t>
-            </a:r>
-            <a:endParaRPr lang="en-US" sz="800" dirty="0"/>
-          </a:p>
-          <a:p>
-            <a:pPr marL="0" indent="0">
-              <a:buNone/>
-            </a:pPr>
-            <a:r>
-              <a:rPr lang="en-US" sz="800" dirty="0">
-                <a:solidFill>
-                  <a:srgbClr val="F4F8FC"/>
-                </a:solidFill>
-                <a:latin typeface="Calibri" pitchFamily="34" charset="0"/>
-                <a:ea typeface="Calibri" pitchFamily="34" charset="-122"/>
-                <a:cs typeface="Calibri" pitchFamily="34" charset="-120"/>
-              </a:rPr>
-              <a:t>3–15% más barato</a:t>
-            </a:r>
-            <a:endParaRPr lang="en-US" sz="800" dirty="0"/>
-          </a:p>
-        </p:txBody>
-      </p:sp>
-      <p:sp>
-        <p:nvSpPr>
-          <p:cNvPr id="15" name="Shape 13"/>
-          <p:cNvSpPr/>
-          <p:nvPr/>
-        </p:nvSpPr>
-        <p:spPr>
-          <a:xfrm>
-            <a:off x="457200" y="2679192"/>
-            <a:ext cx="2148840" cy="475488"/>
-          </a:xfrm>
-          <a:prstGeom prst="rect">
-            <a:avLst/>
-          </a:prstGeom>
-          <a:solidFill>
-            <a:srgbClr val="1A4A8C"/>
-          </a:solidFill>
-          <a:ln/>
-          <a:effectLst>
-            <a:outerShdw blurRad="50800" dist="25400" dir="8100000" algn="bl" rotWithShape="0">
-              <a:srgbClr val="000000">
-                <a:alpha val="10000"/>
-              </a:srgbClr>
-            </a:outerShdw>
-          </a:effectLst>
-        </p:spPr>
-      </p:sp>
-      <p:sp>
-        <p:nvSpPr>
-          <p:cNvPr id="16" name="Text 14"/>
-          <p:cNvSpPr/>
-          <p:nvPr/>
-        </p:nvSpPr>
-        <p:spPr>
-          <a:xfrm>
-            <a:off x="548640" y="2697480"/>
-            <a:ext cx="1965960" cy="201168"/>
-          </a:xfrm>
-          <a:prstGeom prst="rect">
-            <a:avLst/>
-          </a:prstGeom>
-          <a:noFill/>
-          <a:ln/>
-        </p:spPr>
-        <p:txBody>
-          <a:bodyPr wrap="square" lIns="0" tIns="0" rIns="0" bIns="0" rtlCol="0" anchor="ctr"/>
-          <a:lstStyle/>
-          <a:p>
-            <a:pPr marL="0" indent="0">
-              <a:buNone/>
-            </a:pPr>
-            <a:r>
-              <a:rPr lang="en-US" sz="950" b="1" dirty="0">
-                <a:solidFill>
-                  <a:srgbClr val="FFFFFF"/>
-                </a:solidFill>
-                <a:latin typeface="Calibri" pitchFamily="34" charset="0"/>
-                <a:ea typeface="Calibri" pitchFamily="34" charset="-122"/>
-                <a:cs typeface="Calibri" pitchFamily="34" charset="-120"/>
-              </a:rPr>
-              <a:t>1  Normal</a:t>
-            </a:r>
-            <a:endParaRPr lang="en-US" sz="950" dirty="0"/>
-          </a:p>
-        </p:txBody>
-      </p:sp>
-      <p:sp>
-        <p:nvSpPr>
-          <p:cNvPr id="17" name="Text 15"/>
-          <p:cNvSpPr/>
-          <p:nvPr/>
-        </p:nvSpPr>
-        <p:spPr>
-          <a:xfrm>
-            <a:off x="548640" y="2898648"/>
-            <a:ext cx="1965960" cy="237744"/>
-          </a:xfrm>
-          <a:prstGeom prst="rect">
-            <a:avLst/>
-          </a:prstGeom>
-          <a:noFill/>
-          <a:ln/>
-        </p:spPr>
-        <p:txBody>
-          <a:bodyPr wrap="square" lIns="0" tIns="0" rIns="0" bIns="0" rtlCol="0" anchor="ctr"/>
-          <a:lstStyle/>
-          <a:p>
-            <a:pPr marL="0" indent="0">
-              <a:buNone/>
-            </a:pPr>
-            <a:r>
-              <a:rPr lang="en-US" sz="800" dirty="0">
-                <a:solidFill>
-                  <a:srgbClr val="F4F8FC"/>
-                </a:solidFill>
-                <a:latin typeface="Calibri" pitchFamily="34" charset="0"/>
-                <a:ea typeface="Calibri" pitchFamily="34" charset="-122"/>
-                <a:cs typeface="Calibri" pitchFamily="34" charset="-120"/>
-              </a:rPr>
-              <a:t>0.97 ≤ ratio ≤ 1.03</a:t>
-            </a:r>
-            <a:endParaRPr lang="en-US" sz="800" dirty="0"/>
-          </a:p>
-          <a:p>
-            <a:pPr marL="0" indent="0">
-              <a:buNone/>
-            </a:pPr>
-            <a:r>
-              <a:rPr lang="en-US" sz="800" dirty="0">
-                <a:solidFill>
-                  <a:srgbClr val="F4F8FC"/>
-                </a:solidFill>
-                <a:latin typeface="Calibri" pitchFamily="34" charset="0"/>
-                <a:ea typeface="Calibri" pitchFamily="34" charset="-122"/>
-                <a:cs typeface="Calibri" pitchFamily="34" charset="-120"/>
-              </a:rPr>
-              <a:t>precio dentro del ±3%</a:t>
-            </a:r>
-            <a:endParaRPr lang="en-US" sz="800" dirty="0"/>
-          </a:p>
-        </p:txBody>
-      </p:sp>
-      <p:sp>
-        <p:nvSpPr>
-          <p:cNvPr id="18" name="Shape 16"/>
-          <p:cNvSpPr/>
-          <p:nvPr/>
-        </p:nvSpPr>
-        <p:spPr>
-          <a:xfrm>
-            <a:off x="457200" y="3200400"/>
-            <a:ext cx="2148840" cy="475488"/>
-          </a:xfrm>
-          <a:prstGeom prst="rect">
-            <a:avLst/>
-          </a:prstGeom>
-          <a:solidFill>
-            <a:srgbClr val="B81A1A"/>
-          </a:solidFill>
-          <a:ln/>
-          <a:effectLst>
-            <a:outerShdw blurRad="50800" dist="25400" dir="8100000" algn="bl" rotWithShape="0">
-              <a:srgbClr val="000000">
-                <a:alpha val="10000"/>
-              </a:srgbClr>
-            </a:outerShdw>
-          </a:effectLst>
-        </p:spPr>
-      </p:sp>
-      <p:sp>
-        <p:nvSpPr>
-          <p:cNvPr id="19" name="Text 17"/>
-          <p:cNvSpPr/>
-          <p:nvPr/>
-        </p:nvSpPr>
-        <p:spPr>
-          <a:xfrm>
-            <a:off x="548640" y="3218688"/>
-            <a:ext cx="1965960" cy="201168"/>
-          </a:xfrm>
-          <a:prstGeom prst="rect">
-            <a:avLst/>
-          </a:prstGeom>
-          <a:noFill/>
-          <a:ln/>
-        </p:spPr>
-        <p:txBody>
-          <a:bodyPr wrap="square" lIns="0" tIns="0" rIns="0" bIns="0" rtlCol="0" anchor="ctr"/>
-          <a:lstStyle/>
-          <a:p>
-            <a:pPr marL="0" indent="0">
-              <a:buNone/>
-            </a:pPr>
-            <a:r>
-              <a:rPr lang="en-US" sz="950" b="1" dirty="0">
-                <a:solidFill>
-                  <a:srgbClr val="FFFFFF"/>
-                </a:solidFill>
-                <a:latin typeface="Calibri" pitchFamily="34" charset="0"/>
-                <a:ea typeface="Calibri" pitchFamily="34" charset="-122"/>
-                <a:cs typeface="Calibri" pitchFamily="34" charset="-120"/>
-              </a:rPr>
-              <a:t>0  Inflado</a:t>
-            </a:r>
-            <a:endParaRPr lang="en-US" sz="950" dirty="0"/>
-          </a:p>
-        </p:txBody>
-      </p:sp>
-      <p:sp>
-        <p:nvSpPr>
-          <p:cNvPr id="20" name="Text 18"/>
-          <p:cNvSpPr/>
-          <p:nvPr/>
-        </p:nvSpPr>
-        <p:spPr>
-          <a:xfrm>
-            <a:off x="548640" y="3419856"/>
-            <a:ext cx="1965960" cy="237744"/>
-          </a:xfrm>
-          <a:prstGeom prst="rect">
-            <a:avLst/>
-          </a:prstGeom>
-          <a:noFill/>
-          <a:ln/>
-        </p:spPr>
-        <p:txBody>
-          <a:bodyPr wrap="square" lIns="0" tIns="0" rIns="0" bIns="0" rtlCol="0" anchor="ctr"/>
-          <a:lstStyle/>
-          <a:p>
-            <a:pPr marL="0" indent="0">
-              <a:buNone/>
-            </a:pPr>
-            <a:r>
-              <a:rPr lang="en-US" sz="800" dirty="0">
-                <a:solidFill>
-                  <a:srgbClr val="F4F8FC"/>
-                </a:solidFill>
-                <a:latin typeface="Calibri" pitchFamily="34" charset="0"/>
-                <a:ea typeface="Calibri" pitchFamily="34" charset="-122"/>
-                <a:cs typeface="Calibri" pitchFamily="34" charset="-120"/>
-              </a:rPr>
-              <a:t>ratio &gt; 1.03</a:t>
-            </a:r>
-            <a:endParaRPr lang="en-US" sz="800" dirty="0"/>
-          </a:p>
-          <a:p>
-            <a:pPr marL="0" indent="0">
-              <a:buNone/>
-            </a:pPr>
-            <a:r>
-              <a:rPr lang="en-US" sz="800" dirty="0">
-                <a:solidFill>
-                  <a:srgbClr val="F4F8FC"/>
-                </a:solidFill>
-                <a:latin typeface="Calibri" pitchFamily="34" charset="0"/>
-                <a:ea typeface="Calibri" pitchFamily="34" charset="-122"/>
-                <a:cs typeface="Calibri" pitchFamily="34" charset="-120"/>
-              </a:rPr>
-              <a:t>más de un 3% por encima</a:t>
-            </a:r>
-            <a:endParaRPr lang="en-US" sz="800" dirty="0"/>
-          </a:p>
-        </p:txBody>
-      </p:sp>
-      <p:sp>
-        <p:nvSpPr>
-          <p:cNvPr id="21" name="Shape 19"/>
-          <p:cNvSpPr/>
-          <p:nvPr/>
-        </p:nvSpPr>
-        <p:spPr>
-          <a:xfrm>
-            <a:off x="2724912" y="1115567"/>
-            <a:ext cx="4023360" cy="2787352"/>
-          </a:xfrm>
-          <a:prstGeom prst="rect">
-            <a:avLst/>
-          </a:prstGeom>
-          <a:solidFill>
-            <a:srgbClr val="0D1117"/>
-          </a:solidFill>
-          <a:ln/>
-          <a:effectLst>
-            <a:outerShdw blurRad="50800" dist="25400" dir="8100000" algn="bl" rotWithShape="0">
-              <a:srgbClr val="000000">
-                <a:alpha val="10000"/>
-              </a:srgbClr>
-            </a:outerShdw>
-          </a:effectLst>
-        </p:spPr>
-      </p:sp>
-      <p:sp>
-        <p:nvSpPr>
-          <p:cNvPr id="22" name="Shape 20"/>
-          <p:cNvSpPr/>
-          <p:nvPr/>
-        </p:nvSpPr>
-        <p:spPr>
-          <a:xfrm>
-            <a:off x="2724912" y="914400"/>
-            <a:ext cx="2377440" cy="201168"/>
-          </a:xfrm>
-          <a:prstGeom prst="rect">
-            <a:avLst/>
-          </a:prstGeom>
-          <a:solidFill>
-            <a:srgbClr val="2A5080"/>
-          </a:solidFill>
-          <a:ln/>
-        </p:spPr>
-      </p:sp>
-      <p:sp>
-        <p:nvSpPr>
-          <p:cNvPr id="23" name="Text 21"/>
-          <p:cNvSpPr/>
-          <p:nvPr/>
-        </p:nvSpPr>
-        <p:spPr>
-          <a:xfrm>
-            <a:off x="2779776" y="914400"/>
-            <a:ext cx="2697480" cy="201168"/>
-          </a:xfrm>
-          <a:prstGeom prst="rect">
-            <a:avLst/>
-          </a:prstGeom>
-          <a:noFill/>
-          <a:ln/>
-        </p:spPr>
-        <p:txBody>
-          <a:bodyPr wrap="square" lIns="0" tIns="0" rIns="0" bIns="0" rtlCol="0" anchor="ctr"/>
-          <a:lstStyle/>
-          <a:p>
-            <a:pPr marL="0" indent="0">
-              <a:buNone/>
-            </a:pPr>
-            <a:r>
-              <a:rPr lang="en-US" sz="900" b="1" dirty="0">
-                <a:solidFill>
-                  <a:srgbClr val="F0C060"/>
-                </a:solidFill>
-                <a:latin typeface="Consolas" pitchFamily="34" charset="0"/>
-                <a:ea typeface="Consolas" pitchFamily="34" charset="-122"/>
-                <a:cs typeface="Consolas" pitchFamily="34" charset="-120"/>
-              </a:rPr>
-              <a:t>crear_etiqueta_chollo()</a:t>
-            </a:r>
-            <a:endParaRPr lang="en-US" sz="900" dirty="0"/>
-          </a:p>
-        </p:txBody>
-      </p:sp>
-      <p:sp>
-        <p:nvSpPr>
-          <p:cNvPr id="24" name="Text 22"/>
-          <p:cNvSpPr/>
-          <p:nvPr/>
-        </p:nvSpPr>
-        <p:spPr>
-          <a:xfrm>
-            <a:off x="2852928" y="1188720"/>
-            <a:ext cx="3767328" cy="2505456"/>
-          </a:xfrm>
-          <a:prstGeom prst="rect">
-            <a:avLst/>
-          </a:prstGeom>
-          <a:noFill/>
-          <a:ln/>
-        </p:spPr>
-        <p:txBody>
-          <a:bodyPr wrap="square" lIns="0" tIns="0" rIns="0" bIns="0" rtlCol="0" anchor="t"/>
-          <a:lstStyle/>
-          <a:p>
-            <a:pPr marL="0" indent="0">
-              <a:buNone/>
-            </a:pPr>
-            <a:r>
-              <a:rPr lang="en-US" sz="800" dirty="0">
-                <a:solidFill>
-                  <a:srgbClr val="E2E8F0"/>
-                </a:solidFill>
-                <a:latin typeface="Consolas" pitchFamily="34" charset="0"/>
-                <a:ea typeface="Consolas" pitchFamily="34" charset="-122"/>
-                <a:cs typeface="Consolas" pitchFamily="34" charset="-120"/>
-              </a:rPr>
-              <a:t>def crear_etiqueta_chollo(y_real, y_predicho):</a:t>
-            </a:r>
-            <a:endParaRPr lang="en-US" sz="800" dirty="0"/>
-          </a:p>
-          <a:p>
-            <a:pPr marL="0" indent="0">
-              <a:buNone/>
-            </a:pPr>
-            <a:r>
-              <a:rPr lang="en-US" sz="800" dirty="0">
-                <a:solidFill>
-                  <a:srgbClr val="E2E8F0"/>
-                </a:solidFill>
-                <a:latin typeface="Consolas" pitchFamily="34" charset="0"/>
-                <a:ea typeface="Consolas" pitchFamily="34" charset="-122"/>
-                <a:cs typeface="Consolas" pitchFamily="34" charset="-120"/>
-              </a:rPr>
-              <a:t>  """</a:t>
-            </a:r>
-            <a:endParaRPr lang="en-US" sz="800" dirty="0"/>
-          </a:p>
-          <a:p>
-            <a:pPr marL="0" indent="0">
-              <a:buNone/>
-            </a:pPr>
-            <a:r>
-              <a:rPr lang="en-US" sz="800" dirty="0">
-                <a:solidFill>
-                  <a:srgbClr val="E2E8F0"/>
-                </a:solidFill>
-                <a:latin typeface="Consolas" pitchFamily="34" charset="0"/>
-                <a:ea typeface="Consolas" pitchFamily="34" charset="-122"/>
-                <a:cs typeface="Consolas" pitchFamily="34" charset="-120"/>
-              </a:rPr>
-              <a:t>  Compara precio real vs. precio predicho por</a:t>
-            </a:r>
-            <a:endParaRPr lang="en-US" sz="800" dirty="0"/>
-          </a:p>
-          <a:p>
-            <a:pPr marL="0" indent="0">
-              <a:buNone/>
-            </a:pPr>
-            <a:r>
-              <a:rPr lang="en-US" sz="800" dirty="0">
-                <a:solidFill>
-                  <a:srgbClr val="E2E8F0"/>
-                </a:solidFill>
-                <a:latin typeface="Consolas" pitchFamily="34" charset="0"/>
-                <a:ea typeface="Consolas" pitchFamily="34" charset="-122"/>
-                <a:cs typeface="Consolas" pitchFamily="34" charset="-120"/>
-              </a:rPr>
-              <a:t>  el modelo de regresión. El ratio indica cuánto</a:t>
-            </a:r>
-            <a:endParaRPr lang="en-US" sz="800" dirty="0"/>
-          </a:p>
-          <a:p>
-            <a:pPr marL="0" indent="0">
-              <a:buNone/>
-            </a:pPr>
-            <a:r>
-              <a:rPr lang="en-US" sz="800" dirty="0">
-                <a:solidFill>
-                  <a:srgbClr val="E2E8F0"/>
-                </a:solidFill>
-                <a:latin typeface="Consolas" pitchFamily="34" charset="0"/>
-                <a:ea typeface="Consolas" pitchFamily="34" charset="-122"/>
-                <a:cs typeface="Consolas" pitchFamily="34" charset="-120"/>
-              </a:rPr>
-              <a:t>  vale el alojamiento respecto a su 'precio justo'.</a:t>
-            </a:r>
-            <a:endParaRPr lang="en-US" sz="800" dirty="0"/>
-          </a:p>
-          <a:p>
-            <a:pPr marL="0" indent="0">
-              <a:buNone/>
-            </a:pPr>
-            <a:r>
-              <a:rPr lang="en-US" sz="800" dirty="0">
-                <a:solidFill>
-                  <a:srgbClr val="E2E8F0"/>
-                </a:solidFill>
-                <a:latin typeface="Consolas" pitchFamily="34" charset="0"/>
-                <a:ea typeface="Consolas" pitchFamily="34" charset="-122"/>
-                <a:cs typeface="Consolas" pitchFamily="34" charset="-120"/>
-              </a:rPr>
-              <a:t>  """</a:t>
-            </a:r>
-            <a:endParaRPr lang="en-US" sz="800" dirty="0"/>
-          </a:p>
-          <a:p>
-            <a:pPr marL="0" indent="0">
-              <a:buNone/>
-            </a:pPr>
-            <a:r>
-              <a:rPr lang="en-US" sz="800" dirty="0">
-                <a:solidFill>
-                  <a:srgbClr val="E2E8F0"/>
-                </a:solidFill>
-                <a:latin typeface="Consolas" pitchFamily="34" charset="0"/>
-                <a:ea typeface="Consolas" pitchFamily="34" charset="-122"/>
-                <a:cs typeface="Consolas" pitchFamily="34" charset="-120"/>
-              </a:rPr>
-              <a:t>  ratio = y_real / y_predicho  # &lt; 1 = más barato</a:t>
-            </a:r>
-            <a:endParaRPr lang="en-US" sz="800" dirty="0"/>
-          </a:p>
-          <a:p>
-            <a:pPr marL="0" indent="0">
-              <a:buNone/>
-            </a:pPr>
-            <a:endParaRPr lang="en-US" sz="800" dirty="0"/>
-          </a:p>
-          <a:p>
-            <a:pPr marL="0" indent="0">
-              <a:buNone/>
-            </a:pPr>
-            <a:r>
-              <a:rPr lang="en-US" sz="800" dirty="0">
-                <a:solidFill>
-                  <a:srgbClr val="E2E8F0"/>
-                </a:solidFill>
-                <a:latin typeface="Consolas" pitchFamily="34" charset="0"/>
-                <a:ea typeface="Consolas" pitchFamily="34" charset="-122"/>
-                <a:cs typeface="Consolas" pitchFamily="34" charset="-120"/>
-              </a:rPr>
-              <a:t>  condiciones = [</a:t>
-            </a:r>
-            <a:endParaRPr lang="en-US" sz="800" dirty="0"/>
-          </a:p>
-          <a:p>
-            <a:pPr marL="0" indent="0">
-              <a:buNone/>
-            </a:pPr>
-            <a:r>
-              <a:rPr lang="en-US" sz="800" dirty="0">
-                <a:solidFill>
-                  <a:srgbClr val="E2E8F0"/>
-                </a:solidFill>
-                <a:latin typeface="Consolas" pitchFamily="34" charset="0"/>
-                <a:ea typeface="Consolas" pitchFamily="34" charset="-122"/>
-                <a:cs typeface="Consolas" pitchFamily="34" charset="-120"/>
-              </a:rPr>
-              <a:t>    ratio &lt;= 0.75,                       # hiper_chollo</a:t>
-            </a:r>
-            <a:endParaRPr lang="en-US" sz="800" dirty="0"/>
-          </a:p>
-          <a:p>
-            <a:pPr marL="0" indent="0">
-              <a:buNone/>
-            </a:pPr>
-            <a:r>
-              <a:rPr lang="en-US" sz="800" dirty="0">
-                <a:solidFill>
-                  <a:srgbClr val="E2E8F0"/>
-                </a:solidFill>
-                <a:latin typeface="Consolas" pitchFamily="34" charset="0"/>
-                <a:ea typeface="Consolas" pitchFamily="34" charset="-122"/>
-                <a:cs typeface="Consolas" pitchFamily="34" charset="-120"/>
-              </a:rPr>
-              <a:t>    (ratio &gt; 0.75) &amp; (ratio &lt; 0.85),    # super_chollo</a:t>
-            </a:r>
-            <a:endParaRPr lang="en-US" sz="800" dirty="0"/>
-          </a:p>
-          <a:p>
-            <a:pPr marL="0" indent="0">
-              <a:buNone/>
-            </a:pPr>
-            <a:r>
-              <a:rPr lang="en-US" sz="800" dirty="0">
-                <a:solidFill>
-                  <a:srgbClr val="E2E8F0"/>
-                </a:solidFill>
-                <a:latin typeface="Consolas" pitchFamily="34" charset="0"/>
-                <a:ea typeface="Consolas" pitchFamily="34" charset="-122"/>
-                <a:cs typeface="Consolas" pitchFamily="34" charset="-120"/>
-              </a:rPr>
-              <a:t>    (ratio &gt;= 0.85) &amp; (ratio &lt; 0.97),   # chollo</a:t>
-            </a:r>
-            <a:endParaRPr lang="en-US" sz="800" dirty="0"/>
-          </a:p>
-          <a:p>
-            <a:pPr marL="0" indent="0">
-              <a:buNone/>
-            </a:pPr>
-            <a:r>
-              <a:rPr lang="en-US" sz="800" dirty="0">
-                <a:solidFill>
-                  <a:srgbClr val="E2E8F0"/>
-                </a:solidFill>
-                <a:latin typeface="Consolas" pitchFamily="34" charset="0"/>
-                <a:ea typeface="Consolas" pitchFamily="34" charset="-122"/>
-                <a:cs typeface="Consolas" pitchFamily="34" charset="-120"/>
-              </a:rPr>
-              <a:t>    (ratio &gt;= 0.97) &amp; (ratio &lt;= 1.03),  # normal</a:t>
-            </a:r>
-            <a:endParaRPr lang="en-US" sz="800" dirty="0"/>
-          </a:p>
-          <a:p>
-            <a:pPr marL="0" indent="0">
-              <a:buNone/>
-            </a:pPr>
-            <a:r>
-              <a:rPr lang="en-US" sz="800" dirty="0">
-                <a:solidFill>
-                  <a:srgbClr val="E2E8F0"/>
-                </a:solidFill>
-                <a:latin typeface="Consolas" pitchFamily="34" charset="0"/>
-                <a:ea typeface="Consolas" pitchFamily="34" charset="-122"/>
-                <a:cs typeface="Consolas" pitchFamily="34" charset="-120"/>
-              </a:rPr>
-              <a:t>    ratio &gt; 1.03                         # inflado</a:t>
-            </a:r>
-            <a:endParaRPr lang="en-US" sz="800" dirty="0"/>
-          </a:p>
-          <a:p>
-            <a:pPr marL="0" indent="0">
-              <a:buNone/>
-            </a:pPr>
-            <a:r>
-              <a:rPr lang="en-US" sz="800" dirty="0">
-                <a:solidFill>
-                  <a:srgbClr val="E2E8F0"/>
-                </a:solidFill>
-                <a:latin typeface="Consolas" pitchFamily="34" charset="0"/>
-                <a:ea typeface="Consolas" pitchFamily="34" charset="-122"/>
-                <a:cs typeface="Consolas" pitchFamily="34" charset="-120"/>
-              </a:rPr>
-              <a:t>  ]</a:t>
-            </a:r>
-            <a:endParaRPr lang="en-US" sz="800" dirty="0"/>
-          </a:p>
-          <a:p>
-            <a:pPr marL="0" indent="0">
-              <a:buNone/>
-            </a:pPr>
-            <a:r>
-              <a:rPr lang="en-US" sz="800" dirty="0">
-                <a:solidFill>
-                  <a:srgbClr val="E2E8F0"/>
-                </a:solidFill>
-                <a:latin typeface="Consolas" pitchFamily="34" charset="0"/>
-                <a:ea typeface="Consolas" pitchFamily="34" charset="-122"/>
-                <a:cs typeface="Consolas" pitchFamily="34" charset="-120"/>
-              </a:rPr>
-              <a:t>  etiquetas = [4, 3, 2, 1, 0]</a:t>
-            </a:r>
-            <a:endParaRPr lang="en-US" sz="800" dirty="0"/>
-          </a:p>
-          <a:p>
-            <a:pPr marL="0" indent="0">
-              <a:buNone/>
-            </a:pPr>
-            <a:endParaRPr lang="en-US" sz="800" dirty="0"/>
-          </a:p>
-          <a:p>
-            <a:pPr marL="0" indent="0">
-              <a:buNone/>
-            </a:pPr>
-            <a:r>
-              <a:rPr lang="en-US" sz="800" dirty="0">
-                <a:solidFill>
-                  <a:srgbClr val="E2E8F0"/>
-                </a:solidFill>
-                <a:latin typeface="Consolas" pitchFamily="34" charset="0"/>
-                <a:ea typeface="Consolas" pitchFamily="34" charset="-122"/>
-                <a:cs typeface="Consolas" pitchFamily="34" charset="-120"/>
-              </a:rPr>
-              <a:t>  # np.select aplica condiciones vectorizadas</a:t>
-            </a:r>
-            <a:endParaRPr lang="en-US" sz="800" dirty="0"/>
-          </a:p>
-          <a:p>
-            <a:pPr marL="0" indent="0">
-              <a:buNone/>
-            </a:pPr>
-            <a:r>
-              <a:rPr lang="en-US" sz="800" dirty="0">
-                <a:solidFill>
-                  <a:srgbClr val="E2E8F0"/>
-                </a:solidFill>
-                <a:latin typeface="Consolas" pitchFamily="34" charset="0"/>
-                <a:ea typeface="Consolas" pitchFamily="34" charset="-122"/>
-                <a:cs typeface="Consolas" pitchFamily="34" charset="-120"/>
-              </a:rPr>
-              <a:t>  return pd.Series(</a:t>
-            </a:r>
-            <a:endParaRPr lang="en-US" sz="800" dirty="0"/>
-          </a:p>
-          <a:p>
-            <a:pPr marL="0" indent="0">
-              <a:buNone/>
-            </a:pPr>
-            <a:r>
-              <a:rPr lang="en-US" sz="800" dirty="0">
-                <a:solidFill>
-                  <a:srgbClr val="E2E8F0"/>
-                </a:solidFill>
-                <a:latin typeface="Consolas" pitchFamily="34" charset="0"/>
-                <a:ea typeface="Consolas" pitchFamily="34" charset="-122"/>
-                <a:cs typeface="Consolas" pitchFamily="34" charset="-120"/>
-              </a:rPr>
-              <a:t>    np.select(condiciones, etiquetas),</a:t>
-            </a:r>
-            <a:endParaRPr lang="en-US" sz="800" dirty="0"/>
-          </a:p>
-          <a:p>
-            <a:pPr marL="0" indent="0">
-              <a:buNone/>
-            </a:pPr>
-            <a:r>
-              <a:rPr lang="en-US" sz="800" dirty="0">
-                <a:solidFill>
-                  <a:srgbClr val="E2E8F0"/>
-                </a:solidFill>
-                <a:latin typeface="Consolas" pitchFamily="34" charset="0"/>
-                <a:ea typeface="Consolas" pitchFamily="34" charset="-122"/>
-                <a:cs typeface="Consolas" pitchFamily="34" charset="-120"/>
-              </a:rPr>
-              <a:t>    index=y_real.index,</a:t>
-            </a:r>
-            <a:endParaRPr lang="en-US" sz="800" dirty="0"/>
-          </a:p>
-          <a:p>
-            <a:pPr marL="0" indent="0">
-              <a:buNone/>
-            </a:pPr>
-            <a:r>
-              <a:rPr lang="en-US" sz="800" dirty="0">
-                <a:solidFill>
-                  <a:srgbClr val="E2E8F0"/>
-                </a:solidFill>
-                <a:latin typeface="Consolas" pitchFamily="34" charset="0"/>
-                <a:ea typeface="Consolas" pitchFamily="34" charset="-122"/>
-                <a:cs typeface="Consolas" pitchFamily="34" charset="-120"/>
-              </a:rPr>
-              <a:t>    name='</a:t>
-            </a:r>
-            <a:r>
-              <a:rPr lang="en-US" sz="800" dirty="0" err="1">
-                <a:solidFill>
-                  <a:srgbClr val="E2E8F0"/>
-                </a:solidFill>
-                <a:latin typeface="Consolas" pitchFamily="34" charset="0"/>
-                <a:ea typeface="Consolas" pitchFamily="34" charset="-122"/>
-                <a:cs typeface="Consolas" pitchFamily="34" charset="-120"/>
-              </a:rPr>
-              <a:t>categoria</a:t>
-            </a:r>
-            <a:r>
-              <a:rPr lang="en-US" sz="800" dirty="0">
-                <a:solidFill>
-                  <a:srgbClr val="E2E8F0"/>
-                </a:solidFill>
-                <a:latin typeface="Consolas" pitchFamily="34" charset="0"/>
-                <a:ea typeface="Consolas" pitchFamily="34" charset="-122"/>
-                <a:cs typeface="Consolas" pitchFamily="34" charset="-120"/>
-              </a:rPr>
-              <a:t>')</a:t>
-            </a:r>
-            <a:endParaRPr lang="en-US" sz="800" dirty="0"/>
-          </a:p>
-        </p:txBody>
-      </p:sp>
-      <p:sp>
-        <p:nvSpPr>
-          <p:cNvPr id="25" name="Shape 23"/>
-          <p:cNvSpPr/>
-          <p:nvPr/>
-        </p:nvSpPr>
-        <p:spPr>
-          <a:xfrm>
-            <a:off x="6903720" y="1115567"/>
-            <a:ext cx="1783080" cy="2787351"/>
-          </a:xfrm>
-          <a:prstGeom prst="rect">
-            <a:avLst/>
-          </a:prstGeom>
-          <a:solidFill>
-            <a:srgbClr val="1E3A5F"/>
-          </a:solidFill>
-          <a:ln/>
-          <a:effectLst>
-            <a:outerShdw blurRad="101600" dist="38100" dir="8100000" algn="bl" rotWithShape="0">
-              <a:srgbClr val="000000">
-                <a:alpha val="18000"/>
-              </a:srgbClr>
-            </a:outerShdw>
-          </a:effectLst>
-        </p:spPr>
-      </p:sp>
-      <p:sp>
-        <p:nvSpPr>
-          <p:cNvPr id="26" name="Shape 24"/>
-          <p:cNvSpPr/>
-          <p:nvPr/>
-        </p:nvSpPr>
-        <p:spPr>
-          <a:xfrm>
-            <a:off x="6903720" y="1115568"/>
-            <a:ext cx="1783080" cy="45720"/>
-          </a:xfrm>
-          <a:prstGeom prst="rect">
-            <a:avLst/>
-          </a:prstGeom>
-          <a:solidFill>
-            <a:srgbClr val="D4A843"/>
-          </a:solidFill>
-          <a:ln/>
-        </p:spPr>
-      </p:sp>
-      <p:sp>
-        <p:nvSpPr>
-          <p:cNvPr id="27" name="Text 25"/>
-          <p:cNvSpPr/>
-          <p:nvPr/>
-        </p:nvSpPr>
-        <p:spPr>
-          <a:xfrm>
-            <a:off x="6995160" y="1188720"/>
-            <a:ext cx="1600200" cy="411480"/>
-          </a:xfrm>
-          <a:prstGeom prst="rect">
-            <a:avLst/>
-          </a:prstGeom>
-          <a:noFill/>
-          <a:ln/>
-        </p:spPr>
-        <p:txBody>
-          <a:bodyPr wrap="square" lIns="0" tIns="0" rIns="0" bIns="0" rtlCol="0" anchor="ctr"/>
-          <a:lstStyle/>
-          <a:p>
-            <a:pPr marL="0" indent="0">
-              <a:buNone/>
-            </a:pPr>
-            <a:r>
-              <a:rPr lang="en-US" sz="950" b="1" dirty="0">
-                <a:solidFill>
-                  <a:srgbClr val="D4A843"/>
-                </a:solidFill>
-                <a:latin typeface="Calibri" pitchFamily="34" charset="0"/>
-                <a:ea typeface="Calibri" pitchFamily="34" charset="-122"/>
-                <a:cs typeface="Calibri" pitchFamily="34" charset="-120"/>
-              </a:rPr>
-              <a:t>¿Por qué no</a:t>
-            </a:r>
-            <a:endParaRPr lang="en-US" sz="950" dirty="0"/>
-          </a:p>
-          <a:p>
-            <a:pPr marL="0" indent="0">
-              <a:buNone/>
-            </a:pPr>
-            <a:r>
-              <a:rPr lang="en-US" sz="950" b="1" dirty="0">
-                <a:solidFill>
-                  <a:srgbClr val="D4A843"/>
-                </a:solidFill>
-                <a:latin typeface="Calibri" pitchFamily="34" charset="0"/>
-                <a:ea typeface="Calibri" pitchFamily="34" charset="-122"/>
-                <a:cs typeface="Calibri" pitchFamily="34" charset="-120"/>
-              </a:rPr>
-              <a:t>ML de clasificación?</a:t>
-            </a:r>
-            <a:endParaRPr lang="en-US" sz="950" dirty="0"/>
-          </a:p>
-        </p:txBody>
-      </p:sp>
-      <p:sp>
-        <p:nvSpPr>
-          <p:cNvPr id="28" name="Text 26"/>
-          <p:cNvSpPr/>
-          <p:nvPr/>
-        </p:nvSpPr>
-        <p:spPr>
-          <a:xfrm>
-            <a:off x="6995160" y="1627632"/>
-            <a:ext cx="1600200" cy="2084832"/>
-          </a:xfrm>
-          <a:prstGeom prst="rect">
-            <a:avLst/>
-          </a:prstGeom>
-          <a:noFill/>
-          <a:ln/>
-        </p:spPr>
-        <p:txBody>
-          <a:bodyPr wrap="square" lIns="0" tIns="0" rIns="0" bIns="0" rtlCol="0" anchor="t"/>
-          <a:lstStyle/>
-          <a:p>
-            <a:pPr marL="0" indent="0">
-              <a:lnSpc>
-                <a:spcPct val="125000"/>
-              </a:lnSpc>
-              <a:buNone/>
-            </a:pPr>
-            <a:r>
-              <a:rPr lang="en-US" sz="800" dirty="0">
-                <a:solidFill>
-                  <a:srgbClr val="F4F8FC"/>
-                </a:solidFill>
-                <a:latin typeface="Calibri" pitchFamily="34" charset="0"/>
-                <a:ea typeface="Calibri" pitchFamily="34" charset="-122"/>
-                <a:cs typeface="Calibri" pitchFamily="34" charset="-120"/>
-              </a:rPr>
-              <a:t>La categoría chollo es consecuencia directa de la comparación entre precio real y precio predicho.</a:t>
-            </a:r>
-            <a:endParaRPr lang="en-US" sz="800" dirty="0"/>
-          </a:p>
-          <a:p>
-            <a:pPr marL="0" indent="0">
-              <a:lnSpc>
-                <a:spcPct val="125000"/>
-              </a:lnSpc>
-              <a:buNone/>
-            </a:pPr>
-            <a:endParaRPr lang="en-US" sz="800" dirty="0"/>
-          </a:p>
-          <a:p>
-            <a:pPr marL="0" indent="0">
-              <a:lnSpc>
-                <a:spcPct val="125000"/>
-              </a:lnSpc>
-              <a:buNone/>
-            </a:pPr>
-            <a:r>
-              <a:rPr lang="en-US" sz="800" dirty="0">
-                <a:solidFill>
-                  <a:srgbClr val="F4F8FC"/>
-                </a:solidFill>
-                <a:latin typeface="Calibri" pitchFamily="34" charset="0"/>
-                <a:ea typeface="Calibri" pitchFamily="34" charset="-122"/>
-                <a:cs typeface="Calibri" pitchFamily="34" charset="-120"/>
-              </a:rPr>
-              <a:t>Un chollo no tiene sentido sin su precio de referencia.</a:t>
-            </a:r>
-            <a:endParaRPr lang="en-US" sz="800" dirty="0"/>
-          </a:p>
-          <a:p>
-            <a:pPr marL="0" indent="0">
-              <a:lnSpc>
-                <a:spcPct val="125000"/>
-              </a:lnSpc>
-              <a:buNone/>
-            </a:pPr>
-            <a:endParaRPr lang="en-US" sz="800" dirty="0"/>
-          </a:p>
-          <a:p>
-            <a:pPr marL="0" indent="0">
-              <a:lnSpc>
-                <a:spcPct val="125000"/>
-              </a:lnSpc>
-              <a:buNone/>
-            </a:pPr>
-            <a:r>
-              <a:rPr lang="en-US" sz="800" dirty="0">
-                <a:solidFill>
-                  <a:srgbClr val="F4F8FC"/>
-                </a:solidFill>
-                <a:latin typeface="Calibri" pitchFamily="34" charset="0"/>
-                <a:ea typeface="Calibri" pitchFamily="34" charset="-122"/>
-                <a:cs typeface="Calibri" pitchFamily="34" charset="-120"/>
-              </a:rPr>
-              <a:t>Entrenar un modelo de clasificación sobre etiquetas derivadas del propio modelo de regresión sería redundante y añadiría complejidad sin valor.</a:t>
-            </a:r>
-            <a:endParaRPr lang="en-US" sz="800" dirty="0"/>
-          </a:p>
-          <a:p>
-            <a:pPr marL="0" indent="0">
-              <a:lnSpc>
-                <a:spcPct val="125000"/>
-              </a:lnSpc>
-              <a:buNone/>
-            </a:pPr>
-            <a:endParaRPr lang="en-US" sz="800" dirty="0"/>
-          </a:p>
-          <a:p>
-            <a:pPr marL="0" indent="0">
-              <a:lnSpc>
-                <a:spcPct val="125000"/>
-              </a:lnSpc>
-              <a:buNone/>
-            </a:pPr>
-            <a:r>
-              <a:rPr lang="en-US" sz="800" dirty="0">
-                <a:solidFill>
-                  <a:srgbClr val="F4F8FC"/>
-                </a:solidFill>
-                <a:latin typeface="Calibri" pitchFamily="34" charset="0"/>
-                <a:ea typeface="Calibri" pitchFamily="34" charset="-122"/>
-                <a:cs typeface="Calibri" pitchFamily="34" charset="-120"/>
-              </a:rPr>
-              <a:t>La regla determinista (ratio) es interpretable, reproducible y no introduce sesgo de aprendizaje.</a:t>
-            </a:r>
-            <a:endParaRPr lang="en-US" sz="800" dirty="0"/>
-          </a:p>
-        </p:txBody>
-      </p:sp>
-      <p:sp>
-        <p:nvSpPr>
-          <p:cNvPr id="29" name="Text 27"/>
-          <p:cNvSpPr/>
-          <p:nvPr/>
-        </p:nvSpPr>
-        <p:spPr>
-          <a:xfrm>
-            <a:off x="402336" y="3838911"/>
-            <a:ext cx="8229600" cy="228600"/>
-          </a:xfrm>
-          <a:prstGeom prst="rect">
-            <a:avLst/>
-          </a:prstGeom>
-          <a:noFill/>
-          <a:ln/>
-        </p:spPr>
-        <p:txBody>
-          <a:bodyPr wrap="square" lIns="0" tIns="0" rIns="0" bIns="0" rtlCol="0" anchor="ctr"/>
-          <a:lstStyle/>
-          <a:p>
-            <a:pPr marL="0" indent="0">
-              <a:buNone/>
-            </a:pPr>
-            <a:r>
-              <a:rPr lang="en-US" sz="1000" b="1" dirty="0">
-                <a:solidFill>
-                  <a:srgbClr val="1E293B"/>
-                </a:solidFill>
-                <a:latin typeface="Calibri" pitchFamily="34" charset="0"/>
-                <a:ea typeface="Calibri" pitchFamily="34" charset="-122"/>
-                <a:cs typeface="Calibri" pitchFamily="34" charset="-120"/>
-              </a:rPr>
-              <a:t>Pipeline completo:</a:t>
-            </a:r>
-            <a:endParaRPr lang="en-US" sz="1000" dirty="0"/>
-          </a:p>
-        </p:txBody>
-      </p:sp>
-      <p:sp>
-        <p:nvSpPr>
-          <p:cNvPr id="30" name="Shape 28"/>
-          <p:cNvSpPr/>
-          <p:nvPr/>
-        </p:nvSpPr>
-        <p:spPr>
-          <a:xfrm>
-            <a:off x="950976" y="4058367"/>
-            <a:ext cx="1097280" cy="502920"/>
-          </a:xfrm>
-          <a:prstGeom prst="rect">
-            <a:avLst/>
-          </a:prstGeom>
-          <a:solidFill>
-            <a:srgbClr val="1A2E4A"/>
-          </a:solidFill>
-          <a:ln w="12700">
-            <a:solidFill>
-              <a:srgbClr val="2A5080"/>
-            </a:solidFill>
-            <a:prstDash val="solid"/>
-          </a:ln>
-        </p:spPr>
-      </p:sp>
-      <p:sp>
-        <p:nvSpPr>
-          <p:cNvPr id="31" name="Text 29"/>
-          <p:cNvSpPr/>
-          <p:nvPr/>
-        </p:nvSpPr>
-        <p:spPr>
-          <a:xfrm>
-            <a:off x="950976" y="4058367"/>
-            <a:ext cx="1097280" cy="502920"/>
-          </a:xfrm>
-          <a:prstGeom prst="rect">
-            <a:avLst/>
-          </a:prstGeom>
-          <a:noFill/>
-          <a:ln/>
-        </p:spPr>
-        <p:txBody>
-          <a:bodyPr wrap="square" lIns="0" tIns="0" rIns="0" bIns="0" rtlCol="0" anchor="ctr"/>
-          <a:lstStyle/>
-          <a:p>
-            <a:pPr marL="0" indent="0" algn="ctr">
-              <a:buNone/>
-            </a:pPr>
-            <a:r>
-              <a:rPr lang="en-US" sz="750" dirty="0">
-                <a:solidFill>
-                  <a:srgbClr val="F4F8FC"/>
-                </a:solidFill>
-                <a:latin typeface="Calibri" pitchFamily="34" charset="0"/>
-                <a:ea typeface="Calibri" pitchFamily="34" charset="-122"/>
-                <a:cs typeface="Calibri" pitchFamily="34" charset="-120"/>
-              </a:rPr>
-              <a:t>X features</a:t>
-            </a:r>
-            <a:endParaRPr lang="en-US" sz="750" dirty="0"/>
-          </a:p>
-        </p:txBody>
-      </p:sp>
-      <p:sp>
-        <p:nvSpPr>
-          <p:cNvPr id="32" name="Shape 30"/>
-          <p:cNvSpPr/>
-          <p:nvPr/>
-        </p:nvSpPr>
-        <p:spPr>
-          <a:xfrm>
-            <a:off x="2048256" y="4277823"/>
-            <a:ext cx="146304" cy="73152"/>
-          </a:xfrm>
-          <a:prstGeom prst="rect">
-            <a:avLst/>
-          </a:prstGeom>
-          <a:solidFill>
-            <a:srgbClr val="D4A843"/>
-          </a:solidFill>
-          <a:ln/>
-        </p:spPr>
-      </p:sp>
-      <p:sp>
-        <p:nvSpPr>
-          <p:cNvPr id="33" name="Shape 31"/>
-          <p:cNvSpPr/>
-          <p:nvPr/>
-        </p:nvSpPr>
-        <p:spPr>
-          <a:xfrm>
-            <a:off x="2194560" y="4058367"/>
-            <a:ext cx="1097280" cy="502920"/>
-          </a:xfrm>
-          <a:prstGeom prst="rect">
-            <a:avLst/>
-          </a:prstGeom>
-          <a:solidFill>
-            <a:srgbClr val="2A5080"/>
-          </a:solidFill>
-          <a:ln w="12700">
-            <a:solidFill>
-              <a:srgbClr val="D4A843"/>
-            </a:solidFill>
-            <a:prstDash val="solid"/>
-          </a:ln>
-        </p:spPr>
-      </p:sp>
-      <p:sp>
-        <p:nvSpPr>
-          <p:cNvPr id="34" name="Text 32"/>
-          <p:cNvSpPr/>
-          <p:nvPr/>
-        </p:nvSpPr>
-        <p:spPr>
-          <a:xfrm>
-            <a:off x="2194560" y="4058367"/>
-            <a:ext cx="1097280" cy="502920"/>
-          </a:xfrm>
-          <a:prstGeom prst="rect">
-            <a:avLst/>
-          </a:prstGeom>
-          <a:noFill/>
-          <a:ln/>
-        </p:spPr>
-        <p:txBody>
-          <a:bodyPr wrap="square" lIns="0" tIns="0" rIns="0" bIns="0" rtlCol="0" anchor="ctr"/>
-          <a:lstStyle/>
-          <a:p>
-            <a:pPr marL="0" indent="0" algn="ctr">
-              <a:buNone/>
-            </a:pPr>
-            <a:r>
-              <a:rPr lang="en-US" sz="750" dirty="0">
-                <a:solidFill>
-                  <a:srgbClr val="F4F8FC"/>
-                </a:solidFill>
-                <a:latin typeface="Calibri" pitchFamily="34" charset="0"/>
-                <a:ea typeface="Calibri" pitchFamily="34" charset="-122"/>
-                <a:cs typeface="Calibri" pitchFamily="34" charset="-120"/>
-              </a:rPr>
-              <a:t>Modelo de</a:t>
-            </a:r>
-            <a:endParaRPr lang="en-US" sz="750" dirty="0"/>
-          </a:p>
-          <a:p>
-            <a:pPr marL="0" indent="0" algn="ctr">
-              <a:buNone/>
-            </a:pPr>
-            <a:r>
-              <a:rPr lang="en-US" sz="750" dirty="0">
-                <a:solidFill>
-                  <a:srgbClr val="F4F8FC"/>
-                </a:solidFill>
-                <a:latin typeface="Calibri" pitchFamily="34" charset="0"/>
-                <a:ea typeface="Calibri" pitchFamily="34" charset="-122"/>
-                <a:cs typeface="Calibri" pitchFamily="34" charset="-120"/>
-              </a:rPr>
-              <a:t>Regresión</a:t>
-            </a:r>
-            <a:endParaRPr lang="en-US" sz="750" dirty="0"/>
-          </a:p>
-        </p:txBody>
-      </p:sp>
-      <p:sp>
-        <p:nvSpPr>
-          <p:cNvPr id="35" name="Shape 33"/>
-          <p:cNvSpPr/>
-          <p:nvPr/>
-        </p:nvSpPr>
-        <p:spPr>
-          <a:xfrm>
-            <a:off x="3291840" y="4277823"/>
-            <a:ext cx="146304" cy="73152"/>
-          </a:xfrm>
-          <a:prstGeom prst="rect">
-            <a:avLst/>
-          </a:prstGeom>
-          <a:solidFill>
-            <a:srgbClr val="D4A843"/>
-          </a:solidFill>
-          <a:ln/>
-        </p:spPr>
-      </p:sp>
-      <p:sp>
-        <p:nvSpPr>
-          <p:cNvPr id="36" name="Shape 34"/>
-          <p:cNvSpPr/>
-          <p:nvPr/>
-        </p:nvSpPr>
-        <p:spPr>
-          <a:xfrm>
-            <a:off x="3438144" y="4058367"/>
-            <a:ext cx="1097280" cy="502920"/>
-          </a:xfrm>
-          <a:prstGeom prst="rect">
-            <a:avLst/>
-          </a:prstGeom>
-          <a:solidFill>
-            <a:srgbClr val="1A2E4A"/>
-          </a:solidFill>
-          <a:ln w="12700">
-            <a:solidFill>
-              <a:srgbClr val="2A5080"/>
-            </a:solidFill>
-            <a:prstDash val="solid"/>
-          </a:ln>
-        </p:spPr>
-      </p:sp>
-      <p:sp>
-        <p:nvSpPr>
-          <p:cNvPr id="37" name="Text 35"/>
-          <p:cNvSpPr/>
-          <p:nvPr/>
-        </p:nvSpPr>
-        <p:spPr>
-          <a:xfrm>
-            <a:off x="3438144" y="4058367"/>
-            <a:ext cx="1097280" cy="502920"/>
-          </a:xfrm>
-          <a:prstGeom prst="rect">
-            <a:avLst/>
-          </a:prstGeom>
-          <a:noFill/>
-          <a:ln/>
-        </p:spPr>
-        <p:txBody>
-          <a:bodyPr wrap="square" lIns="0" tIns="0" rIns="0" bIns="0" rtlCol="0" anchor="ctr"/>
-          <a:lstStyle/>
-          <a:p>
-            <a:pPr marL="0" indent="0" algn="ctr">
-              <a:buNone/>
-            </a:pPr>
-            <a:r>
-              <a:rPr lang="en-US" sz="750" dirty="0">
-                <a:solidFill>
-                  <a:srgbClr val="F4F8FC"/>
-                </a:solidFill>
-                <a:latin typeface="Calibri" pitchFamily="34" charset="0"/>
-                <a:ea typeface="Calibri" pitchFamily="34" charset="-122"/>
-                <a:cs typeface="Calibri" pitchFamily="34" charset="-120"/>
-              </a:rPr>
-              <a:t>y_predicho</a:t>
-            </a:r>
-            <a:endParaRPr lang="en-US" sz="750" dirty="0"/>
-          </a:p>
-        </p:txBody>
-      </p:sp>
-      <p:sp>
-        <p:nvSpPr>
-          <p:cNvPr id="38" name="Shape 36"/>
-          <p:cNvSpPr/>
-          <p:nvPr/>
-        </p:nvSpPr>
-        <p:spPr>
-          <a:xfrm>
-            <a:off x="4535424" y="4277823"/>
-            <a:ext cx="146304" cy="73152"/>
-          </a:xfrm>
-          <a:prstGeom prst="rect">
-            <a:avLst/>
-          </a:prstGeom>
-          <a:solidFill>
-            <a:srgbClr val="D4A843"/>
-          </a:solidFill>
-          <a:ln/>
-        </p:spPr>
-      </p:sp>
-      <p:sp>
-        <p:nvSpPr>
-          <p:cNvPr id="39" name="Shape 37"/>
-          <p:cNvSpPr/>
-          <p:nvPr/>
-        </p:nvSpPr>
-        <p:spPr>
-          <a:xfrm>
-            <a:off x="4681728" y="4058367"/>
-            <a:ext cx="1097280" cy="502920"/>
-          </a:xfrm>
-          <a:prstGeom prst="rect">
-            <a:avLst/>
-          </a:prstGeom>
-          <a:solidFill>
-            <a:srgbClr val="2A5080"/>
-          </a:solidFill>
-          <a:ln w="12700">
-            <a:solidFill>
-              <a:srgbClr val="D4A843"/>
-            </a:solidFill>
-            <a:prstDash val="solid"/>
-          </a:ln>
-        </p:spPr>
-      </p:sp>
-      <p:sp>
-        <p:nvSpPr>
-          <p:cNvPr id="40" name="Text 38"/>
-          <p:cNvSpPr/>
-          <p:nvPr/>
-        </p:nvSpPr>
-        <p:spPr>
-          <a:xfrm>
-            <a:off x="4681728" y="4058367"/>
-            <a:ext cx="1097280" cy="502920"/>
-          </a:xfrm>
-          <a:prstGeom prst="rect">
-            <a:avLst/>
-          </a:prstGeom>
-          <a:noFill/>
-          <a:ln/>
-        </p:spPr>
-        <p:txBody>
-          <a:bodyPr wrap="square" lIns="0" tIns="0" rIns="0" bIns="0" rtlCol="0" anchor="ctr"/>
-          <a:lstStyle/>
-          <a:p>
-            <a:pPr marL="0" indent="0" algn="ctr">
-              <a:buNone/>
-            </a:pPr>
-            <a:r>
-              <a:rPr lang="en-US" sz="750" dirty="0">
-                <a:solidFill>
-                  <a:srgbClr val="F4F8FC"/>
-                </a:solidFill>
-                <a:latin typeface="Calibri" pitchFamily="34" charset="0"/>
-                <a:ea typeface="Calibri" pitchFamily="34" charset="-122"/>
-                <a:cs typeface="Calibri" pitchFamily="34" charset="-120"/>
-              </a:rPr>
-              <a:t>ratio =</a:t>
-            </a:r>
-            <a:endParaRPr lang="en-US" sz="750" dirty="0"/>
-          </a:p>
-          <a:p>
-            <a:pPr marL="0" indent="0" algn="ctr">
-              <a:buNone/>
-            </a:pPr>
-            <a:r>
-              <a:rPr lang="en-US" sz="750" dirty="0">
-                <a:solidFill>
-                  <a:srgbClr val="F4F8FC"/>
-                </a:solidFill>
-                <a:latin typeface="Calibri" pitchFamily="34" charset="0"/>
-                <a:ea typeface="Calibri" pitchFamily="34" charset="-122"/>
-                <a:cs typeface="Calibri" pitchFamily="34" charset="-120"/>
-              </a:rPr>
-              <a:t>real / pred</a:t>
-            </a:r>
-            <a:endParaRPr lang="en-US" sz="750" dirty="0"/>
-          </a:p>
-        </p:txBody>
-      </p:sp>
-      <p:sp>
-        <p:nvSpPr>
-          <p:cNvPr id="41" name="Shape 39"/>
-          <p:cNvSpPr/>
-          <p:nvPr/>
-        </p:nvSpPr>
-        <p:spPr>
-          <a:xfrm>
-            <a:off x="5779008" y="4277823"/>
-            <a:ext cx="146304" cy="73152"/>
-          </a:xfrm>
-          <a:prstGeom prst="rect">
-            <a:avLst/>
-          </a:prstGeom>
-          <a:solidFill>
-            <a:srgbClr val="D4A843"/>
-          </a:solidFill>
-          <a:ln/>
-        </p:spPr>
-      </p:sp>
-      <p:sp>
-        <p:nvSpPr>
-          <p:cNvPr id="42" name="Shape 40"/>
-          <p:cNvSpPr/>
-          <p:nvPr/>
-        </p:nvSpPr>
-        <p:spPr>
-          <a:xfrm>
-            <a:off x="5925312" y="4058367"/>
-            <a:ext cx="1097280" cy="502920"/>
-          </a:xfrm>
-          <a:prstGeom prst="rect">
-            <a:avLst/>
-          </a:prstGeom>
-          <a:solidFill>
-            <a:srgbClr val="2A5080"/>
-          </a:solidFill>
-          <a:ln w="12700">
-            <a:solidFill>
-              <a:srgbClr val="D4A843"/>
-            </a:solidFill>
-            <a:prstDash val="solid"/>
-          </a:ln>
-        </p:spPr>
-      </p:sp>
-      <p:sp>
-        <p:nvSpPr>
-          <p:cNvPr id="43" name="Text 41"/>
-          <p:cNvSpPr/>
-          <p:nvPr/>
-        </p:nvSpPr>
-        <p:spPr>
-          <a:xfrm>
-            <a:off x="5925312" y="4058367"/>
-            <a:ext cx="1097280" cy="502920"/>
-          </a:xfrm>
-          <a:prstGeom prst="rect">
-            <a:avLst/>
-          </a:prstGeom>
-          <a:noFill/>
-          <a:ln/>
-        </p:spPr>
-        <p:txBody>
-          <a:bodyPr wrap="square" lIns="0" tIns="0" rIns="0" bIns="0" rtlCol="0" anchor="ctr"/>
-          <a:lstStyle/>
-          <a:p>
-            <a:pPr marL="0" indent="0" algn="ctr">
-              <a:buNone/>
-            </a:pPr>
-            <a:r>
-              <a:rPr lang="en-US" sz="750" dirty="0">
-                <a:solidFill>
-                  <a:srgbClr val="F4F8FC"/>
-                </a:solidFill>
-                <a:latin typeface="Calibri" pitchFamily="34" charset="0"/>
-                <a:ea typeface="Calibri" pitchFamily="34" charset="-122"/>
-                <a:cs typeface="Calibri" pitchFamily="34" charset="-120"/>
-              </a:rPr>
-              <a:t>crear_etiqueta</a:t>
-            </a:r>
-            <a:endParaRPr lang="en-US" sz="750" dirty="0"/>
-          </a:p>
-          <a:p>
-            <a:pPr marL="0" indent="0" algn="ctr">
-              <a:buNone/>
-            </a:pPr>
-            <a:r>
-              <a:rPr lang="en-US" sz="750" dirty="0">
-                <a:solidFill>
-                  <a:srgbClr val="F4F8FC"/>
-                </a:solidFill>
-                <a:latin typeface="Calibri" pitchFamily="34" charset="0"/>
-                <a:ea typeface="Calibri" pitchFamily="34" charset="-122"/>
-                <a:cs typeface="Calibri" pitchFamily="34" charset="-120"/>
-              </a:rPr>
-              <a:t>_chollo()</a:t>
-            </a:r>
-            <a:endParaRPr lang="en-US" sz="750" dirty="0"/>
-          </a:p>
-        </p:txBody>
-      </p:sp>
-      <p:sp>
-        <p:nvSpPr>
-          <p:cNvPr id="44" name="Shape 42"/>
-          <p:cNvSpPr/>
-          <p:nvPr/>
-        </p:nvSpPr>
-        <p:spPr>
-          <a:xfrm>
-            <a:off x="7022592" y="4277823"/>
-            <a:ext cx="146304" cy="73152"/>
-          </a:xfrm>
-          <a:prstGeom prst="rect">
-            <a:avLst/>
-          </a:prstGeom>
-          <a:solidFill>
-            <a:srgbClr val="D4A843"/>
-          </a:solidFill>
-          <a:ln/>
-        </p:spPr>
-      </p:sp>
-      <p:sp>
-        <p:nvSpPr>
-          <p:cNvPr id="45" name="Shape 43"/>
-          <p:cNvSpPr/>
-          <p:nvPr/>
-        </p:nvSpPr>
-        <p:spPr>
-          <a:xfrm>
-            <a:off x="7168896" y="4058367"/>
-            <a:ext cx="1097280" cy="502920"/>
-          </a:xfrm>
-          <a:prstGeom prst="rect">
-            <a:avLst/>
-          </a:prstGeom>
-          <a:solidFill>
-            <a:srgbClr val="1F5C40"/>
-          </a:solidFill>
-          <a:ln w="12700">
-            <a:solidFill>
-              <a:srgbClr val="D4A843"/>
-            </a:solidFill>
-            <a:prstDash val="solid"/>
-          </a:ln>
-        </p:spPr>
-      </p:sp>
-      <p:sp>
-        <p:nvSpPr>
-          <p:cNvPr id="46" name="Text 44"/>
-          <p:cNvSpPr/>
-          <p:nvPr/>
-        </p:nvSpPr>
-        <p:spPr>
-          <a:xfrm>
-            <a:off x="7168896" y="4058367"/>
-            <a:ext cx="1097280" cy="502920"/>
-          </a:xfrm>
-          <a:prstGeom prst="rect">
-            <a:avLst/>
-          </a:prstGeom>
-          <a:noFill/>
-          <a:ln/>
-        </p:spPr>
-        <p:txBody>
-          <a:bodyPr wrap="square" lIns="0" tIns="0" rIns="0" bIns="0" rtlCol="0" anchor="ctr"/>
-          <a:lstStyle/>
-          <a:p>
-            <a:pPr marL="0" indent="0" algn="ctr">
-              <a:buNone/>
-            </a:pPr>
-            <a:r>
-              <a:rPr lang="en-US" sz="750" dirty="0">
-                <a:solidFill>
-                  <a:srgbClr val="D4A843"/>
-                </a:solidFill>
-                <a:latin typeface="Calibri" pitchFamily="34" charset="0"/>
-                <a:ea typeface="Calibri" pitchFamily="34" charset="-122"/>
-                <a:cs typeface="Calibri" pitchFamily="34" charset="-120"/>
-              </a:rPr>
-              <a:t>Categoría</a:t>
-            </a:r>
-            <a:endParaRPr lang="en-US" sz="750" dirty="0"/>
-          </a:p>
-          <a:p>
-            <a:pPr marL="0" indent="0" algn="ctr">
-              <a:buNone/>
-            </a:pPr>
-            <a:r>
-              <a:rPr lang="en-US" sz="750" dirty="0">
-                <a:solidFill>
-                  <a:srgbClr val="D4A843"/>
-                </a:solidFill>
-                <a:latin typeface="Calibri" pitchFamily="34" charset="0"/>
-                <a:ea typeface="Calibri" pitchFamily="34" charset="-122"/>
-                <a:cs typeface="Calibri" pitchFamily="34" charset="-120"/>
-              </a:rPr>
-              <a:t>(0–4)</a:t>
-            </a:r>
-            <a:endParaRPr lang="en-US" sz="750" dirty="0"/>
-          </a:p>
-        </p:txBody>
-      </p:sp>
-      <p:sp>
-        <p:nvSpPr>
-          <p:cNvPr id="50" name="Shape 48"/>
-          <p:cNvSpPr/>
-          <p:nvPr/>
-        </p:nvSpPr>
-        <p:spPr>
-          <a:xfrm>
-            <a:off x="402336" y="4607007"/>
-            <a:ext cx="8229600" cy="256032"/>
-          </a:xfrm>
-          <a:prstGeom prst="rect">
-            <a:avLst/>
-          </a:prstGeom>
-          <a:solidFill>
-            <a:srgbClr val="1F5C40"/>
-          </a:solidFill>
-          <a:ln/>
-        </p:spPr>
-      </p:sp>
-      <p:sp>
-        <p:nvSpPr>
-          <p:cNvPr id="51" name="Text 49"/>
-          <p:cNvSpPr/>
-          <p:nvPr/>
-        </p:nvSpPr>
-        <p:spPr>
-          <a:xfrm>
-            <a:off x="493776" y="4607007"/>
-            <a:ext cx="8046720" cy="256032"/>
-          </a:xfrm>
-          <a:prstGeom prst="rect">
-            <a:avLst/>
-          </a:prstGeom>
-          <a:noFill/>
-          <a:ln/>
-        </p:spPr>
-        <p:txBody>
-          <a:bodyPr wrap="square" lIns="0" tIns="0" rIns="0" bIns="0" rtlCol="0" anchor="ctr"/>
-          <a:lstStyle/>
-          <a:p>
-            <a:pPr marL="0" indent="0">
-              <a:buNone/>
-            </a:pPr>
-            <a:r>
-              <a:rPr lang="en-US" sz="900" dirty="0">
-                <a:solidFill>
-                  <a:srgbClr val="FFFFFF"/>
-                </a:solidFill>
-                <a:latin typeface="Calibri" pitchFamily="34" charset="0"/>
-                <a:ea typeface="Calibri" pitchFamily="34" charset="-122"/>
-                <a:cs typeface="Calibri" pitchFamily="34" charset="-120"/>
-              </a:rPr>
-              <a:t>Evaluación del modelo de regresión sobre X_test (una sola vez): R², MAE, RMSE  ·  joblib guarda modelo + scalers para producción</a:t>
-            </a:r>
-            <a:endParaRPr lang="en-US" sz="900" dirty="0"/>
-          </a:p>
-        </p:txBody>
-      </p:sp>
-      <p:sp>
-        <p:nvSpPr>
-          <p:cNvPr id="52" name="Text 50"/>
-          <p:cNvSpPr/>
-          <p:nvPr/>
-        </p:nvSpPr>
-        <p:spPr>
-          <a:xfrm>
-            <a:off x="402336" y="4899615"/>
-            <a:ext cx="7772400" cy="201168"/>
-          </a:xfrm>
-          <a:prstGeom prst="rect">
-            <a:avLst/>
-          </a:prstGeom>
-          <a:noFill/>
-          <a:ln/>
-        </p:spPr>
-        <p:txBody>
-          <a:bodyPr wrap="square" lIns="0" tIns="0" rIns="0" bIns="0" rtlCol="0" anchor="ctr"/>
-          <a:lstStyle/>
-          <a:p>
-            <a:pPr marL="0" indent="0" algn="l">
-              <a:buNone/>
-            </a:pPr>
-            <a:r>
-              <a:rPr lang="en-US" sz="800" dirty="0">
-                <a:solidFill>
-                  <a:srgbClr val="CBD5E1"/>
-                </a:solidFill>
-                <a:latin typeface="Calibri" pitchFamily="34" charset="0"/>
-                <a:ea typeface="Calibri" pitchFamily="34" charset="-122"/>
-                <a:cs typeface="Calibri" pitchFamily="34" charset="-120"/>
-              </a:rPr>
-              <a:t>TFG · Detector de Chollos en Andalucía · Mario Jiménez · Universidad de Sevilla</a:t>
-            </a:r>
-            <a:endParaRPr lang="en-US" sz="800" dirty="0"/>
-          </a:p>
-        </p:txBody>
-      </p:sp>
-      <p:sp>
-        <p:nvSpPr>
-          <p:cNvPr id="53" name="Text 51"/>
-          <p:cNvSpPr/>
-          <p:nvPr/>
-        </p:nvSpPr>
-        <p:spPr>
-          <a:xfrm>
-            <a:off x="8741664" y="4858331"/>
-            <a:ext cx="365760" cy="228600"/>
-          </a:xfrm>
-          <a:prstGeom prst="rect">
-            <a:avLst/>
-          </a:prstGeom>
-          <a:noFill/>
-          <a:ln/>
-        </p:spPr>
-        <p:txBody>
-          <a:bodyPr wrap="square" lIns="0" tIns="0" rIns="0" bIns="0" rtlCol="0" anchor="ctr"/>
-          <a:lstStyle/>
-          <a:p>
-            <a:pPr marL="0" indent="0" algn="ctr">
-              <a:buNone/>
-            </a:pPr>
-            <a:endParaRPr lang="en-US" sz="900" dirty="0"/>
           </a:p>
         </p:txBody>
       </p:sp>
@@ -14618,6 +13673,2198 @@
 
 <file path=ppt/slides/slide20.xml><?xml version="1.0" encoding="utf-8"?>
 <p:sld xmlns:a="http://schemas.openxmlformats.org/drawingml/2006/main" xmlns:r="http://schemas.openxmlformats.org/officeDocument/2006/relationships" xmlns:p="http://schemas.openxmlformats.org/presentationml/2006/main">
+  <p:cSld name="Slide 8">
+    <p:bg>
+      <p:bgPr>
+        <a:solidFill>
+          <a:srgbClr val="F4F8FC"/>
+        </a:solidFill>
+        <a:effectLst/>
+      </p:bgPr>
+    </p:bg>
+    <p:spTree>
+      <p:nvGrpSpPr>
+        <p:cNvPr id="1" name=""/>
+        <p:cNvGrpSpPr/>
+        <p:nvPr/>
+      </p:nvGrpSpPr>
+      <p:grpSpPr>
+        <a:xfrm>
+          <a:off x="0" y="0"/>
+          <a:ext cx="0" cy="0"/>
+          <a:chOff x="0" y="0"/>
+          <a:chExt cx="0" cy="0"/>
+        </a:xfrm>
+      </p:grpSpPr>
+      <p:sp>
+        <p:nvSpPr>
+          <p:cNvPr id="2" name="Shape 0"/>
+          <p:cNvSpPr/>
+          <p:nvPr/>
+        </p:nvSpPr>
+        <p:spPr>
+          <a:xfrm>
+            <a:off x="0" y="0"/>
+            <a:ext cx="9144000" cy="1005840"/>
+          </a:xfrm>
+          <a:prstGeom prst="rect">
+            <a:avLst/>
+          </a:prstGeom>
+          <a:solidFill>
+            <a:srgbClr val="1A2E4A"/>
+          </a:solidFill>
+          <a:ln/>
+        </p:spPr>
+      </p:sp>
+      <p:sp>
+        <p:nvSpPr>
+          <p:cNvPr id="3" name="Shape 1"/>
+          <p:cNvSpPr/>
+          <p:nvPr/>
+        </p:nvSpPr>
+        <p:spPr>
+          <a:xfrm>
+            <a:off x="0" y="0"/>
+            <a:ext cx="9144000" cy="54864"/>
+          </a:xfrm>
+          <a:prstGeom prst="rect">
+            <a:avLst/>
+          </a:prstGeom>
+          <a:solidFill>
+            <a:srgbClr val="D4A843"/>
+          </a:solidFill>
+          <a:ln/>
+        </p:spPr>
+      </p:sp>
+      <p:sp>
+        <p:nvSpPr>
+          <p:cNvPr id="4" name="Text 2"/>
+          <p:cNvSpPr/>
+          <p:nvPr/>
+        </p:nvSpPr>
+        <p:spPr>
+          <a:xfrm>
+            <a:off x="457200" y="164592"/>
+            <a:ext cx="8229600" cy="457200"/>
+          </a:xfrm>
+          <a:prstGeom prst="rect">
+            <a:avLst/>
+          </a:prstGeom>
+          <a:noFill/>
+          <a:ln/>
+        </p:spPr>
+        <p:txBody>
+          <a:bodyPr wrap="square" lIns="0" tIns="0" rIns="0" bIns="0" rtlCol="0" anchor="ctr"/>
+          <a:lstStyle/>
+          <a:p>
+            <a:pPr marL="0" indent="0">
+              <a:buNone/>
+            </a:pPr>
+            <a:r>
+              <a:rPr lang="en-US" sz="2400" b="1" dirty="0">
+                <a:solidFill>
+                  <a:srgbClr val="FFFFFF"/>
+                </a:solidFill>
+                <a:latin typeface="Calibri" pitchFamily="34" charset="0"/>
+                <a:ea typeface="Calibri" pitchFamily="34" charset="-122"/>
+                <a:cs typeface="Calibri" pitchFamily="34" charset="-120"/>
+              </a:rPr>
+              <a:t>Categorización de Chollos · Núcleo del Proyecto</a:t>
+            </a:r>
+            <a:endParaRPr lang="en-US" sz="2400" dirty="0"/>
+          </a:p>
+        </p:txBody>
+      </p:sp>
+      <p:sp>
+        <p:nvSpPr>
+          <p:cNvPr id="5" name="Text 3"/>
+          <p:cNvSpPr/>
+          <p:nvPr/>
+        </p:nvSpPr>
+        <p:spPr>
+          <a:xfrm>
+            <a:off x="457200" y="621792"/>
+            <a:ext cx="8229600" cy="274320"/>
+          </a:xfrm>
+          <a:prstGeom prst="rect">
+            <a:avLst/>
+          </a:prstGeom>
+          <a:noFill/>
+          <a:ln/>
+        </p:spPr>
+        <p:txBody>
+          <a:bodyPr wrap="square" lIns="0" tIns="0" rIns="0" bIns="0" rtlCol="0" anchor="ctr"/>
+          <a:lstStyle/>
+          <a:p>
+            <a:pPr marL="0" indent="0">
+              <a:buNone/>
+            </a:pPr>
+            <a:r>
+              <a:rPr lang="en-US" sz="1000" dirty="0">
+                <a:solidFill>
+                  <a:srgbClr val="F0C060"/>
+                </a:solidFill>
+                <a:latin typeface="Consolas" pitchFamily="34" charset="0"/>
+                <a:ea typeface="Consolas" pitchFamily="34" charset="-122"/>
+                <a:cs typeface="Consolas" pitchFamily="34" charset="-120"/>
+              </a:rPr>
+              <a:t>crear_etiqueta_chollo(y_real, y_predicho)  →  ratio precio_real / precio_predicho</a:t>
+            </a:r>
+            <a:endParaRPr lang="en-US" sz="1000" dirty="0"/>
+          </a:p>
+        </p:txBody>
+      </p:sp>
+      <p:sp>
+        <p:nvSpPr>
+          <p:cNvPr id="6" name="Shape 4"/>
+          <p:cNvSpPr/>
+          <p:nvPr/>
+        </p:nvSpPr>
+        <p:spPr>
+          <a:xfrm>
+            <a:off x="457200" y="1115568"/>
+            <a:ext cx="2148840" cy="475488"/>
+          </a:xfrm>
+          <a:prstGeom prst="rect">
+            <a:avLst/>
+          </a:prstGeom>
+          <a:solidFill>
+            <a:srgbClr val="1A7A2A"/>
+          </a:solidFill>
+          <a:ln/>
+          <a:effectLst>
+            <a:outerShdw blurRad="50800" dist="25400" dir="8100000" algn="bl" rotWithShape="0">
+              <a:srgbClr val="000000">
+                <a:alpha val="10000"/>
+              </a:srgbClr>
+            </a:outerShdw>
+          </a:effectLst>
+        </p:spPr>
+      </p:sp>
+      <p:sp>
+        <p:nvSpPr>
+          <p:cNvPr id="7" name="Text 5"/>
+          <p:cNvSpPr/>
+          <p:nvPr/>
+        </p:nvSpPr>
+        <p:spPr>
+          <a:xfrm>
+            <a:off x="548640" y="1133856"/>
+            <a:ext cx="1965960" cy="201168"/>
+          </a:xfrm>
+          <a:prstGeom prst="rect">
+            <a:avLst/>
+          </a:prstGeom>
+          <a:noFill/>
+          <a:ln/>
+        </p:spPr>
+        <p:txBody>
+          <a:bodyPr wrap="square" lIns="0" tIns="0" rIns="0" bIns="0" rtlCol="0" anchor="ctr"/>
+          <a:lstStyle/>
+          <a:p>
+            <a:pPr marL="0" indent="0">
+              <a:buNone/>
+            </a:pPr>
+            <a:r>
+              <a:rPr lang="en-US" sz="950" b="1" dirty="0">
+                <a:solidFill>
+                  <a:srgbClr val="FFFFFF"/>
+                </a:solidFill>
+                <a:latin typeface="Calibri" pitchFamily="34" charset="0"/>
+                <a:ea typeface="Calibri" pitchFamily="34" charset="-122"/>
+                <a:cs typeface="Calibri" pitchFamily="34" charset="-120"/>
+              </a:rPr>
+              <a:t>4  Hiper-chollo</a:t>
+            </a:r>
+            <a:endParaRPr lang="en-US" sz="950" dirty="0"/>
+          </a:p>
+        </p:txBody>
+      </p:sp>
+      <p:sp>
+        <p:nvSpPr>
+          <p:cNvPr id="8" name="Text 6"/>
+          <p:cNvSpPr/>
+          <p:nvPr/>
+        </p:nvSpPr>
+        <p:spPr>
+          <a:xfrm>
+            <a:off x="548640" y="1335024"/>
+            <a:ext cx="1965960" cy="237744"/>
+          </a:xfrm>
+          <a:prstGeom prst="rect">
+            <a:avLst/>
+          </a:prstGeom>
+          <a:noFill/>
+          <a:ln/>
+        </p:spPr>
+        <p:txBody>
+          <a:bodyPr wrap="square" lIns="0" tIns="0" rIns="0" bIns="0" rtlCol="0" anchor="ctr"/>
+          <a:lstStyle/>
+          <a:p>
+            <a:pPr marL="0" indent="0">
+              <a:buNone/>
+            </a:pPr>
+            <a:r>
+              <a:rPr lang="en-US" sz="800" dirty="0">
+                <a:solidFill>
+                  <a:srgbClr val="F4F8FC"/>
+                </a:solidFill>
+                <a:latin typeface="Calibri" pitchFamily="34" charset="0"/>
+                <a:ea typeface="Calibri" pitchFamily="34" charset="-122"/>
+                <a:cs typeface="Calibri" pitchFamily="34" charset="-120"/>
+              </a:rPr>
+              <a:t>ratio ≤ 0.75</a:t>
+            </a:r>
+            <a:endParaRPr lang="en-US" sz="800" dirty="0"/>
+          </a:p>
+          <a:p>
+            <a:pPr marL="0" indent="0">
+              <a:buNone/>
+            </a:pPr>
+            <a:r>
+              <a:rPr lang="en-US" sz="800" dirty="0">
+                <a:solidFill>
+                  <a:srgbClr val="F4F8FC"/>
+                </a:solidFill>
+                <a:latin typeface="Calibri" pitchFamily="34" charset="0"/>
+                <a:ea typeface="Calibri" pitchFamily="34" charset="-122"/>
+                <a:cs typeface="Calibri" pitchFamily="34" charset="-120"/>
+              </a:rPr>
+              <a:t>&gt;25% más barato que el precio justo</a:t>
+            </a:r>
+            <a:endParaRPr lang="en-US" sz="800" dirty="0"/>
+          </a:p>
+        </p:txBody>
+      </p:sp>
+      <p:sp>
+        <p:nvSpPr>
+          <p:cNvPr id="9" name="Shape 7"/>
+          <p:cNvSpPr/>
+          <p:nvPr/>
+        </p:nvSpPr>
+        <p:spPr>
+          <a:xfrm>
+            <a:off x="457200" y="1636776"/>
+            <a:ext cx="2148840" cy="475488"/>
+          </a:xfrm>
+          <a:prstGeom prst="rect">
+            <a:avLst/>
+          </a:prstGeom>
+          <a:solidFill>
+            <a:srgbClr val="2E8B4A"/>
+          </a:solidFill>
+          <a:ln/>
+          <a:effectLst>
+            <a:outerShdw blurRad="50800" dist="25400" dir="8100000" algn="bl" rotWithShape="0">
+              <a:srgbClr val="000000">
+                <a:alpha val="10000"/>
+              </a:srgbClr>
+            </a:outerShdw>
+          </a:effectLst>
+        </p:spPr>
+      </p:sp>
+      <p:sp>
+        <p:nvSpPr>
+          <p:cNvPr id="10" name="Text 8"/>
+          <p:cNvSpPr/>
+          <p:nvPr/>
+        </p:nvSpPr>
+        <p:spPr>
+          <a:xfrm>
+            <a:off x="548640" y="1655064"/>
+            <a:ext cx="1965960" cy="201168"/>
+          </a:xfrm>
+          <a:prstGeom prst="rect">
+            <a:avLst/>
+          </a:prstGeom>
+          <a:noFill/>
+          <a:ln/>
+        </p:spPr>
+        <p:txBody>
+          <a:bodyPr wrap="square" lIns="0" tIns="0" rIns="0" bIns="0" rtlCol="0" anchor="ctr"/>
+          <a:lstStyle/>
+          <a:p>
+            <a:pPr marL="0" indent="0">
+              <a:buNone/>
+            </a:pPr>
+            <a:r>
+              <a:rPr lang="en-US" sz="950" b="1" dirty="0">
+                <a:solidFill>
+                  <a:srgbClr val="FFFFFF"/>
+                </a:solidFill>
+                <a:latin typeface="Calibri" pitchFamily="34" charset="0"/>
+                <a:ea typeface="Calibri" pitchFamily="34" charset="-122"/>
+                <a:cs typeface="Calibri" pitchFamily="34" charset="-120"/>
+              </a:rPr>
+              <a:t>3  Super-chollo</a:t>
+            </a:r>
+            <a:endParaRPr lang="en-US" sz="950" dirty="0"/>
+          </a:p>
+        </p:txBody>
+      </p:sp>
+      <p:sp>
+        <p:nvSpPr>
+          <p:cNvPr id="11" name="Text 9"/>
+          <p:cNvSpPr/>
+          <p:nvPr/>
+        </p:nvSpPr>
+        <p:spPr>
+          <a:xfrm>
+            <a:off x="548640" y="1856232"/>
+            <a:ext cx="1965960" cy="237744"/>
+          </a:xfrm>
+          <a:prstGeom prst="rect">
+            <a:avLst/>
+          </a:prstGeom>
+          <a:noFill/>
+          <a:ln/>
+        </p:spPr>
+        <p:txBody>
+          <a:bodyPr wrap="square" lIns="0" tIns="0" rIns="0" bIns="0" rtlCol="0" anchor="ctr"/>
+          <a:lstStyle/>
+          <a:p>
+            <a:pPr marL="0" indent="0">
+              <a:buNone/>
+            </a:pPr>
+            <a:r>
+              <a:rPr lang="en-US" sz="800" dirty="0">
+                <a:solidFill>
+                  <a:srgbClr val="F4F8FC"/>
+                </a:solidFill>
+                <a:latin typeface="Calibri" pitchFamily="34" charset="0"/>
+                <a:ea typeface="Calibri" pitchFamily="34" charset="-122"/>
+                <a:cs typeface="Calibri" pitchFamily="34" charset="-120"/>
+              </a:rPr>
+              <a:t>0.75 &lt; ratio &lt; 0.85</a:t>
+            </a:r>
+            <a:endParaRPr lang="en-US" sz="800" dirty="0"/>
+          </a:p>
+          <a:p>
+            <a:pPr marL="0" indent="0">
+              <a:buNone/>
+            </a:pPr>
+            <a:r>
+              <a:rPr lang="en-US" sz="800" dirty="0">
+                <a:solidFill>
+                  <a:srgbClr val="F4F8FC"/>
+                </a:solidFill>
+                <a:latin typeface="Calibri" pitchFamily="34" charset="0"/>
+                <a:ea typeface="Calibri" pitchFamily="34" charset="-122"/>
+                <a:cs typeface="Calibri" pitchFamily="34" charset="-120"/>
+              </a:rPr>
+              <a:t>15–25% más barato</a:t>
+            </a:r>
+            <a:endParaRPr lang="en-US" sz="800" dirty="0"/>
+          </a:p>
+        </p:txBody>
+      </p:sp>
+      <p:sp>
+        <p:nvSpPr>
+          <p:cNvPr id="12" name="Shape 10"/>
+          <p:cNvSpPr/>
+          <p:nvPr/>
+        </p:nvSpPr>
+        <p:spPr>
+          <a:xfrm>
+            <a:off x="457200" y="2157984"/>
+            <a:ext cx="2148840" cy="475488"/>
+          </a:xfrm>
+          <a:prstGeom prst="rect">
+            <a:avLst/>
+          </a:prstGeom>
+          <a:solidFill>
+            <a:srgbClr val="3DA85E"/>
+          </a:solidFill>
+          <a:ln/>
+          <a:effectLst>
+            <a:outerShdw blurRad="50800" dist="25400" dir="8100000" algn="bl" rotWithShape="0">
+              <a:srgbClr val="000000">
+                <a:alpha val="10000"/>
+              </a:srgbClr>
+            </a:outerShdw>
+          </a:effectLst>
+        </p:spPr>
+      </p:sp>
+      <p:sp>
+        <p:nvSpPr>
+          <p:cNvPr id="13" name="Text 11"/>
+          <p:cNvSpPr/>
+          <p:nvPr/>
+        </p:nvSpPr>
+        <p:spPr>
+          <a:xfrm>
+            <a:off x="548640" y="2176272"/>
+            <a:ext cx="1965960" cy="201168"/>
+          </a:xfrm>
+          <a:prstGeom prst="rect">
+            <a:avLst/>
+          </a:prstGeom>
+          <a:noFill/>
+          <a:ln/>
+        </p:spPr>
+        <p:txBody>
+          <a:bodyPr wrap="square" lIns="0" tIns="0" rIns="0" bIns="0" rtlCol="0" anchor="ctr"/>
+          <a:lstStyle/>
+          <a:p>
+            <a:pPr marL="0" indent="0">
+              <a:buNone/>
+            </a:pPr>
+            <a:r>
+              <a:rPr lang="en-US" sz="950" b="1" dirty="0">
+                <a:solidFill>
+                  <a:srgbClr val="FFFFFF"/>
+                </a:solidFill>
+                <a:latin typeface="Calibri" pitchFamily="34" charset="0"/>
+                <a:ea typeface="Calibri" pitchFamily="34" charset="-122"/>
+                <a:cs typeface="Calibri" pitchFamily="34" charset="-120"/>
+              </a:rPr>
+              <a:t>2  Chollo</a:t>
+            </a:r>
+            <a:endParaRPr lang="en-US" sz="950" dirty="0"/>
+          </a:p>
+        </p:txBody>
+      </p:sp>
+      <p:sp>
+        <p:nvSpPr>
+          <p:cNvPr id="14" name="Text 12"/>
+          <p:cNvSpPr/>
+          <p:nvPr/>
+        </p:nvSpPr>
+        <p:spPr>
+          <a:xfrm>
+            <a:off x="548640" y="2377440"/>
+            <a:ext cx="1965960" cy="237744"/>
+          </a:xfrm>
+          <a:prstGeom prst="rect">
+            <a:avLst/>
+          </a:prstGeom>
+          <a:noFill/>
+          <a:ln/>
+        </p:spPr>
+        <p:txBody>
+          <a:bodyPr wrap="square" lIns="0" tIns="0" rIns="0" bIns="0" rtlCol="0" anchor="ctr"/>
+          <a:lstStyle/>
+          <a:p>
+            <a:pPr marL="0" indent="0">
+              <a:buNone/>
+            </a:pPr>
+            <a:r>
+              <a:rPr lang="en-US" sz="800" dirty="0">
+                <a:solidFill>
+                  <a:srgbClr val="F4F8FC"/>
+                </a:solidFill>
+                <a:latin typeface="Calibri" pitchFamily="34" charset="0"/>
+                <a:ea typeface="Calibri" pitchFamily="34" charset="-122"/>
+                <a:cs typeface="Calibri" pitchFamily="34" charset="-120"/>
+              </a:rPr>
+              <a:t>0.85 ≤ ratio &lt; 0.97</a:t>
+            </a:r>
+            <a:endParaRPr lang="en-US" sz="800" dirty="0"/>
+          </a:p>
+          <a:p>
+            <a:pPr marL="0" indent="0">
+              <a:buNone/>
+            </a:pPr>
+            <a:r>
+              <a:rPr lang="en-US" sz="800" dirty="0">
+                <a:solidFill>
+                  <a:srgbClr val="F4F8FC"/>
+                </a:solidFill>
+                <a:latin typeface="Calibri" pitchFamily="34" charset="0"/>
+                <a:ea typeface="Calibri" pitchFamily="34" charset="-122"/>
+                <a:cs typeface="Calibri" pitchFamily="34" charset="-120"/>
+              </a:rPr>
+              <a:t>3–15% más barato</a:t>
+            </a:r>
+            <a:endParaRPr lang="en-US" sz="800" dirty="0"/>
+          </a:p>
+        </p:txBody>
+      </p:sp>
+      <p:sp>
+        <p:nvSpPr>
+          <p:cNvPr id="15" name="Shape 13"/>
+          <p:cNvSpPr/>
+          <p:nvPr/>
+        </p:nvSpPr>
+        <p:spPr>
+          <a:xfrm>
+            <a:off x="457200" y="2679192"/>
+            <a:ext cx="2148840" cy="475488"/>
+          </a:xfrm>
+          <a:prstGeom prst="rect">
+            <a:avLst/>
+          </a:prstGeom>
+          <a:solidFill>
+            <a:srgbClr val="1A4A8C"/>
+          </a:solidFill>
+          <a:ln/>
+          <a:effectLst>
+            <a:outerShdw blurRad="50800" dist="25400" dir="8100000" algn="bl" rotWithShape="0">
+              <a:srgbClr val="000000">
+                <a:alpha val="10000"/>
+              </a:srgbClr>
+            </a:outerShdw>
+          </a:effectLst>
+        </p:spPr>
+      </p:sp>
+      <p:sp>
+        <p:nvSpPr>
+          <p:cNvPr id="16" name="Text 14"/>
+          <p:cNvSpPr/>
+          <p:nvPr/>
+        </p:nvSpPr>
+        <p:spPr>
+          <a:xfrm>
+            <a:off x="548640" y="2697480"/>
+            <a:ext cx="1965960" cy="201168"/>
+          </a:xfrm>
+          <a:prstGeom prst="rect">
+            <a:avLst/>
+          </a:prstGeom>
+          <a:noFill/>
+          <a:ln/>
+        </p:spPr>
+        <p:txBody>
+          <a:bodyPr wrap="square" lIns="0" tIns="0" rIns="0" bIns="0" rtlCol="0" anchor="ctr"/>
+          <a:lstStyle/>
+          <a:p>
+            <a:pPr marL="0" indent="0">
+              <a:buNone/>
+            </a:pPr>
+            <a:r>
+              <a:rPr lang="en-US" sz="950" b="1" dirty="0">
+                <a:solidFill>
+                  <a:srgbClr val="FFFFFF"/>
+                </a:solidFill>
+                <a:latin typeface="Calibri" pitchFamily="34" charset="0"/>
+                <a:ea typeface="Calibri" pitchFamily="34" charset="-122"/>
+                <a:cs typeface="Calibri" pitchFamily="34" charset="-120"/>
+              </a:rPr>
+              <a:t>1  Normal</a:t>
+            </a:r>
+            <a:endParaRPr lang="en-US" sz="950" dirty="0"/>
+          </a:p>
+        </p:txBody>
+      </p:sp>
+      <p:sp>
+        <p:nvSpPr>
+          <p:cNvPr id="17" name="Text 15"/>
+          <p:cNvSpPr/>
+          <p:nvPr/>
+        </p:nvSpPr>
+        <p:spPr>
+          <a:xfrm>
+            <a:off x="548640" y="2898648"/>
+            <a:ext cx="1965960" cy="237744"/>
+          </a:xfrm>
+          <a:prstGeom prst="rect">
+            <a:avLst/>
+          </a:prstGeom>
+          <a:noFill/>
+          <a:ln/>
+        </p:spPr>
+        <p:txBody>
+          <a:bodyPr wrap="square" lIns="0" tIns="0" rIns="0" bIns="0" rtlCol="0" anchor="ctr"/>
+          <a:lstStyle/>
+          <a:p>
+            <a:pPr marL="0" indent="0">
+              <a:buNone/>
+            </a:pPr>
+            <a:r>
+              <a:rPr lang="en-US" sz="800" dirty="0">
+                <a:solidFill>
+                  <a:srgbClr val="F4F8FC"/>
+                </a:solidFill>
+                <a:latin typeface="Calibri" pitchFamily="34" charset="0"/>
+                <a:ea typeface="Calibri" pitchFamily="34" charset="-122"/>
+                <a:cs typeface="Calibri" pitchFamily="34" charset="-120"/>
+              </a:rPr>
+              <a:t>0.97 ≤ ratio ≤ 1.03</a:t>
+            </a:r>
+            <a:endParaRPr lang="en-US" sz="800" dirty="0"/>
+          </a:p>
+          <a:p>
+            <a:pPr marL="0" indent="0">
+              <a:buNone/>
+            </a:pPr>
+            <a:r>
+              <a:rPr lang="en-US" sz="800" dirty="0">
+                <a:solidFill>
+                  <a:srgbClr val="F4F8FC"/>
+                </a:solidFill>
+                <a:latin typeface="Calibri" pitchFamily="34" charset="0"/>
+                <a:ea typeface="Calibri" pitchFamily="34" charset="-122"/>
+                <a:cs typeface="Calibri" pitchFamily="34" charset="-120"/>
+              </a:rPr>
+              <a:t>precio dentro del ±3%</a:t>
+            </a:r>
+            <a:endParaRPr lang="en-US" sz="800" dirty="0"/>
+          </a:p>
+        </p:txBody>
+      </p:sp>
+      <p:sp>
+        <p:nvSpPr>
+          <p:cNvPr id="18" name="Shape 16"/>
+          <p:cNvSpPr/>
+          <p:nvPr/>
+        </p:nvSpPr>
+        <p:spPr>
+          <a:xfrm>
+            <a:off x="457200" y="3200400"/>
+            <a:ext cx="2148840" cy="475488"/>
+          </a:xfrm>
+          <a:prstGeom prst="rect">
+            <a:avLst/>
+          </a:prstGeom>
+          <a:solidFill>
+            <a:srgbClr val="B81A1A"/>
+          </a:solidFill>
+          <a:ln/>
+          <a:effectLst>
+            <a:outerShdw blurRad="50800" dist="25400" dir="8100000" algn="bl" rotWithShape="0">
+              <a:srgbClr val="000000">
+                <a:alpha val="10000"/>
+              </a:srgbClr>
+            </a:outerShdw>
+          </a:effectLst>
+        </p:spPr>
+      </p:sp>
+      <p:sp>
+        <p:nvSpPr>
+          <p:cNvPr id="19" name="Text 17"/>
+          <p:cNvSpPr/>
+          <p:nvPr/>
+        </p:nvSpPr>
+        <p:spPr>
+          <a:xfrm>
+            <a:off x="548640" y="3218688"/>
+            <a:ext cx="1965960" cy="201168"/>
+          </a:xfrm>
+          <a:prstGeom prst="rect">
+            <a:avLst/>
+          </a:prstGeom>
+          <a:noFill/>
+          <a:ln/>
+        </p:spPr>
+        <p:txBody>
+          <a:bodyPr wrap="square" lIns="0" tIns="0" rIns="0" bIns="0" rtlCol="0" anchor="ctr"/>
+          <a:lstStyle/>
+          <a:p>
+            <a:pPr marL="0" indent="0">
+              <a:buNone/>
+            </a:pPr>
+            <a:r>
+              <a:rPr lang="en-US" sz="950" b="1" dirty="0">
+                <a:solidFill>
+                  <a:srgbClr val="FFFFFF"/>
+                </a:solidFill>
+                <a:latin typeface="Calibri" pitchFamily="34" charset="0"/>
+                <a:ea typeface="Calibri" pitchFamily="34" charset="-122"/>
+                <a:cs typeface="Calibri" pitchFamily="34" charset="-120"/>
+              </a:rPr>
+              <a:t>0  Inflado</a:t>
+            </a:r>
+            <a:endParaRPr lang="en-US" sz="950" dirty="0"/>
+          </a:p>
+        </p:txBody>
+      </p:sp>
+      <p:sp>
+        <p:nvSpPr>
+          <p:cNvPr id="20" name="Text 18"/>
+          <p:cNvSpPr/>
+          <p:nvPr/>
+        </p:nvSpPr>
+        <p:spPr>
+          <a:xfrm>
+            <a:off x="548640" y="3419856"/>
+            <a:ext cx="1965960" cy="237744"/>
+          </a:xfrm>
+          <a:prstGeom prst="rect">
+            <a:avLst/>
+          </a:prstGeom>
+          <a:noFill/>
+          <a:ln/>
+        </p:spPr>
+        <p:txBody>
+          <a:bodyPr wrap="square" lIns="0" tIns="0" rIns="0" bIns="0" rtlCol="0" anchor="ctr"/>
+          <a:lstStyle/>
+          <a:p>
+            <a:pPr marL="0" indent="0">
+              <a:buNone/>
+            </a:pPr>
+            <a:r>
+              <a:rPr lang="en-US" sz="800" dirty="0">
+                <a:solidFill>
+                  <a:srgbClr val="F4F8FC"/>
+                </a:solidFill>
+                <a:latin typeface="Calibri" pitchFamily="34" charset="0"/>
+                <a:ea typeface="Calibri" pitchFamily="34" charset="-122"/>
+                <a:cs typeface="Calibri" pitchFamily="34" charset="-120"/>
+              </a:rPr>
+              <a:t>ratio &gt; 1.03</a:t>
+            </a:r>
+            <a:endParaRPr lang="en-US" sz="800" dirty="0"/>
+          </a:p>
+          <a:p>
+            <a:pPr marL="0" indent="0">
+              <a:buNone/>
+            </a:pPr>
+            <a:r>
+              <a:rPr lang="en-US" sz="800" dirty="0">
+                <a:solidFill>
+                  <a:srgbClr val="F4F8FC"/>
+                </a:solidFill>
+                <a:latin typeface="Calibri" pitchFamily="34" charset="0"/>
+                <a:ea typeface="Calibri" pitchFamily="34" charset="-122"/>
+                <a:cs typeface="Calibri" pitchFamily="34" charset="-120"/>
+              </a:rPr>
+              <a:t>más de un 3% por encima</a:t>
+            </a:r>
+            <a:endParaRPr lang="en-US" sz="800" dirty="0"/>
+          </a:p>
+        </p:txBody>
+      </p:sp>
+      <p:sp>
+        <p:nvSpPr>
+          <p:cNvPr id="21" name="Shape 19"/>
+          <p:cNvSpPr/>
+          <p:nvPr/>
+        </p:nvSpPr>
+        <p:spPr>
+          <a:xfrm>
+            <a:off x="2724912" y="1115567"/>
+            <a:ext cx="4023360" cy="2787352"/>
+          </a:xfrm>
+          <a:prstGeom prst="rect">
+            <a:avLst/>
+          </a:prstGeom>
+          <a:solidFill>
+            <a:srgbClr val="0D1117"/>
+          </a:solidFill>
+          <a:ln/>
+          <a:effectLst>
+            <a:outerShdw blurRad="50800" dist="25400" dir="8100000" algn="bl" rotWithShape="0">
+              <a:srgbClr val="000000">
+                <a:alpha val="10000"/>
+              </a:srgbClr>
+            </a:outerShdw>
+          </a:effectLst>
+        </p:spPr>
+      </p:sp>
+      <p:sp>
+        <p:nvSpPr>
+          <p:cNvPr id="22" name="Shape 20"/>
+          <p:cNvSpPr/>
+          <p:nvPr/>
+        </p:nvSpPr>
+        <p:spPr>
+          <a:xfrm>
+            <a:off x="2724912" y="914400"/>
+            <a:ext cx="2377440" cy="201168"/>
+          </a:xfrm>
+          <a:prstGeom prst="rect">
+            <a:avLst/>
+          </a:prstGeom>
+          <a:solidFill>
+            <a:srgbClr val="2A5080"/>
+          </a:solidFill>
+          <a:ln/>
+        </p:spPr>
+      </p:sp>
+      <p:sp>
+        <p:nvSpPr>
+          <p:cNvPr id="23" name="Text 21"/>
+          <p:cNvSpPr/>
+          <p:nvPr/>
+        </p:nvSpPr>
+        <p:spPr>
+          <a:xfrm>
+            <a:off x="2779776" y="914400"/>
+            <a:ext cx="2697480" cy="201168"/>
+          </a:xfrm>
+          <a:prstGeom prst="rect">
+            <a:avLst/>
+          </a:prstGeom>
+          <a:noFill/>
+          <a:ln/>
+        </p:spPr>
+        <p:txBody>
+          <a:bodyPr wrap="square" lIns="0" tIns="0" rIns="0" bIns="0" rtlCol="0" anchor="ctr"/>
+          <a:lstStyle/>
+          <a:p>
+            <a:pPr marL="0" indent="0">
+              <a:buNone/>
+            </a:pPr>
+            <a:r>
+              <a:rPr lang="en-US" sz="900" b="1" dirty="0">
+                <a:solidFill>
+                  <a:srgbClr val="F0C060"/>
+                </a:solidFill>
+                <a:latin typeface="Consolas" pitchFamily="34" charset="0"/>
+                <a:ea typeface="Consolas" pitchFamily="34" charset="-122"/>
+                <a:cs typeface="Consolas" pitchFamily="34" charset="-120"/>
+              </a:rPr>
+              <a:t>crear_etiqueta_chollo()</a:t>
+            </a:r>
+            <a:endParaRPr lang="en-US" sz="900" dirty="0"/>
+          </a:p>
+        </p:txBody>
+      </p:sp>
+      <p:sp>
+        <p:nvSpPr>
+          <p:cNvPr id="24" name="Text 22"/>
+          <p:cNvSpPr/>
+          <p:nvPr/>
+        </p:nvSpPr>
+        <p:spPr>
+          <a:xfrm>
+            <a:off x="2852928" y="1188720"/>
+            <a:ext cx="3767328" cy="2505456"/>
+          </a:xfrm>
+          <a:prstGeom prst="rect">
+            <a:avLst/>
+          </a:prstGeom>
+          <a:noFill/>
+          <a:ln/>
+        </p:spPr>
+        <p:txBody>
+          <a:bodyPr wrap="square" lIns="0" tIns="0" rIns="0" bIns="0" rtlCol="0" anchor="t"/>
+          <a:lstStyle/>
+          <a:p>
+            <a:pPr marL="0" indent="0">
+              <a:buNone/>
+            </a:pPr>
+            <a:r>
+              <a:rPr lang="en-US" sz="800" dirty="0">
+                <a:solidFill>
+                  <a:srgbClr val="E2E8F0"/>
+                </a:solidFill>
+                <a:latin typeface="Consolas" pitchFamily="34" charset="0"/>
+                <a:ea typeface="Consolas" pitchFamily="34" charset="-122"/>
+                <a:cs typeface="Consolas" pitchFamily="34" charset="-120"/>
+              </a:rPr>
+              <a:t>def crear_etiqueta_chollo(y_real, y_predicho):</a:t>
+            </a:r>
+            <a:endParaRPr lang="en-US" sz="800" dirty="0"/>
+          </a:p>
+          <a:p>
+            <a:pPr marL="0" indent="0">
+              <a:buNone/>
+            </a:pPr>
+            <a:r>
+              <a:rPr lang="en-US" sz="800" dirty="0">
+                <a:solidFill>
+                  <a:srgbClr val="E2E8F0"/>
+                </a:solidFill>
+                <a:latin typeface="Consolas" pitchFamily="34" charset="0"/>
+                <a:ea typeface="Consolas" pitchFamily="34" charset="-122"/>
+                <a:cs typeface="Consolas" pitchFamily="34" charset="-120"/>
+              </a:rPr>
+              <a:t>  """</a:t>
+            </a:r>
+            <a:endParaRPr lang="en-US" sz="800" dirty="0"/>
+          </a:p>
+          <a:p>
+            <a:pPr marL="0" indent="0">
+              <a:buNone/>
+            </a:pPr>
+            <a:r>
+              <a:rPr lang="en-US" sz="800" dirty="0">
+                <a:solidFill>
+                  <a:srgbClr val="E2E8F0"/>
+                </a:solidFill>
+                <a:latin typeface="Consolas" pitchFamily="34" charset="0"/>
+                <a:ea typeface="Consolas" pitchFamily="34" charset="-122"/>
+                <a:cs typeface="Consolas" pitchFamily="34" charset="-120"/>
+              </a:rPr>
+              <a:t>  Compara precio real vs. precio predicho por</a:t>
+            </a:r>
+            <a:endParaRPr lang="en-US" sz="800" dirty="0"/>
+          </a:p>
+          <a:p>
+            <a:pPr marL="0" indent="0">
+              <a:buNone/>
+            </a:pPr>
+            <a:r>
+              <a:rPr lang="en-US" sz="800" dirty="0">
+                <a:solidFill>
+                  <a:srgbClr val="E2E8F0"/>
+                </a:solidFill>
+                <a:latin typeface="Consolas" pitchFamily="34" charset="0"/>
+                <a:ea typeface="Consolas" pitchFamily="34" charset="-122"/>
+                <a:cs typeface="Consolas" pitchFamily="34" charset="-120"/>
+              </a:rPr>
+              <a:t>  el modelo de regresión. El ratio indica cuánto</a:t>
+            </a:r>
+            <a:endParaRPr lang="en-US" sz="800" dirty="0"/>
+          </a:p>
+          <a:p>
+            <a:pPr marL="0" indent="0">
+              <a:buNone/>
+            </a:pPr>
+            <a:r>
+              <a:rPr lang="en-US" sz="800" dirty="0">
+                <a:solidFill>
+                  <a:srgbClr val="E2E8F0"/>
+                </a:solidFill>
+                <a:latin typeface="Consolas" pitchFamily="34" charset="0"/>
+                <a:ea typeface="Consolas" pitchFamily="34" charset="-122"/>
+                <a:cs typeface="Consolas" pitchFamily="34" charset="-120"/>
+              </a:rPr>
+              <a:t>  vale el alojamiento respecto a su 'precio justo'.</a:t>
+            </a:r>
+            <a:endParaRPr lang="en-US" sz="800" dirty="0"/>
+          </a:p>
+          <a:p>
+            <a:pPr marL="0" indent="0">
+              <a:buNone/>
+            </a:pPr>
+            <a:r>
+              <a:rPr lang="en-US" sz="800" dirty="0">
+                <a:solidFill>
+                  <a:srgbClr val="E2E8F0"/>
+                </a:solidFill>
+                <a:latin typeface="Consolas" pitchFamily="34" charset="0"/>
+                <a:ea typeface="Consolas" pitchFamily="34" charset="-122"/>
+                <a:cs typeface="Consolas" pitchFamily="34" charset="-120"/>
+              </a:rPr>
+              <a:t>  """</a:t>
+            </a:r>
+            <a:endParaRPr lang="en-US" sz="800" dirty="0"/>
+          </a:p>
+          <a:p>
+            <a:pPr marL="0" indent="0">
+              <a:buNone/>
+            </a:pPr>
+            <a:r>
+              <a:rPr lang="en-US" sz="800" dirty="0">
+                <a:solidFill>
+                  <a:srgbClr val="E2E8F0"/>
+                </a:solidFill>
+                <a:latin typeface="Consolas" pitchFamily="34" charset="0"/>
+                <a:ea typeface="Consolas" pitchFamily="34" charset="-122"/>
+                <a:cs typeface="Consolas" pitchFamily="34" charset="-120"/>
+              </a:rPr>
+              <a:t>  ratio = y_real / y_predicho  # &lt; 1 = más barato</a:t>
+            </a:r>
+            <a:endParaRPr lang="en-US" sz="800" dirty="0"/>
+          </a:p>
+          <a:p>
+            <a:pPr marL="0" indent="0">
+              <a:buNone/>
+            </a:pPr>
+            <a:endParaRPr lang="en-US" sz="800" dirty="0"/>
+          </a:p>
+          <a:p>
+            <a:pPr marL="0" indent="0">
+              <a:buNone/>
+            </a:pPr>
+            <a:r>
+              <a:rPr lang="en-US" sz="800" dirty="0">
+                <a:solidFill>
+                  <a:srgbClr val="E2E8F0"/>
+                </a:solidFill>
+                <a:latin typeface="Consolas" pitchFamily="34" charset="0"/>
+                <a:ea typeface="Consolas" pitchFamily="34" charset="-122"/>
+                <a:cs typeface="Consolas" pitchFamily="34" charset="-120"/>
+              </a:rPr>
+              <a:t>  condiciones = [</a:t>
+            </a:r>
+            <a:endParaRPr lang="en-US" sz="800" dirty="0"/>
+          </a:p>
+          <a:p>
+            <a:pPr marL="0" indent="0">
+              <a:buNone/>
+            </a:pPr>
+            <a:r>
+              <a:rPr lang="en-US" sz="800" dirty="0">
+                <a:solidFill>
+                  <a:srgbClr val="E2E8F0"/>
+                </a:solidFill>
+                <a:latin typeface="Consolas" pitchFamily="34" charset="0"/>
+                <a:ea typeface="Consolas" pitchFamily="34" charset="-122"/>
+                <a:cs typeface="Consolas" pitchFamily="34" charset="-120"/>
+              </a:rPr>
+              <a:t>    ratio &lt;= 0.75,                       # hiper_chollo</a:t>
+            </a:r>
+            <a:endParaRPr lang="en-US" sz="800" dirty="0"/>
+          </a:p>
+          <a:p>
+            <a:pPr marL="0" indent="0">
+              <a:buNone/>
+            </a:pPr>
+            <a:r>
+              <a:rPr lang="en-US" sz="800" dirty="0">
+                <a:solidFill>
+                  <a:srgbClr val="E2E8F0"/>
+                </a:solidFill>
+                <a:latin typeface="Consolas" pitchFamily="34" charset="0"/>
+                <a:ea typeface="Consolas" pitchFamily="34" charset="-122"/>
+                <a:cs typeface="Consolas" pitchFamily="34" charset="-120"/>
+              </a:rPr>
+              <a:t>    (ratio &gt; 0.75) &amp; (ratio &lt; 0.85),    # super_chollo</a:t>
+            </a:r>
+            <a:endParaRPr lang="en-US" sz="800" dirty="0"/>
+          </a:p>
+          <a:p>
+            <a:pPr marL="0" indent="0">
+              <a:buNone/>
+            </a:pPr>
+            <a:r>
+              <a:rPr lang="en-US" sz="800" dirty="0">
+                <a:solidFill>
+                  <a:srgbClr val="E2E8F0"/>
+                </a:solidFill>
+                <a:latin typeface="Consolas" pitchFamily="34" charset="0"/>
+                <a:ea typeface="Consolas" pitchFamily="34" charset="-122"/>
+                <a:cs typeface="Consolas" pitchFamily="34" charset="-120"/>
+              </a:rPr>
+              <a:t>    (ratio &gt;= 0.85) &amp; (ratio &lt; 0.97),   # chollo</a:t>
+            </a:r>
+            <a:endParaRPr lang="en-US" sz="800" dirty="0"/>
+          </a:p>
+          <a:p>
+            <a:pPr marL="0" indent="0">
+              <a:buNone/>
+            </a:pPr>
+            <a:r>
+              <a:rPr lang="en-US" sz="800" dirty="0">
+                <a:solidFill>
+                  <a:srgbClr val="E2E8F0"/>
+                </a:solidFill>
+                <a:latin typeface="Consolas" pitchFamily="34" charset="0"/>
+                <a:ea typeface="Consolas" pitchFamily="34" charset="-122"/>
+                <a:cs typeface="Consolas" pitchFamily="34" charset="-120"/>
+              </a:rPr>
+              <a:t>    (ratio &gt;= 0.97) &amp; (ratio &lt;= 1.03),  # normal</a:t>
+            </a:r>
+            <a:endParaRPr lang="en-US" sz="800" dirty="0"/>
+          </a:p>
+          <a:p>
+            <a:pPr marL="0" indent="0">
+              <a:buNone/>
+            </a:pPr>
+            <a:r>
+              <a:rPr lang="en-US" sz="800" dirty="0">
+                <a:solidFill>
+                  <a:srgbClr val="E2E8F0"/>
+                </a:solidFill>
+                <a:latin typeface="Consolas" pitchFamily="34" charset="0"/>
+                <a:ea typeface="Consolas" pitchFamily="34" charset="-122"/>
+                <a:cs typeface="Consolas" pitchFamily="34" charset="-120"/>
+              </a:rPr>
+              <a:t>    ratio &gt; 1.03                         # inflado</a:t>
+            </a:r>
+            <a:endParaRPr lang="en-US" sz="800" dirty="0"/>
+          </a:p>
+          <a:p>
+            <a:pPr marL="0" indent="0">
+              <a:buNone/>
+            </a:pPr>
+            <a:r>
+              <a:rPr lang="en-US" sz="800" dirty="0">
+                <a:solidFill>
+                  <a:srgbClr val="E2E8F0"/>
+                </a:solidFill>
+                <a:latin typeface="Consolas" pitchFamily="34" charset="0"/>
+                <a:ea typeface="Consolas" pitchFamily="34" charset="-122"/>
+                <a:cs typeface="Consolas" pitchFamily="34" charset="-120"/>
+              </a:rPr>
+              <a:t>  ]</a:t>
+            </a:r>
+            <a:endParaRPr lang="en-US" sz="800" dirty="0"/>
+          </a:p>
+          <a:p>
+            <a:pPr marL="0" indent="0">
+              <a:buNone/>
+            </a:pPr>
+            <a:r>
+              <a:rPr lang="en-US" sz="800" dirty="0">
+                <a:solidFill>
+                  <a:srgbClr val="E2E8F0"/>
+                </a:solidFill>
+                <a:latin typeface="Consolas" pitchFamily="34" charset="0"/>
+                <a:ea typeface="Consolas" pitchFamily="34" charset="-122"/>
+                <a:cs typeface="Consolas" pitchFamily="34" charset="-120"/>
+              </a:rPr>
+              <a:t>  etiquetas = [4, 3, 2, 1, 0]</a:t>
+            </a:r>
+            <a:endParaRPr lang="en-US" sz="800" dirty="0"/>
+          </a:p>
+          <a:p>
+            <a:pPr marL="0" indent="0">
+              <a:buNone/>
+            </a:pPr>
+            <a:endParaRPr lang="en-US" sz="800" dirty="0"/>
+          </a:p>
+          <a:p>
+            <a:pPr marL="0" indent="0">
+              <a:buNone/>
+            </a:pPr>
+            <a:r>
+              <a:rPr lang="en-US" sz="800" dirty="0">
+                <a:solidFill>
+                  <a:srgbClr val="E2E8F0"/>
+                </a:solidFill>
+                <a:latin typeface="Consolas" pitchFamily="34" charset="0"/>
+                <a:ea typeface="Consolas" pitchFamily="34" charset="-122"/>
+                <a:cs typeface="Consolas" pitchFamily="34" charset="-120"/>
+              </a:rPr>
+              <a:t>  # np.select aplica condiciones vectorizadas</a:t>
+            </a:r>
+            <a:endParaRPr lang="en-US" sz="800" dirty="0"/>
+          </a:p>
+          <a:p>
+            <a:pPr marL="0" indent="0">
+              <a:buNone/>
+            </a:pPr>
+            <a:r>
+              <a:rPr lang="en-US" sz="800" dirty="0">
+                <a:solidFill>
+                  <a:srgbClr val="E2E8F0"/>
+                </a:solidFill>
+                <a:latin typeface="Consolas" pitchFamily="34" charset="0"/>
+                <a:ea typeface="Consolas" pitchFamily="34" charset="-122"/>
+                <a:cs typeface="Consolas" pitchFamily="34" charset="-120"/>
+              </a:rPr>
+              <a:t>  return pd.Series(</a:t>
+            </a:r>
+            <a:endParaRPr lang="en-US" sz="800" dirty="0"/>
+          </a:p>
+          <a:p>
+            <a:pPr marL="0" indent="0">
+              <a:buNone/>
+            </a:pPr>
+            <a:r>
+              <a:rPr lang="en-US" sz="800" dirty="0">
+                <a:solidFill>
+                  <a:srgbClr val="E2E8F0"/>
+                </a:solidFill>
+                <a:latin typeface="Consolas" pitchFamily="34" charset="0"/>
+                <a:ea typeface="Consolas" pitchFamily="34" charset="-122"/>
+                <a:cs typeface="Consolas" pitchFamily="34" charset="-120"/>
+              </a:rPr>
+              <a:t>    np.select(condiciones, etiquetas),</a:t>
+            </a:r>
+            <a:endParaRPr lang="en-US" sz="800" dirty="0"/>
+          </a:p>
+          <a:p>
+            <a:pPr marL="0" indent="0">
+              <a:buNone/>
+            </a:pPr>
+            <a:r>
+              <a:rPr lang="en-US" sz="800" dirty="0">
+                <a:solidFill>
+                  <a:srgbClr val="E2E8F0"/>
+                </a:solidFill>
+                <a:latin typeface="Consolas" pitchFamily="34" charset="0"/>
+                <a:ea typeface="Consolas" pitchFamily="34" charset="-122"/>
+                <a:cs typeface="Consolas" pitchFamily="34" charset="-120"/>
+              </a:rPr>
+              <a:t>    index=y_real.index,</a:t>
+            </a:r>
+            <a:endParaRPr lang="en-US" sz="800" dirty="0"/>
+          </a:p>
+          <a:p>
+            <a:pPr marL="0" indent="0">
+              <a:buNone/>
+            </a:pPr>
+            <a:r>
+              <a:rPr lang="en-US" sz="800" dirty="0">
+                <a:solidFill>
+                  <a:srgbClr val="E2E8F0"/>
+                </a:solidFill>
+                <a:latin typeface="Consolas" pitchFamily="34" charset="0"/>
+                <a:ea typeface="Consolas" pitchFamily="34" charset="-122"/>
+                <a:cs typeface="Consolas" pitchFamily="34" charset="-120"/>
+              </a:rPr>
+              <a:t>    name='</a:t>
+            </a:r>
+            <a:r>
+              <a:rPr lang="en-US" sz="800" dirty="0" err="1">
+                <a:solidFill>
+                  <a:srgbClr val="E2E8F0"/>
+                </a:solidFill>
+                <a:latin typeface="Consolas" pitchFamily="34" charset="0"/>
+                <a:ea typeface="Consolas" pitchFamily="34" charset="-122"/>
+                <a:cs typeface="Consolas" pitchFamily="34" charset="-120"/>
+              </a:rPr>
+              <a:t>categoria</a:t>
+            </a:r>
+            <a:r>
+              <a:rPr lang="en-US" sz="800" dirty="0">
+                <a:solidFill>
+                  <a:srgbClr val="E2E8F0"/>
+                </a:solidFill>
+                <a:latin typeface="Consolas" pitchFamily="34" charset="0"/>
+                <a:ea typeface="Consolas" pitchFamily="34" charset="-122"/>
+                <a:cs typeface="Consolas" pitchFamily="34" charset="-120"/>
+              </a:rPr>
+              <a:t>')</a:t>
+            </a:r>
+            <a:endParaRPr lang="en-US" sz="800" dirty="0"/>
+          </a:p>
+        </p:txBody>
+      </p:sp>
+      <p:sp>
+        <p:nvSpPr>
+          <p:cNvPr id="25" name="Shape 23"/>
+          <p:cNvSpPr/>
+          <p:nvPr/>
+        </p:nvSpPr>
+        <p:spPr>
+          <a:xfrm>
+            <a:off x="6903720" y="1115567"/>
+            <a:ext cx="1783080" cy="2787351"/>
+          </a:xfrm>
+          <a:prstGeom prst="rect">
+            <a:avLst/>
+          </a:prstGeom>
+          <a:solidFill>
+            <a:srgbClr val="1E3A5F"/>
+          </a:solidFill>
+          <a:ln/>
+          <a:effectLst>
+            <a:outerShdw blurRad="101600" dist="38100" dir="8100000" algn="bl" rotWithShape="0">
+              <a:srgbClr val="000000">
+                <a:alpha val="18000"/>
+              </a:srgbClr>
+            </a:outerShdw>
+          </a:effectLst>
+        </p:spPr>
+      </p:sp>
+      <p:sp>
+        <p:nvSpPr>
+          <p:cNvPr id="26" name="Shape 24"/>
+          <p:cNvSpPr/>
+          <p:nvPr/>
+        </p:nvSpPr>
+        <p:spPr>
+          <a:xfrm>
+            <a:off x="6903720" y="1115568"/>
+            <a:ext cx="1783080" cy="45720"/>
+          </a:xfrm>
+          <a:prstGeom prst="rect">
+            <a:avLst/>
+          </a:prstGeom>
+          <a:solidFill>
+            <a:srgbClr val="D4A843"/>
+          </a:solidFill>
+          <a:ln/>
+        </p:spPr>
+      </p:sp>
+      <p:sp>
+        <p:nvSpPr>
+          <p:cNvPr id="27" name="Text 25"/>
+          <p:cNvSpPr/>
+          <p:nvPr/>
+        </p:nvSpPr>
+        <p:spPr>
+          <a:xfrm>
+            <a:off x="6995160" y="1188720"/>
+            <a:ext cx="1600200" cy="411480"/>
+          </a:xfrm>
+          <a:prstGeom prst="rect">
+            <a:avLst/>
+          </a:prstGeom>
+          <a:noFill/>
+          <a:ln/>
+        </p:spPr>
+        <p:txBody>
+          <a:bodyPr wrap="square" lIns="0" tIns="0" rIns="0" bIns="0" rtlCol="0" anchor="ctr"/>
+          <a:lstStyle/>
+          <a:p>
+            <a:pPr marL="0" indent="0">
+              <a:buNone/>
+            </a:pPr>
+            <a:r>
+              <a:rPr lang="en-US" sz="950" b="1" dirty="0">
+                <a:solidFill>
+                  <a:srgbClr val="D4A843"/>
+                </a:solidFill>
+                <a:latin typeface="Calibri" pitchFamily="34" charset="0"/>
+                <a:ea typeface="Calibri" pitchFamily="34" charset="-122"/>
+                <a:cs typeface="Calibri" pitchFamily="34" charset="-120"/>
+              </a:rPr>
+              <a:t>¿Por qué no</a:t>
+            </a:r>
+            <a:endParaRPr lang="en-US" sz="950" dirty="0"/>
+          </a:p>
+          <a:p>
+            <a:pPr marL="0" indent="0">
+              <a:buNone/>
+            </a:pPr>
+            <a:r>
+              <a:rPr lang="en-US" sz="950" b="1" dirty="0">
+                <a:solidFill>
+                  <a:srgbClr val="D4A843"/>
+                </a:solidFill>
+                <a:latin typeface="Calibri" pitchFamily="34" charset="0"/>
+                <a:ea typeface="Calibri" pitchFamily="34" charset="-122"/>
+                <a:cs typeface="Calibri" pitchFamily="34" charset="-120"/>
+              </a:rPr>
+              <a:t>ML de clasificación?</a:t>
+            </a:r>
+            <a:endParaRPr lang="en-US" sz="950" dirty="0"/>
+          </a:p>
+        </p:txBody>
+      </p:sp>
+      <p:sp>
+        <p:nvSpPr>
+          <p:cNvPr id="28" name="Text 26"/>
+          <p:cNvSpPr/>
+          <p:nvPr/>
+        </p:nvSpPr>
+        <p:spPr>
+          <a:xfrm>
+            <a:off x="6995160" y="1627632"/>
+            <a:ext cx="1600200" cy="2084832"/>
+          </a:xfrm>
+          <a:prstGeom prst="rect">
+            <a:avLst/>
+          </a:prstGeom>
+          <a:noFill/>
+          <a:ln/>
+        </p:spPr>
+        <p:txBody>
+          <a:bodyPr wrap="square" lIns="0" tIns="0" rIns="0" bIns="0" rtlCol="0" anchor="t"/>
+          <a:lstStyle/>
+          <a:p>
+            <a:pPr marL="0" indent="0">
+              <a:lnSpc>
+                <a:spcPct val="125000"/>
+              </a:lnSpc>
+              <a:buNone/>
+            </a:pPr>
+            <a:r>
+              <a:rPr lang="en-US" sz="800" dirty="0">
+                <a:solidFill>
+                  <a:srgbClr val="F4F8FC"/>
+                </a:solidFill>
+                <a:latin typeface="Calibri" pitchFamily="34" charset="0"/>
+                <a:ea typeface="Calibri" pitchFamily="34" charset="-122"/>
+                <a:cs typeface="Calibri" pitchFamily="34" charset="-120"/>
+              </a:rPr>
+              <a:t>La categoría chollo es consecuencia directa de la comparación entre precio real y precio predicho.</a:t>
+            </a:r>
+            <a:endParaRPr lang="en-US" sz="800" dirty="0"/>
+          </a:p>
+          <a:p>
+            <a:pPr marL="0" indent="0">
+              <a:lnSpc>
+                <a:spcPct val="125000"/>
+              </a:lnSpc>
+              <a:buNone/>
+            </a:pPr>
+            <a:endParaRPr lang="en-US" sz="800" dirty="0"/>
+          </a:p>
+          <a:p>
+            <a:pPr marL="0" indent="0">
+              <a:lnSpc>
+                <a:spcPct val="125000"/>
+              </a:lnSpc>
+              <a:buNone/>
+            </a:pPr>
+            <a:r>
+              <a:rPr lang="en-US" sz="800" dirty="0">
+                <a:solidFill>
+                  <a:srgbClr val="F4F8FC"/>
+                </a:solidFill>
+                <a:latin typeface="Calibri" pitchFamily="34" charset="0"/>
+                <a:ea typeface="Calibri" pitchFamily="34" charset="-122"/>
+                <a:cs typeface="Calibri" pitchFamily="34" charset="-120"/>
+              </a:rPr>
+              <a:t>Un chollo no tiene sentido sin su precio de referencia.</a:t>
+            </a:r>
+            <a:endParaRPr lang="en-US" sz="800" dirty="0"/>
+          </a:p>
+          <a:p>
+            <a:pPr marL="0" indent="0">
+              <a:lnSpc>
+                <a:spcPct val="125000"/>
+              </a:lnSpc>
+              <a:buNone/>
+            </a:pPr>
+            <a:endParaRPr lang="en-US" sz="800" dirty="0"/>
+          </a:p>
+          <a:p>
+            <a:pPr marL="0" indent="0">
+              <a:lnSpc>
+                <a:spcPct val="125000"/>
+              </a:lnSpc>
+              <a:buNone/>
+            </a:pPr>
+            <a:r>
+              <a:rPr lang="en-US" sz="800" dirty="0">
+                <a:solidFill>
+                  <a:srgbClr val="F4F8FC"/>
+                </a:solidFill>
+                <a:latin typeface="Calibri" pitchFamily="34" charset="0"/>
+                <a:ea typeface="Calibri" pitchFamily="34" charset="-122"/>
+                <a:cs typeface="Calibri" pitchFamily="34" charset="-120"/>
+              </a:rPr>
+              <a:t>Entrenar un modelo de clasificación sobre etiquetas derivadas del propio modelo de regresión sería redundante y añadiría complejidad sin valor.</a:t>
+            </a:r>
+            <a:endParaRPr lang="en-US" sz="800" dirty="0"/>
+          </a:p>
+          <a:p>
+            <a:pPr marL="0" indent="0">
+              <a:lnSpc>
+                <a:spcPct val="125000"/>
+              </a:lnSpc>
+              <a:buNone/>
+            </a:pPr>
+            <a:endParaRPr lang="en-US" sz="800" dirty="0"/>
+          </a:p>
+          <a:p>
+            <a:pPr marL="0" indent="0">
+              <a:lnSpc>
+                <a:spcPct val="125000"/>
+              </a:lnSpc>
+              <a:buNone/>
+            </a:pPr>
+            <a:r>
+              <a:rPr lang="en-US" sz="800" dirty="0">
+                <a:solidFill>
+                  <a:srgbClr val="F4F8FC"/>
+                </a:solidFill>
+                <a:latin typeface="Calibri" pitchFamily="34" charset="0"/>
+                <a:ea typeface="Calibri" pitchFamily="34" charset="-122"/>
+                <a:cs typeface="Calibri" pitchFamily="34" charset="-120"/>
+              </a:rPr>
+              <a:t>La regla determinista (ratio) es interpretable, reproducible y no introduce sesgo de aprendizaje.</a:t>
+            </a:r>
+            <a:endParaRPr lang="en-US" sz="800" dirty="0"/>
+          </a:p>
+        </p:txBody>
+      </p:sp>
+      <p:sp>
+        <p:nvSpPr>
+          <p:cNvPr id="29" name="Text 27"/>
+          <p:cNvSpPr/>
+          <p:nvPr/>
+        </p:nvSpPr>
+        <p:spPr>
+          <a:xfrm>
+            <a:off x="402336" y="3838911"/>
+            <a:ext cx="8229600" cy="228600"/>
+          </a:xfrm>
+          <a:prstGeom prst="rect">
+            <a:avLst/>
+          </a:prstGeom>
+          <a:noFill/>
+          <a:ln/>
+        </p:spPr>
+        <p:txBody>
+          <a:bodyPr wrap="square" lIns="0" tIns="0" rIns="0" bIns="0" rtlCol="0" anchor="ctr"/>
+          <a:lstStyle/>
+          <a:p>
+            <a:pPr marL="0" indent="0">
+              <a:buNone/>
+            </a:pPr>
+            <a:r>
+              <a:rPr lang="en-US" sz="1000" b="1" dirty="0">
+                <a:solidFill>
+                  <a:srgbClr val="1E293B"/>
+                </a:solidFill>
+                <a:latin typeface="Calibri" pitchFamily="34" charset="0"/>
+                <a:ea typeface="Calibri" pitchFamily="34" charset="-122"/>
+                <a:cs typeface="Calibri" pitchFamily="34" charset="-120"/>
+              </a:rPr>
+              <a:t>Pipeline completo:</a:t>
+            </a:r>
+            <a:endParaRPr lang="en-US" sz="1000" dirty="0"/>
+          </a:p>
+        </p:txBody>
+      </p:sp>
+      <p:sp>
+        <p:nvSpPr>
+          <p:cNvPr id="30" name="Shape 28"/>
+          <p:cNvSpPr/>
+          <p:nvPr/>
+        </p:nvSpPr>
+        <p:spPr>
+          <a:xfrm>
+            <a:off x="950976" y="4058367"/>
+            <a:ext cx="1097280" cy="502920"/>
+          </a:xfrm>
+          <a:prstGeom prst="rect">
+            <a:avLst/>
+          </a:prstGeom>
+          <a:solidFill>
+            <a:srgbClr val="1A2E4A"/>
+          </a:solidFill>
+          <a:ln w="12700">
+            <a:solidFill>
+              <a:srgbClr val="2A5080"/>
+            </a:solidFill>
+            <a:prstDash val="solid"/>
+          </a:ln>
+        </p:spPr>
+      </p:sp>
+      <p:sp>
+        <p:nvSpPr>
+          <p:cNvPr id="31" name="Text 29"/>
+          <p:cNvSpPr/>
+          <p:nvPr/>
+        </p:nvSpPr>
+        <p:spPr>
+          <a:xfrm>
+            <a:off x="950976" y="4058367"/>
+            <a:ext cx="1097280" cy="502920"/>
+          </a:xfrm>
+          <a:prstGeom prst="rect">
+            <a:avLst/>
+          </a:prstGeom>
+          <a:noFill/>
+          <a:ln/>
+        </p:spPr>
+        <p:txBody>
+          <a:bodyPr wrap="square" lIns="0" tIns="0" rIns="0" bIns="0" rtlCol="0" anchor="ctr"/>
+          <a:lstStyle/>
+          <a:p>
+            <a:pPr marL="0" indent="0" algn="ctr">
+              <a:buNone/>
+            </a:pPr>
+            <a:r>
+              <a:rPr lang="en-US" sz="750" dirty="0">
+                <a:solidFill>
+                  <a:srgbClr val="F4F8FC"/>
+                </a:solidFill>
+                <a:latin typeface="Calibri" pitchFamily="34" charset="0"/>
+                <a:ea typeface="Calibri" pitchFamily="34" charset="-122"/>
+                <a:cs typeface="Calibri" pitchFamily="34" charset="-120"/>
+              </a:rPr>
+              <a:t>X features</a:t>
+            </a:r>
+            <a:endParaRPr lang="en-US" sz="750" dirty="0"/>
+          </a:p>
+        </p:txBody>
+      </p:sp>
+      <p:sp>
+        <p:nvSpPr>
+          <p:cNvPr id="32" name="Shape 30"/>
+          <p:cNvSpPr/>
+          <p:nvPr/>
+        </p:nvSpPr>
+        <p:spPr>
+          <a:xfrm>
+            <a:off x="2048256" y="4277823"/>
+            <a:ext cx="146304" cy="73152"/>
+          </a:xfrm>
+          <a:prstGeom prst="rect">
+            <a:avLst/>
+          </a:prstGeom>
+          <a:solidFill>
+            <a:srgbClr val="D4A843"/>
+          </a:solidFill>
+          <a:ln/>
+        </p:spPr>
+      </p:sp>
+      <p:sp>
+        <p:nvSpPr>
+          <p:cNvPr id="33" name="Shape 31"/>
+          <p:cNvSpPr/>
+          <p:nvPr/>
+        </p:nvSpPr>
+        <p:spPr>
+          <a:xfrm>
+            <a:off x="2194560" y="4058367"/>
+            <a:ext cx="1097280" cy="502920"/>
+          </a:xfrm>
+          <a:prstGeom prst="rect">
+            <a:avLst/>
+          </a:prstGeom>
+          <a:solidFill>
+            <a:srgbClr val="2A5080"/>
+          </a:solidFill>
+          <a:ln w="12700">
+            <a:solidFill>
+              <a:srgbClr val="D4A843"/>
+            </a:solidFill>
+            <a:prstDash val="solid"/>
+          </a:ln>
+        </p:spPr>
+      </p:sp>
+      <p:sp>
+        <p:nvSpPr>
+          <p:cNvPr id="34" name="Text 32"/>
+          <p:cNvSpPr/>
+          <p:nvPr/>
+        </p:nvSpPr>
+        <p:spPr>
+          <a:xfrm>
+            <a:off x="2194560" y="4058367"/>
+            <a:ext cx="1097280" cy="502920"/>
+          </a:xfrm>
+          <a:prstGeom prst="rect">
+            <a:avLst/>
+          </a:prstGeom>
+          <a:noFill/>
+          <a:ln/>
+        </p:spPr>
+        <p:txBody>
+          <a:bodyPr wrap="square" lIns="0" tIns="0" rIns="0" bIns="0" rtlCol="0" anchor="ctr"/>
+          <a:lstStyle/>
+          <a:p>
+            <a:pPr marL="0" indent="0" algn="ctr">
+              <a:buNone/>
+            </a:pPr>
+            <a:r>
+              <a:rPr lang="en-US" sz="750" dirty="0">
+                <a:solidFill>
+                  <a:srgbClr val="F4F8FC"/>
+                </a:solidFill>
+                <a:latin typeface="Calibri" pitchFamily="34" charset="0"/>
+                <a:ea typeface="Calibri" pitchFamily="34" charset="-122"/>
+                <a:cs typeface="Calibri" pitchFamily="34" charset="-120"/>
+              </a:rPr>
+              <a:t>Modelo de</a:t>
+            </a:r>
+            <a:endParaRPr lang="en-US" sz="750" dirty="0"/>
+          </a:p>
+          <a:p>
+            <a:pPr marL="0" indent="0" algn="ctr">
+              <a:buNone/>
+            </a:pPr>
+            <a:r>
+              <a:rPr lang="en-US" sz="750" dirty="0">
+                <a:solidFill>
+                  <a:srgbClr val="F4F8FC"/>
+                </a:solidFill>
+                <a:latin typeface="Calibri" pitchFamily="34" charset="0"/>
+                <a:ea typeface="Calibri" pitchFamily="34" charset="-122"/>
+                <a:cs typeface="Calibri" pitchFamily="34" charset="-120"/>
+              </a:rPr>
+              <a:t>Regresión</a:t>
+            </a:r>
+            <a:endParaRPr lang="en-US" sz="750" dirty="0"/>
+          </a:p>
+        </p:txBody>
+      </p:sp>
+      <p:sp>
+        <p:nvSpPr>
+          <p:cNvPr id="35" name="Shape 33"/>
+          <p:cNvSpPr/>
+          <p:nvPr/>
+        </p:nvSpPr>
+        <p:spPr>
+          <a:xfrm>
+            <a:off x="3291840" y="4277823"/>
+            <a:ext cx="146304" cy="73152"/>
+          </a:xfrm>
+          <a:prstGeom prst="rect">
+            <a:avLst/>
+          </a:prstGeom>
+          <a:solidFill>
+            <a:srgbClr val="D4A843"/>
+          </a:solidFill>
+          <a:ln/>
+        </p:spPr>
+      </p:sp>
+      <p:sp>
+        <p:nvSpPr>
+          <p:cNvPr id="36" name="Shape 34"/>
+          <p:cNvSpPr/>
+          <p:nvPr/>
+        </p:nvSpPr>
+        <p:spPr>
+          <a:xfrm>
+            <a:off x="3438144" y="4058367"/>
+            <a:ext cx="1097280" cy="502920"/>
+          </a:xfrm>
+          <a:prstGeom prst="rect">
+            <a:avLst/>
+          </a:prstGeom>
+          <a:solidFill>
+            <a:srgbClr val="1A2E4A"/>
+          </a:solidFill>
+          <a:ln w="12700">
+            <a:solidFill>
+              <a:srgbClr val="2A5080"/>
+            </a:solidFill>
+            <a:prstDash val="solid"/>
+          </a:ln>
+        </p:spPr>
+      </p:sp>
+      <p:sp>
+        <p:nvSpPr>
+          <p:cNvPr id="37" name="Text 35"/>
+          <p:cNvSpPr/>
+          <p:nvPr/>
+        </p:nvSpPr>
+        <p:spPr>
+          <a:xfrm>
+            <a:off x="3438144" y="4058367"/>
+            <a:ext cx="1097280" cy="502920"/>
+          </a:xfrm>
+          <a:prstGeom prst="rect">
+            <a:avLst/>
+          </a:prstGeom>
+          <a:noFill/>
+          <a:ln/>
+        </p:spPr>
+        <p:txBody>
+          <a:bodyPr wrap="square" lIns="0" tIns="0" rIns="0" bIns="0" rtlCol="0" anchor="ctr"/>
+          <a:lstStyle/>
+          <a:p>
+            <a:pPr marL="0" indent="0" algn="ctr">
+              <a:buNone/>
+            </a:pPr>
+            <a:r>
+              <a:rPr lang="en-US" sz="750" dirty="0">
+                <a:solidFill>
+                  <a:srgbClr val="F4F8FC"/>
+                </a:solidFill>
+                <a:latin typeface="Calibri" pitchFamily="34" charset="0"/>
+                <a:ea typeface="Calibri" pitchFamily="34" charset="-122"/>
+                <a:cs typeface="Calibri" pitchFamily="34" charset="-120"/>
+              </a:rPr>
+              <a:t>y_predicho</a:t>
+            </a:r>
+            <a:endParaRPr lang="en-US" sz="750" dirty="0"/>
+          </a:p>
+        </p:txBody>
+      </p:sp>
+      <p:sp>
+        <p:nvSpPr>
+          <p:cNvPr id="38" name="Shape 36"/>
+          <p:cNvSpPr/>
+          <p:nvPr/>
+        </p:nvSpPr>
+        <p:spPr>
+          <a:xfrm>
+            <a:off x="4535424" y="4277823"/>
+            <a:ext cx="146304" cy="73152"/>
+          </a:xfrm>
+          <a:prstGeom prst="rect">
+            <a:avLst/>
+          </a:prstGeom>
+          <a:solidFill>
+            <a:srgbClr val="D4A843"/>
+          </a:solidFill>
+          <a:ln/>
+        </p:spPr>
+      </p:sp>
+      <p:sp>
+        <p:nvSpPr>
+          <p:cNvPr id="39" name="Shape 37"/>
+          <p:cNvSpPr/>
+          <p:nvPr/>
+        </p:nvSpPr>
+        <p:spPr>
+          <a:xfrm>
+            <a:off x="4681728" y="4058367"/>
+            <a:ext cx="1097280" cy="502920"/>
+          </a:xfrm>
+          <a:prstGeom prst="rect">
+            <a:avLst/>
+          </a:prstGeom>
+          <a:solidFill>
+            <a:srgbClr val="2A5080"/>
+          </a:solidFill>
+          <a:ln w="12700">
+            <a:solidFill>
+              <a:srgbClr val="D4A843"/>
+            </a:solidFill>
+            <a:prstDash val="solid"/>
+          </a:ln>
+        </p:spPr>
+      </p:sp>
+      <p:sp>
+        <p:nvSpPr>
+          <p:cNvPr id="40" name="Text 38"/>
+          <p:cNvSpPr/>
+          <p:nvPr/>
+        </p:nvSpPr>
+        <p:spPr>
+          <a:xfrm>
+            <a:off x="4681728" y="4058367"/>
+            <a:ext cx="1097280" cy="502920"/>
+          </a:xfrm>
+          <a:prstGeom prst="rect">
+            <a:avLst/>
+          </a:prstGeom>
+          <a:noFill/>
+          <a:ln/>
+        </p:spPr>
+        <p:txBody>
+          <a:bodyPr wrap="square" lIns="0" tIns="0" rIns="0" bIns="0" rtlCol="0" anchor="ctr"/>
+          <a:lstStyle/>
+          <a:p>
+            <a:pPr marL="0" indent="0" algn="ctr">
+              <a:buNone/>
+            </a:pPr>
+            <a:r>
+              <a:rPr lang="en-US" sz="750" dirty="0">
+                <a:solidFill>
+                  <a:srgbClr val="F4F8FC"/>
+                </a:solidFill>
+                <a:latin typeface="Calibri" pitchFamily="34" charset="0"/>
+                <a:ea typeface="Calibri" pitchFamily="34" charset="-122"/>
+                <a:cs typeface="Calibri" pitchFamily="34" charset="-120"/>
+              </a:rPr>
+              <a:t>ratio =</a:t>
+            </a:r>
+            <a:endParaRPr lang="en-US" sz="750" dirty="0"/>
+          </a:p>
+          <a:p>
+            <a:pPr marL="0" indent="0" algn="ctr">
+              <a:buNone/>
+            </a:pPr>
+            <a:r>
+              <a:rPr lang="en-US" sz="750" dirty="0">
+                <a:solidFill>
+                  <a:srgbClr val="F4F8FC"/>
+                </a:solidFill>
+                <a:latin typeface="Calibri" pitchFamily="34" charset="0"/>
+                <a:ea typeface="Calibri" pitchFamily="34" charset="-122"/>
+                <a:cs typeface="Calibri" pitchFamily="34" charset="-120"/>
+              </a:rPr>
+              <a:t>real / pred</a:t>
+            </a:r>
+            <a:endParaRPr lang="en-US" sz="750" dirty="0"/>
+          </a:p>
+        </p:txBody>
+      </p:sp>
+      <p:sp>
+        <p:nvSpPr>
+          <p:cNvPr id="41" name="Shape 39"/>
+          <p:cNvSpPr/>
+          <p:nvPr/>
+        </p:nvSpPr>
+        <p:spPr>
+          <a:xfrm>
+            <a:off x="5779008" y="4277823"/>
+            <a:ext cx="146304" cy="73152"/>
+          </a:xfrm>
+          <a:prstGeom prst="rect">
+            <a:avLst/>
+          </a:prstGeom>
+          <a:solidFill>
+            <a:srgbClr val="D4A843"/>
+          </a:solidFill>
+          <a:ln/>
+        </p:spPr>
+      </p:sp>
+      <p:sp>
+        <p:nvSpPr>
+          <p:cNvPr id="42" name="Shape 40"/>
+          <p:cNvSpPr/>
+          <p:nvPr/>
+        </p:nvSpPr>
+        <p:spPr>
+          <a:xfrm>
+            <a:off x="5925312" y="4058367"/>
+            <a:ext cx="1097280" cy="502920"/>
+          </a:xfrm>
+          <a:prstGeom prst="rect">
+            <a:avLst/>
+          </a:prstGeom>
+          <a:solidFill>
+            <a:srgbClr val="2A5080"/>
+          </a:solidFill>
+          <a:ln w="12700">
+            <a:solidFill>
+              <a:srgbClr val="D4A843"/>
+            </a:solidFill>
+            <a:prstDash val="solid"/>
+          </a:ln>
+        </p:spPr>
+      </p:sp>
+      <p:sp>
+        <p:nvSpPr>
+          <p:cNvPr id="43" name="Text 41"/>
+          <p:cNvSpPr/>
+          <p:nvPr/>
+        </p:nvSpPr>
+        <p:spPr>
+          <a:xfrm>
+            <a:off x="5925312" y="4058367"/>
+            <a:ext cx="1097280" cy="502920"/>
+          </a:xfrm>
+          <a:prstGeom prst="rect">
+            <a:avLst/>
+          </a:prstGeom>
+          <a:noFill/>
+          <a:ln/>
+        </p:spPr>
+        <p:txBody>
+          <a:bodyPr wrap="square" lIns="0" tIns="0" rIns="0" bIns="0" rtlCol="0" anchor="ctr"/>
+          <a:lstStyle/>
+          <a:p>
+            <a:pPr marL="0" indent="0" algn="ctr">
+              <a:buNone/>
+            </a:pPr>
+            <a:r>
+              <a:rPr lang="en-US" sz="750" dirty="0">
+                <a:solidFill>
+                  <a:srgbClr val="F4F8FC"/>
+                </a:solidFill>
+                <a:latin typeface="Calibri" pitchFamily="34" charset="0"/>
+                <a:ea typeface="Calibri" pitchFamily="34" charset="-122"/>
+                <a:cs typeface="Calibri" pitchFamily="34" charset="-120"/>
+              </a:rPr>
+              <a:t>crear_etiqueta</a:t>
+            </a:r>
+            <a:endParaRPr lang="en-US" sz="750" dirty="0"/>
+          </a:p>
+          <a:p>
+            <a:pPr marL="0" indent="0" algn="ctr">
+              <a:buNone/>
+            </a:pPr>
+            <a:r>
+              <a:rPr lang="en-US" sz="750" dirty="0">
+                <a:solidFill>
+                  <a:srgbClr val="F4F8FC"/>
+                </a:solidFill>
+                <a:latin typeface="Calibri" pitchFamily="34" charset="0"/>
+                <a:ea typeface="Calibri" pitchFamily="34" charset="-122"/>
+                <a:cs typeface="Calibri" pitchFamily="34" charset="-120"/>
+              </a:rPr>
+              <a:t>_chollo()</a:t>
+            </a:r>
+            <a:endParaRPr lang="en-US" sz="750" dirty="0"/>
+          </a:p>
+        </p:txBody>
+      </p:sp>
+      <p:sp>
+        <p:nvSpPr>
+          <p:cNvPr id="44" name="Shape 42"/>
+          <p:cNvSpPr/>
+          <p:nvPr/>
+        </p:nvSpPr>
+        <p:spPr>
+          <a:xfrm>
+            <a:off x="7022592" y="4277823"/>
+            <a:ext cx="146304" cy="73152"/>
+          </a:xfrm>
+          <a:prstGeom prst="rect">
+            <a:avLst/>
+          </a:prstGeom>
+          <a:solidFill>
+            <a:srgbClr val="D4A843"/>
+          </a:solidFill>
+          <a:ln/>
+        </p:spPr>
+      </p:sp>
+      <p:sp>
+        <p:nvSpPr>
+          <p:cNvPr id="45" name="Shape 43"/>
+          <p:cNvSpPr/>
+          <p:nvPr/>
+        </p:nvSpPr>
+        <p:spPr>
+          <a:xfrm>
+            <a:off x="7168896" y="4058367"/>
+            <a:ext cx="1097280" cy="502920"/>
+          </a:xfrm>
+          <a:prstGeom prst="rect">
+            <a:avLst/>
+          </a:prstGeom>
+          <a:solidFill>
+            <a:srgbClr val="1F5C40"/>
+          </a:solidFill>
+          <a:ln w="12700">
+            <a:solidFill>
+              <a:srgbClr val="D4A843"/>
+            </a:solidFill>
+            <a:prstDash val="solid"/>
+          </a:ln>
+        </p:spPr>
+      </p:sp>
+      <p:sp>
+        <p:nvSpPr>
+          <p:cNvPr id="46" name="Text 44"/>
+          <p:cNvSpPr/>
+          <p:nvPr/>
+        </p:nvSpPr>
+        <p:spPr>
+          <a:xfrm>
+            <a:off x="7168896" y="4058367"/>
+            <a:ext cx="1097280" cy="502920"/>
+          </a:xfrm>
+          <a:prstGeom prst="rect">
+            <a:avLst/>
+          </a:prstGeom>
+          <a:noFill/>
+          <a:ln/>
+        </p:spPr>
+        <p:txBody>
+          <a:bodyPr wrap="square" lIns="0" tIns="0" rIns="0" bIns="0" rtlCol="0" anchor="ctr"/>
+          <a:lstStyle/>
+          <a:p>
+            <a:pPr marL="0" indent="0" algn="ctr">
+              <a:buNone/>
+            </a:pPr>
+            <a:r>
+              <a:rPr lang="en-US" sz="750" dirty="0">
+                <a:solidFill>
+                  <a:srgbClr val="D4A843"/>
+                </a:solidFill>
+                <a:latin typeface="Calibri" pitchFamily="34" charset="0"/>
+                <a:ea typeface="Calibri" pitchFamily="34" charset="-122"/>
+                <a:cs typeface="Calibri" pitchFamily="34" charset="-120"/>
+              </a:rPr>
+              <a:t>Categoría</a:t>
+            </a:r>
+            <a:endParaRPr lang="en-US" sz="750" dirty="0"/>
+          </a:p>
+          <a:p>
+            <a:pPr marL="0" indent="0" algn="ctr">
+              <a:buNone/>
+            </a:pPr>
+            <a:r>
+              <a:rPr lang="en-US" sz="750" dirty="0">
+                <a:solidFill>
+                  <a:srgbClr val="D4A843"/>
+                </a:solidFill>
+                <a:latin typeface="Calibri" pitchFamily="34" charset="0"/>
+                <a:ea typeface="Calibri" pitchFamily="34" charset="-122"/>
+                <a:cs typeface="Calibri" pitchFamily="34" charset="-120"/>
+              </a:rPr>
+              <a:t>(0–4)</a:t>
+            </a:r>
+            <a:endParaRPr lang="en-US" sz="750" dirty="0"/>
+          </a:p>
+        </p:txBody>
+      </p:sp>
+      <p:sp>
+        <p:nvSpPr>
+          <p:cNvPr id="50" name="Shape 48"/>
+          <p:cNvSpPr/>
+          <p:nvPr/>
+        </p:nvSpPr>
+        <p:spPr>
+          <a:xfrm>
+            <a:off x="402336" y="4607007"/>
+            <a:ext cx="8229600" cy="256032"/>
+          </a:xfrm>
+          <a:prstGeom prst="rect">
+            <a:avLst/>
+          </a:prstGeom>
+          <a:solidFill>
+            <a:srgbClr val="1F5C40"/>
+          </a:solidFill>
+          <a:ln/>
+        </p:spPr>
+      </p:sp>
+      <p:sp>
+        <p:nvSpPr>
+          <p:cNvPr id="51" name="Text 49"/>
+          <p:cNvSpPr/>
+          <p:nvPr/>
+        </p:nvSpPr>
+        <p:spPr>
+          <a:xfrm>
+            <a:off x="493776" y="4607007"/>
+            <a:ext cx="8046720" cy="256032"/>
+          </a:xfrm>
+          <a:prstGeom prst="rect">
+            <a:avLst/>
+          </a:prstGeom>
+          <a:noFill/>
+          <a:ln/>
+        </p:spPr>
+        <p:txBody>
+          <a:bodyPr wrap="square" lIns="0" tIns="0" rIns="0" bIns="0" rtlCol="0" anchor="ctr"/>
+          <a:lstStyle/>
+          <a:p>
+            <a:pPr marL="0" indent="0">
+              <a:buNone/>
+            </a:pPr>
+            <a:r>
+              <a:rPr lang="en-US" sz="900" dirty="0">
+                <a:solidFill>
+                  <a:srgbClr val="FFFFFF"/>
+                </a:solidFill>
+                <a:latin typeface="Calibri" pitchFamily="34" charset="0"/>
+                <a:ea typeface="Calibri" pitchFamily="34" charset="-122"/>
+                <a:cs typeface="Calibri" pitchFamily="34" charset="-120"/>
+              </a:rPr>
+              <a:t>Evaluación del modelo de regresión sobre X_test (una sola vez): R², MAE, RMSE  ·  joblib guarda modelo + scalers para producción</a:t>
+            </a:r>
+            <a:endParaRPr lang="en-US" sz="900" dirty="0"/>
+          </a:p>
+        </p:txBody>
+      </p:sp>
+      <p:sp>
+        <p:nvSpPr>
+          <p:cNvPr id="52" name="Text 50"/>
+          <p:cNvSpPr/>
+          <p:nvPr/>
+        </p:nvSpPr>
+        <p:spPr>
+          <a:xfrm>
+            <a:off x="402336" y="4899615"/>
+            <a:ext cx="7772400" cy="201168"/>
+          </a:xfrm>
+          <a:prstGeom prst="rect">
+            <a:avLst/>
+          </a:prstGeom>
+          <a:noFill/>
+          <a:ln/>
+        </p:spPr>
+        <p:txBody>
+          <a:bodyPr wrap="square" lIns="0" tIns="0" rIns="0" bIns="0" rtlCol="0" anchor="ctr"/>
+          <a:lstStyle/>
+          <a:p>
+            <a:pPr marL="0" indent="0" algn="l">
+              <a:buNone/>
+            </a:pPr>
+            <a:r>
+              <a:rPr lang="en-US" sz="800" dirty="0">
+                <a:solidFill>
+                  <a:srgbClr val="CBD5E1"/>
+                </a:solidFill>
+                <a:latin typeface="Calibri" pitchFamily="34" charset="0"/>
+                <a:ea typeface="Calibri" pitchFamily="34" charset="-122"/>
+                <a:cs typeface="Calibri" pitchFamily="34" charset="-120"/>
+              </a:rPr>
+              <a:t>TFG · Detector de Chollos en Andalucía · Mario Jiménez · Universidad de Sevilla</a:t>
+            </a:r>
+            <a:endParaRPr lang="en-US" sz="800" dirty="0"/>
+          </a:p>
+        </p:txBody>
+      </p:sp>
+      <p:sp>
+        <p:nvSpPr>
+          <p:cNvPr id="53" name="Text 51"/>
+          <p:cNvSpPr/>
+          <p:nvPr/>
+        </p:nvSpPr>
+        <p:spPr>
+          <a:xfrm>
+            <a:off x="8741664" y="4858331"/>
+            <a:ext cx="365760" cy="228600"/>
+          </a:xfrm>
+          <a:prstGeom prst="rect">
+            <a:avLst/>
+          </a:prstGeom>
+          <a:noFill/>
+          <a:ln/>
+        </p:spPr>
+        <p:txBody>
+          <a:bodyPr wrap="square" lIns="0" tIns="0" rIns="0" bIns="0" rtlCol="0" anchor="ctr"/>
+          <a:lstStyle/>
+          <a:p>
+            <a:pPr marL="0" indent="0" algn="ctr">
+              <a:buNone/>
+            </a:pPr>
+            <a:endParaRPr lang="en-US" sz="900" dirty="0"/>
+          </a:p>
+        </p:txBody>
+      </p:sp>
+    </p:spTree>
+  </p:cSld>
+  <p:clrMapOvr>
+    <a:masterClrMapping/>
+  </p:clrMapOvr>
+</p:sld>
+</file>
+
+<file path=ppt/slides/slide21.xml><?xml version="1.0" encoding="utf-8"?>
+<p:sld xmlns:a="http://schemas.openxmlformats.org/drawingml/2006/main" xmlns:r="http://schemas.openxmlformats.org/officeDocument/2006/relationships" xmlns:p="http://schemas.openxmlformats.org/presentationml/2006/main">
   <p:cSld>
     <p:bg>
       <p:bgPr>
@@ -15786,7 +17033,7 @@
 </p:sld>
 </file>
 
-<file path=ppt/slides/slide21.xml><?xml version="1.0" encoding="utf-8"?>
+<file path=ppt/slides/slide22.xml><?xml version="1.0" encoding="utf-8"?>
 <p:sld xmlns:a="http://schemas.openxmlformats.org/drawingml/2006/main" xmlns:r="http://schemas.openxmlformats.org/officeDocument/2006/relationships" xmlns:p="http://schemas.openxmlformats.org/presentationml/2006/main">
   <p:cSld name="Slide 13">
     <p:bg>
@@ -16806,7 +18053,7 @@
 </p:sld>
 </file>
 
-<file path=ppt/slides/slide22.xml><?xml version="1.0" encoding="utf-8"?>
+<file path=ppt/slides/slide23.xml><?xml version="1.0" encoding="utf-8"?>
 <p:sld xmlns:a="http://schemas.openxmlformats.org/drawingml/2006/main" xmlns:r="http://schemas.openxmlformats.org/officeDocument/2006/relationships" xmlns:p="http://schemas.openxmlformats.org/presentationml/2006/main">
   <p:cSld name="Slide 14">
     <p:bg>

--- a/TFG_Chollos/TFG_Presentacion_final.pptx
+++ b/TFG_Chollos/TFG_Presentacion_final.pptx
@@ -5,7 +5,7 @@
     <p:sldMasterId id="2147483648" r:id="rId1"/>
   </p:sldMasterIdLst>
   <p:notesMasterIdLst>
-    <p:notesMasterId r:id="rId25"/>
+    <p:notesMasterId r:id="rId26"/>
   </p:notesMasterIdLst>
   <p:sldIdLst>
     <p:sldId id="256" r:id="rId2"/>
@@ -21,16 +21,17 @@
     <p:sldId id="276" r:id="rId12"/>
     <p:sldId id="274" r:id="rId13"/>
     <p:sldId id="279" r:id="rId14"/>
-    <p:sldId id="277" r:id="rId15"/>
-    <p:sldId id="262" r:id="rId16"/>
-    <p:sldId id="264" r:id="rId17"/>
-    <p:sldId id="270" r:id="rId18"/>
-    <p:sldId id="271" r:id="rId19"/>
-    <p:sldId id="275" r:id="rId20"/>
-    <p:sldId id="263" r:id="rId21"/>
-    <p:sldId id="265" r:id="rId22"/>
-    <p:sldId id="268" r:id="rId23"/>
-    <p:sldId id="269" r:id="rId24"/>
+    <p:sldId id="280" r:id="rId15"/>
+    <p:sldId id="277" r:id="rId16"/>
+    <p:sldId id="262" r:id="rId17"/>
+    <p:sldId id="264" r:id="rId18"/>
+    <p:sldId id="270" r:id="rId19"/>
+    <p:sldId id="271" r:id="rId20"/>
+    <p:sldId id="275" r:id="rId21"/>
+    <p:sldId id="263" r:id="rId22"/>
+    <p:sldId id="265" r:id="rId23"/>
+    <p:sldId id="268" r:id="rId24"/>
+    <p:sldId id="269" r:id="rId25"/>
   </p:sldIdLst>
   <p:sldSz cx="9144000" cy="5143500" type="screen16x9"/>
   <p:notesSz cx="5143500" cy="9144000"/>
@@ -408,7 +409,7 @@
           <a:p>
             <a:fld id="{F7021451-1387-4CA6-816F-3879F97B5CBC}" type="slidenum">
               <a:rPr lang="en-US"/>
-              <a:t>20</a:t>
+              <a:t>21</a:t>
             </a:fld>
             <a:endParaRPr lang="en-US"/>
           </a:p>
@@ -492,7 +493,7 @@
           <a:p>
             <a:fld id="{F7021451-1387-4CA6-816F-3879F97B5CBC}" type="slidenum">
               <a:rPr lang="en-US"/>
-              <a:t>21</a:t>
+              <a:t>22</a:t>
             </a:fld>
             <a:endParaRPr lang="en-US"/>
           </a:p>
@@ -576,7 +577,7 @@
           <a:p>
             <a:fld id="{F7021451-1387-4CA6-816F-3879F97B5CBC}" type="slidenum">
               <a:rPr lang="en-US"/>
-              <a:t>22</a:t>
+              <a:t>23</a:t>
             </a:fld>
             <a:endParaRPr lang="en-US"/>
           </a:p>
@@ -660,7 +661,7 @@
           <a:p>
             <a:fld id="{F7021451-1387-4CA6-816F-3879F97B5CBC}" type="slidenum">
               <a:rPr lang="en-US"/>
-              <a:t>23</a:t>
+              <a:t>24</a:t>
             </a:fld>
             <a:endParaRPr lang="en-US"/>
           </a:p>
@@ -1248,7 +1249,7 @@
           <a:p>
             <a:fld id="{F7021451-1387-4CA6-816F-3879F97B5CBC}" type="slidenum">
               <a:rPr lang="en-US"/>
-              <a:t>15</a:t>
+              <a:t>16</a:t>
             </a:fld>
             <a:endParaRPr lang="en-US"/>
           </a:p>
@@ -1332,7 +1333,7 @@
           <a:p>
             <a:fld id="{F7021451-1387-4CA6-816F-3879F97B5CBC}" type="slidenum">
               <a:rPr lang="en-US"/>
-              <a:t>16</a:t>
+              <a:t>17</a:t>
             </a:fld>
             <a:endParaRPr lang="en-US"/>
           </a:p>
@@ -6802,6 +6803,637 @@
     <p:bg>
       <p:bgPr>
         <a:solidFill>
+          <a:srgbClr val="1A2E4A"/>
+        </a:solidFill>
+        <a:effectLst/>
+      </p:bgPr>
+    </p:bg>
+    <p:spTree>
+      <p:nvGrpSpPr>
+        <p:cNvPr id="1" name=""/>
+        <p:cNvGrpSpPr/>
+        <p:nvPr/>
+      </p:nvGrpSpPr>
+      <p:grpSpPr>
+        <a:xfrm>
+          <a:off x="0" y="0"/>
+          <a:ext cx="0" cy="0"/>
+          <a:chOff x="0" y="0"/>
+          <a:chExt cx="0" cy="0"/>
+        </a:xfrm>
+      </p:grpSpPr>
+      <p:sp>
+        <p:nvSpPr>
+          <p:cNvPr id="2" name="Rectangle 1"/>
+          <p:cNvSpPr/>
+          <p:nvPr/>
+        </p:nvSpPr>
+        <p:spPr>
+          <a:xfrm>
+            <a:off x="0" y="0"/>
+            <a:ext cx="9144000" cy="54864"/>
+          </a:xfrm>
+          <a:prstGeom prst="rect">
+            <a:avLst/>
+          </a:prstGeom>
+          <a:solidFill>
+            <a:srgbClr val="D4A843"/>
+          </a:solidFill>
+          <a:ln>
+            <a:noFill/>
+          </a:ln>
+          <a:effectLst/>
+        </p:spPr>
+        <p:style>
+          <a:lnRef idx="1">
+            <a:schemeClr val="accent1"/>
+          </a:lnRef>
+          <a:fillRef idx="3">
+            <a:schemeClr val="accent1"/>
+          </a:fillRef>
+          <a:effectRef idx="2">
+            <a:schemeClr val="accent1"/>
+          </a:effectRef>
+          <a:fontRef idx="minor">
+            <a:schemeClr val="lt1"/>
+          </a:fontRef>
+        </p:style>
+        <p:txBody>
+          <a:bodyPr rtlCol="0" anchor="ctr"/>
+          <a:lstStyle/>
+          <a:p>
+            <a:pPr algn="ctr"/>
+            <a:endParaRPr/>
+          </a:p>
+        </p:txBody>
+      </p:sp>
+      <p:sp>
+        <p:nvSpPr>
+          <p:cNvPr id="3" name="TextBox 2"/>
+          <p:cNvSpPr txBox="1"/>
+          <p:nvPr/>
+        </p:nvSpPr>
+        <p:spPr>
+          <a:xfrm>
+            <a:off x="457200" y="109728"/>
+            <a:ext cx="8229600" cy="457200"/>
+          </a:xfrm>
+          <a:prstGeom prst="rect">
+            <a:avLst/>
+          </a:prstGeom>
+          <a:noFill/>
+        </p:spPr>
+        <p:txBody>
+          <a:bodyPr wrap="square" lIns="0" tIns="0" rIns="0" bIns="0">
+            <a:spAutoFit/>
+          </a:bodyPr>
+          <a:lstStyle/>
+          <a:p>
+            <a:pPr algn="l"/>
+            <a:r>
+              <a:rPr sz="2400" b="1">
+                <a:solidFill>
+                  <a:srgbClr val="FFFFFF"/>
+                </a:solidFill>
+                <a:latin typeface="Calibri"/>
+              </a:rPr>
+              <a:t>Interoperabilidad Python ↔ R · rpy2 + ggplot2</a:t>
+            </a:r>
+          </a:p>
+        </p:txBody>
+      </p:sp>
+      <p:sp>
+        <p:nvSpPr>
+          <p:cNvPr id="4" name="TextBox 3"/>
+          <p:cNvSpPr txBox="1"/>
+          <p:nvPr/>
+        </p:nvSpPr>
+        <p:spPr>
+          <a:xfrm>
+            <a:off x="457200" y="603504"/>
+            <a:ext cx="8229600" cy="274320"/>
+          </a:xfrm>
+          <a:prstGeom prst="rect">
+            <a:avLst/>
+          </a:prstGeom>
+          <a:noFill/>
+        </p:spPr>
+        <p:txBody>
+          <a:bodyPr wrap="square" lIns="0" tIns="0" rIns="0" bIns="0">
+            <a:spAutoFit/>
+          </a:bodyPr>
+          <a:lstStyle/>
+          <a:p>
+            <a:pPr algn="l"/>
+            <a:r>
+              <a:rPr sz="1000" b="0">
+                <a:solidFill>
+                  <a:srgbClr val="F0C060"/>
+                </a:solidFill>
+                <a:latin typeface="Consolas"/>
+              </a:rPr>
+              <a:t>Graficos/r_integration.py  ·  Python envía el DataFrame a R  ·  R genera el gráfico ggplot2 y devuelve los bins</a:t>
+            </a:r>
+          </a:p>
+        </p:txBody>
+      </p:sp>
+      <p:pic>
+        <p:nvPicPr>
+          <p:cNvPr id="5" name="Picture 4" descr="eda_hist_precios_comparativa.png"/>
+          <p:cNvPicPr>
+            <a:picLocks noChangeAspect="1"/>
+          </p:cNvPicPr>
+          <p:nvPr/>
+        </p:nvPicPr>
+        <p:blipFill>
+          <a:blip r:embed="rId2"/>
+          <a:stretch>
+            <a:fillRect/>
+          </a:stretch>
+        </p:blipFill>
+        <p:spPr>
+          <a:xfrm>
+            <a:off x="457200" y="855939"/>
+            <a:ext cx="8229600" cy="2745486"/>
+          </a:xfrm>
+          <a:prstGeom prst="rect">
+            <a:avLst/>
+          </a:prstGeom>
+        </p:spPr>
+      </p:pic>
+      <p:pic>
+        <p:nvPicPr>
+          <p:cNvPr id="6" name="Picture 5" descr="eda_hist_precios_r.png"/>
+          <p:cNvPicPr>
+            <a:picLocks noChangeAspect="1"/>
+          </p:cNvPicPr>
+          <p:nvPr/>
+        </p:nvPicPr>
+        <p:blipFill>
+          <a:blip r:embed="rId3"/>
+          <a:stretch>
+            <a:fillRect/>
+          </a:stretch>
+        </p:blipFill>
+        <p:spPr>
+          <a:xfrm>
+            <a:off x="457200" y="3767328"/>
+            <a:ext cx="1905977" cy="1058875"/>
+          </a:xfrm>
+          <a:prstGeom prst="rect">
+            <a:avLst/>
+          </a:prstGeom>
+        </p:spPr>
+      </p:pic>
+      <p:sp>
+        <p:nvSpPr>
+          <p:cNvPr id="7" name="TextBox 6"/>
+          <p:cNvSpPr txBox="1"/>
+          <p:nvPr/>
+        </p:nvSpPr>
+        <p:spPr>
+          <a:xfrm>
+            <a:off x="2413604" y="4032301"/>
+            <a:ext cx="1776259" cy="430631"/>
+          </a:xfrm>
+          <a:prstGeom prst="rect">
+            <a:avLst/>
+          </a:prstGeom>
+          <a:noFill/>
+        </p:spPr>
+        <p:txBody>
+          <a:bodyPr wrap="square" lIns="0" tIns="0" rIns="0" bIns="0" anchor="ctr">
+            <a:spAutoFit/>
+          </a:bodyPr>
+          <a:lstStyle/>
+          <a:p>
+            <a:pPr algn="l">
+              <a:lnSpc>
+                <a:spcPct val="105000"/>
+              </a:lnSpc>
+            </a:pPr>
+            <a:r>
+              <a:rPr sz="1000" b="1" dirty="0">
+                <a:solidFill>
+                  <a:srgbClr val="F0C060"/>
+                </a:solidFill>
+                <a:latin typeface="Calibri"/>
+              </a:rPr>
+              <a:t>ggplot2 (R)</a:t>
+            </a:r>
+          </a:p>
+          <a:p>
+            <a:pPr algn="l">
+              <a:lnSpc>
+                <a:spcPct val="105000"/>
+              </a:lnSpc>
+            </a:pPr>
+            <a:r>
+              <a:rPr sz="850" b="0" dirty="0" err="1">
+                <a:solidFill>
+                  <a:srgbClr val="CBD5E1"/>
+                </a:solidFill>
+                <a:latin typeface="Calibri"/>
+              </a:rPr>
+              <a:t>Mismo</a:t>
+            </a:r>
+            <a:r>
+              <a:rPr sz="850" b="0" dirty="0">
+                <a:solidFill>
+                  <a:srgbClr val="CBD5E1"/>
+                </a:solidFill>
+                <a:latin typeface="Calibri"/>
+              </a:rPr>
+              <a:t> </a:t>
+            </a:r>
+            <a:r>
+              <a:rPr sz="850" b="0" dirty="0" err="1">
+                <a:solidFill>
+                  <a:srgbClr val="CBD5E1"/>
+                </a:solidFill>
+                <a:latin typeface="Calibri"/>
+              </a:rPr>
+              <a:t>histograma</a:t>
+            </a:r>
+            <a:r>
+              <a:rPr sz="850" b="0" dirty="0">
+                <a:solidFill>
+                  <a:srgbClr val="CBD5E1"/>
+                </a:solidFill>
+                <a:latin typeface="Calibri"/>
+              </a:rPr>
+              <a:t> </a:t>
+            </a:r>
+            <a:r>
+              <a:rPr sz="850" b="0" dirty="0" err="1">
+                <a:solidFill>
+                  <a:srgbClr val="CBD5E1"/>
+                </a:solidFill>
+                <a:latin typeface="Calibri"/>
+              </a:rPr>
+              <a:t>generado</a:t>
+            </a:r>
+            <a:r>
+              <a:rPr sz="850" b="0" dirty="0">
+                <a:solidFill>
+                  <a:srgbClr val="CBD5E1"/>
+                </a:solidFill>
+                <a:latin typeface="Calibri"/>
+              </a:rPr>
+              <a:t> </a:t>
+            </a:r>
+            <a:r>
+              <a:rPr sz="850" b="0" dirty="0" err="1">
+                <a:solidFill>
+                  <a:srgbClr val="CBD5E1"/>
+                </a:solidFill>
+                <a:latin typeface="Calibri"/>
+              </a:rPr>
+              <a:t>en</a:t>
+            </a:r>
+            <a:r>
+              <a:rPr sz="850" b="0" dirty="0">
+                <a:solidFill>
+                  <a:srgbClr val="CBD5E1"/>
+                </a:solidFill>
+                <a:latin typeface="Calibri"/>
+              </a:rPr>
+              <a:t> R con </a:t>
+            </a:r>
+          </a:p>
+          <a:p>
+            <a:pPr algn="l">
+              <a:lnSpc>
+                <a:spcPct val="105000"/>
+              </a:lnSpc>
+            </a:pPr>
+            <a:r>
+              <a:rPr sz="850" b="1" dirty="0" err="1">
+                <a:solidFill>
+                  <a:srgbClr val="F0C060"/>
+                </a:solidFill>
+                <a:latin typeface="Consolas"/>
+              </a:rPr>
+              <a:t>ggsave</a:t>
+            </a:r>
+            <a:r>
+              <a:rPr sz="850" b="1" dirty="0">
+                <a:solidFill>
+                  <a:srgbClr val="F0C060"/>
+                </a:solidFill>
+                <a:latin typeface="Consolas"/>
+              </a:rPr>
+              <a:t>()</a:t>
+            </a:r>
+            <a:r>
+              <a:rPr sz="850" b="0" dirty="0">
+                <a:solidFill>
+                  <a:srgbClr val="CBD5E1"/>
+                </a:solidFill>
+                <a:latin typeface="Calibri"/>
+              </a:rPr>
+              <a:t> y </a:t>
+            </a:r>
+            <a:r>
+              <a:rPr sz="850" b="0" dirty="0" err="1">
+                <a:solidFill>
+                  <a:srgbClr val="CBD5E1"/>
+                </a:solidFill>
+                <a:latin typeface="Calibri"/>
+              </a:rPr>
+              <a:t>devuelto</a:t>
+            </a:r>
+            <a:r>
+              <a:rPr sz="850" b="0" dirty="0">
+                <a:solidFill>
+                  <a:srgbClr val="CBD5E1"/>
+                </a:solidFill>
+                <a:latin typeface="Calibri"/>
+              </a:rPr>
+              <a:t> </a:t>
+            </a:r>
+            <a:r>
+              <a:rPr sz="850" b="0" dirty="0" err="1">
+                <a:solidFill>
+                  <a:srgbClr val="CBD5E1"/>
+                </a:solidFill>
+                <a:latin typeface="Calibri"/>
+              </a:rPr>
+              <a:t>como</a:t>
+            </a:r>
+            <a:r>
+              <a:rPr sz="850" b="0" dirty="0">
+                <a:solidFill>
+                  <a:srgbClr val="CBD5E1"/>
+                </a:solidFill>
+                <a:latin typeface="Calibri"/>
+              </a:rPr>
+              <a:t> imagen.</a:t>
+            </a:r>
+          </a:p>
+        </p:txBody>
+      </p:sp>
+      <p:sp>
+        <p:nvSpPr>
+          <p:cNvPr id="8" name="Rectangle 7"/>
+          <p:cNvSpPr/>
+          <p:nvPr/>
+        </p:nvSpPr>
+        <p:spPr>
+          <a:xfrm>
+            <a:off x="4572000" y="3813048"/>
+            <a:ext cx="4230014" cy="201168"/>
+          </a:xfrm>
+          <a:prstGeom prst="rect">
+            <a:avLst/>
+          </a:prstGeom>
+          <a:solidFill>
+            <a:srgbClr val="2A5080"/>
+          </a:solidFill>
+          <a:ln>
+            <a:noFill/>
+          </a:ln>
+          <a:effectLst/>
+        </p:spPr>
+        <p:style>
+          <a:lnRef idx="1">
+            <a:schemeClr val="accent1"/>
+          </a:lnRef>
+          <a:fillRef idx="3">
+            <a:schemeClr val="accent1"/>
+          </a:fillRef>
+          <a:effectRef idx="2">
+            <a:schemeClr val="accent1"/>
+          </a:effectRef>
+          <a:fontRef idx="minor">
+            <a:schemeClr val="lt1"/>
+          </a:fontRef>
+        </p:style>
+        <p:txBody>
+          <a:bodyPr rtlCol="0" anchor="ctr"/>
+          <a:lstStyle/>
+          <a:p>
+            <a:pPr algn="ctr"/>
+            <a:endParaRPr/>
+          </a:p>
+        </p:txBody>
+      </p:sp>
+      <p:sp>
+        <p:nvSpPr>
+          <p:cNvPr id="9" name="TextBox 8"/>
+          <p:cNvSpPr txBox="1"/>
+          <p:nvPr/>
+        </p:nvSpPr>
+        <p:spPr>
+          <a:xfrm>
+            <a:off x="4626864" y="3813048"/>
+            <a:ext cx="4120286" cy="201168"/>
+          </a:xfrm>
+          <a:prstGeom prst="rect">
+            <a:avLst/>
+          </a:prstGeom>
+          <a:noFill/>
+        </p:spPr>
+        <p:txBody>
+          <a:bodyPr wrap="square" lIns="0" tIns="0" rIns="0" bIns="0" anchor="ctr">
+            <a:spAutoFit/>
+          </a:bodyPr>
+          <a:lstStyle/>
+          <a:p>
+            <a:pPr algn="l"/>
+            <a:r>
+              <a:rPr sz="900" b="1">
+                <a:solidFill>
+                  <a:srgbClr val="F0C060"/>
+                </a:solidFill>
+                <a:latin typeface="Consolas"/>
+              </a:rPr>
+              <a:t>r_integration.py — Python → R con rpy2</a:t>
+            </a:r>
+          </a:p>
+        </p:txBody>
+      </p:sp>
+      <p:sp>
+        <p:nvSpPr>
+          <p:cNvPr id="10" name="Rectangle 9"/>
+          <p:cNvSpPr/>
+          <p:nvPr/>
+        </p:nvSpPr>
+        <p:spPr>
+          <a:xfrm>
+            <a:off x="4572000" y="4014216"/>
+            <a:ext cx="4230014" cy="603503"/>
+          </a:xfrm>
+          <a:prstGeom prst="rect">
+            <a:avLst/>
+          </a:prstGeom>
+          <a:solidFill>
+            <a:srgbClr val="0D1117"/>
+          </a:solidFill>
+          <a:ln>
+            <a:noFill/>
+          </a:ln>
+          <a:effectLst/>
+        </p:spPr>
+        <p:style>
+          <a:lnRef idx="1">
+            <a:schemeClr val="accent1"/>
+          </a:lnRef>
+          <a:fillRef idx="3">
+            <a:schemeClr val="accent1"/>
+          </a:fillRef>
+          <a:effectRef idx="2">
+            <a:schemeClr val="accent1"/>
+          </a:effectRef>
+          <a:fontRef idx="minor">
+            <a:schemeClr val="lt1"/>
+          </a:fontRef>
+        </p:style>
+        <p:txBody>
+          <a:bodyPr rtlCol="0" anchor="ctr"/>
+          <a:lstStyle/>
+          <a:p>
+            <a:pPr algn="ctr"/>
+            <a:endParaRPr/>
+          </a:p>
+        </p:txBody>
+      </p:sp>
+      <p:sp>
+        <p:nvSpPr>
+          <p:cNvPr id="11" name="TextBox 10"/>
+          <p:cNvSpPr txBox="1"/>
+          <p:nvPr/>
+        </p:nvSpPr>
+        <p:spPr>
+          <a:xfrm>
+            <a:off x="4645152" y="4059936"/>
+            <a:ext cx="4083710" cy="530351"/>
+          </a:xfrm>
+          <a:prstGeom prst="rect">
+            <a:avLst/>
+          </a:prstGeom>
+          <a:noFill/>
+        </p:spPr>
+        <p:txBody>
+          <a:bodyPr wrap="square" lIns="0" tIns="0" rIns="0" bIns="0">
+            <a:spAutoFit/>
+          </a:bodyPr>
+          <a:lstStyle/>
+          <a:p>
+            <a:pPr algn="l">
+              <a:lnSpc>
+                <a:spcPct val="105000"/>
+              </a:lnSpc>
+            </a:pPr>
+            <a:r>
+              <a:rPr sz="800" b="0">
+                <a:solidFill>
+                  <a:srgbClr val="E2E8F0"/>
+                </a:solidFill>
+                <a:latin typeface="Consolas"/>
+              </a:rPr>
+              <a:t>ro.globalenv['df_r'] = pandas2ri.py2rpy(df[['precio']])</a:t>
+            </a:r>
+          </a:p>
+          <a:p>
+            <a:pPr algn="l">
+              <a:lnSpc>
+                <a:spcPct val="105000"/>
+              </a:lnSpc>
+            </a:pPr>
+            <a:r>
+              <a:rPr sz="800" b="0">
+                <a:solidFill>
+                  <a:srgbClr val="E2E8F0"/>
+                </a:solidFill>
+                <a:latin typeface="Consolas"/>
+              </a:rPr>
+              <a:t>ro.r('hist_data &lt;- hist(df_r$precio, plot=FALSE)')</a:t>
+            </a:r>
+          </a:p>
+          <a:p>
+            <a:pPr algn="l">
+              <a:lnSpc>
+                <a:spcPct val="105000"/>
+              </a:lnSpc>
+            </a:pPr>
+            <a:r>
+              <a:rPr sz="800" b="0">
+                <a:solidFill>
+                  <a:srgbClr val="E2E8F0"/>
+                </a:solidFill>
+                <a:latin typeface="Consolas"/>
+              </a:rPr>
+              <a:t>breaks = list(ro.r('hist_data$breaks'))</a:t>
+            </a:r>
+          </a:p>
+          <a:p>
+            <a:pPr algn="l">
+              <a:lnSpc>
+                <a:spcPct val="105000"/>
+              </a:lnSpc>
+            </a:pPr>
+            <a:r>
+              <a:rPr sz="800" b="0">
+                <a:solidFill>
+                  <a:srgbClr val="E2E8F0"/>
+                </a:solidFill>
+                <a:latin typeface="Consolas"/>
+              </a:rPr>
+              <a:t>counts = list(ro.r('hist_data$counts'))</a:t>
+            </a:r>
+          </a:p>
+        </p:txBody>
+      </p:sp>
+      <p:sp>
+        <p:nvSpPr>
+          <p:cNvPr id="12" name="TextBox 11"/>
+          <p:cNvSpPr txBox="1"/>
+          <p:nvPr/>
+        </p:nvSpPr>
+        <p:spPr>
+          <a:xfrm>
+            <a:off x="457200" y="4826203"/>
+            <a:ext cx="7772400" cy="201168"/>
+          </a:xfrm>
+          <a:prstGeom prst="rect">
+            <a:avLst/>
+          </a:prstGeom>
+          <a:noFill/>
+        </p:spPr>
+        <p:txBody>
+          <a:bodyPr wrap="square" lIns="0" tIns="0" rIns="0" bIns="0">
+            <a:spAutoFit/>
+          </a:bodyPr>
+          <a:lstStyle/>
+          <a:p>
+            <a:pPr algn="l"/>
+            <a:r>
+              <a:rPr sz="800" b="0">
+                <a:solidFill>
+                  <a:srgbClr val="4A6080"/>
+                </a:solidFill>
+                <a:latin typeface="Calibri"/>
+              </a:rPr>
+              <a:t>TFG · Detector de Chollos en Andalucía · Mario Jiménez · Universidad de Sevilla · 2025–2026</a:t>
+            </a:r>
+          </a:p>
+        </p:txBody>
+      </p:sp>
+    </p:spTree>
+  </p:cSld>
+  <p:clrMapOvr>
+    <a:masterClrMapping/>
+  </p:clrMapOvr>
+</p:sld>
+</file>
+
+<file path=ppt/slides/slide15.xml><?xml version="1.0" encoding="utf-8"?>
+<p:sld xmlns:a="http://schemas.openxmlformats.org/drawingml/2006/main" xmlns:r="http://schemas.openxmlformats.org/officeDocument/2006/relationships" xmlns:p="http://schemas.openxmlformats.org/presentationml/2006/main">
+  <p:cSld>
+    <p:bg>
+      <p:bgPr>
+        <a:solidFill>
           <a:srgbClr val="F4F8FC"/>
         </a:solidFill>
         <a:effectLst/>
@@ -8144,7 +8776,7 @@
 </p:sld>
 </file>
 
-<file path=ppt/slides/slide15.xml><?xml version="1.0" encoding="utf-8"?>
+<file path=ppt/slides/slide16.xml><?xml version="1.0" encoding="utf-8"?>
 <p:sld xmlns:a="http://schemas.openxmlformats.org/drawingml/2006/main" xmlns:r="http://schemas.openxmlformats.org/officeDocument/2006/relationships" xmlns:p="http://schemas.openxmlformats.org/presentationml/2006/main">
   <p:cSld name="Slide 7">
     <p:bg>
@@ -9927,344 +10559,6 @@
               <a:buNone/>
             </a:pPr>
             <a:endParaRPr lang="en-US" sz="900" dirty="0"/>
-          </a:p>
-        </p:txBody>
-      </p:sp>
-    </p:spTree>
-  </p:cSld>
-  <p:clrMapOvr>
-    <a:masterClrMapping/>
-  </p:clrMapOvr>
-</p:sld>
-</file>
-
-<file path=ppt/slides/slide16.xml><?xml version="1.0" encoding="utf-8"?>
-<p:sld xmlns:a="http://schemas.openxmlformats.org/drawingml/2006/main" xmlns:r="http://schemas.openxmlformats.org/officeDocument/2006/relationships" xmlns:p="http://schemas.openxmlformats.org/presentationml/2006/main">
-  <p:cSld name="Slide 9">
-    <p:bg>
-      <p:bgPr>
-        <a:solidFill>
-          <a:srgbClr val="1A2E4A"/>
-        </a:solidFill>
-        <a:effectLst/>
-      </p:bgPr>
-    </p:bg>
-    <p:spTree>
-      <p:nvGrpSpPr>
-        <p:cNvPr id="1" name=""/>
-        <p:cNvGrpSpPr/>
-        <p:nvPr/>
-      </p:nvGrpSpPr>
-      <p:grpSpPr>
-        <a:xfrm>
-          <a:off x="0" y="0"/>
-          <a:ext cx="0" cy="0"/>
-          <a:chOff x="0" y="0"/>
-          <a:chExt cx="0" cy="0"/>
-        </a:xfrm>
-      </p:grpSpPr>
-      <p:sp>
-        <p:nvSpPr>
-          <p:cNvPr id="2" name="Shape 0"/>
-          <p:cNvSpPr/>
-          <p:nvPr/>
-        </p:nvSpPr>
-        <p:spPr>
-          <a:xfrm>
-            <a:off x="0" y="0"/>
-            <a:ext cx="9144000" cy="54864"/>
-          </a:xfrm>
-          <a:prstGeom prst="rect">
-            <a:avLst/>
-          </a:prstGeom>
-          <a:solidFill>
-            <a:srgbClr val="D4A843"/>
-          </a:solidFill>
-          <a:ln/>
-        </p:spPr>
-      </p:sp>
-      <p:sp>
-        <p:nvSpPr>
-          <p:cNvPr id="3" name="Text 1"/>
-          <p:cNvSpPr/>
-          <p:nvPr/>
-        </p:nvSpPr>
-        <p:spPr>
-          <a:xfrm>
-            <a:off x="457200" y="146304"/>
-            <a:ext cx="8229600" cy="457200"/>
-          </a:xfrm>
-          <a:prstGeom prst="rect">
-            <a:avLst/>
-          </a:prstGeom>
-          <a:noFill/>
-          <a:ln/>
-        </p:spPr>
-        <p:txBody>
-          <a:bodyPr wrap="square" lIns="0" tIns="0" rIns="0" bIns="0" rtlCol="0" anchor="ctr"/>
-          <a:lstStyle/>
-          <a:p>
-            <a:pPr marL="0" indent="0">
-              <a:buNone/>
-            </a:pPr>
-            <a:r>
-              <a:rPr lang="en-US" sz="2600" b="1" dirty="0">
-                <a:solidFill>
-                  <a:srgbClr val="FFFFFF"/>
-                </a:solidFill>
-                <a:latin typeface="Calibri" pitchFamily="34" charset="0"/>
-                <a:ea typeface="Calibri" pitchFamily="34" charset="-122"/>
-                <a:cs typeface="Calibri" pitchFamily="34" charset="-120"/>
-              </a:rPr>
-              <a:t>Visualización · </a:t>
-            </a:r>
-            <a:r>
-              <a:rPr lang="en-US" sz="2600" b="1" dirty="0" err="1">
-                <a:solidFill>
-                  <a:srgbClr val="FFFFFF"/>
-                </a:solidFill>
-                <a:latin typeface="Calibri" pitchFamily="34" charset="0"/>
-                <a:ea typeface="Calibri" pitchFamily="34" charset="-122"/>
-                <a:cs typeface="Calibri" pitchFamily="34" charset="-120"/>
-              </a:rPr>
-              <a:t>Corrplot</a:t>
-            </a:r>
-            <a:r>
-              <a:rPr lang="en-US" sz="2600" b="1" dirty="0">
-                <a:solidFill>
-                  <a:srgbClr val="FFFFFF"/>
-                </a:solidFill>
-                <a:latin typeface="Calibri" pitchFamily="34" charset="0"/>
-                <a:ea typeface="Calibri" pitchFamily="34" charset="-122"/>
-                <a:cs typeface="Calibri" pitchFamily="34" charset="-120"/>
-              </a:rPr>
-              <a:t> de </a:t>
-            </a:r>
-            <a:r>
-              <a:rPr lang="en-US" sz="2600" b="1" u="sng" dirty="0">
-                <a:solidFill>
-                  <a:srgbClr val="FFFFFF"/>
-                </a:solidFill>
-                <a:latin typeface="Calibri" pitchFamily="34" charset="0"/>
-                <a:ea typeface="Calibri" pitchFamily="34" charset="-122"/>
-                <a:cs typeface="Calibri" pitchFamily="34" charset="-120"/>
-              </a:rPr>
-              <a:t>R Studio</a:t>
-            </a:r>
-            <a:r>
-              <a:rPr lang="en-US" sz="2600" b="1" dirty="0">
-                <a:solidFill>
-                  <a:srgbClr val="FFFFFF"/>
-                </a:solidFill>
-                <a:latin typeface="Calibri" pitchFamily="34" charset="0"/>
-                <a:ea typeface="Calibri" pitchFamily="34" charset="-122"/>
-                <a:cs typeface="Calibri" pitchFamily="34" charset="-120"/>
-              </a:rPr>
-              <a:t> (1/3)</a:t>
-            </a:r>
-            <a:endParaRPr lang="en-US" sz="2600" dirty="0"/>
-          </a:p>
-        </p:txBody>
-      </p:sp>
-      <p:sp>
-        <p:nvSpPr>
-          <p:cNvPr id="4" name="Text 2"/>
-          <p:cNvSpPr/>
-          <p:nvPr/>
-        </p:nvSpPr>
-        <p:spPr>
-          <a:xfrm>
-            <a:off x="457200" y="562726"/>
-            <a:ext cx="8229600" cy="228600"/>
-          </a:xfrm>
-          <a:prstGeom prst="rect">
-            <a:avLst/>
-          </a:prstGeom>
-          <a:noFill/>
-          <a:ln/>
-        </p:spPr>
-        <p:txBody>
-          <a:bodyPr wrap="square" lIns="0" tIns="0" rIns="0" bIns="0" rtlCol="0" anchor="ctr"/>
-          <a:lstStyle/>
-          <a:p>
-            <a:pPr marL="0" indent="0">
-              <a:buNone/>
-            </a:pPr>
-            <a:r>
-              <a:rPr lang="en-US" sz="1000" dirty="0">
-                <a:solidFill>
-                  <a:srgbClr val="F0C060"/>
-                </a:solidFill>
-                <a:latin typeface="Consolas" pitchFamily="34" charset="0"/>
-                <a:ea typeface="Consolas" pitchFamily="34" charset="-122"/>
-                <a:cs typeface="Consolas" pitchFamily="34" charset="-120"/>
-              </a:rPr>
-              <a:t>Correlación lineal (Pearson) · dataset codificado numéricamente</a:t>
-            </a:r>
-            <a:endParaRPr lang="en-US" sz="1000" dirty="0"/>
-          </a:p>
-        </p:txBody>
-      </p:sp>
-      <p:pic>
-        <p:nvPicPr>
-          <p:cNvPr id="10" name="Image 0" descr="preencoded.png"/>
-          <p:cNvPicPr>
-            <a:picLocks noChangeAspect="1"/>
-          </p:cNvPicPr>
-          <p:nvPr/>
-        </p:nvPicPr>
-        <p:blipFill>
-          <a:blip r:embed="rId3"/>
-          <a:stretch>
-            <a:fillRect/>
-          </a:stretch>
-        </p:blipFill>
-        <p:spPr>
-          <a:xfrm>
-            <a:off x="1451819" y="982104"/>
-            <a:ext cx="6788377" cy="3940928"/>
-          </a:xfrm>
-          <a:prstGeom prst="rect">
-            <a:avLst/>
-          </a:prstGeom>
-        </p:spPr>
-      </p:pic>
-      <p:sp>
-        <p:nvSpPr>
-          <p:cNvPr id="33" name="Text 30"/>
-          <p:cNvSpPr/>
-          <p:nvPr/>
-        </p:nvSpPr>
-        <p:spPr>
-          <a:xfrm>
-            <a:off x="457200" y="4928616"/>
-            <a:ext cx="7772400" cy="201168"/>
-          </a:xfrm>
-          <a:prstGeom prst="rect">
-            <a:avLst/>
-          </a:prstGeom>
-          <a:noFill/>
-          <a:ln/>
-        </p:spPr>
-        <p:txBody>
-          <a:bodyPr wrap="square" lIns="0" tIns="0" rIns="0" bIns="0" rtlCol="0" anchor="ctr"/>
-          <a:lstStyle/>
-          <a:p>
-            <a:pPr marL="0" indent="0" algn="l">
-              <a:buNone/>
-            </a:pPr>
-            <a:r>
-              <a:rPr lang="en-US" sz="800" dirty="0">
-                <a:solidFill>
-                  <a:srgbClr val="4A6080"/>
-                </a:solidFill>
-                <a:latin typeface="Calibri" pitchFamily="34" charset="0"/>
-                <a:ea typeface="Calibri" pitchFamily="34" charset="-122"/>
-                <a:cs typeface="Calibri" pitchFamily="34" charset="-120"/>
-              </a:rPr>
-              <a:t>TFG · Detector de Chollos en Andalucía · Mario Jiménez · Universidad de Sevilla</a:t>
-            </a:r>
-            <a:endParaRPr lang="en-US" sz="800" dirty="0"/>
-          </a:p>
-        </p:txBody>
-      </p:sp>
-      <p:sp>
-        <p:nvSpPr>
-          <p:cNvPr id="34" name="Text 31"/>
-          <p:cNvSpPr/>
-          <p:nvPr/>
-        </p:nvSpPr>
-        <p:spPr>
-          <a:xfrm>
-            <a:off x="8595360" y="4754880"/>
-            <a:ext cx="365760" cy="228600"/>
-          </a:xfrm>
-          <a:prstGeom prst="rect">
-            <a:avLst/>
-          </a:prstGeom>
-          <a:noFill/>
-          <a:ln/>
-        </p:spPr>
-        <p:txBody>
-          <a:bodyPr wrap="square" lIns="0" tIns="0" rIns="0" bIns="0" rtlCol="0" anchor="ctr"/>
-          <a:lstStyle/>
-          <a:p>
-            <a:pPr marL="0" indent="0" algn="ctr">
-              <a:buNone/>
-            </a:pPr>
-            <a:endParaRPr lang="en-US" sz="900" dirty="0"/>
-          </a:p>
-        </p:txBody>
-      </p:sp>
-      <p:sp>
-        <p:nvSpPr>
-          <p:cNvPr id="50" name="LabelCorrplot"/>
-          <p:cNvSpPr/>
-          <p:nvPr/>
-        </p:nvSpPr>
-        <p:spPr>
-          <a:xfrm>
-            <a:off x="274680" y="786436"/>
-            <a:ext cx="8594640" cy="182880"/>
-          </a:xfrm>
-          <a:prstGeom prst="rect">
-            <a:avLst/>
-          </a:prstGeom>
-          <a:noFill/>
-          <a:ln/>
-        </p:spPr>
-        <p:txBody>
-          <a:bodyPr wrap="square" lIns="0" tIns="0" rIns="0" bIns="0" rtlCol="0" anchor="ctr"/>
-          <a:lstStyle/>
-          <a:p>
-            <a:pPr marL="0" indent="0">
-              <a:buNone/>
-            </a:pPr>
-            <a:r>
-              <a:rPr lang="es-ES" sz="900" b="1" dirty="0">
-                <a:solidFill>
-                  <a:srgbClr val="D4A843"/>
-                </a:solidFill>
-                <a:latin typeface="Calibri" pitchFamily="34" charset="0"/>
-              </a:rPr>
-              <a:t>📊  Pearson · </a:t>
-            </a:r>
-            <a:r>
-              <a:rPr lang="es-ES" sz="900" b="1" dirty="0">
-                <a:solidFill>
-                  <a:srgbClr val="FF0000"/>
-                </a:solidFill>
-                <a:latin typeface="Calibri" pitchFamily="34" charset="0"/>
-              </a:rPr>
-              <a:t>R Studio </a:t>
-            </a:r>
-            <a:r>
-              <a:rPr lang="es-ES" sz="900" b="1" dirty="0" err="1">
-                <a:solidFill>
-                  <a:srgbClr val="FF0000"/>
-                </a:solidFill>
-                <a:latin typeface="Calibri" pitchFamily="34" charset="0"/>
-              </a:rPr>
-              <a:t>corrplot</a:t>
-            </a:r>
-            <a:r>
-              <a:rPr lang="es-ES" sz="900" b="1" dirty="0">
-                <a:solidFill>
-                  <a:srgbClr val="FF0000"/>
-                </a:solidFill>
-                <a:latin typeface="Calibri" pitchFamily="34" charset="0"/>
-              </a:rPr>
-              <a:t> </a:t>
-            </a:r>
-            <a:r>
-              <a:rPr lang="es-ES" sz="900" b="1" dirty="0">
-                <a:solidFill>
-                  <a:srgbClr val="D4A843"/>
-                </a:solidFill>
-                <a:latin typeface="Calibri" pitchFamily="34" charset="0"/>
-              </a:rPr>
-              <a:t>· 30 variables · LabelEncoder + get_dummies</a:t>
-            </a:r>
           </a:p>
         </p:txBody>
       </p:sp>
@@ -10354,7 +10648,51 @@
                 <a:ea typeface="Calibri" pitchFamily="34" charset="-122"/>
                 <a:cs typeface="Calibri" pitchFamily="34" charset="-120"/>
               </a:rPr>
-              <a:t>Visualización de Datos  (2/3)</a:t>
+              <a:t>Visualización · </a:t>
+            </a:r>
+            <a:r>
+              <a:rPr lang="en-US" sz="2600" b="1" dirty="0" err="1">
+                <a:solidFill>
+                  <a:srgbClr val="FFFFFF"/>
+                </a:solidFill>
+                <a:latin typeface="Calibri" pitchFamily="34" charset="0"/>
+                <a:ea typeface="Calibri" pitchFamily="34" charset="-122"/>
+                <a:cs typeface="Calibri" pitchFamily="34" charset="-120"/>
+              </a:rPr>
+              <a:t>Corrplot</a:t>
+            </a:r>
+            <a:r>
+              <a:rPr lang="en-US" sz="2600" b="1" dirty="0">
+                <a:solidFill>
+                  <a:srgbClr val="FFFFFF"/>
+                </a:solidFill>
+                <a:latin typeface="Calibri" pitchFamily="34" charset="0"/>
+                <a:ea typeface="Calibri" pitchFamily="34" charset="-122"/>
+                <a:cs typeface="Calibri" pitchFamily="34" charset="-120"/>
+              </a:rPr>
+              <a:t> de </a:t>
+            </a:r>
+            <a:r>
+              <a:rPr lang="en-US" sz="2600" b="1" u="sng" dirty="0">
+                <a:solidFill>
+                  <a:srgbClr val="FFFFFF"/>
+                </a:solidFill>
+                <a:latin typeface="Calibri" pitchFamily="34" charset="0"/>
+                <a:ea typeface="Calibri" pitchFamily="34" charset="-122"/>
+                <a:cs typeface="Calibri" pitchFamily="34" charset="-120"/>
+              </a:rPr>
+              <a:t>R Studio</a:t>
+            </a:r>
+            <a:r>
+              <a:rPr lang="en-US" sz="2600" b="1" dirty="0">
+                <a:solidFill>
+                  <a:srgbClr val="FFFFFF"/>
+                </a:solidFill>
+                <a:latin typeface="Calibri" pitchFamily="34" charset="0"/>
+                <a:ea typeface="Calibri" pitchFamily="34" charset="-122"/>
+                <a:cs typeface="Calibri" pitchFamily="34" charset="-120"/>
+              </a:rPr>
+              <a:t> (1/3)</a:t>
             </a:r>
             <a:endParaRPr lang="en-US" sz="2600" dirty="0"/>
           </a:p>
@@ -10368,7 +10706,7 @@
         </p:nvSpPr>
         <p:spPr>
           <a:xfrm>
-            <a:off x="457200" y="603504"/>
+            <a:off x="457200" y="562726"/>
             <a:ext cx="8229600" cy="228600"/>
           </a:xfrm>
           <a:prstGeom prst="rect">
@@ -10393,7 +10731,7 @@
                 <a:ea typeface="Consolas" pitchFamily="34" charset="-122"/>
                 <a:cs typeface="Consolas" pitchFamily="34" charset="-120"/>
               </a:rPr>
-              <a:t>Regresión Lineal  ·  Mapa Coroplético Andalucía</a:t>
+              <a:t>Correlación lineal (Pearson) · dataset codificado numéricamente</a:t>
             </a:r>
             <a:endParaRPr lang="en-US" sz="1000" dirty="0"/>
           </a:p>
@@ -10408,15 +10746,15 @@
           <p:nvPr/>
         </p:nvPicPr>
         <p:blipFill>
-          <a:blip r:embed="rId2"/>
+          <a:blip r:embed="rId3"/>
           <a:stretch>
             <a:fillRect/>
           </a:stretch>
         </p:blipFill>
         <p:spPr>
           <a:xfrm>
-            <a:off x="96336" y="1175004"/>
-            <a:ext cx="4535424" cy="3310128"/>
+            <a:off x="1451819" y="982104"/>
+            <a:ext cx="6788377" cy="3940928"/>
           </a:xfrm>
           <a:prstGeom prst="rect">
             <a:avLst/>
@@ -10431,7 +10769,7 @@
         </p:nvSpPr>
         <p:spPr>
           <a:xfrm>
-            <a:off x="457200" y="4828032"/>
+            <a:off x="457200" y="4928616"/>
             <a:ext cx="7772400" cy="201168"/>
           </a:xfrm>
           <a:prstGeom prst="rect">
@@ -10498,8 +10836,8 @@
         </p:nvSpPr>
         <p:spPr>
           <a:xfrm>
-            <a:off x="274320" y="770400"/>
-            <a:ext cx="4389120" cy="190500"/>
+            <a:off x="274680" y="786436"/>
+            <a:ext cx="8594640" cy="182880"/>
           </a:xfrm>
           <a:prstGeom prst="rect">
             <a:avLst/>
@@ -10521,131 +10859,43 @@
                 </a:solidFill>
                 <a:latin typeface="Calibri" pitchFamily="34" charset="0"/>
               </a:rPr>
-              <a:t>Regresión Lineal: tamaño_habitacion vs precio</a:t>
-            </a:r>
-          </a:p>
-        </p:txBody>
-      </p:sp>
-      <p:sp>
-        <p:nvSpPr>
-          <p:cNvPr id="51" name="LabelArbol"/>
-          <p:cNvSpPr/>
-          <p:nvPr/>
-        </p:nvSpPr>
-        <p:spPr>
-          <a:xfrm>
-            <a:off x="4731120" y="770400"/>
-            <a:ext cx="4130640" cy="190500"/>
-          </a:xfrm>
-          <a:prstGeom prst="rect">
-            <a:avLst/>
-          </a:prstGeom>
-          <a:noFill/>
-          <a:ln/>
-        </p:spPr>
-        <p:txBody>
-          <a:bodyPr wrap="square" lIns="0" tIns="0" rIns="0" bIns="0" rtlCol="0" anchor="ctr"/>
-          <a:lstStyle/>
-          <a:p>
-            <a:pPr marL="0" indent="0">
-              <a:buNone/>
-            </a:pPr>
+              <a:t>📊  Pearson · </a:t>
+            </a:r>
             <a:r>
               <a:rPr lang="es-ES" sz="900" b="1" dirty="0">
                 <a:solidFill>
+                  <a:srgbClr val="FF0000"/>
+                </a:solidFill>
+                <a:latin typeface="Calibri" pitchFamily="34" charset="0"/>
+              </a:rPr>
+              <a:t>R Studio </a:t>
+            </a:r>
+            <a:r>
+              <a:rPr lang="es-ES" sz="900" b="1" dirty="0" err="1">
+                <a:solidFill>
+                  <a:srgbClr val="FF0000"/>
+                </a:solidFill>
+                <a:latin typeface="Calibri" pitchFamily="34" charset="0"/>
+              </a:rPr>
+              <a:t>corrplot</a:t>
+            </a:r>
+            <a:r>
+              <a:rPr lang="es-ES" sz="900" b="1" dirty="0">
+                <a:solidFill>
+                  <a:srgbClr val="FF0000"/>
+                </a:solidFill>
+                <a:latin typeface="Calibri" pitchFamily="34" charset="0"/>
+              </a:rPr>
+              <a:t> </a:t>
+            </a:r>
+            <a:r>
+              <a:rPr lang="es-ES" sz="900" b="1" dirty="0">
+                <a:solidFill>
                   <a:srgbClr val="D4A843"/>
                 </a:solidFill>
                 <a:latin typeface="Calibri" pitchFamily="34" charset="0"/>
               </a:rPr>
-              <a:t>🗺️  Mapa Coroplético Andalucía  ·  plotly.express</a:t>
-            </a:r>
-          </a:p>
-        </p:txBody>
-      </p:sp>
-      <p:sp>
-        <p:nvSpPr>
-          <p:cNvPr id="60" name="MapaDesc"/>
-          <p:cNvSpPr/>
-          <p:nvPr/>
-        </p:nvSpPr>
-        <p:spPr>
-          <a:xfrm>
-            <a:off x="4731120" y="960120"/>
-            <a:ext cx="4130640" cy="1143000"/>
-          </a:xfrm>
-          <a:prstGeom prst="rect">
-            <a:avLst/>
-          </a:prstGeom>
-          <a:solidFill>
-            <a:srgbClr val="1E3A5F"/>
-          </a:solidFill>
-          <a:ln/>
-        </p:spPr>
-        <p:txBody>
-          <a:bodyPr wrap="square" lIns="91440" tIns="91440" rIns="91440" bIns="91440" rtlCol="0" anchor="t"/>
-          <a:lstStyle/>
-          <a:p>
-            <a:pPr marL="0" indent="0">
-              <a:buNone/>
-            </a:pPr>
-            <a:r>
-              <a:rPr lang="es-ES" sz="900" dirty="0">
-                <a:solidFill>
-                  <a:srgbClr val="F4F8FC"/>
-                </a:solidFill>
-                <a:latin typeface="Calibri" pitchFamily="34" charset="0"/>
-              </a:rPr>
-              <a:t>Choropleth por provincias andaluzas (GeoJSON spain-provinces) + scatter de alojamientos únicos (lat/lon). El HTML resultante se usa como mapa por defecto en la app Streamlit del usuario final.</a:t>
-            </a:r>
-          </a:p>
-        </p:txBody>
-      </p:sp>
-      <p:sp>
-        <p:nvSpPr>
-          <p:cNvPr id="61" name="MapaCode"/>
-          <p:cNvSpPr/>
-          <p:nvPr/>
-        </p:nvSpPr>
-        <p:spPr>
-          <a:xfrm>
-            <a:off x="4731120" y="2160120"/>
-            <a:ext cx="4130640" cy="1761876"/>
-          </a:xfrm>
-          <a:prstGeom prst="rect">
-            <a:avLst/>
-          </a:prstGeom>
-          <a:solidFill>
-            <a:srgbClr val="0D1117"/>
-          </a:solidFill>
-          <a:ln/>
-        </p:spPr>
-        <p:txBody>
-          <a:bodyPr wrap="square" lIns="91440" tIns="91440" rIns="91440" bIns="91440" rtlCol="0" anchor="t"/>
-          <a:lstStyle/>
-          <a:p>
-            <a:pPr marL="0" indent="0">
-              <a:buNone/>
-            </a:pPr>
-            <a:r>
-              <a:rPr lang="en-US" sz="800" dirty="0">
-                <a:solidFill>
-                  <a:srgbClr val="E2E8F0"/>
-                </a:solidFill>
-                <a:latin typeface="Consolas" pitchFamily="49" charset="0"/>
-              </a:rPr>
-              <a:t># Mapa coroplético + scatter
-fig = px.choropleth(
-  locations=NOMBRES_PROVINCIAS,
-  geojson=geojson,
-  featureidkey="properties.name",
-  color=alojamientos_por_provincia,
-  color_continuous_scale="Reds")
-fig.add_scattergeo(
-  lat=df['latitud'],
-  lon=df['longitud'],
-  mode="markers",
-  marker=dict(size=5,color="green"))
-fig.write_html(salida)  # → Streamlit</a:t>
+              <a:t>· 30 variables · LabelEncoder + get_dummies</a:t>
             </a:r>
           </a:p>
         </p:txBody>
@@ -10736,29 +10986,7 @@
                 <a:ea typeface="Calibri" pitchFamily="34" charset="-122"/>
                 <a:cs typeface="Calibri" pitchFamily="34" charset="-120"/>
               </a:rPr>
-              <a:t>Visualización · Árbol de </a:t>
-            </a:r>
-            <a:r>
-              <a:rPr lang="en-US" sz="2600" b="1" dirty="0" err="1">
-                <a:solidFill>
-                  <a:srgbClr val="FFFFFF"/>
-                </a:solidFill>
-                <a:latin typeface="Calibri" pitchFamily="34" charset="0"/>
-                <a:ea typeface="Calibri" pitchFamily="34" charset="-122"/>
-                <a:cs typeface="Calibri" pitchFamily="34" charset="-120"/>
-              </a:rPr>
-              <a:t>Decisión</a:t>
-            </a:r>
-            <a:r>
-              <a:rPr lang="en-US" sz="2600" b="1" dirty="0">
-                <a:solidFill>
-                  <a:srgbClr val="FFFFFF"/>
-                </a:solidFill>
-                <a:latin typeface="Calibri" pitchFamily="34" charset="0"/>
-                <a:ea typeface="Calibri" pitchFamily="34" charset="-122"/>
-                <a:cs typeface="Calibri" pitchFamily="34" charset="-120"/>
-              </a:rPr>
-              <a:t> (3/3)</a:t>
+              <a:t>Visualización de Datos  (2/3)</a:t>
             </a:r>
             <a:endParaRPr lang="en-US" sz="2600" dirty="0"/>
           </a:p>
@@ -10797,7 +11025,7 @@
                 <a:ea typeface="Consolas" pitchFamily="34" charset="-122"/>
                 <a:cs typeface="Consolas" pitchFamily="34" charset="-120"/>
               </a:rPr>
-              <a:t>sklearn plot_tree · variable raíz: tamaño_habitacion ≤ 75.5 · primeros 4 niveles</a:t>
+              <a:t>Regresión Lineal  ·  Mapa Coroplético Andalucía</a:t>
             </a:r>
             <a:endParaRPr lang="en-US" sz="1000" dirty="0"/>
           </a:p>
@@ -10805,7 +11033,7 @@
       </p:sp>
       <p:pic>
         <p:nvPicPr>
-          <p:cNvPr id="60" name="ArbolDecision" descr="arbol_decision.png"/>
+          <p:cNvPr id="10" name="Image 0" descr="preencoded.png"/>
           <p:cNvPicPr>
             <a:picLocks noChangeAspect="1"/>
           </p:cNvPicPr>
@@ -10819,8 +11047,24 @@
         </p:blipFill>
         <p:spPr>
           <a:xfrm>
-            <a:off x="274320" y="960120"/>
-            <a:ext cx="8594640" cy="4014720"/>
+            <a:off x="96336" y="1175004"/>
+            <a:ext cx="4535424" cy="3310128"/>
+          </a:xfrm>
+          <a:prstGeom prst="rect">
+            <a:avLst/>
+          </a:prstGeom>
+        </p:spPr>
+      </p:pic>
+      <p:sp>
+        <p:nvSpPr>
+          <p:cNvPr id="33" name="Text 30"/>
+          <p:cNvSpPr/>
+          <p:nvPr/>
+        </p:nvSpPr>
+        <p:spPr>
+          <a:xfrm>
+            <a:off x="457200" y="4828032"/>
+            <a:ext cx="7772400" cy="201168"/>
           </a:xfrm>
           <a:prstGeom prst="rect">
             <a:avLst/>
@@ -10828,7 +11072,216 @@
           <a:noFill/>
           <a:ln/>
         </p:spPr>
-      </p:pic>
+        <p:txBody>
+          <a:bodyPr wrap="square" lIns="0" tIns="0" rIns="0" bIns="0" rtlCol="0" anchor="ctr"/>
+          <a:lstStyle/>
+          <a:p>
+            <a:pPr marL="0" indent="0" algn="l">
+              <a:buNone/>
+            </a:pPr>
+            <a:r>
+              <a:rPr lang="en-US" sz="800" dirty="0">
+                <a:solidFill>
+                  <a:srgbClr val="4A6080"/>
+                </a:solidFill>
+                <a:latin typeface="Calibri" pitchFamily="34" charset="0"/>
+                <a:ea typeface="Calibri" pitchFamily="34" charset="-122"/>
+                <a:cs typeface="Calibri" pitchFamily="34" charset="-120"/>
+              </a:rPr>
+              <a:t>TFG · Detector de Chollos en Andalucía · Mario Jiménez · Universidad de Sevilla</a:t>
+            </a:r>
+            <a:endParaRPr lang="en-US" sz="800" dirty="0"/>
+          </a:p>
+        </p:txBody>
+      </p:sp>
+      <p:sp>
+        <p:nvSpPr>
+          <p:cNvPr id="34" name="Text 31"/>
+          <p:cNvSpPr/>
+          <p:nvPr/>
+        </p:nvSpPr>
+        <p:spPr>
+          <a:xfrm>
+            <a:off x="8595360" y="4754880"/>
+            <a:ext cx="365760" cy="228600"/>
+          </a:xfrm>
+          <a:prstGeom prst="rect">
+            <a:avLst/>
+          </a:prstGeom>
+          <a:noFill/>
+          <a:ln/>
+        </p:spPr>
+        <p:txBody>
+          <a:bodyPr wrap="square" lIns="0" tIns="0" rIns="0" bIns="0" rtlCol="0" anchor="ctr"/>
+          <a:lstStyle/>
+          <a:p>
+            <a:pPr marL="0" indent="0" algn="ctr">
+              <a:buNone/>
+            </a:pPr>
+            <a:endParaRPr lang="en-US" sz="900" dirty="0"/>
+          </a:p>
+        </p:txBody>
+      </p:sp>
+      <p:sp>
+        <p:nvSpPr>
+          <p:cNvPr id="50" name="LabelCorrplot"/>
+          <p:cNvSpPr/>
+          <p:nvPr/>
+        </p:nvSpPr>
+        <p:spPr>
+          <a:xfrm>
+            <a:off x="274320" y="770400"/>
+            <a:ext cx="4389120" cy="190500"/>
+          </a:xfrm>
+          <a:prstGeom prst="rect">
+            <a:avLst/>
+          </a:prstGeom>
+          <a:noFill/>
+          <a:ln/>
+        </p:spPr>
+        <p:txBody>
+          <a:bodyPr wrap="square" lIns="0" tIns="0" rIns="0" bIns="0" rtlCol="0" anchor="ctr"/>
+          <a:lstStyle/>
+          <a:p>
+            <a:pPr marL="0" indent="0">
+              <a:buNone/>
+            </a:pPr>
+            <a:r>
+              <a:rPr lang="es-ES" sz="900" b="1" dirty="0">
+                <a:solidFill>
+                  <a:srgbClr val="D4A843"/>
+                </a:solidFill>
+                <a:latin typeface="Calibri" pitchFamily="34" charset="0"/>
+              </a:rPr>
+              <a:t>Regresión Lineal: tamaño_habitacion vs precio</a:t>
+            </a:r>
+          </a:p>
+        </p:txBody>
+      </p:sp>
+      <p:sp>
+        <p:nvSpPr>
+          <p:cNvPr id="51" name="LabelArbol"/>
+          <p:cNvSpPr/>
+          <p:nvPr/>
+        </p:nvSpPr>
+        <p:spPr>
+          <a:xfrm>
+            <a:off x="4731120" y="770400"/>
+            <a:ext cx="4130640" cy="190500"/>
+          </a:xfrm>
+          <a:prstGeom prst="rect">
+            <a:avLst/>
+          </a:prstGeom>
+          <a:noFill/>
+          <a:ln/>
+        </p:spPr>
+        <p:txBody>
+          <a:bodyPr wrap="square" lIns="0" tIns="0" rIns="0" bIns="0" rtlCol="0" anchor="ctr"/>
+          <a:lstStyle/>
+          <a:p>
+            <a:pPr marL="0" indent="0">
+              <a:buNone/>
+            </a:pPr>
+            <a:r>
+              <a:rPr lang="es-ES" sz="900" b="1" dirty="0">
+                <a:solidFill>
+                  <a:srgbClr val="D4A843"/>
+                </a:solidFill>
+                <a:latin typeface="Calibri" pitchFamily="34" charset="0"/>
+              </a:rPr>
+              <a:t>🗺️  Mapa Coroplético Andalucía  ·  plotly.express</a:t>
+            </a:r>
+          </a:p>
+        </p:txBody>
+      </p:sp>
+      <p:sp>
+        <p:nvSpPr>
+          <p:cNvPr id="60" name="MapaDesc"/>
+          <p:cNvSpPr/>
+          <p:nvPr/>
+        </p:nvSpPr>
+        <p:spPr>
+          <a:xfrm>
+            <a:off x="4731120" y="960120"/>
+            <a:ext cx="4130640" cy="1143000"/>
+          </a:xfrm>
+          <a:prstGeom prst="rect">
+            <a:avLst/>
+          </a:prstGeom>
+          <a:solidFill>
+            <a:srgbClr val="1E3A5F"/>
+          </a:solidFill>
+          <a:ln/>
+        </p:spPr>
+        <p:txBody>
+          <a:bodyPr wrap="square" lIns="91440" tIns="91440" rIns="91440" bIns="91440" rtlCol="0" anchor="t"/>
+          <a:lstStyle/>
+          <a:p>
+            <a:pPr marL="0" indent="0">
+              <a:buNone/>
+            </a:pPr>
+            <a:r>
+              <a:rPr lang="es-ES" sz="900" dirty="0">
+                <a:solidFill>
+                  <a:srgbClr val="F4F8FC"/>
+                </a:solidFill>
+                <a:latin typeface="Calibri" pitchFamily="34" charset="0"/>
+              </a:rPr>
+              <a:t>Choropleth por provincias andaluzas (GeoJSON spain-provinces) + scatter de alojamientos únicos (lat/lon). El HTML resultante se usa como mapa por defecto en la app Streamlit del usuario final.</a:t>
+            </a:r>
+          </a:p>
+        </p:txBody>
+      </p:sp>
+      <p:sp>
+        <p:nvSpPr>
+          <p:cNvPr id="61" name="MapaCode"/>
+          <p:cNvSpPr/>
+          <p:nvPr/>
+        </p:nvSpPr>
+        <p:spPr>
+          <a:xfrm>
+            <a:off x="4731120" y="2160120"/>
+            <a:ext cx="4130640" cy="1761876"/>
+          </a:xfrm>
+          <a:prstGeom prst="rect">
+            <a:avLst/>
+          </a:prstGeom>
+          <a:solidFill>
+            <a:srgbClr val="0D1117"/>
+          </a:solidFill>
+          <a:ln/>
+        </p:spPr>
+        <p:txBody>
+          <a:bodyPr wrap="square" lIns="91440" tIns="91440" rIns="91440" bIns="91440" rtlCol="0" anchor="t"/>
+          <a:lstStyle/>
+          <a:p>
+            <a:pPr marL="0" indent="0">
+              <a:buNone/>
+            </a:pPr>
+            <a:r>
+              <a:rPr lang="en-US" sz="800" dirty="0">
+                <a:solidFill>
+                  <a:srgbClr val="E2E8F0"/>
+                </a:solidFill>
+                <a:latin typeface="Consolas" pitchFamily="49" charset="0"/>
+              </a:rPr>
+              <a:t># Mapa coroplético + scatter
+fig = px.choropleth(
+  locations=NOMBRES_PROVINCIAS,
+  geojson=geojson,
+  featureidkey="properties.name",
+  color=alojamientos_por_provincia,
+  color_continuous_scale="Reds")
+fig.add_scattergeo(
+  lat=df['latitud'],
+  lon=df['longitud'],
+  mode="markers",
+  marker=dict(size=5,color="green"))
+fig.write_html(salida)  # → Streamlit</a:t>
+            </a:r>
+          </a:p>
+        </p:txBody>
+      </p:sp>
     </p:spTree>
   </p:cSld>
   <p:clrMapOvr>
@@ -10839,7 +11292,7 @@
 
 <file path=ppt/slides/slide19.xml><?xml version="1.0" encoding="utf-8"?>
 <p:sld xmlns:a="http://schemas.openxmlformats.org/drawingml/2006/main" xmlns:r="http://schemas.openxmlformats.org/officeDocument/2006/relationships" xmlns:p="http://schemas.openxmlformats.org/presentationml/2006/main">
-  <p:cSld>
+  <p:cSld name="Slide 9">
     <p:bg>
       <p:bgPr>
         <a:solidFill>
@@ -10864,7 +11317,7 @@
       </p:grpSpPr>
       <p:sp>
         <p:nvSpPr>
-          <p:cNvPr id="2" name="Gold"/>
+          <p:cNvPr id="2" name="Shape 0"/>
           <p:cNvSpPr/>
           <p:nvPr/>
         </p:nvSpPr>
@@ -10884,13 +11337,13 @@
       </p:sp>
       <p:sp>
         <p:nvSpPr>
-          <p:cNvPr id="3" name="Title"/>
-          <p:cNvSpPr/>
-          <p:nvPr/>
-        </p:nvSpPr>
-        <p:spPr>
-          <a:xfrm>
-            <a:off x="457200" y="109728"/>
+          <p:cNvPr id="3" name="Text 1"/>
+          <p:cNvSpPr/>
+          <p:nvPr/>
+        </p:nvSpPr>
+        <p:spPr>
+          <a:xfrm>
+            <a:off x="457200" y="146304"/>
             <a:ext cx="8229600" cy="457200"/>
           </a:xfrm>
           <a:prstGeom prst="rect">
@@ -10907,20 +11360,45 @@
               <a:buNone/>
             </a:pPr>
             <a:r>
-              <a:rPr lang="es-ES" sz="2400" b="1" dirty="0">
+              <a:rPr lang="en-US" sz="2600" b="1" dirty="0">
                 <a:solidFill>
                   <a:srgbClr val="FFFFFF"/>
                 </a:solidFill>
                 <a:latin typeface="Calibri" pitchFamily="34" charset="0"/>
-              </a:rPr>
-              <a:t>Resultados de los Modelos · Conjunto de TEST</a:t>
-            </a:r>
-          </a:p>
-        </p:txBody>
-      </p:sp>
-      <p:sp>
-        <p:nvSpPr>
-          <p:cNvPr id="4" name="Sub"/>
+                <a:ea typeface="Calibri" pitchFamily="34" charset="-122"/>
+                <a:cs typeface="Calibri" pitchFamily="34" charset="-120"/>
+              </a:rPr>
+              <a:t>Visualización · Árbol de </a:t>
+            </a:r>
+            <a:r>
+              <a:rPr lang="en-US" sz="2600" b="1" dirty="0" err="1">
+                <a:solidFill>
+                  <a:srgbClr val="FFFFFF"/>
+                </a:solidFill>
+                <a:latin typeface="Calibri" pitchFamily="34" charset="0"/>
+                <a:ea typeface="Calibri" pitchFamily="34" charset="-122"/>
+                <a:cs typeface="Calibri" pitchFamily="34" charset="-120"/>
+              </a:rPr>
+              <a:t>Decisión</a:t>
+            </a:r>
+            <a:r>
+              <a:rPr lang="en-US" sz="2600" b="1" dirty="0">
+                <a:solidFill>
+                  <a:srgbClr val="FFFFFF"/>
+                </a:solidFill>
+                <a:latin typeface="Calibri" pitchFamily="34" charset="0"/>
+                <a:ea typeface="Calibri" pitchFamily="34" charset="-122"/>
+                <a:cs typeface="Calibri" pitchFamily="34" charset="-120"/>
+              </a:rPr>
+              <a:t> (3/3)</a:t>
+            </a:r>
+            <a:endParaRPr lang="en-US" sz="2600" dirty="0"/>
+          </a:p>
+        </p:txBody>
+      </p:sp>
+      <p:sp>
+        <p:nvSpPr>
+          <p:cNvPr id="4" name="Text 2"/>
           <p:cNvSpPr/>
           <p:nvPr/>
         </p:nvSpPr>
@@ -10943,58 +11421,23 @@
               <a:buNone/>
             </a:pPr>
             <a:r>
-              <a:rPr lang="es-ES" sz="1000" dirty="0">
+              <a:rPr lang="en-US" sz="1000" dirty="0">
                 <a:solidFill>
                   <a:srgbClr val="F0C060"/>
                 </a:solidFill>
                 <a:latin typeface="Consolas" pitchFamily="34" charset="0"/>
-              </a:rPr>
-              <a:t>Modelizacion/Modelizacion.py · Evaluación final (X_test, usado una única vez)</a:t>
-            </a:r>
-          </a:p>
-        </p:txBody>
-      </p:sp>
-      <p:sp>
-        <p:nvSpPr>
-          <p:cNvPr id="5" name="LblTabla"/>
-          <p:cNvSpPr/>
-          <p:nvPr/>
-        </p:nvSpPr>
-        <p:spPr>
-          <a:xfrm>
-            <a:off x="182880" y="868680"/>
-            <a:ext cx="5486400" cy="228600"/>
-          </a:xfrm>
-          <a:prstGeom prst="rect">
-            <a:avLst/>
-          </a:prstGeom>
-          <a:solidFill>
-            <a:srgbClr val="2A5080"/>
-          </a:solidFill>
-          <a:ln/>
-        </p:spPr>
-        <p:txBody>
-          <a:bodyPr wrap="square" lIns="91440" tIns="45720" rIns="91440" bIns="45720" rtlCol="0" anchor="ctr"/>
-          <a:lstStyle/>
-          <a:p>
-            <a:pPr marL="0" indent="0">
-              <a:buNone/>
-            </a:pPr>
-            <a:r>
-              <a:rPr lang="es-ES" sz="950" b="1" dirty="0">
-                <a:solidFill>
-                  <a:srgbClr val="D4A843"/>
-                </a:solidFill>
-                <a:latin typeface="Calibri" pitchFamily="34" charset="0"/>
-              </a:rPr>
-              <a:t>📊  Comparativa de modelos — Métricas sobre conjunto de TEST</a:t>
-            </a:r>
+                <a:ea typeface="Consolas" pitchFamily="34" charset="-122"/>
+                <a:cs typeface="Consolas" pitchFamily="34" charset="-120"/>
+              </a:rPr>
+              <a:t>sklearn plot_tree · variable raíz: tamaño_habitacion ≤ 75.5 · primeros 4 niveles</a:t>
+            </a:r>
+            <a:endParaRPr lang="en-US" sz="1000" dirty="0"/>
           </a:p>
         </p:txBody>
       </p:sp>
       <p:pic>
         <p:nvPicPr>
-          <p:cNvPr id="6" name="TablaMetricas"/>
+          <p:cNvPr id="60" name="ArbolDecision" descr="arbol_decision.png"/>
           <p:cNvPicPr>
             <a:picLocks noChangeAspect="1"/>
           </p:cNvPicPr>
@@ -11008,8 +11451,8 @@
         </p:blipFill>
         <p:spPr>
           <a:xfrm>
-            <a:off x="182880" y="1097280"/>
-            <a:ext cx="5486400" cy="1554480"/>
+            <a:off x="274320" y="960120"/>
+            <a:ext cx="8594640" cy="4014720"/>
           </a:xfrm>
           <a:prstGeom prst="rect">
             <a:avLst/>
@@ -11018,475 +11461,6 @@
           <a:ln/>
         </p:spPr>
       </p:pic>
-      <p:sp>
-        <p:nvSpPr>
-          <p:cNvPr id="7" name="WinnerBox"/>
-          <p:cNvSpPr/>
-          <p:nvPr/>
-        </p:nvSpPr>
-        <p:spPr>
-          <a:xfrm>
-            <a:off x="5852880" y="868680"/>
-            <a:ext cx="3108960" cy="1783080"/>
-          </a:xfrm>
-          <a:prstGeom prst="rect">
-            <a:avLst/>
-          </a:prstGeom>
-          <a:solidFill>
-            <a:srgbClr val="1E3A5F"/>
-          </a:solidFill>
-          <a:ln>
-            <a:solidFill>
-              <a:srgbClr val="16A34A"/>
-            </a:solidFill>
-          </a:ln>
-        </p:spPr>
-        <p:txBody>
-          <a:bodyPr wrap="square" lIns="182880" tIns="91440" rIns="182880" bIns="91440" rtlCol="0" anchor="ctr"/>
-          <a:lstStyle/>
-          <a:p>
-            <a:pPr marL="0" indent="0">
-              <a:buNone/>
-            </a:pPr>
-            <a:r>
-              <a:rPr lang="es-ES" sz="1050" b="1" dirty="0">
-                <a:solidFill>
-                  <a:srgbClr val="16A34A"/>
-                </a:solidFill>
-                <a:latin typeface="Calibri" pitchFamily="34" charset="0"/>
-              </a:rPr>
-              <a:t>🏆  Mejor modelo: Bosque Aleatorio</a:t>
-            </a:r>
-          </a:p>
-          <a:p>
-            <a:pPr marL="0" indent="0">
-              <a:buNone/>
-            </a:pPr>
-            <a:r>
-              <a:rPr lang="es-ES" sz="800" dirty="0">
-                <a:latin typeface="Calibri" pitchFamily="34" charset="0"/>
-              </a:rPr>
-              <a:t> </a:t>
-            </a:r>
-          </a:p>
-          <a:p>
-            <a:pPr marL="0" indent="0">
-              <a:buNone/>
-            </a:pPr>
-            <a:r>
-              <a:rPr lang="es-ES" sz="1000" b="1" dirty="0">
-                <a:solidFill>
-                  <a:srgbClr val="D4A843"/>
-                </a:solidFill>
-                <a:latin typeface="Calibri" pitchFamily="34" charset="0"/>
-              </a:rPr>
-              <a:t>R²</a:t>
-            </a:r>
-            <a:r>
-              <a:rPr lang="es-ES" sz="900" dirty="0">
-                <a:solidFill>
-                  <a:srgbClr val="CBD5E1"/>
-                </a:solidFill>
-                <a:latin typeface="Calibri" pitchFamily="34" charset="0"/>
-              </a:rPr>
-              <a:t>  =  </a:t>
-            </a:r>
-            <a:r>
-              <a:rPr lang="es-ES" sz="2200" b="1" dirty="0">
-                <a:solidFill>
-                  <a:srgbClr val="FFFFFF"/>
-                </a:solidFill>
-                <a:latin typeface="Calibri" pitchFamily="34" charset="0"/>
-              </a:rPr>
-              <a:t>0.8779</a:t>
-            </a:r>
-          </a:p>
-          <a:p>
-            <a:pPr marL="0" indent="0">
-              <a:buNone/>
-            </a:pPr>
-            <a:r>
-              <a:rPr lang="es-ES" sz="1000" b="1" dirty="0">
-                <a:solidFill>
-                  <a:srgbClr val="D4A843"/>
-                </a:solidFill>
-                <a:latin typeface="Calibri" pitchFamily="34" charset="0"/>
-              </a:rPr>
-              <a:t>MAE</a:t>
-            </a:r>
-            <a:r>
-              <a:rPr lang="es-ES" sz="900" dirty="0">
-                <a:solidFill>
-                  <a:srgbClr val="CBD5E1"/>
-                </a:solidFill>
-                <a:latin typeface="Calibri" pitchFamily="34" charset="0"/>
-              </a:rPr>
-              <a:t>  =  </a:t>
-            </a:r>
-            <a:r>
-              <a:rPr lang="es-ES" sz="1800" b="1" dirty="0">
-                <a:solidFill>
-                  <a:srgbClr val="F4F8FC"/>
-                </a:solidFill>
-                <a:latin typeface="Calibri" pitchFamily="34" charset="0"/>
-              </a:rPr>
-              <a:t>19.45 €</a:t>
-            </a:r>
-          </a:p>
-          <a:p>
-            <a:pPr marL="0" indent="0">
-              <a:buNone/>
-            </a:pPr>
-            <a:r>
-              <a:rPr lang="es-ES" sz="1000" b="1" dirty="0">
-                <a:solidFill>
-                  <a:srgbClr val="D4A843"/>
-                </a:solidFill>
-                <a:latin typeface="Calibri" pitchFamily="34" charset="0"/>
-              </a:rPr>
-              <a:t>RMSE</a:t>
-            </a:r>
-            <a:r>
-              <a:rPr lang="es-ES" sz="900" dirty="0">
-                <a:solidFill>
-                  <a:srgbClr val="CBD5E1"/>
-                </a:solidFill>
-                <a:latin typeface="Calibri" pitchFamily="34" charset="0"/>
-              </a:rPr>
-              <a:t>  =  </a:t>
-            </a:r>
-            <a:r>
-              <a:rPr lang="es-ES" sz="1800" b="1" dirty="0">
-                <a:solidFill>
-                  <a:srgbClr val="F4F8FC"/>
-                </a:solidFill>
-                <a:latin typeface="Calibri" pitchFamily="34" charset="0"/>
-              </a:rPr>
-              <a:t>33.18 €</a:t>
-            </a:r>
-          </a:p>
-          <a:p>
-            <a:pPr marL="0" indent="0">
-              <a:buNone/>
-            </a:pPr>
-            <a:r>
-              <a:rPr lang="es-ES" sz="800" dirty="0">
-                <a:latin typeface="Calibri" pitchFamily="34" charset="0"/>
-              </a:rPr>
-              <a:t> </a:t>
-            </a:r>
-          </a:p>
-          <a:p>
-            <a:pPr marL="0" indent="0">
-              <a:buNone/>
-            </a:pPr>
-            <a:r>
-              <a:rPr lang="es-ES" sz="900" dirty="0">
-                <a:solidFill>
-                  <a:srgbClr val="CBD5E1"/>
-                </a:solidFill>
-                <a:latin typeface="Calibri" pitchFamily="34" charset="0"/>
-              </a:rPr>
-              <a:t>Explica el 87,8% de la varianza del precio.
-Error medio de ±19,45€ sobre el precio real.</a:t>
-            </a:r>
-          </a:p>
-        </p:txBody>
-      </p:sp>
-      <p:sp>
-        <p:nvSpPr>
-          <p:cNvPr id="8" name="LblDist"/>
-          <p:cNvSpPr/>
-          <p:nvPr/>
-        </p:nvSpPr>
-        <p:spPr>
-          <a:xfrm>
-            <a:off x="182880" y="2743200"/>
-            <a:ext cx="4921383" cy="228600"/>
-          </a:xfrm>
-          <a:prstGeom prst="rect">
-            <a:avLst/>
-          </a:prstGeom>
-          <a:solidFill>
-            <a:srgbClr val="1F5C40"/>
-          </a:solidFill>
-          <a:ln/>
-        </p:spPr>
-        <p:txBody>
-          <a:bodyPr wrap="square" lIns="91440" tIns="45720" rIns="91440" bIns="45720" rtlCol="0" anchor="ctr"/>
-          <a:lstStyle/>
-          <a:p>
-            <a:pPr marL="0" indent="0">
-              <a:buNone/>
-            </a:pPr>
-            <a:r>
-              <a:rPr lang="es-ES" sz="950" b="1" dirty="0">
-                <a:solidFill>
-                  <a:srgbClr val="D4A843"/>
-                </a:solidFill>
-                <a:latin typeface="Calibri" pitchFamily="34" charset="0"/>
-              </a:rPr>
-              <a:t>📊  Distribución de categorías de chollo — Conjunto TEST (414.936 registros)</a:t>
-            </a:r>
-          </a:p>
-        </p:txBody>
-      </p:sp>
-      <p:pic>
-        <p:nvPicPr>
-          <p:cNvPr id="9" name="TablaDistrib"/>
-          <p:cNvPicPr>
-            <a:picLocks noChangeAspect="1"/>
-          </p:cNvPicPr>
-          <p:nvPr/>
-        </p:nvPicPr>
-        <p:blipFill>
-          <a:blip r:embed="rId3"/>
-          <a:stretch>
-            <a:fillRect/>
-          </a:stretch>
-        </p:blipFill>
-        <p:spPr>
-          <a:xfrm>
-            <a:off x="182880" y="2972880"/>
-            <a:ext cx="4921383" cy="1782000"/>
-          </a:xfrm>
-          <a:prstGeom prst="rect">
-            <a:avLst/>
-          </a:prstGeom>
-          <a:noFill/>
-          <a:ln/>
-        </p:spPr>
-      </p:pic>
-      <p:sp>
-        <p:nvSpPr>
-          <p:cNvPr id="10" name="InsightBox"/>
-          <p:cNvSpPr/>
-          <p:nvPr/>
-        </p:nvSpPr>
-        <p:spPr>
-          <a:xfrm>
-            <a:off x="5424985" y="2743200"/>
-            <a:ext cx="3536855" cy="2011680"/>
-          </a:xfrm>
-          <a:prstGeom prst="rect">
-            <a:avLst/>
-          </a:prstGeom>
-          <a:solidFill>
-            <a:srgbClr val="1E3A5F"/>
-          </a:solidFill>
-          <a:ln>
-            <a:solidFill>
-              <a:srgbClr val="2A5080"/>
-            </a:solidFill>
-          </a:ln>
-        </p:spPr>
-        <p:txBody>
-          <a:bodyPr wrap="square" lIns="182880" tIns="182880" rIns="182880" bIns="91440" rtlCol="0" anchor="t"/>
-          <a:lstStyle/>
-          <a:p>
-            <a:pPr marL="0" indent="0">
-              <a:buNone/>
-            </a:pPr>
-            <a:r>
-              <a:rPr lang="es-ES" sz="1000" b="1" dirty="0">
-                <a:solidFill>
-                  <a:srgbClr val="D4A843"/>
-                </a:solidFill>
-                <a:latin typeface="Calibri" pitchFamily="34" charset="0"/>
-              </a:rPr>
-              <a:t>💡  Interpretación:</a:t>
-            </a:r>
-          </a:p>
-          <a:p>
-            <a:pPr marL="0" indent="0">
-              <a:buNone/>
-            </a:pPr>
-            <a:r>
-              <a:rPr lang="es-ES" sz="800" dirty="0">
-                <a:latin typeface="Calibri" pitchFamily="34" charset="0"/>
-              </a:rPr>
-              <a:t> </a:t>
-            </a:r>
-          </a:p>
-          <a:p>
-            <a:pPr marL="0" indent="0">
-              <a:buNone/>
-            </a:pPr>
-            <a:r>
-              <a:rPr lang="es-ES" sz="900" b="1" dirty="0">
-                <a:solidFill>
-                  <a:srgbClr val="16A34A"/>
-                </a:solidFill>
-                <a:latin typeface="Calibri" pitchFamily="34" charset="0"/>
-              </a:rPr>
-              <a:t>Chollos detectados</a:t>
-            </a:r>
-          </a:p>
-          <a:p>
-            <a:pPr marL="0" indent="0">
-              <a:buNone/>
-            </a:pPr>
-            <a:r>
-              <a:rPr lang="es-ES" sz="850" dirty="0">
-                <a:solidFill>
-                  <a:srgbClr val="CBD5E1"/>
-                </a:solidFill>
-                <a:latin typeface="Calibri" pitchFamily="34" charset="0"/>
-              </a:rPr>
-              <a:t>chollo + super + híper-chollo</a:t>
-            </a:r>
-          </a:p>
-          <a:p>
-            <a:pPr marL="0" indent="0">
-              <a:buNone/>
-            </a:pPr>
-            <a:r>
-              <a:rPr lang="es-ES" sz="1300" b="1" dirty="0">
-                <a:solidFill>
-                  <a:srgbClr val="FFFFFF"/>
-                </a:solidFill>
-                <a:latin typeface="Calibri" pitchFamily="34" charset="0"/>
-              </a:rPr>
-              <a:t>= 206.006 registros</a:t>
-            </a:r>
-          </a:p>
-          <a:p>
-            <a:pPr marL="0" indent="0">
-              <a:buNone/>
-            </a:pPr>
-            <a:r>
-              <a:rPr lang="es-ES" sz="1000" b="1" dirty="0">
-                <a:solidFill>
-                  <a:srgbClr val="16A34A"/>
-                </a:solidFill>
-                <a:latin typeface="Calibri" pitchFamily="34" charset="0"/>
-              </a:rPr>
-              <a:t>= 49,9% del conjunto TEST</a:t>
-            </a:r>
-          </a:p>
-          <a:p>
-            <a:pPr marL="0" indent="0">
-              <a:buNone/>
-            </a:pPr>
-            <a:r>
-              <a:rPr lang="es-ES" sz="800" dirty="0">
-                <a:latin typeface="Calibri" pitchFamily="34" charset="0"/>
-              </a:rPr>
-              <a:t> </a:t>
-            </a:r>
-          </a:p>
-          <a:p>
-            <a:pPr marL="0" indent="0">
-              <a:buNone/>
-            </a:pPr>
-            <a:r>
-              <a:rPr lang="es-ES" sz="900" dirty="0">
-                <a:solidFill>
-                  <a:srgbClr val="CBD5E1"/>
-                </a:solidFill>
-                <a:latin typeface="Calibri" pitchFamily="34" charset="0"/>
-              </a:rPr>
-              <a:t>El modelo identifica correctamente
-casi 1 de cada 2 alojamientos
-como oportunidad de ahorro.</a:t>
-            </a:r>
-          </a:p>
-          <a:p>
-            <a:pPr marL="0" indent="0">
-              <a:buNone/>
-            </a:pPr>
-            <a:r>
-              <a:rPr lang="es-ES" sz="800" dirty="0">
-                <a:latin typeface="Calibri" pitchFamily="34" charset="0"/>
-              </a:rPr>
-              <a:t> </a:t>
-            </a:r>
-          </a:p>
-          <a:p>
-            <a:pPr marL="0" indent="0">
-              <a:buNone/>
-            </a:pPr>
-            <a:r>
-              <a:rPr lang="es-ES" sz="850" dirty="0">
-                <a:solidFill>
-                  <a:srgbClr val="8899AA"/>
-                </a:solidFill>
-                <a:latin typeface="Calibri" pitchFamily="34" charset="0"/>
-              </a:rPr>
-              <a:t>Inflado + Normal = 207.930 (50.1%)</a:t>
-            </a:r>
-          </a:p>
-        </p:txBody>
-      </p:sp>
-      <p:sp>
-        <p:nvSpPr>
-          <p:cNvPr id="97" name="Footer"/>
-          <p:cNvSpPr/>
-          <p:nvPr/>
-        </p:nvSpPr>
-        <p:spPr>
-          <a:xfrm>
-            <a:off x="457200" y="4826520"/>
-            <a:ext cx="7772400" cy="200000"/>
-          </a:xfrm>
-          <a:prstGeom prst="rect">
-            <a:avLst/>
-          </a:prstGeom>
-          <a:noFill/>
-          <a:ln/>
-        </p:spPr>
-        <p:txBody>
-          <a:bodyPr wrap="square" lIns="0" tIns="0" rIns="0" bIns="0" rtlCol="0" anchor="ctr"/>
-          <a:lstStyle/>
-          <a:p>
-            <a:pPr marL="0" indent="0">
-              <a:buNone/>
-            </a:pPr>
-            <a:r>
-              <a:rPr lang="es-ES" sz="800" dirty="0">
-                <a:solidFill>
-                  <a:srgbClr val="4A6080"/>
-                </a:solidFill>
-                <a:latin typeface="Calibri" pitchFamily="34" charset="0"/>
-              </a:rPr>
-              <a:t>TFG · Detector de Chollos en Andalucía · Mario Jiménez · Universidad de Sevilla</a:t>
-            </a:r>
-          </a:p>
-        </p:txBody>
-      </p:sp>
-      <p:sp>
-        <p:nvSpPr>
-          <p:cNvPr id="98" name="PageNum"/>
-          <p:cNvSpPr/>
-          <p:nvPr/>
-        </p:nvSpPr>
-        <p:spPr>
-          <a:xfrm>
-            <a:off x="8594640" y="4754880"/>
-            <a:ext cx="365760" cy="228600"/>
-          </a:xfrm>
-          <a:prstGeom prst="rect">
-            <a:avLst/>
-          </a:prstGeom>
-          <a:noFill/>
-          <a:ln/>
-        </p:spPr>
-        <p:txBody>
-          <a:bodyPr wrap="square" lIns="0" tIns="0" rIns="0" bIns="0" rtlCol="0" anchor="ctr"/>
-          <a:lstStyle/>
-          <a:p>
-            <a:pPr marL="0" indent="0">
-              <a:buNone/>
-            </a:pPr>
-            <a:endParaRPr lang="es-ES" sz="900" dirty="0">
-              <a:solidFill>
-                <a:srgbClr val="4A6080"/>
-              </a:solidFill>
-              <a:latin typeface="Calibri" pitchFamily="34" charset="0"/>
-            </a:endParaRPr>
-          </a:p>
-        </p:txBody>
-      </p:sp>
     </p:spTree>
   </p:cSld>
   <p:clrMapOvr>
@@ -13673,6 +13647,664 @@
 
 <file path=ppt/slides/slide20.xml><?xml version="1.0" encoding="utf-8"?>
 <p:sld xmlns:a="http://schemas.openxmlformats.org/drawingml/2006/main" xmlns:r="http://schemas.openxmlformats.org/officeDocument/2006/relationships" xmlns:p="http://schemas.openxmlformats.org/presentationml/2006/main">
+  <p:cSld>
+    <p:bg>
+      <p:bgPr>
+        <a:solidFill>
+          <a:srgbClr val="1A2E4A"/>
+        </a:solidFill>
+        <a:effectLst/>
+      </p:bgPr>
+    </p:bg>
+    <p:spTree>
+      <p:nvGrpSpPr>
+        <p:cNvPr id="1" name=""/>
+        <p:cNvGrpSpPr/>
+        <p:nvPr/>
+      </p:nvGrpSpPr>
+      <p:grpSpPr>
+        <a:xfrm>
+          <a:off x="0" y="0"/>
+          <a:ext cx="0" cy="0"/>
+          <a:chOff x="0" y="0"/>
+          <a:chExt cx="0" cy="0"/>
+        </a:xfrm>
+      </p:grpSpPr>
+      <p:sp>
+        <p:nvSpPr>
+          <p:cNvPr id="2" name="Gold"/>
+          <p:cNvSpPr/>
+          <p:nvPr/>
+        </p:nvSpPr>
+        <p:spPr>
+          <a:xfrm>
+            <a:off x="0" y="0"/>
+            <a:ext cx="9144000" cy="54864"/>
+          </a:xfrm>
+          <a:prstGeom prst="rect">
+            <a:avLst/>
+          </a:prstGeom>
+          <a:solidFill>
+            <a:srgbClr val="D4A843"/>
+          </a:solidFill>
+          <a:ln/>
+        </p:spPr>
+      </p:sp>
+      <p:sp>
+        <p:nvSpPr>
+          <p:cNvPr id="3" name="Title"/>
+          <p:cNvSpPr/>
+          <p:nvPr/>
+        </p:nvSpPr>
+        <p:spPr>
+          <a:xfrm>
+            <a:off x="457200" y="109728"/>
+            <a:ext cx="8229600" cy="457200"/>
+          </a:xfrm>
+          <a:prstGeom prst="rect">
+            <a:avLst/>
+          </a:prstGeom>
+          <a:noFill/>
+          <a:ln/>
+        </p:spPr>
+        <p:txBody>
+          <a:bodyPr wrap="square" lIns="0" tIns="0" rIns="0" bIns="0" rtlCol="0" anchor="ctr"/>
+          <a:lstStyle/>
+          <a:p>
+            <a:pPr marL="0" indent="0">
+              <a:buNone/>
+            </a:pPr>
+            <a:r>
+              <a:rPr lang="es-ES" sz="2400" b="1" dirty="0">
+                <a:solidFill>
+                  <a:srgbClr val="FFFFFF"/>
+                </a:solidFill>
+                <a:latin typeface="Calibri" pitchFamily="34" charset="0"/>
+              </a:rPr>
+              <a:t>Resultados de los Modelos · Conjunto de TEST</a:t>
+            </a:r>
+          </a:p>
+        </p:txBody>
+      </p:sp>
+      <p:sp>
+        <p:nvSpPr>
+          <p:cNvPr id="4" name="Sub"/>
+          <p:cNvSpPr/>
+          <p:nvPr/>
+        </p:nvSpPr>
+        <p:spPr>
+          <a:xfrm>
+            <a:off x="457200" y="603504"/>
+            <a:ext cx="8229600" cy="228600"/>
+          </a:xfrm>
+          <a:prstGeom prst="rect">
+            <a:avLst/>
+          </a:prstGeom>
+          <a:noFill/>
+          <a:ln/>
+        </p:spPr>
+        <p:txBody>
+          <a:bodyPr wrap="square" lIns="0" tIns="0" rIns="0" bIns="0" rtlCol="0" anchor="ctr"/>
+          <a:lstStyle/>
+          <a:p>
+            <a:pPr marL="0" indent="0">
+              <a:buNone/>
+            </a:pPr>
+            <a:r>
+              <a:rPr lang="es-ES" sz="1000" dirty="0">
+                <a:solidFill>
+                  <a:srgbClr val="F0C060"/>
+                </a:solidFill>
+                <a:latin typeface="Consolas" pitchFamily="34" charset="0"/>
+              </a:rPr>
+              <a:t>Modelizacion/Modelizacion.py · Evaluación final (X_test, usado una única vez)</a:t>
+            </a:r>
+          </a:p>
+        </p:txBody>
+      </p:sp>
+      <p:sp>
+        <p:nvSpPr>
+          <p:cNvPr id="5" name="LblTabla"/>
+          <p:cNvSpPr/>
+          <p:nvPr/>
+        </p:nvSpPr>
+        <p:spPr>
+          <a:xfrm>
+            <a:off x="182880" y="868680"/>
+            <a:ext cx="5486400" cy="228600"/>
+          </a:xfrm>
+          <a:prstGeom prst="rect">
+            <a:avLst/>
+          </a:prstGeom>
+          <a:solidFill>
+            <a:srgbClr val="2A5080"/>
+          </a:solidFill>
+          <a:ln/>
+        </p:spPr>
+        <p:txBody>
+          <a:bodyPr wrap="square" lIns="91440" tIns="45720" rIns="91440" bIns="45720" rtlCol="0" anchor="ctr"/>
+          <a:lstStyle/>
+          <a:p>
+            <a:pPr marL="0" indent="0">
+              <a:buNone/>
+            </a:pPr>
+            <a:r>
+              <a:rPr lang="es-ES" sz="950" b="1" dirty="0">
+                <a:solidFill>
+                  <a:srgbClr val="D4A843"/>
+                </a:solidFill>
+                <a:latin typeface="Calibri" pitchFamily="34" charset="0"/>
+              </a:rPr>
+              <a:t>📊  Comparativa de modelos — Métricas sobre conjunto de TEST</a:t>
+            </a:r>
+          </a:p>
+        </p:txBody>
+      </p:sp>
+      <p:pic>
+        <p:nvPicPr>
+          <p:cNvPr id="6" name="TablaMetricas"/>
+          <p:cNvPicPr>
+            <a:picLocks noChangeAspect="1"/>
+          </p:cNvPicPr>
+          <p:nvPr/>
+        </p:nvPicPr>
+        <p:blipFill>
+          <a:blip r:embed="rId2"/>
+          <a:stretch>
+            <a:fillRect/>
+          </a:stretch>
+        </p:blipFill>
+        <p:spPr>
+          <a:xfrm>
+            <a:off x="182880" y="1097280"/>
+            <a:ext cx="5486400" cy="1554480"/>
+          </a:xfrm>
+          <a:prstGeom prst="rect">
+            <a:avLst/>
+          </a:prstGeom>
+          <a:noFill/>
+          <a:ln/>
+        </p:spPr>
+      </p:pic>
+      <p:sp>
+        <p:nvSpPr>
+          <p:cNvPr id="7" name="WinnerBox"/>
+          <p:cNvSpPr/>
+          <p:nvPr/>
+        </p:nvSpPr>
+        <p:spPr>
+          <a:xfrm>
+            <a:off x="5852880" y="868680"/>
+            <a:ext cx="3108960" cy="1783080"/>
+          </a:xfrm>
+          <a:prstGeom prst="rect">
+            <a:avLst/>
+          </a:prstGeom>
+          <a:solidFill>
+            <a:srgbClr val="1E3A5F"/>
+          </a:solidFill>
+          <a:ln>
+            <a:solidFill>
+              <a:srgbClr val="16A34A"/>
+            </a:solidFill>
+          </a:ln>
+        </p:spPr>
+        <p:txBody>
+          <a:bodyPr wrap="square" lIns="182880" tIns="91440" rIns="182880" bIns="91440" rtlCol="0" anchor="ctr"/>
+          <a:lstStyle/>
+          <a:p>
+            <a:pPr marL="0" indent="0">
+              <a:buNone/>
+            </a:pPr>
+            <a:r>
+              <a:rPr lang="es-ES" sz="1050" b="1" dirty="0">
+                <a:solidFill>
+                  <a:srgbClr val="16A34A"/>
+                </a:solidFill>
+                <a:latin typeface="Calibri" pitchFamily="34" charset="0"/>
+              </a:rPr>
+              <a:t>🏆  Mejor modelo: Bosque Aleatorio</a:t>
+            </a:r>
+          </a:p>
+          <a:p>
+            <a:pPr marL="0" indent="0">
+              <a:buNone/>
+            </a:pPr>
+            <a:r>
+              <a:rPr lang="es-ES" sz="800" dirty="0">
+                <a:latin typeface="Calibri" pitchFamily="34" charset="0"/>
+              </a:rPr>
+              <a:t> </a:t>
+            </a:r>
+          </a:p>
+          <a:p>
+            <a:pPr marL="0" indent="0">
+              <a:buNone/>
+            </a:pPr>
+            <a:r>
+              <a:rPr lang="es-ES" sz="1000" b="1" dirty="0">
+                <a:solidFill>
+                  <a:srgbClr val="D4A843"/>
+                </a:solidFill>
+                <a:latin typeface="Calibri" pitchFamily="34" charset="0"/>
+              </a:rPr>
+              <a:t>R²</a:t>
+            </a:r>
+            <a:r>
+              <a:rPr lang="es-ES" sz="900" dirty="0">
+                <a:solidFill>
+                  <a:srgbClr val="CBD5E1"/>
+                </a:solidFill>
+                <a:latin typeface="Calibri" pitchFamily="34" charset="0"/>
+              </a:rPr>
+              <a:t>  =  </a:t>
+            </a:r>
+            <a:r>
+              <a:rPr lang="es-ES" sz="2200" b="1" dirty="0">
+                <a:solidFill>
+                  <a:srgbClr val="FFFFFF"/>
+                </a:solidFill>
+                <a:latin typeface="Calibri" pitchFamily="34" charset="0"/>
+              </a:rPr>
+              <a:t>0.8779</a:t>
+            </a:r>
+          </a:p>
+          <a:p>
+            <a:pPr marL="0" indent="0">
+              <a:buNone/>
+            </a:pPr>
+            <a:r>
+              <a:rPr lang="es-ES" sz="1000" b="1" dirty="0">
+                <a:solidFill>
+                  <a:srgbClr val="D4A843"/>
+                </a:solidFill>
+                <a:latin typeface="Calibri" pitchFamily="34" charset="0"/>
+              </a:rPr>
+              <a:t>MAE</a:t>
+            </a:r>
+            <a:r>
+              <a:rPr lang="es-ES" sz="900" dirty="0">
+                <a:solidFill>
+                  <a:srgbClr val="CBD5E1"/>
+                </a:solidFill>
+                <a:latin typeface="Calibri" pitchFamily="34" charset="0"/>
+              </a:rPr>
+              <a:t>  =  </a:t>
+            </a:r>
+            <a:r>
+              <a:rPr lang="es-ES" sz="1800" b="1" dirty="0">
+                <a:solidFill>
+                  <a:srgbClr val="F4F8FC"/>
+                </a:solidFill>
+                <a:latin typeface="Calibri" pitchFamily="34" charset="0"/>
+              </a:rPr>
+              <a:t>19.45 €</a:t>
+            </a:r>
+          </a:p>
+          <a:p>
+            <a:pPr marL="0" indent="0">
+              <a:buNone/>
+            </a:pPr>
+            <a:r>
+              <a:rPr lang="es-ES" sz="1000" b="1" dirty="0">
+                <a:solidFill>
+                  <a:srgbClr val="D4A843"/>
+                </a:solidFill>
+                <a:latin typeface="Calibri" pitchFamily="34" charset="0"/>
+              </a:rPr>
+              <a:t>RMSE</a:t>
+            </a:r>
+            <a:r>
+              <a:rPr lang="es-ES" sz="900" dirty="0">
+                <a:solidFill>
+                  <a:srgbClr val="CBD5E1"/>
+                </a:solidFill>
+                <a:latin typeface="Calibri" pitchFamily="34" charset="0"/>
+              </a:rPr>
+              <a:t>  =  </a:t>
+            </a:r>
+            <a:r>
+              <a:rPr lang="es-ES" sz="1800" b="1" dirty="0">
+                <a:solidFill>
+                  <a:srgbClr val="F4F8FC"/>
+                </a:solidFill>
+                <a:latin typeface="Calibri" pitchFamily="34" charset="0"/>
+              </a:rPr>
+              <a:t>33.18 €</a:t>
+            </a:r>
+          </a:p>
+          <a:p>
+            <a:pPr marL="0" indent="0">
+              <a:buNone/>
+            </a:pPr>
+            <a:r>
+              <a:rPr lang="es-ES" sz="800" dirty="0">
+                <a:latin typeface="Calibri" pitchFamily="34" charset="0"/>
+              </a:rPr>
+              <a:t> </a:t>
+            </a:r>
+          </a:p>
+          <a:p>
+            <a:pPr marL="0" indent="0">
+              <a:buNone/>
+            </a:pPr>
+            <a:r>
+              <a:rPr lang="es-ES" sz="900" dirty="0">
+                <a:solidFill>
+                  <a:srgbClr val="CBD5E1"/>
+                </a:solidFill>
+                <a:latin typeface="Calibri" pitchFamily="34" charset="0"/>
+              </a:rPr>
+              <a:t>Explica el 87,8% de la varianza del precio.
+Error medio de ±19,45€ sobre el precio real.</a:t>
+            </a:r>
+          </a:p>
+        </p:txBody>
+      </p:sp>
+      <p:sp>
+        <p:nvSpPr>
+          <p:cNvPr id="8" name="LblDist"/>
+          <p:cNvSpPr/>
+          <p:nvPr/>
+        </p:nvSpPr>
+        <p:spPr>
+          <a:xfrm>
+            <a:off x="182880" y="2743200"/>
+            <a:ext cx="4921383" cy="228600"/>
+          </a:xfrm>
+          <a:prstGeom prst="rect">
+            <a:avLst/>
+          </a:prstGeom>
+          <a:solidFill>
+            <a:srgbClr val="1F5C40"/>
+          </a:solidFill>
+          <a:ln/>
+        </p:spPr>
+        <p:txBody>
+          <a:bodyPr wrap="square" lIns="91440" tIns="45720" rIns="91440" bIns="45720" rtlCol="0" anchor="ctr"/>
+          <a:lstStyle/>
+          <a:p>
+            <a:pPr marL="0" indent="0">
+              <a:buNone/>
+            </a:pPr>
+            <a:r>
+              <a:rPr lang="es-ES" sz="950" b="1" dirty="0">
+                <a:solidFill>
+                  <a:srgbClr val="D4A843"/>
+                </a:solidFill>
+                <a:latin typeface="Calibri" pitchFamily="34" charset="0"/>
+              </a:rPr>
+              <a:t>📊  Distribución de categorías de chollo — Conjunto TEST (414.936 registros)</a:t>
+            </a:r>
+          </a:p>
+        </p:txBody>
+      </p:sp>
+      <p:pic>
+        <p:nvPicPr>
+          <p:cNvPr id="9" name="TablaDistrib"/>
+          <p:cNvPicPr>
+            <a:picLocks noChangeAspect="1"/>
+          </p:cNvPicPr>
+          <p:nvPr/>
+        </p:nvPicPr>
+        <p:blipFill>
+          <a:blip r:embed="rId3"/>
+          <a:stretch>
+            <a:fillRect/>
+          </a:stretch>
+        </p:blipFill>
+        <p:spPr>
+          <a:xfrm>
+            <a:off x="182880" y="2972880"/>
+            <a:ext cx="4921383" cy="1782000"/>
+          </a:xfrm>
+          <a:prstGeom prst="rect">
+            <a:avLst/>
+          </a:prstGeom>
+          <a:noFill/>
+          <a:ln/>
+        </p:spPr>
+      </p:pic>
+      <p:sp>
+        <p:nvSpPr>
+          <p:cNvPr id="10" name="InsightBox"/>
+          <p:cNvSpPr/>
+          <p:nvPr/>
+        </p:nvSpPr>
+        <p:spPr>
+          <a:xfrm>
+            <a:off x="5424985" y="2743200"/>
+            <a:ext cx="3536855" cy="2011680"/>
+          </a:xfrm>
+          <a:prstGeom prst="rect">
+            <a:avLst/>
+          </a:prstGeom>
+          <a:solidFill>
+            <a:srgbClr val="1E3A5F"/>
+          </a:solidFill>
+          <a:ln>
+            <a:solidFill>
+              <a:srgbClr val="2A5080"/>
+            </a:solidFill>
+          </a:ln>
+        </p:spPr>
+        <p:txBody>
+          <a:bodyPr wrap="square" lIns="182880" tIns="182880" rIns="182880" bIns="91440" rtlCol="0" anchor="t"/>
+          <a:lstStyle/>
+          <a:p>
+            <a:pPr marL="0" indent="0">
+              <a:buNone/>
+            </a:pPr>
+            <a:r>
+              <a:rPr lang="es-ES" sz="1000" b="1" dirty="0">
+                <a:solidFill>
+                  <a:srgbClr val="D4A843"/>
+                </a:solidFill>
+                <a:latin typeface="Calibri" pitchFamily="34" charset="0"/>
+              </a:rPr>
+              <a:t>💡  Interpretación:</a:t>
+            </a:r>
+          </a:p>
+          <a:p>
+            <a:pPr marL="0" indent="0">
+              <a:buNone/>
+            </a:pPr>
+            <a:r>
+              <a:rPr lang="es-ES" sz="800" dirty="0">
+                <a:latin typeface="Calibri" pitchFamily="34" charset="0"/>
+              </a:rPr>
+              <a:t> </a:t>
+            </a:r>
+          </a:p>
+          <a:p>
+            <a:pPr marL="0" indent="0">
+              <a:buNone/>
+            </a:pPr>
+            <a:r>
+              <a:rPr lang="es-ES" sz="900" b="1" dirty="0">
+                <a:solidFill>
+                  <a:srgbClr val="16A34A"/>
+                </a:solidFill>
+                <a:latin typeface="Calibri" pitchFamily="34" charset="0"/>
+              </a:rPr>
+              <a:t>Chollos detectados</a:t>
+            </a:r>
+          </a:p>
+          <a:p>
+            <a:pPr marL="0" indent="0">
+              <a:buNone/>
+            </a:pPr>
+            <a:r>
+              <a:rPr lang="es-ES" sz="850" dirty="0">
+                <a:solidFill>
+                  <a:srgbClr val="CBD5E1"/>
+                </a:solidFill>
+                <a:latin typeface="Calibri" pitchFamily="34" charset="0"/>
+              </a:rPr>
+              <a:t>chollo + super + híper-chollo</a:t>
+            </a:r>
+          </a:p>
+          <a:p>
+            <a:pPr marL="0" indent="0">
+              <a:buNone/>
+            </a:pPr>
+            <a:r>
+              <a:rPr lang="es-ES" sz="1300" b="1" dirty="0">
+                <a:solidFill>
+                  <a:srgbClr val="FFFFFF"/>
+                </a:solidFill>
+                <a:latin typeface="Calibri" pitchFamily="34" charset="0"/>
+              </a:rPr>
+              <a:t>= 206.006 registros</a:t>
+            </a:r>
+          </a:p>
+          <a:p>
+            <a:pPr marL="0" indent="0">
+              <a:buNone/>
+            </a:pPr>
+            <a:r>
+              <a:rPr lang="es-ES" sz="1000" b="1" dirty="0">
+                <a:solidFill>
+                  <a:srgbClr val="16A34A"/>
+                </a:solidFill>
+                <a:latin typeface="Calibri" pitchFamily="34" charset="0"/>
+              </a:rPr>
+              <a:t>= 49,9% del conjunto TEST</a:t>
+            </a:r>
+          </a:p>
+          <a:p>
+            <a:pPr marL="0" indent="0">
+              <a:buNone/>
+            </a:pPr>
+            <a:r>
+              <a:rPr lang="es-ES" sz="800" dirty="0">
+                <a:latin typeface="Calibri" pitchFamily="34" charset="0"/>
+              </a:rPr>
+              <a:t> </a:t>
+            </a:r>
+          </a:p>
+          <a:p>
+            <a:pPr marL="0" indent="0">
+              <a:buNone/>
+            </a:pPr>
+            <a:r>
+              <a:rPr lang="es-ES" sz="900" dirty="0">
+                <a:solidFill>
+                  <a:srgbClr val="CBD5E1"/>
+                </a:solidFill>
+                <a:latin typeface="Calibri" pitchFamily="34" charset="0"/>
+              </a:rPr>
+              <a:t>El modelo identifica correctamente
+casi 1 de cada 2 alojamientos
+como oportunidad de ahorro.</a:t>
+            </a:r>
+          </a:p>
+          <a:p>
+            <a:pPr marL="0" indent="0">
+              <a:buNone/>
+            </a:pPr>
+            <a:r>
+              <a:rPr lang="es-ES" sz="800" dirty="0">
+                <a:latin typeface="Calibri" pitchFamily="34" charset="0"/>
+              </a:rPr>
+              <a:t> </a:t>
+            </a:r>
+          </a:p>
+          <a:p>
+            <a:pPr marL="0" indent="0">
+              <a:buNone/>
+            </a:pPr>
+            <a:r>
+              <a:rPr lang="es-ES" sz="850" dirty="0">
+                <a:solidFill>
+                  <a:srgbClr val="8899AA"/>
+                </a:solidFill>
+                <a:latin typeface="Calibri" pitchFamily="34" charset="0"/>
+              </a:rPr>
+              <a:t>Inflado + Normal = 207.930 (50.1%)</a:t>
+            </a:r>
+          </a:p>
+        </p:txBody>
+      </p:sp>
+      <p:sp>
+        <p:nvSpPr>
+          <p:cNvPr id="97" name="Footer"/>
+          <p:cNvSpPr/>
+          <p:nvPr/>
+        </p:nvSpPr>
+        <p:spPr>
+          <a:xfrm>
+            <a:off x="457200" y="4826520"/>
+            <a:ext cx="7772400" cy="200000"/>
+          </a:xfrm>
+          <a:prstGeom prst="rect">
+            <a:avLst/>
+          </a:prstGeom>
+          <a:noFill/>
+          <a:ln/>
+        </p:spPr>
+        <p:txBody>
+          <a:bodyPr wrap="square" lIns="0" tIns="0" rIns="0" bIns="0" rtlCol="0" anchor="ctr"/>
+          <a:lstStyle/>
+          <a:p>
+            <a:pPr marL="0" indent="0">
+              <a:buNone/>
+            </a:pPr>
+            <a:r>
+              <a:rPr lang="es-ES" sz="800" dirty="0">
+                <a:solidFill>
+                  <a:srgbClr val="4A6080"/>
+                </a:solidFill>
+                <a:latin typeface="Calibri" pitchFamily="34" charset="0"/>
+              </a:rPr>
+              <a:t>TFG · Detector de Chollos en Andalucía · Mario Jiménez · Universidad de Sevilla</a:t>
+            </a:r>
+          </a:p>
+        </p:txBody>
+      </p:sp>
+      <p:sp>
+        <p:nvSpPr>
+          <p:cNvPr id="98" name="PageNum"/>
+          <p:cNvSpPr/>
+          <p:nvPr/>
+        </p:nvSpPr>
+        <p:spPr>
+          <a:xfrm>
+            <a:off x="8594640" y="4754880"/>
+            <a:ext cx="365760" cy="228600"/>
+          </a:xfrm>
+          <a:prstGeom prst="rect">
+            <a:avLst/>
+          </a:prstGeom>
+          <a:noFill/>
+          <a:ln/>
+        </p:spPr>
+        <p:txBody>
+          <a:bodyPr wrap="square" lIns="0" tIns="0" rIns="0" bIns="0" rtlCol="0" anchor="ctr"/>
+          <a:lstStyle/>
+          <a:p>
+            <a:pPr marL="0" indent="0">
+              <a:buNone/>
+            </a:pPr>
+            <a:endParaRPr lang="es-ES" sz="900" dirty="0">
+              <a:solidFill>
+                <a:srgbClr val="4A6080"/>
+              </a:solidFill>
+              <a:latin typeface="Calibri" pitchFamily="34" charset="0"/>
+            </a:endParaRPr>
+          </a:p>
+        </p:txBody>
+      </p:sp>
+    </p:spTree>
+  </p:cSld>
+  <p:clrMapOvr>
+    <a:masterClrMapping/>
+  </p:clrMapOvr>
+</p:sld>
+</file>
+
+<file path=ppt/slides/slide21.xml><?xml version="1.0" encoding="utf-8"?>
+<p:sld xmlns:a="http://schemas.openxmlformats.org/drawingml/2006/main" xmlns:r="http://schemas.openxmlformats.org/officeDocument/2006/relationships" xmlns:p="http://schemas.openxmlformats.org/presentationml/2006/main">
   <p:cSld name="Slide 8">
     <p:bg>
       <p:bgPr>
@@ -15863,7 +16495,7 @@
 </p:sld>
 </file>
 
-<file path=ppt/slides/slide21.xml><?xml version="1.0" encoding="utf-8"?>
+<file path=ppt/slides/slide22.xml><?xml version="1.0" encoding="utf-8"?>
 <p:sld xmlns:a="http://schemas.openxmlformats.org/drawingml/2006/main" xmlns:r="http://schemas.openxmlformats.org/officeDocument/2006/relationships" xmlns:p="http://schemas.openxmlformats.org/presentationml/2006/main">
   <p:cSld>
     <p:bg>
@@ -17033,7 +17665,7 @@
 </p:sld>
 </file>
 
-<file path=ppt/slides/slide22.xml><?xml version="1.0" encoding="utf-8"?>
+<file path=ppt/slides/slide23.xml><?xml version="1.0" encoding="utf-8"?>
 <p:sld xmlns:a="http://schemas.openxmlformats.org/drawingml/2006/main" xmlns:r="http://schemas.openxmlformats.org/officeDocument/2006/relationships" xmlns:p="http://schemas.openxmlformats.org/presentationml/2006/main">
   <p:cSld name="Slide 13">
     <p:bg>
@@ -18053,7 +18685,7 @@
 </p:sld>
 </file>
 
-<file path=ppt/slides/slide23.xml><?xml version="1.0" encoding="utf-8"?>
+<file path=ppt/slides/slide24.xml><?xml version="1.0" encoding="utf-8"?>
 <p:sld xmlns:a="http://schemas.openxmlformats.org/drawingml/2006/main" xmlns:r="http://schemas.openxmlformats.org/officeDocument/2006/relationships" xmlns:p="http://schemas.openxmlformats.org/presentationml/2006/main">
   <p:cSld name="Slide 14">
     <p:bg>
